--- a/grav-site/root/kit-corso/corso-base-hd.pptx
+++ b/grav-site/root/kit-corso/corso-base-hd.pptx
@@ -3181,8 +3181,8 @@
         </p:nvSpPr>
         <p:spPr>
           <a:xfrm>
-            <a:off x="596899" y="1797641"/>
-            <a:ext cx="11010872" cy="177800"/>
+            <a:off x="596899" y="1778591"/>
+            <a:ext cx="3424328" cy="215899"/>
           </a:xfrm>
           <a:prstGeom prst="rect">
             <a:avLst/>
@@ -3201,7 +3201,7 @@
               </a:lnSpc>
             </a:pPr>
             <a:r>
-              <a:rPr sz="1650" b="1" i="0">
+              <a:rPr sz="1100" b="1" i="0">
                 <a:solidFill>
                   <a:srgbClr val="FBF7F5"/>
                 </a:solidFill>
@@ -3220,8 +3220,8 @@
         </p:nvSpPr>
         <p:spPr>
           <a:xfrm>
-            <a:off x="596899" y="2153240"/>
-            <a:ext cx="7150082" cy="2256824"/>
+            <a:off x="596899" y="2045290"/>
+            <a:ext cx="5657935" cy="2463397"/>
           </a:xfrm>
           <a:prstGeom prst="rect">
             <a:avLst/>
@@ -3240,7 +3240,7 @@
               </a:lnSpc>
             </a:pPr>
             <a:r>
-              <a:rPr sz="8400" b="1" i="0">
+              <a:rPr sz="5600" b="1" i="0">
                 <a:solidFill>
                   <a:srgbClr val="FBF7F5"/>
                 </a:solidFill>
@@ -3256,7 +3256,7 @@
               </a:lnSpc>
             </a:pPr>
             <a:r>
-              <a:rPr sz="8400" b="1" i="0">
+              <a:rPr sz="5600" b="1" i="0">
                 <a:solidFill>
                   <a:srgbClr val="FBF7F5"/>
                 </a:solidFill>
@@ -3275,8 +3275,8 @@
         </p:nvSpPr>
         <p:spPr>
           <a:xfrm>
-            <a:off x="596899" y="4651363"/>
-            <a:ext cx="11010872" cy="269180"/>
+            <a:off x="596899" y="4657713"/>
+            <a:ext cx="2106310" cy="247649"/>
           </a:xfrm>
           <a:prstGeom prst="rect">
             <a:avLst/>
@@ -3295,7 +3295,7 @@
               </a:lnSpc>
             </a:pPr>
             <a:r>
-              <a:rPr sz="1950" b="0" i="0">
+              <a:rPr sz="1300" b="0" i="0">
                 <a:solidFill>
                   <a:srgbClr val="C9BFB8"/>
                 </a:solidFill>
@@ -3314,8 +3314,8 @@
         </p:nvSpPr>
         <p:spPr>
           <a:xfrm>
-            <a:off x="596899" y="6515084"/>
-            <a:ext cx="167282" cy="152400"/>
+            <a:off x="596899" y="6496034"/>
+            <a:ext cx="179982" cy="184150"/>
           </a:xfrm>
           <a:prstGeom prst="rect">
             <a:avLst/>
@@ -3334,7 +3334,7 @@
               </a:lnSpc>
             </a:pPr>
             <a:r>
-              <a:rPr sz="1350" b="0" i="0">
+              <a:rPr sz="900" b="0" i="0">
                 <a:solidFill>
                   <a:srgbClr val="8E8580"/>
                 </a:solidFill>
@@ -3353,8 +3353,8 @@
         </p:nvSpPr>
         <p:spPr>
           <a:xfrm>
-            <a:off x="9960545" y="6407134"/>
-            <a:ext cx="1266227" cy="152400"/>
+            <a:off x="9960545" y="6388084"/>
+            <a:ext cx="1278926" cy="184150"/>
           </a:xfrm>
           <a:prstGeom prst="rect">
             <a:avLst/>
@@ -3373,7 +3373,7 @@
               </a:lnSpc>
             </a:pPr>
             <a:r>
-              <a:rPr sz="1350" b="0" i="0">
+              <a:rPr sz="900" b="0" i="0">
                 <a:solidFill>
                   <a:srgbClr val="8E8580"/>
                 </a:solidFill>
@@ -3490,8 +3490,8 @@
         </p:nvSpPr>
         <p:spPr>
           <a:xfrm>
-            <a:off x="596899" y="444499"/>
-            <a:ext cx="11010872" cy="177800"/>
+            <a:off x="596899" y="425449"/>
+            <a:ext cx="946842" cy="215899"/>
           </a:xfrm>
           <a:prstGeom prst="rect">
             <a:avLst/>
@@ -3510,7 +3510,7 @@
               </a:lnSpc>
             </a:pPr>
             <a:r>
-              <a:rPr sz="1650" b="1" i="0">
+              <a:rPr sz="1100" b="1" i="0">
                 <a:solidFill>
                   <a:srgbClr val="7A4F5E"/>
                 </a:solidFill>
@@ -3529,8 +3529,8 @@
         </p:nvSpPr>
         <p:spPr>
           <a:xfrm>
-            <a:off x="596899" y="698498"/>
-            <a:ext cx="11010872" cy="485079"/>
+            <a:off x="596899" y="647698"/>
+            <a:ext cx="5774616" cy="577849"/>
           </a:xfrm>
           <a:prstGeom prst="rect">
             <a:avLst/>
@@ -3549,7 +3549,7 @@
               </a:lnSpc>
             </a:pPr>
             <a:r>
-              <a:rPr sz="4800" b="1" i="0">
+              <a:rPr sz="3200" b="1" i="0">
                 <a:solidFill>
                   <a:srgbClr val="3A3532"/>
                 </a:solidFill>
@@ -3568,8 +3568,8 @@
         </p:nvSpPr>
         <p:spPr>
           <a:xfrm>
-            <a:off x="596899" y="2492468"/>
-            <a:ext cx="5499086" cy="553639"/>
+            <a:off x="596899" y="2505168"/>
+            <a:ext cx="4994560" cy="518119"/>
           </a:xfrm>
           <a:prstGeom prst="rect">
             <a:avLst/>
@@ -3588,7 +3588,7 @@
               </a:lnSpc>
             </a:pPr>
             <a:r>
-              <a:rPr sz="2100" b="0" i="0">
+              <a:rPr sz="1400" b="0" i="0">
                 <a:solidFill>
                   <a:srgbClr val="3A3532"/>
                 </a:solidFill>
@@ -3607,8 +3607,8 @@
         </p:nvSpPr>
         <p:spPr>
           <a:xfrm>
-            <a:off x="596899" y="3173107"/>
-            <a:ext cx="5499086" cy="811409"/>
+            <a:off x="596899" y="3185807"/>
+            <a:ext cx="5255604" cy="775889"/>
           </a:xfrm>
           <a:prstGeom prst="rect">
             <a:avLst/>
@@ -3627,7 +3627,7 @@
               </a:lnSpc>
             </a:pPr>
             <a:r>
-              <a:rPr sz="2100" b="0" i="0">
+              <a:rPr sz="1400" b="0" i="0">
                 <a:solidFill>
                   <a:srgbClr val="3A3532"/>
                 </a:solidFill>
@@ -3646,8 +3646,8 @@
         </p:nvSpPr>
         <p:spPr>
           <a:xfrm>
-            <a:off x="596899" y="4111516"/>
-            <a:ext cx="5499086" cy="1069179"/>
+            <a:off x="596899" y="4124215"/>
+            <a:ext cx="5121361" cy="1033658"/>
           </a:xfrm>
           <a:prstGeom prst="rect">
             <a:avLst/>
@@ -3666,7 +3666,7 @@
               </a:lnSpc>
             </a:pPr>
             <a:r>
-              <a:rPr sz="2100" b="0" i="0">
+              <a:rPr sz="1400" b="0" i="0">
                 <a:solidFill>
                   <a:srgbClr val="3A3532"/>
                 </a:solidFill>
@@ -3685,8 +3685,8 @@
         </p:nvSpPr>
         <p:spPr>
           <a:xfrm>
-            <a:off x="596899" y="6426184"/>
-            <a:ext cx="167282" cy="152400"/>
+            <a:off x="596899" y="6407134"/>
+            <a:ext cx="179982" cy="184150"/>
           </a:xfrm>
           <a:prstGeom prst="rect">
             <a:avLst/>
@@ -3705,7 +3705,7 @@
               </a:lnSpc>
             </a:pPr>
             <a:r>
-              <a:rPr sz="1350" b="0" i="0">
+              <a:rPr sz="900" b="0" i="0">
                 <a:solidFill>
                   <a:srgbClr val="6B625D"/>
                 </a:solidFill>
@@ -3724,8 +3724,8 @@
         </p:nvSpPr>
         <p:spPr>
           <a:xfrm>
-            <a:off x="9960545" y="6407134"/>
-            <a:ext cx="1266227" cy="152400"/>
+            <a:off x="9960545" y="6388084"/>
+            <a:ext cx="1278926" cy="184150"/>
           </a:xfrm>
           <a:prstGeom prst="rect">
             <a:avLst/>
@@ -3744,7 +3744,7 @@
               </a:lnSpc>
             </a:pPr>
             <a:r>
-              <a:rPr sz="1350" b="0" i="0">
+              <a:rPr sz="900" b="0" i="0">
                 <a:solidFill>
                   <a:srgbClr val="6B625D"/>
                 </a:solidFill>
@@ -3861,8 +3861,8 @@
         </p:nvSpPr>
         <p:spPr>
           <a:xfrm>
-            <a:off x="596899" y="444499"/>
-            <a:ext cx="11010872" cy="177800"/>
+            <a:off x="596899" y="425449"/>
+            <a:ext cx="3415101" cy="215899"/>
           </a:xfrm>
           <a:prstGeom prst="rect">
             <a:avLst/>
@@ -3881,7 +3881,7 @@
               </a:lnSpc>
             </a:pPr>
             <a:r>
-              <a:rPr sz="1650" b="1" i="0">
+              <a:rPr sz="1100" b="1" i="0">
                 <a:solidFill>
                   <a:srgbClr val="7A4F5E"/>
                 </a:solidFill>
@@ -3900,8 +3900,8 @@
         </p:nvSpPr>
         <p:spPr>
           <a:xfrm>
-            <a:off x="596899" y="698498"/>
-            <a:ext cx="11010872" cy="485079"/>
+            <a:off x="596899" y="647698"/>
+            <a:ext cx="3326399" cy="577849"/>
           </a:xfrm>
           <a:prstGeom prst="rect">
             <a:avLst/>
@@ -3920,7 +3920,7 @@
               </a:lnSpc>
             </a:pPr>
             <a:r>
-              <a:rPr sz="4800" b="1" i="0">
+              <a:rPr sz="3200" b="1" i="0">
                 <a:solidFill>
                   <a:srgbClr val="3A3532"/>
                 </a:solidFill>
@@ -3939,8 +3939,8 @@
         </p:nvSpPr>
         <p:spPr>
           <a:xfrm>
-            <a:off x="596899" y="2710848"/>
-            <a:ext cx="5499086" cy="1326948"/>
+            <a:off x="596899" y="2723548"/>
+            <a:ext cx="5432312" cy="1291428"/>
           </a:xfrm>
           <a:prstGeom prst="rect">
             <a:avLst/>
@@ -3959,7 +3959,7 @@
               </a:lnSpc>
             </a:pPr>
             <a:r>
-              <a:rPr sz="2100" b="0" i="0">
+              <a:rPr sz="1400" b="0" i="0">
                 <a:solidFill>
                   <a:srgbClr val="3A3532"/>
                 </a:solidFill>
@@ -3978,8 +3978,8 @@
         </p:nvSpPr>
         <p:spPr>
           <a:xfrm>
-            <a:off x="596899" y="4253696"/>
-            <a:ext cx="5245087" cy="708619"/>
+            <a:off x="596899" y="4228296"/>
+            <a:ext cx="4817356" cy="748008"/>
           </a:xfrm>
           <a:prstGeom prst="rect">
             <a:avLst/>
@@ -3998,7 +3998,7 @@
               </a:lnSpc>
             </a:pPr>
             <a:r>
-              <a:rPr sz="3300" b="1" i="1">
+              <a:rPr sz="2200" b="1" i="1">
                 <a:solidFill>
                   <a:srgbClr val="7A4F5E"/>
                 </a:solidFill>
@@ -4017,8 +4017,8 @@
         </p:nvSpPr>
         <p:spPr>
           <a:xfrm>
-            <a:off x="596899" y="6426184"/>
-            <a:ext cx="133052" cy="152400"/>
+            <a:off x="596899" y="6407134"/>
+            <a:ext cx="145752" cy="184150"/>
           </a:xfrm>
           <a:prstGeom prst="rect">
             <a:avLst/>
@@ -4037,7 +4037,7 @@
               </a:lnSpc>
             </a:pPr>
             <a:r>
-              <a:rPr sz="1350" b="0" i="0">
+              <a:rPr sz="900" b="0" i="0">
                 <a:solidFill>
                   <a:srgbClr val="6B625D"/>
                 </a:solidFill>
@@ -4056,8 +4056,8 @@
         </p:nvSpPr>
         <p:spPr>
           <a:xfrm>
-            <a:off x="9960545" y="6407134"/>
-            <a:ext cx="1266227" cy="152400"/>
+            <a:off x="9960545" y="6388084"/>
+            <a:ext cx="1278926" cy="184150"/>
           </a:xfrm>
           <a:prstGeom prst="rect">
             <a:avLst/>
@@ -4076,7 +4076,7 @@
               </a:lnSpc>
             </a:pPr>
             <a:r>
-              <a:rPr sz="1350" b="0" i="0">
+              <a:rPr sz="900" b="0" i="0">
                 <a:solidFill>
                   <a:srgbClr val="6B625D"/>
                 </a:solidFill>
@@ -4402,14 +4402,143 @@
       </p:sp>
       <p:sp>
         <p:nvSpPr>
-          <p:cNvPr id="10" name="TextBox 9"/>
-          <p:cNvSpPr txBox="1"/>
-          <p:nvPr/>
-        </p:nvSpPr>
-        <p:spPr>
-          <a:xfrm>
-            <a:off x="596899" y="444499"/>
-            <a:ext cx="11010872" cy="177800"/>
+          <p:cNvPr id="10" name="Rectangle 9"/>
+          <p:cNvSpPr/>
+          <p:nvPr/>
+        </p:nvSpPr>
+        <p:spPr>
+          <a:xfrm>
+            <a:off x="609598" y="5724511"/>
+            <a:ext cx="165100" cy="38100"/>
+          </a:xfrm>
+          <a:prstGeom prst="rect">
+            <a:avLst/>
+          </a:prstGeom>
+          <a:solidFill>
+            <a:srgbClr val="C0392B"/>
+          </a:solidFill>
+          <a:ln>
+            <a:noFill/>
+          </a:ln>
+        </p:spPr>
+        <p:style>
+          <a:lnRef idx="1">
+            <a:schemeClr val="accent1"/>
+          </a:lnRef>
+          <a:fillRef idx="3">
+            <a:schemeClr val="accent1"/>
+          </a:fillRef>
+          <a:effectRef idx="2">
+            <a:schemeClr val="accent1"/>
+          </a:effectRef>
+          <a:fontRef idx="minor">
+            <a:schemeClr val="lt1"/>
+          </a:fontRef>
+        </p:style>
+        <p:txBody>
+          <a:bodyPr rtlCol="0" anchor="ctr"/>
+          <a:lstStyle/>
+          <a:p>
+            <a:pPr algn="ctr"/>
+          </a:p>
+        </p:txBody>
+      </p:sp>
+      <p:sp>
+        <p:nvSpPr>
+          <p:cNvPr id="11" name="Rectangle 10"/>
+          <p:cNvSpPr/>
+          <p:nvPr/>
+        </p:nvSpPr>
+        <p:spPr>
+          <a:xfrm>
+            <a:off x="1499390" y="5724511"/>
+            <a:ext cx="165100" cy="38100"/>
+          </a:xfrm>
+          <a:prstGeom prst="rect">
+            <a:avLst/>
+          </a:prstGeom>
+          <a:solidFill>
+            <a:srgbClr val="1A1A2E"/>
+          </a:solidFill>
+          <a:ln>
+            <a:noFill/>
+          </a:ln>
+        </p:spPr>
+        <p:style>
+          <a:lnRef idx="1">
+            <a:schemeClr val="accent1"/>
+          </a:lnRef>
+          <a:fillRef idx="3">
+            <a:schemeClr val="accent1"/>
+          </a:fillRef>
+          <a:effectRef idx="2">
+            <a:schemeClr val="accent1"/>
+          </a:effectRef>
+          <a:fontRef idx="minor">
+            <a:schemeClr val="lt1"/>
+          </a:fontRef>
+        </p:style>
+        <p:txBody>
+          <a:bodyPr rtlCol="0" anchor="ctr"/>
+          <a:lstStyle/>
+          <a:p>
+            <a:pPr algn="ctr"/>
+          </a:p>
+        </p:txBody>
+      </p:sp>
+      <p:sp>
+        <p:nvSpPr>
+          <p:cNvPr id="12" name="Rectangle 11"/>
+          <p:cNvSpPr/>
+          <p:nvPr/>
+        </p:nvSpPr>
+        <p:spPr>
+          <a:xfrm>
+            <a:off x="2566981" y="5724511"/>
+            <a:ext cx="165100" cy="38100"/>
+          </a:xfrm>
+          <a:prstGeom prst="rect">
+            <a:avLst/>
+          </a:prstGeom>
+          <a:solidFill>
+            <a:srgbClr val="C8C2BC"/>
+          </a:solidFill>
+          <a:ln>
+            <a:noFill/>
+          </a:ln>
+        </p:spPr>
+        <p:style>
+          <a:lnRef idx="1">
+            <a:schemeClr val="accent1"/>
+          </a:lnRef>
+          <a:fillRef idx="3">
+            <a:schemeClr val="accent1"/>
+          </a:fillRef>
+          <a:effectRef idx="2">
+            <a:schemeClr val="accent1"/>
+          </a:effectRef>
+          <a:fontRef idx="minor">
+            <a:schemeClr val="lt1"/>
+          </a:fontRef>
+        </p:style>
+        <p:txBody>
+          <a:bodyPr rtlCol="0" anchor="ctr"/>
+          <a:lstStyle/>
+          <a:p>
+            <a:pPr algn="ctr"/>
+          </a:p>
+        </p:txBody>
+      </p:sp>
+      <p:sp>
+        <p:nvSpPr>
+          <p:cNvPr id="13" name="TextBox 12"/>
+          <p:cNvSpPr txBox="1"/>
+          <p:nvPr/>
+        </p:nvSpPr>
+        <p:spPr>
+          <a:xfrm>
+            <a:off x="596899" y="425449"/>
+            <a:ext cx="2980226" cy="215899"/>
           </a:xfrm>
           <a:prstGeom prst="rect">
             <a:avLst/>
@@ -4428,7 +4557,7 @@
               </a:lnSpc>
             </a:pPr>
             <a:r>
-              <a:rPr sz="1650" b="1" i="0">
+              <a:rPr sz="1100" b="1" i="0">
                 <a:solidFill>
                   <a:srgbClr val="7A4F5E"/>
                 </a:solidFill>
@@ -4441,14 +4570,14 @@
       </p:sp>
       <p:sp>
         <p:nvSpPr>
-          <p:cNvPr id="11" name="TextBox 10"/>
-          <p:cNvSpPr txBox="1"/>
-          <p:nvPr/>
-        </p:nvSpPr>
-        <p:spPr>
-          <a:xfrm>
-            <a:off x="596899" y="698498"/>
-            <a:ext cx="11010872" cy="485079"/>
+          <p:cNvPr id="14" name="TextBox 13"/>
+          <p:cNvSpPr txBox="1"/>
+          <p:nvPr/>
+        </p:nvSpPr>
+        <p:spPr>
+          <a:xfrm>
+            <a:off x="596899" y="647698"/>
+            <a:ext cx="4966680" cy="577849"/>
           </a:xfrm>
           <a:prstGeom prst="rect">
             <a:avLst/>
@@ -4467,7 +4596,7 @@
               </a:lnSpc>
             </a:pPr>
             <a:r>
-              <a:rPr sz="4800" b="1" i="0">
+              <a:rPr sz="3200" b="1" i="0">
                 <a:solidFill>
                   <a:srgbClr val="3A3532"/>
                 </a:solidFill>
@@ -4480,14 +4609,14 @@
       </p:sp>
       <p:sp>
         <p:nvSpPr>
-          <p:cNvPr id="12" name="TextBox 11"/>
-          <p:cNvSpPr txBox="1"/>
-          <p:nvPr/>
-        </p:nvSpPr>
-        <p:spPr>
-          <a:xfrm>
-            <a:off x="596899" y="5670536"/>
-            <a:ext cx="711992" cy="158750"/>
+          <p:cNvPr id="15" name="TextBox 14"/>
+          <p:cNvSpPr txBox="1"/>
+          <p:nvPr/>
+        </p:nvSpPr>
+        <p:spPr>
+          <a:xfrm>
+            <a:off x="825498" y="5651486"/>
+            <a:ext cx="496093" cy="190500"/>
           </a:xfrm>
           <a:prstGeom prst="rect">
             <a:avLst/>
@@ -4506,7 +4635,7 @@
               </a:lnSpc>
             </a:pPr>
             <a:r>
-              <a:rPr sz="1425" b="1" i="0">
+              <a:rPr sz="950" b="1" i="0">
                 <a:solidFill>
                   <a:srgbClr val="6B625D"/>
                 </a:solidFill>
@@ -4519,14 +4648,14 @@
       </p:sp>
       <p:sp>
         <p:nvSpPr>
-          <p:cNvPr id="13" name="TextBox 12"/>
-          <p:cNvSpPr txBox="1"/>
-          <p:nvPr/>
-        </p:nvSpPr>
-        <p:spPr>
-          <a:xfrm>
-            <a:off x="1486690" y="5670536"/>
-            <a:ext cx="889792" cy="158750"/>
+          <p:cNvPr id="16" name="TextBox 15"/>
+          <p:cNvSpPr txBox="1"/>
+          <p:nvPr/>
+        </p:nvSpPr>
+        <p:spPr>
+          <a:xfrm>
+            <a:off x="1715289" y="5651486"/>
+            <a:ext cx="673892" cy="190500"/>
           </a:xfrm>
           <a:prstGeom prst="rect">
             <a:avLst/>
@@ -4545,7 +4674,7 @@
               </a:lnSpc>
             </a:pPr>
             <a:r>
-              <a:rPr sz="1425" b="1" i="0">
+              <a:rPr sz="950" b="1" i="0">
                 <a:solidFill>
                   <a:srgbClr val="6B625D"/>
                 </a:solidFill>
@@ -4558,14 +4687,14 @@
       </p:sp>
       <p:sp>
         <p:nvSpPr>
-          <p:cNvPr id="14" name="TextBox 13"/>
-          <p:cNvSpPr txBox="1"/>
-          <p:nvPr/>
-        </p:nvSpPr>
-        <p:spPr>
-          <a:xfrm>
-            <a:off x="2554281" y="5670536"/>
-            <a:ext cx="789283" cy="158750"/>
+          <p:cNvPr id="17" name="TextBox 16"/>
+          <p:cNvSpPr txBox="1"/>
+          <p:nvPr/>
+        </p:nvSpPr>
+        <p:spPr>
+          <a:xfrm>
+            <a:off x="2782881" y="5651486"/>
+            <a:ext cx="573384" cy="190500"/>
           </a:xfrm>
           <a:prstGeom prst="rect">
             <a:avLst/>
@@ -4584,7 +4713,7 @@
               </a:lnSpc>
             </a:pPr>
             <a:r>
-              <a:rPr sz="1425" b="1" i="0">
+              <a:rPr sz="950" b="1" i="0">
                 <a:solidFill>
                   <a:srgbClr val="6B625D"/>
                 </a:solidFill>
@@ -4597,14 +4726,14 @@
       </p:sp>
       <p:sp>
         <p:nvSpPr>
-          <p:cNvPr id="15" name="TextBox 14"/>
-          <p:cNvSpPr txBox="1"/>
-          <p:nvPr/>
-        </p:nvSpPr>
-        <p:spPr>
-          <a:xfrm>
-            <a:off x="596899" y="5880085"/>
-            <a:ext cx="3086092" cy="393699"/>
+          <p:cNvPr id="18" name="TextBox 17"/>
+          <p:cNvSpPr txBox="1"/>
+          <p:nvPr/>
+        </p:nvSpPr>
+        <p:spPr>
+          <a:xfrm>
+            <a:off x="596899" y="5886435"/>
+            <a:ext cx="2926152" cy="374649"/>
           </a:xfrm>
           <a:prstGeom prst="rect">
             <a:avLst/>
@@ -4623,7 +4752,7 @@
               </a:lnSpc>
             </a:pPr>
             <a:r>
-              <a:rPr sz="1500" b="0" i="0">
+              <a:rPr sz="1000" b="0" i="0">
                 <a:solidFill>
                   <a:srgbClr val="6B625D"/>
                 </a:solidFill>
@@ -4636,14 +4765,14 @@
       </p:sp>
       <p:sp>
         <p:nvSpPr>
-          <p:cNvPr id="16" name="TextBox 15"/>
-          <p:cNvSpPr txBox="1"/>
-          <p:nvPr/>
-        </p:nvSpPr>
-        <p:spPr>
-          <a:xfrm>
-            <a:off x="4152890" y="2548923"/>
-            <a:ext cx="4102090" cy="295870"/>
+          <p:cNvPr id="19" name="TextBox 18"/>
+          <p:cNvSpPr txBox="1"/>
+          <p:nvPr/>
+        </p:nvSpPr>
+        <p:spPr>
+          <a:xfrm>
+            <a:off x="4368789" y="2561623"/>
+            <a:ext cx="3034697" cy="260349"/>
           </a:xfrm>
           <a:prstGeom prst="rect">
             <a:avLst/>
@@ -4662,7 +4791,7 @@
               </a:lnSpc>
             </a:pPr>
             <a:r>
-              <a:rPr sz="2100" b="0" i="0">
+              <a:rPr sz="1400" b="0" i="0">
                 <a:solidFill>
                   <a:srgbClr val="3A3532"/>
                 </a:solidFill>
@@ -4675,14 +4804,14 @@
       </p:sp>
       <p:sp>
         <p:nvSpPr>
-          <p:cNvPr id="17" name="TextBox 16"/>
-          <p:cNvSpPr txBox="1"/>
-          <p:nvPr/>
-        </p:nvSpPr>
-        <p:spPr>
-          <a:xfrm>
-            <a:off x="4152890" y="2933693"/>
-            <a:ext cx="4102090" cy="295870"/>
+          <p:cNvPr id="20" name="TextBox 19"/>
+          <p:cNvSpPr txBox="1"/>
+          <p:nvPr/>
+        </p:nvSpPr>
+        <p:spPr>
+          <a:xfrm>
+            <a:off x="4368789" y="2946393"/>
+            <a:ext cx="3151279" cy="260349"/>
           </a:xfrm>
           <a:prstGeom prst="rect">
             <a:avLst/>
@@ -4701,7 +4830,7 @@
               </a:lnSpc>
             </a:pPr>
             <a:r>
-              <a:rPr sz="2100" b="0" i="0">
+              <a:rPr sz="1400" b="0" i="0">
                 <a:solidFill>
                   <a:srgbClr val="3A3532"/>
                 </a:solidFill>
@@ -4714,14 +4843,14 @@
       </p:sp>
       <p:sp>
         <p:nvSpPr>
-          <p:cNvPr id="18" name="TextBox 17"/>
-          <p:cNvSpPr txBox="1"/>
-          <p:nvPr/>
-        </p:nvSpPr>
-        <p:spPr>
-          <a:xfrm>
-            <a:off x="4152890" y="3318462"/>
-            <a:ext cx="4102090" cy="295870"/>
+          <p:cNvPr id="21" name="TextBox 20"/>
+          <p:cNvSpPr txBox="1"/>
+          <p:nvPr/>
+        </p:nvSpPr>
+        <p:spPr>
+          <a:xfrm>
+            <a:off x="4368789" y="3331162"/>
+            <a:ext cx="3563631" cy="260349"/>
           </a:xfrm>
           <a:prstGeom prst="rect">
             <a:avLst/>
@@ -4740,7 +4869,7 @@
               </a:lnSpc>
             </a:pPr>
             <a:r>
-              <a:rPr sz="2100" b="0" i="0">
+              <a:rPr sz="1400" b="0" i="0">
                 <a:solidFill>
                   <a:srgbClr val="3A3532"/>
                 </a:solidFill>
@@ -4753,14 +4882,14 @@
       </p:sp>
       <p:sp>
         <p:nvSpPr>
-          <p:cNvPr id="19" name="TextBox 18"/>
-          <p:cNvSpPr txBox="1"/>
-          <p:nvPr/>
-        </p:nvSpPr>
-        <p:spPr>
-          <a:xfrm>
-            <a:off x="4152890" y="3703231"/>
-            <a:ext cx="4102090" cy="295870"/>
+          <p:cNvPr id="22" name="TextBox 21"/>
+          <p:cNvSpPr txBox="1"/>
+          <p:nvPr/>
+        </p:nvSpPr>
+        <p:spPr>
+          <a:xfrm>
+            <a:off x="4368789" y="3715931"/>
+            <a:ext cx="3716924" cy="260349"/>
           </a:xfrm>
           <a:prstGeom prst="rect">
             <a:avLst/>
@@ -4779,7 +4908,7 @@
               </a:lnSpc>
             </a:pPr>
             <a:r>
-              <a:rPr sz="2100" b="0" i="0">
+              <a:rPr sz="1400" b="0" i="0">
                 <a:solidFill>
                   <a:srgbClr val="3A3532"/>
                 </a:solidFill>
@@ -4792,14 +4921,14 @@
       </p:sp>
       <p:sp>
         <p:nvSpPr>
-          <p:cNvPr id="20" name="TextBox 19"/>
-          <p:cNvSpPr txBox="1"/>
-          <p:nvPr/>
-        </p:nvSpPr>
-        <p:spPr>
-          <a:xfrm>
-            <a:off x="4152890" y="4088001"/>
-            <a:ext cx="4102090" cy="553639"/>
+          <p:cNvPr id="23" name="TextBox 22"/>
+          <p:cNvSpPr txBox="1"/>
+          <p:nvPr/>
+        </p:nvSpPr>
+        <p:spPr>
+          <a:xfrm>
+            <a:off x="4368789" y="4100701"/>
+            <a:ext cx="3533965" cy="518119"/>
           </a:xfrm>
           <a:prstGeom prst="rect">
             <a:avLst/>
@@ -4818,7 +4947,7 @@
               </a:lnSpc>
             </a:pPr>
             <a:r>
-              <a:rPr sz="2100" b="0" i="0">
+              <a:rPr sz="1400" b="0" i="0">
                 <a:solidFill>
                   <a:srgbClr val="3A3532"/>
                 </a:solidFill>
@@ -4831,14 +4960,14 @@
       </p:sp>
       <p:sp>
         <p:nvSpPr>
-          <p:cNvPr id="21" name="TextBox 20"/>
-          <p:cNvSpPr txBox="1"/>
-          <p:nvPr/>
-        </p:nvSpPr>
-        <p:spPr>
-          <a:xfrm>
-            <a:off x="4152890" y="4794040"/>
-            <a:ext cx="2837848" cy="330199"/>
+          <p:cNvPr id="24" name="TextBox 23"/>
+          <p:cNvSpPr txBox="1"/>
+          <p:nvPr/>
+        </p:nvSpPr>
+        <p:spPr>
+          <a:xfrm>
+            <a:off x="4203689" y="4800390"/>
+            <a:ext cx="2748948" cy="311149"/>
           </a:xfrm>
           <a:prstGeom prst="rect">
             <a:avLst/>
@@ -4852,7 +4981,7 @@
           </a:ln>
         </p:spPr>
         <p:txBody>
-          <a:bodyPr wrap="square" lIns="114300" rIns="114300" tIns="50800" bIns="50800" anchor="t">
+          <a:bodyPr wrap="square" lIns="114300" rIns="114300" tIns="57150" bIns="57150" anchor="t">
             <a:spAutoFit/>
           </a:bodyPr>
           <a:lstStyle/>
@@ -4863,7 +4992,7 @@
               </a:lnSpc>
             </a:pPr>
             <a:r>
-              <a:rPr sz="1500" b="1" i="0">
+              <a:rPr sz="1000" b="1" i="0">
                 <a:solidFill>
                   <a:srgbClr val="076B7D"/>
                 </a:solidFill>
@@ -4876,14 +5005,14 @@
       </p:sp>
       <p:sp>
         <p:nvSpPr>
-          <p:cNvPr id="22" name="TextBox 21"/>
-          <p:cNvSpPr txBox="1"/>
-          <p:nvPr/>
-        </p:nvSpPr>
-        <p:spPr>
-          <a:xfrm>
-            <a:off x="596899" y="6426184"/>
-            <a:ext cx="154285" cy="152400"/>
+          <p:cNvPr id="25" name="TextBox 24"/>
+          <p:cNvSpPr txBox="1"/>
+          <p:nvPr/>
+        </p:nvSpPr>
+        <p:spPr>
+          <a:xfrm>
+            <a:off x="596899" y="6407134"/>
+            <a:ext cx="166985" cy="184150"/>
           </a:xfrm>
           <a:prstGeom prst="rect">
             <a:avLst/>
@@ -4902,7 +5031,7 @@
               </a:lnSpc>
             </a:pPr>
             <a:r>
-              <a:rPr sz="1350" b="0" i="0">
+              <a:rPr sz="900" b="0" i="0">
                 <a:solidFill>
                   <a:srgbClr val="6B625D"/>
                 </a:solidFill>
@@ -4915,14 +5044,14 @@
       </p:sp>
       <p:sp>
         <p:nvSpPr>
-          <p:cNvPr id="23" name="TextBox 22"/>
-          <p:cNvSpPr txBox="1"/>
-          <p:nvPr/>
-        </p:nvSpPr>
-        <p:spPr>
-          <a:xfrm>
-            <a:off x="9960545" y="6407134"/>
-            <a:ext cx="1266227" cy="152400"/>
+          <p:cNvPr id="26" name="TextBox 25"/>
+          <p:cNvSpPr txBox="1"/>
+          <p:nvPr/>
+        </p:nvSpPr>
+        <p:spPr>
+          <a:xfrm>
+            <a:off x="9960545" y="6388084"/>
+            <a:ext cx="1278926" cy="184150"/>
           </a:xfrm>
           <a:prstGeom prst="rect">
             <a:avLst/>
@@ -4941,7 +5070,7 @@
               </a:lnSpc>
             </a:pPr>
             <a:r>
-              <a:rPr sz="1350" b="0" i="0">
+              <a:rPr sz="900" b="0" i="0">
                 <a:solidFill>
                   <a:srgbClr val="6B625D"/>
                 </a:solidFill>
@@ -5058,8 +5187,8 @@
         </p:nvSpPr>
         <p:spPr>
           <a:xfrm>
-            <a:off x="596899" y="444499"/>
-            <a:ext cx="11010872" cy="177800"/>
+            <a:off x="596899" y="425449"/>
+            <a:ext cx="2980226" cy="215899"/>
           </a:xfrm>
           <a:prstGeom prst="rect">
             <a:avLst/>
@@ -5078,7 +5207,7 @@
               </a:lnSpc>
             </a:pPr>
             <a:r>
-              <a:rPr sz="1650" b="1" i="0">
+              <a:rPr sz="1100" b="1" i="0">
                 <a:solidFill>
                   <a:srgbClr val="7A4F5E"/>
                 </a:solidFill>
@@ -5097,8 +5226,8 @@
         </p:nvSpPr>
         <p:spPr>
           <a:xfrm>
-            <a:off x="596899" y="698498"/>
-            <a:ext cx="11010872" cy="485079"/>
+            <a:off x="596899" y="647698"/>
+            <a:ext cx="2713130" cy="577849"/>
           </a:xfrm>
           <a:prstGeom prst="rect">
             <a:avLst/>
@@ -5117,7 +5246,7 @@
               </a:lnSpc>
             </a:pPr>
             <a:r>
-              <a:rPr sz="4800" b="1" i="0">
+              <a:rPr sz="3200" b="1" i="0">
                 <a:solidFill>
                   <a:srgbClr val="3A3532"/>
                 </a:solidFill>
@@ -5136,8 +5265,8 @@
         </p:nvSpPr>
         <p:spPr>
           <a:xfrm>
-            <a:off x="596899" y="6057885"/>
-            <a:ext cx="2705887" cy="215899"/>
+            <a:off x="596899" y="6064235"/>
+            <a:ext cx="2718587" cy="196850"/>
           </a:xfrm>
           <a:prstGeom prst="rect">
             <a:avLst/>
@@ -5156,7 +5285,7 @@
               </a:lnSpc>
             </a:pPr>
             <a:r>
-              <a:rPr sz="1500" b="0" i="0">
+              <a:rPr sz="1000" b="0" i="0">
                 <a:solidFill>
                   <a:srgbClr val="6B625D"/>
                 </a:solidFill>
@@ -5175,8 +5304,8 @@
         </p:nvSpPr>
         <p:spPr>
           <a:xfrm>
-            <a:off x="3898890" y="1931784"/>
-            <a:ext cx="1244597" cy="469899"/>
+            <a:off x="4866568" y="1855584"/>
+            <a:ext cx="289619" cy="615948"/>
           </a:xfrm>
           <a:prstGeom prst="rect">
             <a:avLst/>
@@ -5195,7 +5324,7 @@
               </a:lnSpc>
             </a:pPr>
             <a:r>
-              <a:rPr sz="5100" b="1" i="0">
+              <a:rPr sz="3400" b="1" i="0">
                 <a:solidFill>
                   <a:srgbClr val="7A4F5E"/>
                 </a:solidFill>
@@ -5215,7 +5344,7 @@
         <p:spPr>
           <a:xfrm>
             <a:off x="5270487" y="2147684"/>
-            <a:ext cx="6337284" cy="459679"/>
+            <a:ext cx="618528" cy="453329"/>
           </a:xfrm>
           <a:prstGeom prst="rect">
             <a:avLst/>
@@ -5234,13 +5363,29 @@
               </a:lnSpc>
             </a:pPr>
             <a:r>
-              <a:rPr sz="2100" b="0" i="0">
+              <a:rPr sz="1400" b="0" i="0">
                 <a:solidFill>
                   <a:srgbClr val="3A3532"/>
                 </a:solidFill>
                 <a:latin typeface="Outfit"/>
               </a:rPr>
-              <a:t>centrile funzioni</a:t>
+              <a:t>centri</a:t>
+            </a:r>
+          </a:p>
+          <a:p>
+            <a:pPr algn="l">
+              <a:lnSpc>
+                <a:spcPct val="130000"/>
+              </a:lnSpc>
+            </a:pPr>
+            <a:r>
+              <a:rPr sz="1400" b="0" i="0">
+                <a:solidFill>
+                  <a:srgbClr val="3A3532"/>
+                </a:solidFill>
+                <a:latin typeface="Outfit"/>
+              </a:rPr>
+              <a:t>le funzioni</a:t>
             </a:r>
           </a:p>
         </p:txBody>
@@ -5253,8 +5398,8 @@
         </p:nvSpPr>
         <p:spPr>
           <a:xfrm>
-            <a:off x="3898890" y="2708963"/>
-            <a:ext cx="1244597" cy="469899"/>
+            <a:off x="4877383" y="2632763"/>
+            <a:ext cx="278804" cy="615948"/>
           </a:xfrm>
           <a:prstGeom prst="rect">
             <a:avLst/>
@@ -5273,7 +5418,7 @@
               </a:lnSpc>
             </a:pPr>
             <a:r>
-              <a:rPr sz="5100" b="1" i="0">
+              <a:rPr sz="3400" b="1" i="0">
                 <a:solidFill>
                   <a:srgbClr val="7A4F5E"/>
                 </a:solidFill>
@@ -5293,7 +5438,7 @@
         <p:spPr>
           <a:xfrm>
             <a:off x="5270487" y="2924862"/>
-            <a:ext cx="6337284" cy="459679"/>
+            <a:ext cx="2782881" cy="453329"/>
           </a:xfrm>
           <a:prstGeom prst="rect">
             <a:avLst/>
@@ -5312,13 +5457,29 @@
               </a:lnSpc>
             </a:pPr>
             <a:r>
-              <a:rPr sz="2100" b="0" i="0">
+              <a:rPr sz="1400" b="0" i="0">
                 <a:solidFill>
                   <a:srgbClr val="3A3532"/>
                 </a:solidFill>
                 <a:latin typeface="Outfit"/>
               </a:rPr>
-              <a:t>Tipologiein BG5: Iniziatore, Costruttore, Guida, Valutatore</a:t>
+              <a:t>Tipologie</a:t>
+            </a:r>
+          </a:p>
+          <a:p>
+            <a:pPr algn="l">
+              <a:lnSpc>
+                <a:spcPct val="130000"/>
+              </a:lnSpc>
+            </a:pPr>
+            <a:r>
+              <a:rPr sz="1400" b="0" i="0">
+                <a:solidFill>
+                  <a:srgbClr val="3A3532"/>
+                </a:solidFill>
+                <a:latin typeface="Outfit"/>
+              </a:rPr>
+              <a:t>in BG5: Iniziatore, Costruttore, Guida, Valutatore</a:t>
             </a:r>
           </a:p>
         </p:txBody>
@@ -5331,8 +5492,8 @@
         </p:nvSpPr>
         <p:spPr>
           <a:xfrm>
-            <a:off x="3898890" y="3486141"/>
-            <a:ext cx="1244597" cy="469899"/>
+            <a:off x="4652356" y="3409941"/>
+            <a:ext cx="503832" cy="615948"/>
           </a:xfrm>
           <a:prstGeom prst="rect">
             <a:avLst/>
@@ -5351,7 +5512,7 @@
               </a:lnSpc>
             </a:pPr>
             <a:r>
-              <a:rPr sz="5100" b="1" i="0">
+              <a:rPr sz="3400" b="1" i="0">
                 <a:solidFill>
                   <a:srgbClr val="7A4F5E"/>
                 </a:solidFill>
@@ -5371,7 +5532,7 @@
         <p:spPr>
           <a:xfrm>
             <a:off x="5270487" y="3702041"/>
-            <a:ext cx="6337284" cy="459679"/>
+            <a:ext cx="846334" cy="453329"/>
           </a:xfrm>
           <a:prstGeom prst="rect">
             <a:avLst/>
@@ -5390,13 +5551,29 @@
               </a:lnSpc>
             </a:pPr>
             <a:r>
-              <a:rPr sz="2100" b="0" i="0">
+              <a:rPr sz="1400" b="0" i="0">
                 <a:solidFill>
                   <a:srgbClr val="3A3532"/>
                 </a:solidFill>
                 <a:latin typeface="Outfit"/>
               </a:rPr>
-              <a:t>canalii punti di forza</a:t>
+              <a:t>canali</a:t>
+            </a:r>
+          </a:p>
+          <a:p>
+            <a:pPr algn="l">
+              <a:lnSpc>
+                <a:spcPct val="130000"/>
+              </a:lnSpc>
+            </a:pPr>
+            <a:r>
+              <a:rPr sz="1400" b="0" i="0">
+                <a:solidFill>
+                  <a:srgbClr val="3A3532"/>
+                </a:solidFill>
+                <a:latin typeface="Outfit"/>
+              </a:rPr>
+              <a:t>i punti di forza</a:t>
             </a:r>
           </a:p>
         </p:txBody>
@@ -5409,8 +5586,8 @@
         </p:nvSpPr>
         <p:spPr>
           <a:xfrm>
-            <a:off x="3898890" y="4263320"/>
-            <a:ext cx="1244597" cy="469899"/>
+            <a:off x="4635092" y="4187120"/>
+            <a:ext cx="521096" cy="615948"/>
           </a:xfrm>
           <a:prstGeom prst="rect">
             <a:avLst/>
@@ -5429,7 +5606,7 @@
               </a:lnSpc>
             </a:pPr>
             <a:r>
-              <a:rPr sz="5100" b="1" i="0">
+              <a:rPr sz="3400" b="1" i="0">
                 <a:solidFill>
                   <a:srgbClr val="7A4F5E"/>
                 </a:solidFill>
@@ -5449,7 +5626,7 @@
         <p:spPr>
           <a:xfrm>
             <a:off x="5270487" y="4479219"/>
-            <a:ext cx="6337284" cy="459679"/>
+            <a:ext cx="1040405" cy="453329"/>
           </a:xfrm>
           <a:prstGeom prst="rect">
             <a:avLst/>
@@ -5468,13 +5645,29 @@
               </a:lnSpc>
             </a:pPr>
             <a:r>
-              <a:rPr sz="2100" b="0" i="0">
+              <a:rPr sz="1400" b="0" i="0">
                 <a:solidFill>
                   <a:srgbClr val="3A3532"/>
                 </a:solidFill>
                 <a:latin typeface="Outfit"/>
               </a:rPr>
-              <a:t>portei tratti caratteriali</a:t>
+              <a:t>porte</a:t>
+            </a:r>
+          </a:p>
+          <a:p>
+            <a:pPr algn="l">
+              <a:lnSpc>
+                <a:spcPct val="130000"/>
+              </a:lnSpc>
+            </a:pPr>
+            <a:r>
+              <a:rPr sz="1400" b="0" i="0">
+                <a:solidFill>
+                  <a:srgbClr val="3A3532"/>
+                </a:solidFill>
+                <a:latin typeface="Outfit"/>
+              </a:rPr>
+              <a:t>i tratti caratteriali</a:t>
             </a:r>
           </a:p>
         </p:txBody>
@@ -5487,8 +5680,8 @@
         </p:nvSpPr>
         <p:spPr>
           <a:xfrm>
-            <a:off x="3898890" y="5040498"/>
-            <a:ext cx="1244597" cy="469899"/>
+            <a:off x="4424351" y="4964299"/>
+            <a:ext cx="731836" cy="615948"/>
           </a:xfrm>
           <a:prstGeom prst="rect">
             <a:avLst/>
@@ -5507,7 +5700,7 @@
               </a:lnSpc>
             </a:pPr>
             <a:r>
-              <a:rPr sz="5100" b="1" i="0">
+              <a:rPr sz="3400" b="1" i="0">
                 <a:solidFill>
                   <a:srgbClr val="7A4F5E"/>
                 </a:solidFill>
@@ -5527,7 +5720,7 @@
         <p:spPr>
           <a:xfrm>
             <a:off x="5270487" y="5256398"/>
-            <a:ext cx="6337284" cy="459679"/>
+            <a:ext cx="3016044" cy="453329"/>
           </a:xfrm>
           <a:prstGeom prst="rect">
             <a:avLst/>
@@ -5546,13 +5739,29 @@
               </a:lnSpc>
             </a:pPr>
             <a:r>
-              <a:rPr sz="2100" b="0" i="0">
+              <a:rPr sz="1400" b="0" i="0">
                 <a:solidFill>
                   <a:srgbClr val="3A3532"/>
                 </a:solidFill>
                 <a:latin typeface="Outfit"/>
               </a:rPr>
-              <a:t>variazioni di lineele qualità in cui si può esprimere un tratto caratteriale</a:t>
+              <a:t>variazioni di linee</a:t>
+            </a:r>
+          </a:p>
+          <a:p>
+            <a:pPr algn="l">
+              <a:lnSpc>
+                <a:spcPct val="130000"/>
+              </a:lnSpc>
+            </a:pPr>
+            <a:r>
+              <a:rPr sz="1400" b="0" i="0">
+                <a:solidFill>
+                  <a:srgbClr val="3A3532"/>
+                </a:solidFill>
+                <a:latin typeface="Outfit"/>
+              </a:rPr>
+              <a:t>le qualità in cui si può esprimere un tratto caratteriale</a:t>
             </a:r>
           </a:p>
         </p:txBody>
@@ -5565,8 +5774,8 @@
         </p:nvSpPr>
         <p:spPr>
           <a:xfrm>
-            <a:off x="596899" y="6426184"/>
-            <a:ext cx="154186" cy="152400"/>
+            <a:off x="596899" y="6407134"/>
+            <a:ext cx="166886" cy="184150"/>
           </a:xfrm>
           <a:prstGeom prst="rect">
             <a:avLst/>
@@ -5585,7 +5794,7 @@
               </a:lnSpc>
             </a:pPr>
             <a:r>
-              <a:rPr sz="1350" b="0" i="0">
+              <a:rPr sz="900" b="0" i="0">
                 <a:solidFill>
                   <a:srgbClr val="6B625D"/>
                 </a:solidFill>
@@ -5604,8 +5813,8 @@
         </p:nvSpPr>
         <p:spPr>
           <a:xfrm>
-            <a:off x="9960545" y="6407134"/>
-            <a:ext cx="1266227" cy="152400"/>
+            <a:off x="9960545" y="6388084"/>
+            <a:ext cx="1278926" cy="184150"/>
           </a:xfrm>
           <a:prstGeom prst="rect">
             <a:avLst/>
@@ -5624,7 +5833,7 @@
               </a:lnSpc>
             </a:pPr>
             <a:r>
-              <a:rPr sz="1350" b="0" i="0">
+              <a:rPr sz="900" b="0" i="0">
                 <a:solidFill>
                   <a:srgbClr val="6B625D"/>
                 </a:solidFill>
@@ -6104,8 +6313,8 @@
         </p:nvSpPr>
         <p:spPr>
           <a:xfrm>
-            <a:off x="596899" y="444499"/>
-            <a:ext cx="11010872" cy="177800"/>
+            <a:off x="596899" y="425449"/>
+            <a:ext cx="2980226" cy="215899"/>
           </a:xfrm>
           <a:prstGeom prst="rect">
             <a:avLst/>
@@ -6124,7 +6333,7 @@
               </a:lnSpc>
             </a:pPr>
             <a:r>
-              <a:rPr sz="1650" b="1" i="0">
+              <a:rPr sz="1100" b="1" i="0">
                 <a:solidFill>
                   <a:srgbClr val="7A4F5E"/>
                 </a:solidFill>
@@ -6143,8 +6352,8 @@
         </p:nvSpPr>
         <p:spPr>
           <a:xfrm>
-            <a:off x="596899" y="698498"/>
-            <a:ext cx="11010872" cy="485079"/>
+            <a:off x="596899" y="647698"/>
+            <a:ext cx="6729197" cy="577849"/>
           </a:xfrm>
           <a:prstGeom prst="rect">
             <a:avLst/>
@@ -6163,7 +6372,7 @@
               </a:lnSpc>
             </a:pPr>
             <a:r>
-              <a:rPr sz="4800" b="1" i="0">
+              <a:rPr sz="3200" b="1" i="0">
                 <a:solidFill>
                   <a:srgbClr val="3A3532"/>
                 </a:solidFill>
@@ -6182,8 +6391,8 @@
         </p:nvSpPr>
         <p:spPr>
           <a:xfrm>
-            <a:off x="596899" y="1424877"/>
-            <a:ext cx="5114912" cy="281880"/>
+            <a:off x="596899" y="1418527"/>
+            <a:ext cx="1877611" cy="292099"/>
           </a:xfrm>
           <a:prstGeom prst="rect">
             <a:avLst/>
@@ -6202,7 +6411,7 @@
               </a:lnSpc>
             </a:pPr>
             <a:r>
-              <a:rPr sz="2400" b="1" i="0">
+              <a:rPr sz="1600" b="1" i="0">
                 <a:solidFill>
                   <a:srgbClr val="6B625D"/>
                 </a:solidFill>
@@ -6221,8 +6430,8 @@
         </p:nvSpPr>
         <p:spPr>
           <a:xfrm>
-            <a:off x="596899" y="1833756"/>
-            <a:ext cx="5114912" cy="295870"/>
+            <a:off x="812798" y="1846456"/>
+            <a:ext cx="3039162" cy="260349"/>
           </a:xfrm>
           <a:prstGeom prst="rect">
             <a:avLst/>
@@ -6241,7 +6450,7 @@
               </a:lnSpc>
             </a:pPr>
             <a:r>
-              <a:rPr sz="2100" b="0" i="0">
+              <a:rPr sz="1400" b="0" i="0">
                 <a:solidFill>
                   <a:srgbClr val="6B625D"/>
                 </a:solidFill>
@@ -6260,8 +6469,8 @@
         </p:nvSpPr>
         <p:spPr>
           <a:xfrm>
-            <a:off x="596899" y="2231226"/>
-            <a:ext cx="5114912" cy="295870"/>
+            <a:off x="812798" y="2243926"/>
+            <a:ext cx="2081009" cy="260349"/>
           </a:xfrm>
           <a:prstGeom prst="rect">
             <a:avLst/>
@@ -6280,7 +6489,7 @@
               </a:lnSpc>
             </a:pPr>
             <a:r>
-              <a:rPr sz="2100" b="0" i="0">
+              <a:rPr sz="1400" b="0" i="0">
                 <a:solidFill>
                   <a:srgbClr val="6B625D"/>
                 </a:solidFill>
@@ -6299,8 +6508,8 @@
         </p:nvSpPr>
         <p:spPr>
           <a:xfrm>
-            <a:off x="596899" y="2628695"/>
-            <a:ext cx="5114912" cy="295870"/>
+            <a:off x="812798" y="2641395"/>
+            <a:ext cx="1963038" cy="260349"/>
           </a:xfrm>
           <a:prstGeom prst="rect">
             <a:avLst/>
@@ -6319,7 +6528,7 @@
               </a:lnSpc>
             </a:pPr>
             <a:r>
-              <a:rPr sz="2100" b="0" i="0">
+              <a:rPr sz="1400" b="0" i="0">
                 <a:solidFill>
                   <a:srgbClr val="6B625D"/>
                 </a:solidFill>
@@ -6338,8 +6547,8 @@
         </p:nvSpPr>
         <p:spPr>
           <a:xfrm>
-            <a:off x="596899" y="3026164"/>
-            <a:ext cx="5114912" cy="295870"/>
+            <a:off x="812798" y="3038864"/>
+            <a:ext cx="2114247" cy="260349"/>
           </a:xfrm>
           <a:prstGeom prst="rect">
             <a:avLst/>
@@ -6358,7 +6567,7 @@
               </a:lnSpc>
             </a:pPr>
             <a:r>
-              <a:rPr sz="2100" b="0" i="0">
+              <a:rPr sz="1400" b="0" i="0">
                 <a:solidFill>
                   <a:srgbClr val="6B625D"/>
                 </a:solidFill>
@@ -6377,8 +6586,8 @@
         </p:nvSpPr>
         <p:spPr>
           <a:xfrm>
-            <a:off x="6492859" y="1424877"/>
-            <a:ext cx="5114912" cy="281880"/>
+            <a:off x="6492859" y="1418527"/>
+            <a:ext cx="2259205" cy="292099"/>
           </a:xfrm>
           <a:prstGeom prst="rect">
             <a:avLst/>
@@ -6397,7 +6606,7 @@
               </a:lnSpc>
             </a:pPr>
             <a:r>
-              <a:rPr sz="2400" b="1" i="0">
+              <a:rPr sz="1600" b="1" i="0">
                 <a:solidFill>
                   <a:srgbClr val="7A4F5E"/>
                 </a:solidFill>
@@ -6416,8 +6625,8 @@
         </p:nvSpPr>
         <p:spPr>
           <a:xfrm>
-            <a:off x="6492859" y="1833756"/>
-            <a:ext cx="5114912" cy="295870"/>
+            <a:off x="6708758" y="1846456"/>
+            <a:ext cx="2310898" cy="260349"/>
           </a:xfrm>
           <a:prstGeom prst="rect">
             <a:avLst/>
@@ -6436,7 +6645,7 @@
               </a:lnSpc>
             </a:pPr>
             <a:r>
-              <a:rPr sz="2100" b="0" i="0">
+              <a:rPr sz="1400" b="0" i="0">
                 <a:solidFill>
                   <a:srgbClr val="3A3532"/>
                 </a:solidFill>
@@ -6455,8 +6664,8 @@
         </p:nvSpPr>
         <p:spPr>
           <a:xfrm>
-            <a:off x="6492859" y="2231226"/>
-            <a:ext cx="5114912" cy="295870"/>
+            <a:off x="6708758" y="2243926"/>
+            <a:ext cx="4014182" cy="260349"/>
           </a:xfrm>
           <a:prstGeom prst="rect">
             <a:avLst/>
@@ -6475,7 +6684,7 @@
               </a:lnSpc>
             </a:pPr>
             <a:r>
-              <a:rPr sz="2100" b="0" i="0">
+              <a:rPr sz="1400" b="0" i="0">
                 <a:solidFill>
                   <a:srgbClr val="3A3532"/>
                 </a:solidFill>
@@ -6494,8 +6703,8 @@
         </p:nvSpPr>
         <p:spPr>
           <a:xfrm>
-            <a:off x="6492859" y="2628695"/>
-            <a:ext cx="5114912" cy="295870"/>
+            <a:off x="6708758" y="2641395"/>
+            <a:ext cx="1638990" cy="260349"/>
           </a:xfrm>
           <a:prstGeom prst="rect">
             <a:avLst/>
@@ -6514,7 +6723,7 @@
               </a:lnSpc>
             </a:pPr>
             <a:r>
-              <a:rPr sz="2100" b="0" i="0">
+              <a:rPr sz="1400" b="0" i="0">
                 <a:solidFill>
                   <a:srgbClr val="3A3532"/>
                 </a:solidFill>
@@ -6533,8 +6742,8 @@
         </p:nvSpPr>
         <p:spPr>
           <a:xfrm>
-            <a:off x="6492859" y="3026164"/>
-            <a:ext cx="5114912" cy="295870"/>
+            <a:off x="6708758" y="3038864"/>
+            <a:ext cx="2007190" cy="260349"/>
           </a:xfrm>
           <a:prstGeom prst="rect">
             <a:avLst/>
@@ -6553,7 +6762,7 @@
               </a:lnSpc>
             </a:pPr>
             <a:r>
-              <a:rPr sz="2100" b="0" i="0">
+              <a:rPr sz="1400" b="0" i="0">
                 <a:solidFill>
                   <a:srgbClr val="3A3532"/>
                 </a:solidFill>
@@ -6572,8 +6781,8 @@
         </p:nvSpPr>
         <p:spPr>
           <a:xfrm>
-            <a:off x="596899" y="6426184"/>
-            <a:ext cx="160932" cy="152400"/>
+            <a:off x="596899" y="6407134"/>
+            <a:ext cx="173632" cy="184150"/>
           </a:xfrm>
           <a:prstGeom prst="rect">
             <a:avLst/>
@@ -6592,7 +6801,7 @@
               </a:lnSpc>
             </a:pPr>
             <a:r>
-              <a:rPr sz="1350" b="0" i="0">
+              <a:rPr sz="900" b="0" i="0">
                 <a:solidFill>
                   <a:srgbClr val="6B625D"/>
                 </a:solidFill>
@@ -6611,8 +6820,8 @@
         </p:nvSpPr>
         <p:spPr>
           <a:xfrm>
-            <a:off x="9960545" y="6407134"/>
-            <a:ext cx="1266227" cy="152400"/>
+            <a:off x="9960545" y="6388084"/>
+            <a:ext cx="1278926" cy="184150"/>
           </a:xfrm>
           <a:prstGeom prst="rect">
             <a:avLst/>
@@ -6631,7 +6840,7 @@
               </a:lnSpc>
             </a:pPr>
             <a:r>
-              <a:rPr sz="1350" b="0" i="0">
+              <a:rPr sz="900" b="0" i="0">
                 <a:solidFill>
                   <a:srgbClr val="6B625D"/>
                 </a:solidFill>
@@ -6748,8 +6957,8 @@
         </p:nvSpPr>
         <p:spPr>
           <a:xfrm>
-            <a:off x="596899" y="444499"/>
-            <a:ext cx="11010872" cy="177800"/>
+            <a:off x="596899" y="425449"/>
+            <a:ext cx="2980226" cy="215899"/>
           </a:xfrm>
           <a:prstGeom prst="rect">
             <a:avLst/>
@@ -6768,7 +6977,7 @@
               </a:lnSpc>
             </a:pPr>
             <a:r>
-              <a:rPr sz="1650" b="1" i="0">
+              <a:rPr sz="1100" b="1" i="0">
                 <a:solidFill>
                   <a:srgbClr val="7A4F5E"/>
                 </a:solidFill>
@@ -6787,8 +6996,8 @@
         </p:nvSpPr>
         <p:spPr>
           <a:xfrm>
-            <a:off x="596899" y="698498"/>
-            <a:ext cx="11010872" cy="485079"/>
+            <a:off x="596899" y="647698"/>
+            <a:ext cx="5943585" cy="577849"/>
           </a:xfrm>
           <a:prstGeom prst="rect">
             <a:avLst/>
@@ -6807,7 +7016,7 @@
               </a:lnSpc>
             </a:pPr>
             <a:r>
-              <a:rPr sz="4800" b="1" i="0">
+              <a:rPr sz="3200" b="1" i="0">
                 <a:solidFill>
                   <a:srgbClr val="3A3532"/>
                 </a:solidFill>
@@ -6826,8 +7035,8 @@
         </p:nvSpPr>
         <p:spPr>
           <a:xfrm>
-            <a:off x="4914888" y="2933097"/>
-            <a:ext cx="6692883" cy="525660"/>
+            <a:off x="4914888" y="2926747"/>
+            <a:ext cx="6539988" cy="535879"/>
           </a:xfrm>
           <a:prstGeom prst="rect">
             <a:avLst/>
@@ -6846,7 +7055,7 @@
               </a:lnSpc>
             </a:pPr>
             <a:r>
-              <a:rPr sz="2400" b="1" i="0">
+              <a:rPr sz="1600" b="1" i="0">
                 <a:solidFill>
                   <a:srgbClr val="6B625D"/>
                 </a:solidFill>
@@ -6865,8 +7074,82 @@
         </p:nvSpPr>
         <p:spPr>
           <a:xfrm>
+            <a:off x="5283187" y="3611157"/>
+            <a:ext cx="5959460" cy="260349"/>
+          </a:xfrm>
+          <a:prstGeom prst="rect">
+            <a:avLst/>
+          </a:prstGeom>
+          <a:noFill/>
+        </p:spPr>
+        <p:txBody>
+          <a:bodyPr wrap="square" lIns="0" rIns="0" tIns="0" bIns="0" anchor="t">
+            <a:spAutoFit/>
+          </a:bodyPr>
+          <a:lstStyle/>
+          <a:p>
+            <a:pPr algn="l">
+              <a:lnSpc>
+                <a:spcPct val="145000"/>
+              </a:lnSpc>
+            </a:pPr>
+            <a:r>
+              <a:rPr sz="1400" b="0" i="0">
+                <a:solidFill>
+                  <a:srgbClr val="3A3532"/>
+                </a:solidFill>
+                <a:latin typeface="Outfit"/>
+              </a:rPr>
+              <a:t>Sintesi della Genetica e della Personalità: ciò che nel Disegno è rosso e nero.</a:t>
+            </a:r>
+          </a:p>
+        </p:txBody>
+      </p:sp>
+      <p:sp>
+        <p:nvSpPr>
+          <p:cNvPr id="9" name="TextBox 8"/>
+          <p:cNvSpPr txBox="1"/>
+          <p:nvPr/>
+        </p:nvSpPr>
+        <p:spPr>
+          <a:xfrm>
             <a:off x="4914888" y="3598457"/>
-            <a:ext cx="6692883" cy="295870"/>
+            <a:ext cx="368299" cy="228599"/>
+          </a:xfrm>
+          <a:prstGeom prst="rect">
+            <a:avLst/>
+          </a:prstGeom>
+          <a:noFill/>
+        </p:spPr>
+        <p:txBody>
+          <a:bodyPr wrap="square" lIns="0" rIns="0" tIns="0" bIns="0" anchor="t">
+            <a:spAutoFit/>
+          </a:bodyPr>
+          <a:lstStyle/>
+          <a:p>
+            <a:pPr algn="l"/>
+            <a:r>
+              <a:rPr sz="1000" b="1" i="0">
+                <a:solidFill>
+                  <a:srgbClr val="7A4F5E"/>
+                </a:solidFill>
+                <a:latin typeface="Outfit"/>
+              </a:rPr>
+              <a:t>01</a:t>
+            </a:r>
+          </a:p>
+        </p:txBody>
+      </p:sp>
+      <p:sp>
+        <p:nvSpPr>
+          <p:cNvPr id="10" name="TextBox 9"/>
+          <p:cNvSpPr txBox="1"/>
+          <p:nvPr/>
+        </p:nvSpPr>
+        <p:spPr>
+          <a:xfrm>
+            <a:off x="5283187" y="4034026"/>
+            <a:ext cx="3659476" cy="260349"/>
           </a:xfrm>
           <a:prstGeom prst="rect">
             <a:avLst/>
@@ -6885,27 +7168,27 @@
               </a:lnSpc>
             </a:pPr>
             <a:r>
-              <a:rPr sz="2100" b="0" i="0">
+              <a:rPr sz="1400" b="0" i="0">
                 <a:solidFill>
                   <a:srgbClr val="3A3532"/>
                 </a:solidFill>
                 <a:latin typeface="Outfit"/>
               </a:rPr>
-              <a:t>Sintesi della Genetica e della Personalità: ciò che nel Disegno è rosso e nero.</a:t>
-            </a:r>
-          </a:p>
-        </p:txBody>
-      </p:sp>
-      <p:sp>
-        <p:nvSpPr>
-          <p:cNvPr id="9" name="TextBox 8"/>
-          <p:cNvSpPr txBox="1"/>
-          <p:nvPr/>
-        </p:nvSpPr>
-        <p:spPr>
-          <a:xfrm>
-            <a:off x="4914888" y="3598457"/>
-            <a:ext cx="355599" cy="228599"/>
+              <a:t>Sintesi di due Porte che definiscono un Canale.</a:t>
+            </a:r>
+          </a:p>
+        </p:txBody>
+      </p:sp>
+      <p:sp>
+        <p:nvSpPr>
+          <p:cNvPr id="11" name="TextBox 10"/>
+          <p:cNvSpPr txBox="1"/>
+          <p:nvPr/>
+        </p:nvSpPr>
+        <p:spPr>
+          <a:xfrm>
+            <a:off x="4914888" y="4021326"/>
+            <a:ext cx="368299" cy="228599"/>
           </a:xfrm>
           <a:prstGeom prst="rect">
             <a:avLst/>
@@ -6920,27 +7203,27 @@
           <a:p>
             <a:pPr algn="l"/>
             <a:r>
-              <a:rPr sz="1500" b="1" i="0">
+              <a:rPr sz="1000" b="1" i="0">
                 <a:solidFill>
                   <a:srgbClr val="7A4F5E"/>
                 </a:solidFill>
                 <a:latin typeface="Outfit"/>
               </a:rPr>
-              <a:t>01</a:t>
-            </a:r>
-          </a:p>
-        </p:txBody>
-      </p:sp>
-      <p:sp>
-        <p:nvSpPr>
-          <p:cNvPr id="10" name="TextBox 9"/>
-          <p:cNvSpPr txBox="1"/>
-          <p:nvPr/>
-        </p:nvSpPr>
-        <p:spPr>
-          <a:xfrm>
-            <a:off x="4914888" y="4021326"/>
-            <a:ext cx="6692883" cy="295870"/>
+              <a:t>02</a:t>
+            </a:r>
+          </a:p>
+        </p:txBody>
+      </p:sp>
+      <p:sp>
+        <p:nvSpPr>
+          <p:cNvPr id="12" name="TextBox 11"/>
+          <p:cNvSpPr txBox="1"/>
+          <p:nvPr/>
+        </p:nvSpPr>
+        <p:spPr>
+          <a:xfrm>
+            <a:off x="5283187" y="4456895"/>
+            <a:ext cx="5304618" cy="260349"/>
           </a:xfrm>
           <a:prstGeom prst="rect">
             <a:avLst/>
@@ -6959,27 +7242,27 @@
               </a:lnSpc>
             </a:pPr>
             <a:r>
-              <a:rPr sz="2100" b="0" i="0">
+              <a:rPr sz="1400" b="0" i="0">
                 <a:solidFill>
                   <a:srgbClr val="3A3532"/>
                 </a:solidFill>
                 <a:latin typeface="Outfit"/>
               </a:rPr>
-              <a:t>Sintesi di due Porte che definiscono un Canale.</a:t>
-            </a:r>
-          </a:p>
-        </p:txBody>
-      </p:sp>
-      <p:sp>
-        <p:nvSpPr>
-          <p:cNvPr id="11" name="TextBox 10"/>
-          <p:cNvSpPr txBox="1"/>
-          <p:nvPr/>
-        </p:nvSpPr>
-        <p:spPr>
-          <a:xfrm>
-            <a:off x="4914888" y="4021326"/>
-            <a:ext cx="355599" cy="228599"/>
+              <a:t>Sintesi tra Natura e Nutrimento: ciò che è definito e ciò che non lo è.</a:t>
+            </a:r>
+          </a:p>
+        </p:txBody>
+      </p:sp>
+      <p:sp>
+        <p:nvSpPr>
+          <p:cNvPr id="13" name="TextBox 12"/>
+          <p:cNvSpPr txBox="1"/>
+          <p:nvPr/>
+        </p:nvSpPr>
+        <p:spPr>
+          <a:xfrm>
+            <a:off x="4914888" y="4444195"/>
+            <a:ext cx="368299" cy="228599"/>
           </a:xfrm>
           <a:prstGeom prst="rect">
             <a:avLst/>
@@ -6994,86 +7277,12 @@
           <a:p>
             <a:pPr algn="l"/>
             <a:r>
-              <a:rPr sz="1500" b="1" i="0">
+              <a:rPr sz="1000" b="1" i="0">
                 <a:solidFill>
                   <a:srgbClr val="7A4F5E"/>
                 </a:solidFill>
                 <a:latin typeface="Outfit"/>
               </a:rPr>
-              <a:t>02</a:t>
-            </a:r>
-          </a:p>
-        </p:txBody>
-      </p:sp>
-      <p:sp>
-        <p:nvSpPr>
-          <p:cNvPr id="12" name="TextBox 11"/>
-          <p:cNvSpPr txBox="1"/>
-          <p:nvPr/>
-        </p:nvSpPr>
-        <p:spPr>
-          <a:xfrm>
-            <a:off x="4914888" y="4444195"/>
-            <a:ext cx="6692883" cy="295870"/>
-          </a:xfrm>
-          <a:prstGeom prst="rect">
-            <a:avLst/>
-          </a:prstGeom>
-          <a:noFill/>
-        </p:spPr>
-        <p:txBody>
-          <a:bodyPr wrap="square" lIns="0" rIns="0" tIns="0" bIns="0" anchor="t">
-            <a:spAutoFit/>
-          </a:bodyPr>
-          <a:lstStyle/>
-          <a:p>
-            <a:pPr algn="l">
-              <a:lnSpc>
-                <a:spcPct val="145000"/>
-              </a:lnSpc>
-            </a:pPr>
-            <a:r>
-              <a:rPr sz="2100" b="0" i="0">
-                <a:solidFill>
-                  <a:srgbClr val="3A3532"/>
-                </a:solidFill>
-                <a:latin typeface="Outfit"/>
-              </a:rPr>
-              <a:t>Sintesi tra Natura e Nutrimento: ciò che è definito e ciò che non lo è.</a:t>
-            </a:r>
-          </a:p>
-        </p:txBody>
-      </p:sp>
-      <p:sp>
-        <p:nvSpPr>
-          <p:cNvPr id="13" name="TextBox 12"/>
-          <p:cNvSpPr txBox="1"/>
-          <p:nvPr/>
-        </p:nvSpPr>
-        <p:spPr>
-          <a:xfrm>
-            <a:off x="4914888" y="4444195"/>
-            <a:ext cx="355599" cy="228599"/>
-          </a:xfrm>
-          <a:prstGeom prst="rect">
-            <a:avLst/>
-          </a:prstGeom>
-          <a:noFill/>
-        </p:spPr>
-        <p:txBody>
-          <a:bodyPr wrap="square" lIns="0" rIns="0" tIns="0" bIns="0" anchor="t">
-            <a:spAutoFit/>
-          </a:bodyPr>
-          <a:lstStyle/>
-          <a:p>
-            <a:pPr algn="l"/>
-            <a:r>
-              <a:rPr sz="1500" b="1" i="0">
-                <a:solidFill>
-                  <a:srgbClr val="7A4F5E"/>
-                </a:solidFill>
-                <a:latin typeface="Outfit"/>
-              </a:rPr>
               <a:t>03</a:t>
             </a:r>
           </a:p>
@@ -7087,8 +7296,8 @@
         </p:nvSpPr>
         <p:spPr>
           <a:xfrm>
-            <a:off x="596899" y="6426184"/>
-            <a:ext cx="154781" cy="152400"/>
+            <a:off x="596899" y="6407134"/>
+            <a:ext cx="167481" cy="184150"/>
           </a:xfrm>
           <a:prstGeom prst="rect">
             <a:avLst/>
@@ -7107,7 +7316,7 @@
               </a:lnSpc>
             </a:pPr>
             <a:r>
-              <a:rPr sz="1350" b="0" i="0">
+              <a:rPr sz="900" b="0" i="0">
                 <a:solidFill>
                   <a:srgbClr val="6B625D"/>
                 </a:solidFill>
@@ -7126,8 +7335,8 @@
         </p:nvSpPr>
         <p:spPr>
           <a:xfrm>
-            <a:off x="9960545" y="6407134"/>
-            <a:ext cx="1266227" cy="152400"/>
+            <a:off x="9960545" y="6388084"/>
+            <a:ext cx="1278926" cy="184150"/>
           </a:xfrm>
           <a:prstGeom prst="rect">
             <a:avLst/>
@@ -7146,7 +7355,7 @@
               </a:lnSpc>
             </a:pPr>
             <a:r>
-              <a:rPr sz="1350" b="0" i="0">
+              <a:rPr sz="900" b="0" i="0">
                 <a:solidFill>
                   <a:srgbClr val="6B625D"/>
                 </a:solidFill>
@@ -7311,8 +7520,8 @@
         </p:nvSpPr>
         <p:spPr>
           <a:xfrm>
-            <a:off x="596899" y="444499"/>
-            <a:ext cx="11010872" cy="177800"/>
+            <a:off x="596899" y="425449"/>
+            <a:ext cx="1200345" cy="215899"/>
           </a:xfrm>
           <a:prstGeom prst="rect">
             <a:avLst/>
@@ -7331,7 +7540,7 @@
               </a:lnSpc>
             </a:pPr>
             <a:r>
-              <a:rPr sz="1650" b="1" i="0">
+              <a:rPr sz="1100" b="1" i="0">
                 <a:solidFill>
                   <a:srgbClr val="7A4F5E"/>
                 </a:solidFill>
@@ -7350,8 +7559,8 @@
         </p:nvSpPr>
         <p:spPr>
           <a:xfrm>
-            <a:off x="596899" y="698498"/>
-            <a:ext cx="11010872" cy="485079"/>
+            <a:off x="596899" y="647698"/>
+            <a:ext cx="6023654" cy="577849"/>
           </a:xfrm>
           <a:prstGeom prst="rect">
             <a:avLst/>
@@ -7370,7 +7579,7 @@
               </a:lnSpc>
             </a:pPr>
             <a:r>
-              <a:rPr sz="4800" b="1" i="0">
+              <a:rPr sz="3200" b="1" i="0">
                 <a:solidFill>
                   <a:srgbClr val="3A3532"/>
                 </a:solidFill>
@@ -7389,8 +7598,8 @@
         </p:nvSpPr>
         <p:spPr>
           <a:xfrm>
-            <a:off x="1214931" y="6057885"/>
-            <a:ext cx="2036261" cy="215899"/>
+            <a:off x="1214931" y="6064235"/>
+            <a:ext cx="2048961" cy="196850"/>
           </a:xfrm>
           <a:prstGeom prst="rect">
             <a:avLst/>
@@ -7409,7 +7618,7 @@
               </a:lnSpc>
             </a:pPr>
             <a:r>
-              <a:rPr sz="1500" b="0" i="0">
+              <a:rPr sz="1000" b="0" i="0">
                 <a:solidFill>
                   <a:srgbClr val="6B625D"/>
                 </a:solidFill>
@@ -7428,8 +7637,8 @@
         </p:nvSpPr>
         <p:spPr>
           <a:xfrm>
-            <a:off x="4908439" y="6057885"/>
-            <a:ext cx="2387693" cy="215899"/>
+            <a:off x="4031942" y="3512732"/>
+            <a:ext cx="284162" cy="577849"/>
           </a:xfrm>
           <a:prstGeom prst="rect">
             <a:avLst/>
@@ -7444,11 +7653,50 @@
           <a:p>
             <a:pPr algn="ctr">
               <a:lnSpc>
+                <a:spcPct val="100000"/>
+              </a:lnSpc>
+            </a:pPr>
+            <a:r>
+              <a:rPr sz="3200" b="1" i="0">
+                <a:solidFill>
+                  <a:srgbClr val="C48A3A"/>
+                </a:solidFill>
+                <a:latin typeface="Playfair Display"/>
+              </a:rPr>
+              <a:t>+</a:t>
+            </a:r>
+          </a:p>
+        </p:txBody>
+      </p:sp>
+      <p:sp>
+        <p:nvSpPr>
+          <p:cNvPr id="11" name="TextBox 10"/>
+          <p:cNvSpPr txBox="1"/>
+          <p:nvPr/>
+        </p:nvSpPr>
+        <p:spPr>
+          <a:xfrm>
+            <a:off x="4908439" y="6064235"/>
+            <a:ext cx="2400393" cy="196850"/>
+          </a:xfrm>
+          <a:prstGeom prst="rect">
+            <a:avLst/>
+          </a:prstGeom>
+          <a:noFill/>
+        </p:spPr>
+        <p:txBody>
+          <a:bodyPr wrap="square" lIns="0" rIns="0" tIns="0" bIns="0" anchor="t">
+            <a:spAutoFit/>
+          </a:bodyPr>
+          <a:lstStyle/>
+          <a:p>
+            <a:pPr algn="ctr">
+              <a:lnSpc>
                 <a:spcPct val="140000"/>
               </a:lnSpc>
             </a:pPr>
             <a:r>
-              <a:rPr sz="1500" b="0" i="0">
+              <a:rPr sz="1000" b="0" i="0">
                 <a:solidFill>
                   <a:srgbClr val="6B625D"/>
                 </a:solidFill>
@@ -7461,14 +7709,14 @@
       </p:sp>
       <p:sp>
         <p:nvSpPr>
-          <p:cNvPr id="11" name="TextBox 10"/>
-          <p:cNvSpPr txBox="1"/>
-          <p:nvPr/>
-        </p:nvSpPr>
-        <p:spPr>
-          <a:xfrm>
-            <a:off x="9059939" y="6057885"/>
-            <a:ext cx="1823239" cy="215899"/>
+          <p:cNvPr id="12" name="TextBox 11"/>
+          <p:cNvSpPr txBox="1"/>
+          <p:nvPr/>
+        </p:nvSpPr>
+        <p:spPr>
+          <a:xfrm>
+            <a:off x="7888764" y="3512732"/>
+            <a:ext cx="308867" cy="577849"/>
           </a:xfrm>
           <a:prstGeom prst="rect">
             <a:avLst/>
@@ -7483,11 +7731,50 @@
           <a:p>
             <a:pPr algn="ctr">
               <a:lnSpc>
+                <a:spcPct val="100000"/>
+              </a:lnSpc>
+            </a:pPr>
+            <a:r>
+              <a:rPr sz="3200" b="1" i="0">
+                <a:solidFill>
+                  <a:srgbClr val="C48A3A"/>
+                </a:solidFill>
+                <a:latin typeface="Playfair Display"/>
+              </a:rPr>
+              <a:t>=</a:t>
+            </a:r>
+          </a:p>
+        </p:txBody>
+      </p:sp>
+      <p:sp>
+        <p:nvSpPr>
+          <p:cNvPr id="13" name="TextBox 12"/>
+          <p:cNvSpPr txBox="1"/>
+          <p:nvPr/>
+        </p:nvSpPr>
+        <p:spPr>
+          <a:xfrm>
+            <a:off x="9059939" y="6064235"/>
+            <a:ext cx="1835939" cy="196850"/>
+          </a:xfrm>
+          <a:prstGeom prst="rect">
+            <a:avLst/>
+          </a:prstGeom>
+          <a:noFill/>
+        </p:spPr>
+        <p:txBody>
+          <a:bodyPr wrap="square" lIns="0" rIns="0" tIns="0" bIns="0" anchor="t">
+            <a:spAutoFit/>
+          </a:bodyPr>
+          <a:lstStyle/>
+          <a:p>
+            <a:pPr algn="ctr">
+              <a:lnSpc>
                 <a:spcPct val="140000"/>
               </a:lnSpc>
             </a:pPr>
             <a:r>
-              <a:rPr sz="1500" b="0" i="0">
+              <a:rPr sz="1000" b="0" i="0">
                 <a:solidFill>
                   <a:srgbClr val="6B625D"/>
                 </a:solidFill>
@@ -7500,14 +7787,14 @@
       </p:sp>
       <p:sp>
         <p:nvSpPr>
-          <p:cNvPr id="12" name="TextBox 11"/>
-          <p:cNvSpPr txBox="1"/>
-          <p:nvPr/>
-        </p:nvSpPr>
-        <p:spPr>
-          <a:xfrm>
-            <a:off x="596899" y="6426184"/>
-            <a:ext cx="156666" cy="152400"/>
+          <p:cNvPr id="14" name="TextBox 13"/>
+          <p:cNvSpPr txBox="1"/>
+          <p:nvPr/>
+        </p:nvSpPr>
+        <p:spPr>
+          <a:xfrm>
+            <a:off x="596899" y="6407134"/>
+            <a:ext cx="169366" cy="184150"/>
           </a:xfrm>
           <a:prstGeom prst="rect">
             <a:avLst/>
@@ -7526,7 +7813,7 @@
               </a:lnSpc>
             </a:pPr>
             <a:r>
-              <a:rPr sz="1350" b="0" i="0">
+              <a:rPr sz="900" b="0" i="0">
                 <a:solidFill>
                   <a:srgbClr val="6B625D"/>
                 </a:solidFill>
@@ -7539,14 +7826,14 @@
       </p:sp>
       <p:sp>
         <p:nvSpPr>
-          <p:cNvPr id="13" name="TextBox 12"/>
-          <p:cNvSpPr txBox="1"/>
-          <p:nvPr/>
-        </p:nvSpPr>
-        <p:spPr>
-          <a:xfrm>
-            <a:off x="9960545" y="6407134"/>
-            <a:ext cx="1266227" cy="152400"/>
+          <p:cNvPr id="15" name="TextBox 14"/>
+          <p:cNvSpPr txBox="1"/>
+          <p:nvPr/>
+        </p:nvSpPr>
+        <p:spPr>
+          <a:xfrm>
+            <a:off x="9960545" y="6388084"/>
+            <a:ext cx="1278926" cy="184150"/>
           </a:xfrm>
           <a:prstGeom prst="rect">
             <a:avLst/>
@@ -7565,7 +7852,7 @@
               </a:lnSpc>
             </a:pPr>
             <a:r>
-              <a:rPr sz="1350" b="0" i="0">
+              <a:rPr sz="900" b="0" i="0">
                 <a:solidFill>
                   <a:srgbClr val="6B625D"/>
                 </a:solidFill>
@@ -7682,8 +7969,8 @@
         </p:nvSpPr>
         <p:spPr>
           <a:xfrm>
-            <a:off x="596899" y="444499"/>
-            <a:ext cx="11010872" cy="177800"/>
+            <a:off x="596899" y="425449"/>
+            <a:ext cx="1464862" cy="215899"/>
           </a:xfrm>
           <a:prstGeom prst="rect">
             <a:avLst/>
@@ -7702,7 +7989,7 @@
               </a:lnSpc>
             </a:pPr>
             <a:r>
-              <a:rPr sz="1650" b="1" i="0">
+              <a:rPr sz="1100" b="1" i="0">
                 <a:solidFill>
                   <a:srgbClr val="7A4F5E"/>
                 </a:solidFill>
@@ -7721,8 +8008,8 @@
         </p:nvSpPr>
         <p:spPr>
           <a:xfrm>
-            <a:off x="596899" y="698498"/>
-            <a:ext cx="11010872" cy="485079"/>
+            <a:off x="596899" y="647698"/>
+            <a:ext cx="3596671" cy="577849"/>
           </a:xfrm>
           <a:prstGeom prst="rect">
             <a:avLst/>
@@ -7741,7 +8028,7 @@
               </a:lnSpc>
             </a:pPr>
             <a:r>
-              <a:rPr sz="4800" b="1" i="0">
+              <a:rPr sz="3200" b="1" i="0">
                 <a:solidFill>
                   <a:srgbClr val="3A3532"/>
                 </a:solidFill>
@@ -7760,8 +8047,8 @@
         </p:nvSpPr>
         <p:spPr>
           <a:xfrm>
-            <a:off x="596899" y="6057885"/>
-            <a:ext cx="2112660" cy="215899"/>
+            <a:off x="596899" y="6064235"/>
+            <a:ext cx="2125360" cy="196850"/>
           </a:xfrm>
           <a:prstGeom prst="rect">
             <a:avLst/>
@@ -7780,7 +8067,7 @@
               </a:lnSpc>
             </a:pPr>
             <a:r>
-              <a:rPr sz="1500" b="0" i="0">
+              <a:rPr sz="1000" b="0" i="0">
                 <a:solidFill>
                   <a:srgbClr val="6B625D"/>
                 </a:solidFill>
@@ -7799,8 +8086,8 @@
         </p:nvSpPr>
         <p:spPr>
           <a:xfrm>
-            <a:off x="4406889" y="2974372"/>
-            <a:ext cx="5245087" cy="1216419"/>
+            <a:off x="4406889" y="2993422"/>
+            <a:ext cx="5124933" cy="1175838"/>
           </a:xfrm>
           <a:prstGeom prst="rect">
             <a:avLst/>
@@ -7819,7 +8106,7 @@
               </a:lnSpc>
             </a:pPr>
             <a:r>
-              <a:rPr sz="2400" b="0" i="0">
+              <a:rPr sz="1600" b="0" i="0">
                 <a:solidFill>
                   <a:srgbClr val="3A3532"/>
                 </a:solidFill>
@@ -7838,8 +8125,8 @@
         </p:nvSpPr>
         <p:spPr>
           <a:xfrm>
-            <a:off x="4406889" y="4343191"/>
-            <a:ext cx="3921810" cy="330199"/>
+            <a:off x="4457689" y="4349541"/>
+            <a:ext cx="3832910" cy="311149"/>
           </a:xfrm>
           <a:prstGeom prst="rect">
             <a:avLst/>
@@ -7853,7 +8140,7 @@
           </a:ln>
         </p:spPr>
         <p:txBody>
-          <a:bodyPr wrap="square" lIns="114300" rIns="114300" tIns="50800" bIns="50800" anchor="t">
+          <a:bodyPr wrap="square" lIns="114300" rIns="114300" tIns="57150" bIns="57150" anchor="t">
             <a:spAutoFit/>
           </a:bodyPr>
           <a:lstStyle/>
@@ -7864,7 +8151,7 @@
               </a:lnSpc>
             </a:pPr>
             <a:r>
-              <a:rPr sz="1500" b="1" i="0">
+              <a:rPr sz="1000" b="1" i="0">
                 <a:solidFill>
                   <a:srgbClr val="076B7D"/>
                 </a:solidFill>
@@ -7883,8 +8170,8 @@
         </p:nvSpPr>
         <p:spPr>
           <a:xfrm>
-            <a:off x="596899" y="6426184"/>
-            <a:ext cx="152102" cy="152400"/>
+            <a:off x="596899" y="6407134"/>
+            <a:ext cx="164802" cy="184150"/>
           </a:xfrm>
           <a:prstGeom prst="rect">
             <a:avLst/>
@@ -7903,7 +8190,7 @@
               </a:lnSpc>
             </a:pPr>
             <a:r>
-              <a:rPr sz="1350" b="0" i="0">
+              <a:rPr sz="900" b="0" i="0">
                 <a:solidFill>
                   <a:srgbClr val="6B625D"/>
                 </a:solidFill>
@@ -7922,8 +8209,8 @@
         </p:nvSpPr>
         <p:spPr>
           <a:xfrm>
-            <a:off x="9960545" y="6407134"/>
-            <a:ext cx="1266227" cy="152400"/>
+            <a:off x="9960545" y="6388084"/>
+            <a:ext cx="1278926" cy="184150"/>
           </a:xfrm>
           <a:prstGeom prst="rect">
             <a:avLst/>
@@ -7942,7 +8229,7 @@
               </a:lnSpc>
             </a:pPr>
             <a:r>
-              <a:rPr sz="1350" b="0" i="0">
+              <a:rPr sz="900" b="0" i="0">
                 <a:solidFill>
                   <a:srgbClr val="6B625D"/>
                 </a:solidFill>
@@ -8131,8 +8418,8 @@
         </p:nvSpPr>
         <p:spPr>
           <a:xfrm>
-            <a:off x="596899" y="444499"/>
-            <a:ext cx="11010872" cy="177800"/>
+            <a:off x="596899" y="425449"/>
+            <a:ext cx="1464862" cy="215899"/>
           </a:xfrm>
           <a:prstGeom prst="rect">
             <a:avLst/>
@@ -8151,7 +8438,7 @@
               </a:lnSpc>
             </a:pPr>
             <a:r>
-              <a:rPr sz="1650" b="1" i="0">
+              <a:rPr sz="1100" b="1" i="0">
                 <a:solidFill>
                   <a:srgbClr val="7A4F5E"/>
                 </a:solidFill>
@@ -8170,8 +8457,8 @@
         </p:nvSpPr>
         <p:spPr>
           <a:xfrm>
-            <a:off x="596899" y="698498"/>
-            <a:ext cx="11010872" cy="485079"/>
+            <a:off x="596899" y="647698"/>
+            <a:ext cx="3239087" cy="577849"/>
           </a:xfrm>
           <a:prstGeom prst="rect">
             <a:avLst/>
@@ -8190,7 +8477,7 @@
               </a:lnSpc>
             </a:pPr>
             <a:r>
-              <a:rPr sz="4800" b="1" i="0">
+              <a:rPr sz="3200" b="1" i="0">
                 <a:solidFill>
                   <a:srgbClr val="3A3532"/>
                 </a:solidFill>
@@ -8209,8 +8496,8 @@
         </p:nvSpPr>
         <p:spPr>
           <a:xfrm>
-            <a:off x="1369215" y="5527066"/>
-            <a:ext cx="1065111" cy="429219"/>
+            <a:off x="1369215" y="5533416"/>
+            <a:ext cx="1077811" cy="411459"/>
           </a:xfrm>
           <a:prstGeom prst="rect">
             <a:avLst/>
@@ -8229,7 +8516,7 @@
               </a:lnSpc>
             </a:pPr>
             <a:r>
-              <a:rPr sz="1650" b="0" i="0">
+              <a:rPr sz="1100" b="0" i="0">
                 <a:solidFill>
                   <a:srgbClr val="3A3532"/>
                 </a:solidFill>
@@ -8245,7 +8532,7 @@
               </a:lnSpc>
             </a:pPr>
             <a:r>
-              <a:rPr sz="1650" b="0" i="0">
+              <a:rPr sz="1100" b="0" i="0">
                 <a:solidFill>
                   <a:srgbClr val="3A3532"/>
                 </a:solidFill>
@@ -8264,8 +8551,8 @@
         </p:nvSpPr>
         <p:spPr>
           <a:xfrm>
-            <a:off x="3911392" y="5527066"/>
-            <a:ext cx="1581543" cy="429219"/>
+            <a:off x="3911392" y="5533416"/>
+            <a:ext cx="1594243" cy="411459"/>
           </a:xfrm>
           <a:prstGeom prst="rect">
             <a:avLst/>
@@ -8284,7 +8571,7 @@
               </a:lnSpc>
             </a:pPr>
             <a:r>
-              <a:rPr sz="1650" b="0" i="0">
+              <a:rPr sz="1100" b="0" i="0">
                 <a:solidFill>
                   <a:srgbClr val="3A3532"/>
                 </a:solidFill>
@@ -8300,7 +8587,7 @@
               </a:lnSpc>
             </a:pPr>
             <a:r>
-              <a:rPr sz="1650" b="0" i="0">
+              <a:rPr sz="1100" b="0" i="0">
                 <a:solidFill>
                   <a:srgbClr val="3A3532"/>
                 </a:solidFill>
@@ -8319,8 +8606,8 @@
         </p:nvSpPr>
         <p:spPr>
           <a:xfrm>
-            <a:off x="7130139" y="5527066"/>
-            <a:ext cx="744734" cy="429219"/>
+            <a:off x="7130139" y="5533416"/>
+            <a:ext cx="757434" cy="411459"/>
           </a:xfrm>
           <a:prstGeom prst="rect">
             <a:avLst/>
@@ -8339,7 +8626,7 @@
               </a:lnSpc>
             </a:pPr>
             <a:r>
-              <a:rPr sz="1650" b="0" i="0">
+              <a:rPr sz="1100" b="0" i="0">
                 <a:solidFill>
                   <a:srgbClr val="3A3532"/>
                 </a:solidFill>
@@ -8355,7 +8642,7 @@
               </a:lnSpc>
             </a:pPr>
             <a:r>
-              <a:rPr sz="1650" b="0" i="0">
+              <a:rPr sz="1100" b="0" i="0">
                 <a:solidFill>
                   <a:srgbClr val="3A3532"/>
                 </a:solidFill>
@@ -8374,8 +8661,8 @@
         </p:nvSpPr>
         <p:spPr>
           <a:xfrm>
-            <a:off x="9930482" y="5527066"/>
-            <a:ext cx="744734" cy="429219"/>
+            <a:off x="9930482" y="5533416"/>
+            <a:ext cx="757434" cy="411459"/>
           </a:xfrm>
           <a:prstGeom prst="rect">
             <a:avLst/>
@@ -8394,7 +8681,7 @@
               </a:lnSpc>
             </a:pPr>
             <a:r>
-              <a:rPr sz="1650" b="0" i="0">
+              <a:rPr sz="1100" b="0" i="0">
                 <a:solidFill>
                   <a:srgbClr val="3A3532"/>
                 </a:solidFill>
@@ -8410,7 +8697,7 @@
               </a:lnSpc>
             </a:pPr>
             <a:r>
-              <a:rPr sz="1650" b="0" i="0">
+              <a:rPr sz="1100" b="0" i="0">
                 <a:solidFill>
                   <a:srgbClr val="3A3532"/>
                 </a:solidFill>
@@ -8429,8 +8716,8 @@
         </p:nvSpPr>
         <p:spPr>
           <a:xfrm>
-            <a:off x="596899" y="6057885"/>
-            <a:ext cx="11010872" cy="215899"/>
+            <a:off x="596899" y="6064235"/>
+            <a:ext cx="3815150" cy="196850"/>
           </a:xfrm>
           <a:prstGeom prst="rect">
             <a:avLst/>
@@ -8449,7 +8736,7 @@
               </a:lnSpc>
             </a:pPr>
             <a:r>
-              <a:rPr sz="1500" b="0" i="0">
+              <a:rPr sz="1000" b="0" i="0">
                 <a:solidFill>
                   <a:srgbClr val="6B625D"/>
                 </a:solidFill>
@@ -8468,8 +8755,8 @@
         </p:nvSpPr>
         <p:spPr>
           <a:xfrm>
-            <a:off x="596899" y="6426184"/>
-            <a:ext cx="155079" cy="152400"/>
+            <a:off x="596899" y="6407134"/>
+            <a:ext cx="167778" cy="184150"/>
           </a:xfrm>
           <a:prstGeom prst="rect">
             <a:avLst/>
@@ -8488,7 +8775,7 @@
               </a:lnSpc>
             </a:pPr>
             <a:r>
-              <a:rPr sz="1350" b="0" i="0">
+              <a:rPr sz="900" b="0" i="0">
                 <a:solidFill>
                   <a:srgbClr val="6B625D"/>
                 </a:solidFill>
@@ -8507,8 +8794,8 @@
         </p:nvSpPr>
         <p:spPr>
           <a:xfrm>
-            <a:off x="9960545" y="6407134"/>
-            <a:ext cx="1266227" cy="152400"/>
+            <a:off x="9960545" y="6388084"/>
+            <a:ext cx="1278926" cy="184150"/>
           </a:xfrm>
           <a:prstGeom prst="rect">
             <a:avLst/>
@@ -8527,7 +8814,7 @@
               </a:lnSpc>
             </a:pPr>
             <a:r>
-              <a:rPr sz="1350" b="0" i="0">
+              <a:rPr sz="900" b="0" i="0">
                 <a:solidFill>
                   <a:srgbClr val="6B625D"/>
                 </a:solidFill>
@@ -8988,8 +9275,8 @@
         </p:nvSpPr>
         <p:spPr>
           <a:xfrm>
-            <a:off x="596899" y="444499"/>
-            <a:ext cx="11010872" cy="177800"/>
+            <a:off x="596899" y="425449"/>
+            <a:ext cx="1209077" cy="215899"/>
           </a:xfrm>
           <a:prstGeom prst="rect">
             <a:avLst/>
@@ -9008,7 +9295,7 @@
               </a:lnSpc>
             </a:pPr>
             <a:r>
-              <a:rPr sz="1650" b="1" i="0">
+              <a:rPr sz="1100" b="1" i="0">
                 <a:solidFill>
                   <a:srgbClr val="7A4F5E"/>
                 </a:solidFill>
@@ -9027,8 +9314,8 @@
         </p:nvSpPr>
         <p:spPr>
           <a:xfrm>
-            <a:off x="596899" y="698498"/>
-            <a:ext cx="11010872" cy="485079"/>
+            <a:off x="596899" y="647698"/>
+            <a:ext cx="5716871" cy="577849"/>
           </a:xfrm>
           <a:prstGeom prst="rect">
             <a:avLst/>
@@ -9047,7 +9334,7 @@
               </a:lnSpc>
             </a:pPr>
             <a:r>
-              <a:rPr sz="4800" b="1" i="0">
+              <a:rPr sz="3200" b="1" i="0">
                 <a:solidFill>
                   <a:srgbClr val="3A3532"/>
                 </a:solidFill>
@@ -9066,8 +9353,8 @@
         </p:nvSpPr>
         <p:spPr>
           <a:xfrm>
-            <a:off x="596899" y="2524813"/>
-            <a:ext cx="3835390" cy="525660"/>
+            <a:off x="596899" y="2518463"/>
+            <a:ext cx="3403591" cy="535879"/>
           </a:xfrm>
           <a:prstGeom prst="rect">
             <a:avLst/>
@@ -9086,7 +9373,7 @@
               </a:lnSpc>
             </a:pPr>
             <a:r>
-              <a:rPr sz="2400" b="1" i="0">
+              <a:rPr sz="1600" b="1" i="0">
                 <a:solidFill>
                   <a:srgbClr val="6B625D"/>
                 </a:solidFill>
@@ -9102,7 +9389,7 @@
               </a:lnSpc>
             </a:pPr>
             <a:r>
-              <a:rPr sz="2400" b="1" i="0">
+              <a:rPr sz="1600" b="1" i="0">
                 <a:solidFill>
                   <a:srgbClr val="6B625D"/>
                 </a:solidFill>
@@ -9121,8 +9408,8 @@
         </p:nvSpPr>
         <p:spPr>
           <a:xfrm>
-            <a:off x="596899" y="3177473"/>
-            <a:ext cx="3835390" cy="295870"/>
+            <a:off x="812798" y="3190172"/>
+            <a:ext cx="1893883" cy="260349"/>
           </a:xfrm>
           <a:prstGeom prst="rect">
             <a:avLst/>
@@ -9141,7 +9428,7 @@
               </a:lnSpc>
             </a:pPr>
             <a:r>
-              <a:rPr sz="2100" b="0" i="0">
+              <a:rPr sz="1400" b="0" i="0">
                 <a:solidFill>
                   <a:srgbClr val="3A3532"/>
                 </a:solidFill>
@@ -9160,8 +9447,8 @@
         </p:nvSpPr>
         <p:spPr>
           <a:xfrm>
-            <a:off x="596899" y="3562242"/>
-            <a:ext cx="3835390" cy="295870"/>
+            <a:off x="812798" y="3574942"/>
+            <a:ext cx="3038269" cy="260349"/>
           </a:xfrm>
           <a:prstGeom prst="rect">
             <a:avLst/>
@@ -9180,7 +9467,7 @@
               </a:lnSpc>
             </a:pPr>
             <a:r>
-              <a:rPr sz="2100" b="0" i="0">
+              <a:rPr sz="1400" b="0" i="0">
                 <a:solidFill>
                   <a:srgbClr val="3A3532"/>
                 </a:solidFill>
@@ -9199,8 +9486,8 @@
         </p:nvSpPr>
         <p:spPr>
           <a:xfrm>
-            <a:off x="596899" y="3947011"/>
-            <a:ext cx="3835390" cy="295870"/>
+            <a:off x="812798" y="3959711"/>
+            <a:ext cx="3430976" cy="260349"/>
           </a:xfrm>
           <a:prstGeom prst="rect">
             <a:avLst/>
@@ -9219,7 +9506,7 @@
               </a:lnSpc>
             </a:pPr>
             <a:r>
-              <a:rPr sz="2100" b="0" i="0">
+              <a:rPr sz="1400" b="0" i="0">
                 <a:solidFill>
                   <a:srgbClr val="3A3532"/>
                 </a:solidFill>
@@ -9238,8 +9525,8 @@
         </p:nvSpPr>
         <p:spPr>
           <a:xfrm>
-            <a:off x="596899" y="4331781"/>
-            <a:ext cx="3835390" cy="295870"/>
+            <a:off x="812798" y="4344481"/>
+            <a:ext cx="498176" cy="260349"/>
           </a:xfrm>
           <a:prstGeom prst="rect">
             <a:avLst/>
@@ -9258,7 +9545,7 @@
               </a:lnSpc>
             </a:pPr>
             <a:r>
-              <a:rPr sz="2100" b="0" i="0">
+              <a:rPr sz="1400" b="0" i="0">
                 <a:solidFill>
                   <a:srgbClr val="3A3532"/>
                 </a:solidFill>
@@ -9277,8 +9564,8 @@
         </p:nvSpPr>
         <p:spPr>
           <a:xfrm>
-            <a:off x="596899" y="4780050"/>
-            <a:ext cx="1368124" cy="330199"/>
+            <a:off x="647698" y="4786400"/>
+            <a:ext cx="1279224" cy="311149"/>
           </a:xfrm>
           <a:prstGeom prst="rect">
             <a:avLst/>
@@ -9292,7 +9579,7 @@
           </a:ln>
         </p:spPr>
         <p:txBody>
-          <a:bodyPr wrap="square" lIns="114300" rIns="114300" tIns="50800" bIns="50800" anchor="t">
+          <a:bodyPr wrap="square" lIns="114300" rIns="114300" tIns="57150" bIns="57150" anchor="t">
             <a:spAutoFit/>
           </a:bodyPr>
           <a:lstStyle/>
@@ -9303,7 +9590,7 @@
               </a:lnSpc>
             </a:pPr>
             <a:r>
-              <a:rPr sz="1500" b="1" i="0">
+              <a:rPr sz="1000" b="1" i="0">
                 <a:solidFill>
                   <a:srgbClr val="076B7D"/>
                 </a:solidFill>
@@ -9322,8 +9609,8 @@
         </p:nvSpPr>
         <p:spPr>
           <a:xfrm>
-            <a:off x="7772381" y="2395928"/>
-            <a:ext cx="3835390" cy="525660"/>
+            <a:off x="7772381" y="2389578"/>
+            <a:ext cx="3624948" cy="535879"/>
           </a:xfrm>
           <a:prstGeom prst="rect">
             <a:avLst/>
@@ -9342,7 +9629,7 @@
               </a:lnSpc>
             </a:pPr>
             <a:r>
-              <a:rPr sz="2400" b="1" i="0">
+              <a:rPr sz="1600" b="1" i="0">
                 <a:solidFill>
                   <a:srgbClr val="6B625D"/>
                 </a:solidFill>
@@ -9358,7 +9645,7 @@
               </a:lnSpc>
             </a:pPr>
             <a:r>
-              <a:rPr sz="2400" b="1" i="0">
+              <a:rPr sz="1600" b="1" i="0">
                 <a:solidFill>
                   <a:srgbClr val="6B625D"/>
                 </a:solidFill>
@@ -9377,8 +9664,8 @@
         </p:nvSpPr>
         <p:spPr>
           <a:xfrm>
-            <a:off x="7772381" y="3048588"/>
-            <a:ext cx="3835390" cy="295870"/>
+            <a:off x="7988280" y="3061288"/>
+            <a:ext cx="2127145" cy="260349"/>
           </a:xfrm>
           <a:prstGeom prst="rect">
             <a:avLst/>
@@ -9397,7 +9684,7 @@
               </a:lnSpc>
             </a:pPr>
             <a:r>
-              <a:rPr sz="2100" b="0" i="0">
+              <a:rPr sz="1400" b="0" i="0">
                 <a:solidFill>
                   <a:srgbClr val="3A3532"/>
                 </a:solidFill>
@@ -9416,8 +9703,8 @@
         </p:nvSpPr>
         <p:spPr>
           <a:xfrm>
-            <a:off x="7772381" y="3433357"/>
-            <a:ext cx="3835390" cy="295870"/>
+            <a:off x="7988280" y="3446057"/>
+            <a:ext cx="3355074" cy="260349"/>
           </a:xfrm>
           <a:prstGeom prst="rect">
             <a:avLst/>
@@ -9436,7 +9723,7 @@
               </a:lnSpc>
             </a:pPr>
             <a:r>
-              <a:rPr sz="2100" b="0" i="0">
+              <a:rPr sz="1400" b="0" i="0">
                 <a:solidFill>
                   <a:srgbClr val="3A3532"/>
                 </a:solidFill>
@@ -9455,8 +9742,8 @@
         </p:nvSpPr>
         <p:spPr>
           <a:xfrm>
-            <a:off x="7772381" y="3818126"/>
-            <a:ext cx="3835390" cy="553639"/>
+            <a:off x="7988280" y="3830826"/>
+            <a:ext cx="3014060" cy="518119"/>
           </a:xfrm>
           <a:prstGeom prst="rect">
             <a:avLst/>
@@ -9475,7 +9762,7 @@
               </a:lnSpc>
             </a:pPr>
             <a:r>
-              <a:rPr sz="2100" b="0" i="0">
+              <a:rPr sz="1400" b="0" i="0">
                 <a:solidFill>
                   <a:srgbClr val="3A3532"/>
                 </a:solidFill>
@@ -9494,8 +9781,8 @@
         </p:nvSpPr>
         <p:spPr>
           <a:xfrm>
-            <a:off x="7772381" y="4460665"/>
-            <a:ext cx="3835390" cy="295870"/>
+            <a:off x="7988280" y="4473365"/>
+            <a:ext cx="807539" cy="260349"/>
           </a:xfrm>
           <a:prstGeom prst="rect">
             <a:avLst/>
@@ -9514,7 +9801,7 @@
               </a:lnSpc>
             </a:pPr>
             <a:r>
-              <a:rPr sz="2100" b="0" i="0">
+              <a:rPr sz="1400" b="0" i="0">
                 <a:solidFill>
                   <a:srgbClr val="3A3532"/>
                 </a:solidFill>
@@ -9533,8 +9820,8 @@
         </p:nvSpPr>
         <p:spPr>
           <a:xfrm>
-            <a:off x="7772381" y="4908935"/>
-            <a:ext cx="2057593" cy="330199"/>
+            <a:off x="7823180" y="4915285"/>
+            <a:ext cx="1968694" cy="311149"/>
           </a:xfrm>
           <a:prstGeom prst="rect">
             <a:avLst/>
@@ -9548,7 +9835,7 @@
           </a:ln>
         </p:spPr>
         <p:txBody>
-          <a:bodyPr wrap="square" lIns="114300" rIns="114300" tIns="50800" bIns="50800" anchor="t">
+          <a:bodyPr wrap="square" lIns="114300" rIns="114300" tIns="57150" bIns="57150" anchor="t">
             <a:spAutoFit/>
           </a:bodyPr>
           <a:lstStyle/>
@@ -9559,7 +9846,7 @@
               </a:lnSpc>
             </a:pPr>
             <a:r>
-              <a:rPr sz="1500" b="1" i="0">
+              <a:rPr sz="1000" b="1" i="0">
                 <a:solidFill>
                   <a:srgbClr val="076B7D"/>
                 </a:solidFill>
@@ -9578,8 +9865,8 @@
         </p:nvSpPr>
         <p:spPr>
           <a:xfrm>
-            <a:off x="596899" y="6426184"/>
-            <a:ext cx="156666" cy="152400"/>
+            <a:off x="596899" y="6407134"/>
+            <a:ext cx="169366" cy="184150"/>
           </a:xfrm>
           <a:prstGeom prst="rect">
             <a:avLst/>
@@ -9598,7 +9885,7 @@
               </a:lnSpc>
             </a:pPr>
             <a:r>
-              <a:rPr sz="1350" b="0" i="0">
+              <a:rPr sz="900" b="0" i="0">
                 <a:solidFill>
                   <a:srgbClr val="6B625D"/>
                 </a:solidFill>
@@ -9617,8 +9904,8 @@
         </p:nvSpPr>
         <p:spPr>
           <a:xfrm>
-            <a:off x="9960545" y="6407134"/>
-            <a:ext cx="1266227" cy="152400"/>
+            <a:off x="9960545" y="6388084"/>
+            <a:ext cx="1278926" cy="184150"/>
           </a:xfrm>
           <a:prstGeom prst="rect">
             <a:avLst/>
@@ -9637,7 +9924,7 @@
               </a:lnSpc>
             </a:pPr>
             <a:r>
-              <a:rPr sz="1350" b="0" i="0">
+              <a:rPr sz="900" b="0" i="0">
                 <a:solidFill>
                   <a:srgbClr val="6B625D"/>
                 </a:solidFill>
@@ -9778,8 +10065,8 @@
         </p:nvSpPr>
         <p:spPr>
           <a:xfrm>
-            <a:off x="596899" y="444499"/>
-            <a:ext cx="11010872" cy="177800"/>
+            <a:off x="596899" y="425449"/>
+            <a:ext cx="1778889" cy="215899"/>
           </a:xfrm>
           <a:prstGeom prst="rect">
             <a:avLst/>
@@ -9798,7 +10085,7 @@
               </a:lnSpc>
             </a:pPr>
             <a:r>
-              <a:rPr sz="1650" b="1" i="0">
+              <a:rPr sz="1100" b="1" i="0">
                 <a:solidFill>
                   <a:srgbClr val="7A4F5E"/>
                 </a:solidFill>
@@ -9817,8 +10104,8 @@
         </p:nvSpPr>
         <p:spPr>
           <a:xfrm>
-            <a:off x="596899" y="698498"/>
-            <a:ext cx="11010872" cy="485079"/>
+            <a:off x="596899" y="647698"/>
+            <a:ext cx="2616491" cy="577849"/>
           </a:xfrm>
           <a:prstGeom prst="rect">
             <a:avLst/>
@@ -9837,7 +10124,7 @@
               </a:lnSpc>
             </a:pPr>
             <a:r>
-              <a:rPr sz="4800" b="1" i="0">
+              <a:rPr sz="3200" b="1" i="0">
                 <a:solidFill>
                   <a:srgbClr val="3A3532"/>
                 </a:solidFill>
@@ -9856,8 +10143,8 @@
         </p:nvSpPr>
         <p:spPr>
           <a:xfrm>
-            <a:off x="596899" y="6057885"/>
-            <a:ext cx="1873841" cy="215899"/>
+            <a:off x="596899" y="6064235"/>
+            <a:ext cx="1886541" cy="196850"/>
           </a:xfrm>
           <a:prstGeom prst="rect">
             <a:avLst/>
@@ -9876,7 +10163,7 @@
               </a:lnSpc>
             </a:pPr>
             <a:r>
-              <a:rPr sz="1500" b="0" i="0">
+              <a:rPr sz="1000" b="0" i="0">
                 <a:solidFill>
                   <a:srgbClr val="6B625D"/>
                 </a:solidFill>
@@ -9895,8 +10182,8 @@
         </p:nvSpPr>
         <p:spPr>
           <a:xfrm>
-            <a:off x="3898890" y="1704475"/>
-            <a:ext cx="5753086" cy="553639"/>
+            <a:off x="3898890" y="1717175"/>
+            <a:ext cx="5369209" cy="518119"/>
           </a:xfrm>
           <a:prstGeom prst="rect">
             <a:avLst/>
@@ -9915,7 +10202,7 @@
               </a:lnSpc>
             </a:pPr>
             <a:r>
-              <a:rPr sz="2100" b="0" i="0">
+              <a:rPr sz="1400" b="0" i="0">
                 <a:solidFill>
                   <a:srgbClr val="3A3532"/>
                 </a:solidFill>
@@ -9934,8 +10221,8 @@
         </p:nvSpPr>
         <p:spPr>
           <a:xfrm>
-            <a:off x="3898890" y="2359714"/>
-            <a:ext cx="7708881" cy="295870"/>
+            <a:off x="3898890" y="2372414"/>
+            <a:ext cx="5522899" cy="260349"/>
           </a:xfrm>
           <a:prstGeom prst="rect">
             <a:avLst/>
@@ -9954,7 +10241,7 @@
               </a:lnSpc>
             </a:pPr>
             <a:r>
-              <a:rPr sz="2100" b="0" i="0">
+              <a:rPr sz="1400" b="0" i="0">
                 <a:solidFill>
                   <a:srgbClr val="3A3532"/>
                 </a:solidFill>
@@ -9973,8 +10260,8 @@
         </p:nvSpPr>
         <p:spPr>
           <a:xfrm>
-            <a:off x="596899" y="6426184"/>
-            <a:ext cx="188614" cy="152400"/>
+            <a:off x="596899" y="6407134"/>
+            <a:ext cx="201314" cy="184150"/>
           </a:xfrm>
           <a:prstGeom prst="rect">
             <a:avLst/>
@@ -9993,7 +10280,7 @@
               </a:lnSpc>
             </a:pPr>
             <a:r>
-              <a:rPr sz="1350" b="0" i="0">
+              <a:rPr sz="900" b="0" i="0">
                 <a:solidFill>
                   <a:srgbClr val="6B625D"/>
                 </a:solidFill>
@@ -10012,8 +10299,8 @@
         </p:nvSpPr>
         <p:spPr>
           <a:xfrm>
-            <a:off x="9960545" y="6407134"/>
-            <a:ext cx="1266227" cy="152400"/>
+            <a:off x="9960545" y="6388084"/>
+            <a:ext cx="1278926" cy="184150"/>
           </a:xfrm>
           <a:prstGeom prst="rect">
             <a:avLst/>
@@ -10032,7 +10319,7 @@
               </a:lnSpc>
             </a:pPr>
             <a:r>
-              <a:rPr sz="1350" b="0" i="0">
+              <a:rPr sz="900" b="0" i="0">
                 <a:solidFill>
                   <a:srgbClr val="6B625D"/>
                 </a:solidFill>
@@ -10143,14 +10430,100 @@
       </p:pic>
       <p:sp>
         <p:nvSpPr>
-          <p:cNvPr id="5" name="TextBox 4"/>
-          <p:cNvSpPr txBox="1"/>
-          <p:nvPr/>
-        </p:nvSpPr>
-        <p:spPr>
-          <a:xfrm>
-            <a:off x="596899" y="444499"/>
-            <a:ext cx="11010872" cy="177800"/>
+          <p:cNvPr id="5" name="Rectangle 4"/>
+          <p:cNvSpPr/>
+          <p:nvPr/>
+        </p:nvSpPr>
+        <p:spPr>
+          <a:xfrm>
+            <a:off x="5943585" y="4107051"/>
+            <a:ext cx="253999" cy="38100"/>
+          </a:xfrm>
+          <a:prstGeom prst="rect">
+            <a:avLst/>
+          </a:prstGeom>
+          <a:solidFill>
+            <a:srgbClr val="7A4F5E"/>
+          </a:solidFill>
+          <a:ln>
+            <a:noFill/>
+          </a:ln>
+        </p:spPr>
+        <p:style>
+          <a:lnRef idx="1">
+            <a:schemeClr val="accent1"/>
+          </a:lnRef>
+          <a:fillRef idx="3">
+            <a:schemeClr val="accent1"/>
+          </a:fillRef>
+          <a:effectRef idx="2">
+            <a:schemeClr val="accent1"/>
+          </a:effectRef>
+          <a:fontRef idx="minor">
+            <a:schemeClr val="lt1"/>
+          </a:fontRef>
+        </p:style>
+        <p:txBody>
+          <a:bodyPr rtlCol="0" anchor="ctr"/>
+          <a:lstStyle/>
+          <a:p>
+            <a:pPr algn="ctr"/>
+          </a:p>
+        </p:txBody>
+      </p:sp>
+      <p:sp>
+        <p:nvSpPr>
+          <p:cNvPr id="6" name="Rectangle 5"/>
+          <p:cNvSpPr/>
+          <p:nvPr/>
+        </p:nvSpPr>
+        <p:spPr>
+          <a:xfrm>
+            <a:off x="5943585" y="4373750"/>
+            <a:ext cx="253999" cy="38100"/>
+          </a:xfrm>
+          <a:prstGeom prst="rect">
+            <a:avLst/>
+          </a:prstGeom>
+          <a:solidFill>
+            <a:srgbClr val="E8DDD9"/>
+          </a:solidFill>
+          <a:ln>
+            <a:noFill/>
+          </a:ln>
+        </p:spPr>
+        <p:style>
+          <a:lnRef idx="1">
+            <a:schemeClr val="accent1"/>
+          </a:lnRef>
+          <a:fillRef idx="3">
+            <a:schemeClr val="accent1"/>
+          </a:fillRef>
+          <a:effectRef idx="2">
+            <a:schemeClr val="accent1"/>
+          </a:effectRef>
+          <a:fontRef idx="minor">
+            <a:schemeClr val="lt1"/>
+          </a:fontRef>
+        </p:style>
+        <p:txBody>
+          <a:bodyPr rtlCol="0" anchor="ctr"/>
+          <a:lstStyle/>
+          <a:p>
+            <a:pPr algn="ctr"/>
+          </a:p>
+        </p:txBody>
+      </p:sp>
+      <p:sp>
+        <p:nvSpPr>
+          <p:cNvPr id="7" name="TextBox 6"/>
+          <p:cNvSpPr txBox="1"/>
+          <p:nvPr/>
+        </p:nvSpPr>
+        <p:spPr>
+          <a:xfrm>
+            <a:off x="596899" y="425449"/>
+            <a:ext cx="1209077" cy="215899"/>
           </a:xfrm>
           <a:prstGeom prst="rect">
             <a:avLst/>
@@ -10169,7 +10542,7 @@
               </a:lnSpc>
             </a:pPr>
             <a:r>
-              <a:rPr sz="1650" b="1" i="0">
+              <a:rPr sz="1100" b="1" i="0">
                 <a:solidFill>
                   <a:srgbClr val="7A4F5E"/>
                 </a:solidFill>
@@ -10182,14 +10555,14 @@
       </p:sp>
       <p:sp>
         <p:nvSpPr>
-          <p:cNvPr id="6" name="TextBox 5"/>
-          <p:cNvSpPr txBox="1"/>
-          <p:nvPr/>
-        </p:nvSpPr>
-        <p:spPr>
-          <a:xfrm>
-            <a:off x="596899" y="698498"/>
-            <a:ext cx="11010872" cy="485079"/>
+          <p:cNvPr id="8" name="TextBox 7"/>
+          <p:cNvSpPr txBox="1"/>
+          <p:nvPr/>
+        </p:nvSpPr>
+        <p:spPr>
+          <a:xfrm>
+            <a:off x="596899" y="647698"/>
+            <a:ext cx="4906454" cy="577849"/>
           </a:xfrm>
           <a:prstGeom prst="rect">
             <a:avLst/>
@@ -10208,7 +10581,7 @@
               </a:lnSpc>
             </a:pPr>
             <a:r>
-              <a:rPr sz="4800" b="1" i="0">
+              <a:rPr sz="3200" b="1" i="0">
                 <a:solidFill>
                   <a:srgbClr val="3A3532"/>
                 </a:solidFill>
@@ -10221,14 +10594,14 @@
       </p:sp>
       <p:sp>
         <p:nvSpPr>
-          <p:cNvPr id="7" name="TextBox 6"/>
-          <p:cNvSpPr txBox="1"/>
-          <p:nvPr/>
-        </p:nvSpPr>
-        <p:spPr>
-          <a:xfrm>
-            <a:off x="5930885" y="3178762"/>
-            <a:ext cx="4864088" cy="642539"/>
+          <p:cNvPr id="9" name="TextBox 8"/>
+          <p:cNvSpPr txBox="1"/>
+          <p:nvPr/>
+        </p:nvSpPr>
+        <p:spPr>
+          <a:xfrm>
+            <a:off x="5930885" y="3191462"/>
+            <a:ext cx="4603540" cy="613369"/>
           </a:xfrm>
           <a:prstGeom prst="rect">
             <a:avLst/>
@@ -10247,7 +10620,7 @@
               </a:lnSpc>
             </a:pPr>
             <a:r>
-              <a:rPr sz="2550" b="0" i="0">
+              <a:rPr sz="1700" b="0" i="0">
                 <a:solidFill>
                   <a:srgbClr val="3A3532"/>
                 </a:solidFill>
@@ -10260,14 +10633,14 @@
       </p:sp>
       <p:sp>
         <p:nvSpPr>
-          <p:cNvPr id="8" name="TextBox 7"/>
-          <p:cNvSpPr txBox="1"/>
-          <p:nvPr/>
-        </p:nvSpPr>
-        <p:spPr>
-          <a:xfrm>
-            <a:off x="5930885" y="4037201"/>
-            <a:ext cx="2065233" cy="190500"/>
+          <p:cNvPr id="10" name="TextBox 9"/>
+          <p:cNvSpPr txBox="1"/>
+          <p:nvPr/>
+        </p:nvSpPr>
+        <p:spPr>
+          <a:xfrm>
+            <a:off x="6248384" y="4018151"/>
+            <a:ext cx="1760434" cy="228599"/>
           </a:xfrm>
           <a:prstGeom prst="rect">
             <a:avLst/>
@@ -10286,7 +10659,7 @@
               </a:lnSpc>
             </a:pPr>
             <a:r>
-              <a:rPr sz="1800" b="1" i="0">
+              <a:rPr sz="1200" b="1" i="0">
                 <a:solidFill>
                   <a:srgbClr val="6B625D"/>
                 </a:solidFill>
@@ -10299,14 +10672,14 @@
       </p:sp>
       <p:sp>
         <p:nvSpPr>
-          <p:cNvPr id="9" name="TextBox 8"/>
-          <p:cNvSpPr txBox="1"/>
-          <p:nvPr/>
-        </p:nvSpPr>
-        <p:spPr>
-          <a:xfrm>
-            <a:off x="5930885" y="4303900"/>
-            <a:ext cx="2657071" cy="190500"/>
+          <p:cNvPr id="11" name="TextBox 10"/>
+          <p:cNvSpPr txBox="1"/>
+          <p:nvPr/>
+        </p:nvSpPr>
+        <p:spPr>
+          <a:xfrm>
+            <a:off x="6248384" y="4284850"/>
+            <a:ext cx="2352272" cy="228599"/>
           </a:xfrm>
           <a:prstGeom prst="rect">
             <a:avLst/>
@@ -10325,7 +10698,7 @@
               </a:lnSpc>
             </a:pPr>
             <a:r>
-              <a:rPr sz="1800" b="1" i="0">
+              <a:rPr sz="1200" b="1" i="0">
                 <a:solidFill>
                   <a:srgbClr val="6B625D"/>
                 </a:solidFill>
@@ -10338,14 +10711,14 @@
       </p:sp>
       <p:sp>
         <p:nvSpPr>
-          <p:cNvPr id="10" name="TextBox 9"/>
-          <p:cNvSpPr txBox="1"/>
-          <p:nvPr/>
-        </p:nvSpPr>
-        <p:spPr>
-          <a:xfrm>
-            <a:off x="596899" y="6426184"/>
-            <a:ext cx="188614" cy="152400"/>
+          <p:cNvPr id="12" name="TextBox 11"/>
+          <p:cNvSpPr txBox="1"/>
+          <p:nvPr/>
+        </p:nvSpPr>
+        <p:spPr>
+          <a:xfrm>
+            <a:off x="596899" y="6407134"/>
+            <a:ext cx="201314" cy="184150"/>
           </a:xfrm>
           <a:prstGeom prst="rect">
             <a:avLst/>
@@ -10364,7 +10737,7 @@
               </a:lnSpc>
             </a:pPr>
             <a:r>
-              <a:rPr sz="1350" b="0" i="0">
+              <a:rPr sz="900" b="0" i="0">
                 <a:solidFill>
                   <a:srgbClr val="6B625D"/>
                 </a:solidFill>
@@ -10377,14 +10750,14 @@
       </p:sp>
       <p:sp>
         <p:nvSpPr>
-          <p:cNvPr id="11" name="TextBox 10"/>
-          <p:cNvSpPr txBox="1"/>
-          <p:nvPr/>
-        </p:nvSpPr>
-        <p:spPr>
-          <a:xfrm>
-            <a:off x="9960545" y="6407134"/>
-            <a:ext cx="1266227" cy="152400"/>
+          <p:cNvPr id="13" name="TextBox 12"/>
+          <p:cNvSpPr txBox="1"/>
+          <p:nvPr/>
+        </p:nvSpPr>
+        <p:spPr>
+          <a:xfrm>
+            <a:off x="9960545" y="6388084"/>
+            <a:ext cx="1278926" cy="184150"/>
           </a:xfrm>
           <a:prstGeom prst="rect">
             <a:avLst/>
@@ -10403,7 +10776,7 @@
               </a:lnSpc>
             </a:pPr>
             <a:r>
-              <a:rPr sz="1350" b="0" i="0">
+              <a:rPr sz="900" b="0" i="0">
                 <a:solidFill>
                   <a:srgbClr val="6B625D"/>
                 </a:solidFill>
@@ -10520,8 +10893,8 @@
         </p:nvSpPr>
         <p:spPr>
           <a:xfrm>
-            <a:off x="596899" y="444499"/>
-            <a:ext cx="3121910" cy="177800"/>
+            <a:off x="596899" y="425449"/>
+            <a:ext cx="1543641" cy="215899"/>
           </a:xfrm>
           <a:prstGeom prst="rect">
             <a:avLst/>
@@ -10540,7 +10913,7 @@
               </a:lnSpc>
             </a:pPr>
             <a:r>
-              <a:rPr sz="1650" b="1" i="0">
+              <a:rPr sz="1100" b="1" i="0">
                 <a:solidFill>
                   <a:srgbClr val="7A4F5E"/>
                 </a:solidFill>
@@ -10559,8 +10932,8 @@
         </p:nvSpPr>
         <p:spPr>
           <a:xfrm>
-            <a:off x="596899" y="698498"/>
-            <a:ext cx="3121910" cy="485079"/>
+            <a:off x="596899" y="647698"/>
+            <a:ext cx="3134610" cy="577849"/>
           </a:xfrm>
           <a:prstGeom prst="rect">
             <a:avLst/>
@@ -10579,7 +10952,7 @@
               </a:lnSpc>
             </a:pPr>
             <a:r>
-              <a:rPr sz="4800" b="1" i="0">
+              <a:rPr sz="3200" b="1" i="0">
                 <a:solidFill>
                   <a:srgbClr val="3A3532"/>
                 </a:solidFill>
@@ -10598,8 +10971,8 @@
         </p:nvSpPr>
         <p:spPr>
           <a:xfrm>
-            <a:off x="8781135" y="444499"/>
-            <a:ext cx="2826636" cy="266699"/>
+            <a:off x="8793835" y="425449"/>
+            <a:ext cx="2813936" cy="298449"/>
           </a:xfrm>
           <a:prstGeom prst="rect">
             <a:avLst/>
@@ -10609,7 +10982,7 @@
           </a:solidFill>
         </p:spPr>
         <p:txBody>
-          <a:bodyPr wrap="square" lIns="76200" rIns="76200" tIns="38100" bIns="38100" anchor="t">
+          <a:bodyPr wrap="square" lIns="114300" rIns="114300" tIns="57150" bIns="57150" anchor="t">
             <a:spAutoFit/>
           </a:bodyPr>
           <a:lstStyle/>
@@ -10620,7 +10993,7 @@
               </a:lnSpc>
             </a:pPr>
             <a:r>
-              <a:rPr sz="1350" b="1" i="0">
+              <a:rPr sz="900" b="1" i="0">
                 <a:solidFill>
                   <a:srgbClr val="1C3A36"/>
                 </a:solidFill>
@@ -10639,8 +11012,8 @@
         </p:nvSpPr>
         <p:spPr>
           <a:xfrm>
-            <a:off x="596899" y="2437203"/>
-            <a:ext cx="6134085" cy="553639"/>
+            <a:off x="596899" y="2449903"/>
+            <a:ext cx="6030600" cy="518119"/>
           </a:xfrm>
           <a:prstGeom prst="rect">
             <a:avLst/>
@@ -10659,7 +11032,7 @@
               </a:lnSpc>
             </a:pPr>
             <a:r>
-              <a:rPr sz="2100" b="0" i="0">
+              <a:rPr sz="1400" b="0" i="0">
                 <a:solidFill>
                   <a:srgbClr val="3A3532"/>
                 </a:solidFill>
@@ -10678,8 +11051,82 @@
         </p:nvSpPr>
         <p:spPr>
           <a:xfrm>
+            <a:off x="965198" y="3143242"/>
+            <a:ext cx="3837077" cy="260349"/>
+          </a:xfrm>
+          <a:prstGeom prst="rect">
+            <a:avLst/>
+          </a:prstGeom>
+          <a:noFill/>
+        </p:spPr>
+        <p:txBody>
+          <a:bodyPr wrap="square" lIns="0" rIns="0" tIns="0" bIns="0" anchor="t">
+            <a:spAutoFit/>
+          </a:bodyPr>
+          <a:lstStyle/>
+          <a:p>
+            <a:pPr algn="l">
+              <a:lnSpc>
+                <a:spcPct val="145000"/>
+              </a:lnSpc>
+            </a:pPr>
+            <a:r>
+              <a:rPr sz="1400" b="0" i="0">
+                <a:solidFill>
+                  <a:srgbClr val="3A3532"/>
+                </a:solidFill>
+                <a:latin typeface="Outfit"/>
+              </a:rPr>
+              <a:t>Quantum di sintesi del tuo Disegno: rosso e nero.</a:t>
+            </a:r>
+          </a:p>
+        </p:txBody>
+      </p:sp>
+      <p:sp>
+        <p:nvSpPr>
+          <p:cNvPr id="10" name="TextBox 9"/>
+          <p:cNvSpPr txBox="1"/>
+          <p:nvPr/>
+        </p:nvSpPr>
+        <p:spPr>
+          <a:xfrm>
             <a:off x="596899" y="3130542"/>
-            <a:ext cx="7835880" cy="295870"/>
+            <a:ext cx="368299" cy="228599"/>
+          </a:xfrm>
+          <a:prstGeom prst="rect">
+            <a:avLst/>
+          </a:prstGeom>
+          <a:noFill/>
+        </p:spPr>
+        <p:txBody>
+          <a:bodyPr wrap="square" lIns="0" rIns="0" tIns="0" bIns="0" anchor="t">
+            <a:spAutoFit/>
+          </a:bodyPr>
+          <a:lstStyle/>
+          <a:p>
+            <a:pPr algn="l"/>
+            <a:r>
+              <a:rPr sz="1000" b="1" i="0">
+                <a:solidFill>
+                  <a:srgbClr val="7A4F5E"/>
+                </a:solidFill>
+                <a:latin typeface="Outfit"/>
+              </a:rPr>
+              <a:t>01</a:t>
+            </a:r>
+          </a:p>
+        </p:txBody>
+      </p:sp>
+      <p:sp>
+        <p:nvSpPr>
+          <p:cNvPr id="11" name="TextBox 10"/>
+          <p:cNvSpPr txBox="1"/>
+          <p:nvPr/>
+        </p:nvSpPr>
+        <p:spPr>
+          <a:xfrm>
+            <a:off x="965198" y="3502612"/>
+            <a:ext cx="2853822" cy="260349"/>
           </a:xfrm>
           <a:prstGeom prst="rect">
             <a:avLst/>
@@ -10698,27 +11145,27 @@
               </a:lnSpc>
             </a:pPr>
             <a:r>
-              <a:rPr sz="2100" b="0" i="0">
+              <a:rPr sz="1400" b="0" i="0">
                 <a:solidFill>
                   <a:srgbClr val="3A3532"/>
                 </a:solidFill>
                 <a:latin typeface="Outfit"/>
               </a:rPr>
-              <a:t>Quantum di sintesi del tuo Disegno: rosso e nero.</a:t>
-            </a:r>
-          </a:p>
-        </p:txBody>
-      </p:sp>
-      <p:sp>
-        <p:nvSpPr>
-          <p:cNvPr id="10" name="TextBox 9"/>
-          <p:cNvSpPr txBox="1"/>
-          <p:nvPr/>
-        </p:nvSpPr>
-        <p:spPr>
-          <a:xfrm>
-            <a:off x="596899" y="3130542"/>
-            <a:ext cx="355599" cy="228599"/>
+              <a:t>Solo ciò che nel tuo Disegno è rosso.</a:t>
+            </a:r>
+          </a:p>
+        </p:txBody>
+      </p:sp>
+      <p:sp>
+        <p:nvSpPr>
+          <p:cNvPr id="12" name="TextBox 11"/>
+          <p:cNvSpPr txBox="1"/>
+          <p:nvPr/>
+        </p:nvSpPr>
+        <p:spPr>
+          <a:xfrm>
+            <a:off x="596899" y="3489912"/>
+            <a:ext cx="368299" cy="228599"/>
           </a:xfrm>
           <a:prstGeom prst="rect">
             <a:avLst/>
@@ -10733,27 +11180,27 @@
           <a:p>
             <a:pPr algn="l"/>
             <a:r>
-              <a:rPr sz="1500" b="1" i="0">
+              <a:rPr sz="1000" b="1" i="0">
                 <a:solidFill>
                   <a:srgbClr val="7A4F5E"/>
                 </a:solidFill>
                 <a:latin typeface="Outfit"/>
               </a:rPr>
-              <a:t>01</a:t>
-            </a:r>
-          </a:p>
-        </p:txBody>
-      </p:sp>
-      <p:sp>
-        <p:nvSpPr>
-          <p:cNvPr id="11" name="TextBox 10"/>
-          <p:cNvSpPr txBox="1"/>
-          <p:nvPr/>
-        </p:nvSpPr>
-        <p:spPr>
-          <a:xfrm>
-            <a:off x="596899" y="3489912"/>
-            <a:ext cx="7835880" cy="295870"/>
+              <a:t>02</a:t>
+            </a:r>
+          </a:p>
+        </p:txBody>
+      </p:sp>
+      <p:sp>
+        <p:nvSpPr>
+          <p:cNvPr id="13" name="TextBox 12"/>
+          <p:cNvSpPr txBox="1"/>
+          <p:nvPr/>
+        </p:nvSpPr>
+        <p:spPr>
+          <a:xfrm>
+            <a:off x="965198" y="3861981"/>
+            <a:ext cx="2794092" cy="260349"/>
           </a:xfrm>
           <a:prstGeom prst="rect">
             <a:avLst/>
@@ -10772,27 +11219,27 @@
               </a:lnSpc>
             </a:pPr>
             <a:r>
-              <a:rPr sz="2100" b="0" i="0">
+              <a:rPr sz="1400" b="0" i="0">
                 <a:solidFill>
                   <a:srgbClr val="3A3532"/>
                 </a:solidFill>
                 <a:latin typeface="Outfit"/>
               </a:rPr>
-              <a:t>Solo ciò che nel tuo Disegno è rosso.</a:t>
-            </a:r>
-          </a:p>
-        </p:txBody>
-      </p:sp>
-      <p:sp>
-        <p:nvSpPr>
-          <p:cNvPr id="12" name="TextBox 11"/>
-          <p:cNvSpPr txBox="1"/>
-          <p:nvPr/>
-        </p:nvSpPr>
-        <p:spPr>
-          <a:xfrm>
-            <a:off x="596899" y="3489912"/>
-            <a:ext cx="355599" cy="228599"/>
+              <a:t>Solo ciò che nel tuo Disegno è nero.</a:t>
+            </a:r>
+          </a:p>
+        </p:txBody>
+      </p:sp>
+      <p:sp>
+        <p:nvSpPr>
+          <p:cNvPr id="14" name="TextBox 13"/>
+          <p:cNvSpPr txBox="1"/>
+          <p:nvPr/>
+        </p:nvSpPr>
+        <p:spPr>
+          <a:xfrm>
+            <a:off x="596899" y="3849281"/>
+            <a:ext cx="368299" cy="228599"/>
           </a:xfrm>
           <a:prstGeom prst="rect">
             <a:avLst/>
@@ -10807,27 +11254,27 @@
           <a:p>
             <a:pPr algn="l"/>
             <a:r>
-              <a:rPr sz="1500" b="1" i="0">
+              <a:rPr sz="1000" b="1" i="0">
                 <a:solidFill>
                   <a:srgbClr val="7A4F5E"/>
                 </a:solidFill>
                 <a:latin typeface="Outfit"/>
               </a:rPr>
-              <a:t>02</a:t>
-            </a:r>
-          </a:p>
-        </p:txBody>
-      </p:sp>
-      <p:sp>
-        <p:nvSpPr>
-          <p:cNvPr id="13" name="TextBox 12"/>
-          <p:cNvSpPr txBox="1"/>
-          <p:nvPr/>
-        </p:nvSpPr>
-        <p:spPr>
-          <a:xfrm>
-            <a:off x="596899" y="3849281"/>
-            <a:ext cx="7835880" cy="295870"/>
+              <a:t>03</a:t>
+            </a:r>
+          </a:p>
+        </p:txBody>
+      </p:sp>
+      <p:sp>
+        <p:nvSpPr>
+          <p:cNvPr id="15" name="TextBox 14"/>
+          <p:cNvSpPr txBox="1"/>
+          <p:nvPr/>
+        </p:nvSpPr>
+        <p:spPr>
+          <a:xfrm>
+            <a:off x="965198" y="4221350"/>
+            <a:ext cx="6056397" cy="260349"/>
           </a:xfrm>
           <a:prstGeom prst="rect">
             <a:avLst/>
@@ -10846,27 +11293,27 @@
               </a:lnSpc>
             </a:pPr>
             <a:r>
-              <a:rPr sz="2100" b="0" i="0">
+              <a:rPr sz="1400" b="0" i="0">
                 <a:solidFill>
                   <a:srgbClr val="3A3532"/>
                 </a:solidFill>
                 <a:latin typeface="Outfit"/>
               </a:rPr>
-              <a:t>Solo ciò che nel tuo Disegno è nero.</a:t>
-            </a:r>
-          </a:p>
-        </p:txBody>
-      </p:sp>
-      <p:sp>
-        <p:nvSpPr>
-          <p:cNvPr id="14" name="TextBox 13"/>
-          <p:cNvSpPr txBox="1"/>
-          <p:nvPr/>
-        </p:nvSpPr>
-        <p:spPr>
-          <a:xfrm>
-            <a:off x="596899" y="3849281"/>
-            <a:ext cx="355599" cy="228599"/>
+              <a:t>Solo ciò che nel tuo Disegno è bianco, come a creare un negativo fotografico.</a:t>
+            </a:r>
+          </a:p>
+        </p:txBody>
+      </p:sp>
+      <p:sp>
+        <p:nvSpPr>
+          <p:cNvPr id="16" name="TextBox 15"/>
+          <p:cNvSpPr txBox="1"/>
+          <p:nvPr/>
+        </p:nvSpPr>
+        <p:spPr>
+          <a:xfrm>
+            <a:off x="596899" y="4208650"/>
+            <a:ext cx="368299" cy="228599"/>
           </a:xfrm>
           <a:prstGeom prst="rect">
             <a:avLst/>
@@ -10881,27 +11328,27 @@
           <a:p>
             <a:pPr algn="l"/>
             <a:r>
-              <a:rPr sz="1500" b="1" i="0">
+              <a:rPr sz="1000" b="1" i="0">
                 <a:solidFill>
                   <a:srgbClr val="7A4F5E"/>
                 </a:solidFill>
                 <a:latin typeface="Outfit"/>
               </a:rPr>
-              <a:t>03</a:t>
-            </a:r>
-          </a:p>
-        </p:txBody>
-      </p:sp>
-      <p:sp>
-        <p:nvSpPr>
-          <p:cNvPr id="15" name="TextBox 14"/>
-          <p:cNvSpPr txBox="1"/>
-          <p:nvPr/>
-        </p:nvSpPr>
-        <p:spPr>
-          <a:xfrm>
-            <a:off x="596899" y="4208650"/>
-            <a:ext cx="7835880" cy="295870"/>
+              <a:t>04</a:t>
+            </a:r>
+          </a:p>
+        </p:txBody>
+      </p:sp>
+      <p:sp>
+        <p:nvSpPr>
+          <p:cNvPr id="17" name="TextBox 16"/>
+          <p:cNvSpPr txBox="1"/>
+          <p:nvPr/>
+        </p:nvSpPr>
+        <p:spPr>
+          <a:xfrm>
+            <a:off x="596899" y="4669620"/>
+            <a:ext cx="5906279" cy="518119"/>
           </a:xfrm>
           <a:prstGeom prst="rect">
             <a:avLst/>
@@ -10920,86 +11367,12 @@
               </a:lnSpc>
             </a:pPr>
             <a:r>
-              <a:rPr sz="2100" b="0" i="0">
+              <a:rPr sz="1400" b="0" i="0">
                 <a:solidFill>
                   <a:srgbClr val="3A3532"/>
                 </a:solidFill>
                 <a:latin typeface="Outfit"/>
               </a:rPr>
-              <a:t>Solo ciò che nel tuo Disegno è bianco, come a creare un negativo fotografico.</a:t>
-            </a:r>
-          </a:p>
-        </p:txBody>
-      </p:sp>
-      <p:sp>
-        <p:nvSpPr>
-          <p:cNvPr id="16" name="TextBox 15"/>
-          <p:cNvSpPr txBox="1"/>
-          <p:nvPr/>
-        </p:nvSpPr>
-        <p:spPr>
-          <a:xfrm>
-            <a:off x="596899" y="4208650"/>
-            <a:ext cx="355599" cy="228599"/>
-          </a:xfrm>
-          <a:prstGeom prst="rect">
-            <a:avLst/>
-          </a:prstGeom>
-          <a:noFill/>
-        </p:spPr>
-        <p:txBody>
-          <a:bodyPr wrap="square" lIns="0" rIns="0" tIns="0" bIns="0" anchor="t">
-            <a:spAutoFit/>
-          </a:bodyPr>
-          <a:lstStyle/>
-          <a:p>
-            <a:pPr algn="l"/>
-            <a:r>
-              <a:rPr sz="1500" b="1" i="0">
-                <a:solidFill>
-                  <a:srgbClr val="7A4F5E"/>
-                </a:solidFill>
-                <a:latin typeface="Outfit"/>
-              </a:rPr>
-              <a:t>04</a:t>
-            </a:r>
-          </a:p>
-        </p:txBody>
-      </p:sp>
-      <p:sp>
-        <p:nvSpPr>
-          <p:cNvPr id="17" name="TextBox 16"/>
-          <p:cNvSpPr txBox="1"/>
-          <p:nvPr/>
-        </p:nvSpPr>
-        <p:spPr>
-          <a:xfrm>
-            <a:off x="596899" y="4656920"/>
-            <a:ext cx="6134085" cy="553639"/>
-          </a:xfrm>
-          <a:prstGeom prst="rect">
-            <a:avLst/>
-          </a:prstGeom>
-          <a:noFill/>
-        </p:spPr>
-        <p:txBody>
-          <a:bodyPr wrap="square" lIns="0" rIns="0" tIns="0" bIns="0" anchor="t">
-            <a:spAutoFit/>
-          </a:bodyPr>
-          <a:lstStyle/>
-          <a:p>
-            <a:pPr algn="l">
-              <a:lnSpc>
-                <a:spcPct val="145000"/>
-              </a:lnSpc>
-            </a:pPr>
-            <a:r>
-              <a:rPr sz="2100" b="0" i="0">
-                <a:solidFill>
-                  <a:srgbClr val="3A3532"/>
-                </a:solidFill>
-                <a:latin typeface="Outfit"/>
-              </a:rPr>
               <a:t>Carica le foto o le scansioni dei quattro grafici nel forum e commenta con le sensazioni che hai provato svolgendo l'esercizio.</a:t>
             </a:r>
           </a:p>
@@ -11013,8 +11386,8 @@
         </p:nvSpPr>
         <p:spPr>
           <a:xfrm>
-            <a:off x="8902678" y="6057885"/>
-            <a:ext cx="1843480" cy="215899"/>
+            <a:off x="8902678" y="6064235"/>
+            <a:ext cx="1856180" cy="196850"/>
           </a:xfrm>
           <a:prstGeom prst="rect">
             <a:avLst/>
@@ -11033,7 +11406,7 @@
               </a:lnSpc>
             </a:pPr>
             <a:r>
-              <a:rPr sz="1500" b="0" i="0">
+              <a:rPr sz="1000" b="0" i="0">
                 <a:solidFill>
                   <a:srgbClr val="6B625D"/>
                 </a:solidFill>
@@ -11052,8 +11425,8 @@
         </p:nvSpPr>
         <p:spPr>
           <a:xfrm>
-            <a:off x="596899" y="6426184"/>
-            <a:ext cx="154285" cy="152400"/>
+            <a:off x="596899" y="6407134"/>
+            <a:ext cx="166985" cy="184150"/>
           </a:xfrm>
           <a:prstGeom prst="rect">
             <a:avLst/>
@@ -11072,7 +11445,7 @@
               </a:lnSpc>
             </a:pPr>
             <a:r>
-              <a:rPr sz="1350" b="0" i="0">
+              <a:rPr sz="900" b="0" i="0">
                 <a:solidFill>
                   <a:srgbClr val="6B625D"/>
                 </a:solidFill>
@@ -11091,8 +11464,8 @@
         </p:nvSpPr>
         <p:spPr>
           <a:xfrm>
-            <a:off x="9960545" y="6407134"/>
-            <a:ext cx="1266227" cy="152400"/>
+            <a:off x="9960545" y="6388084"/>
+            <a:ext cx="1278926" cy="184150"/>
           </a:xfrm>
           <a:prstGeom prst="rect">
             <a:avLst/>
@@ -11111,7 +11484,7 @@
               </a:lnSpc>
             </a:pPr>
             <a:r>
-              <a:rPr sz="1350" b="0" i="0">
+              <a:rPr sz="900" b="0" i="0">
                 <a:solidFill>
                   <a:srgbClr val="6B625D"/>
                 </a:solidFill>
@@ -11252,8 +11625,8 @@
         </p:nvSpPr>
         <p:spPr>
           <a:xfrm>
-            <a:off x="596899" y="444499"/>
-            <a:ext cx="3172313" cy="177800"/>
+            <a:off x="596899" y="425449"/>
+            <a:ext cx="3185013" cy="215899"/>
           </a:xfrm>
           <a:prstGeom prst="rect">
             <a:avLst/>
@@ -11272,7 +11645,7 @@
               </a:lnSpc>
             </a:pPr>
             <a:r>
-              <a:rPr sz="1650" b="1" i="0">
+              <a:rPr sz="1100" b="1" i="0">
                 <a:solidFill>
                   <a:srgbClr val="7A4F5E"/>
                 </a:solidFill>
@@ -11291,8 +11664,8 @@
         </p:nvSpPr>
         <p:spPr>
           <a:xfrm>
-            <a:off x="596899" y="673098"/>
-            <a:ext cx="1713305" cy="485079"/>
+            <a:off x="596899" y="622298"/>
+            <a:ext cx="1726005" cy="577849"/>
           </a:xfrm>
           <a:prstGeom prst="rect">
             <a:avLst/>
@@ -11311,7 +11684,7 @@
               </a:lnSpc>
             </a:pPr>
             <a:r>
-              <a:rPr sz="4800" b="1" i="0">
+              <a:rPr sz="3200" b="1" i="0">
                 <a:solidFill>
                   <a:srgbClr val="3A3532"/>
                 </a:solidFill>
@@ -11330,8 +11703,8 @@
         </p:nvSpPr>
         <p:spPr>
           <a:xfrm>
-            <a:off x="2437203" y="692148"/>
-            <a:ext cx="193774" cy="444499"/>
+            <a:off x="2437203" y="622298"/>
+            <a:ext cx="206474" cy="577849"/>
           </a:xfrm>
           <a:prstGeom prst="rect">
             <a:avLst/>
@@ -11350,7 +11723,7 @@
               </a:lnSpc>
             </a:pPr>
             <a:r>
-              <a:rPr sz="4800" b="1" i="0">
+              <a:rPr sz="3200" b="1" i="0">
                 <a:solidFill>
                   <a:srgbClr val="7A4F5E"/>
                 </a:solidFill>
@@ -11369,8 +11742,8 @@
         </p:nvSpPr>
         <p:spPr>
           <a:xfrm>
-            <a:off x="9509597" y="444499"/>
-            <a:ext cx="2098174" cy="266699"/>
+            <a:off x="9522297" y="425449"/>
+            <a:ext cx="2085474" cy="298449"/>
           </a:xfrm>
           <a:prstGeom prst="rect">
             <a:avLst/>
@@ -11380,7 +11753,7 @@
           </a:solidFill>
         </p:spPr>
         <p:txBody>
-          <a:bodyPr wrap="square" lIns="76200" rIns="76200" tIns="38100" bIns="38100" anchor="t">
+          <a:bodyPr wrap="square" lIns="114300" rIns="114300" tIns="57150" bIns="57150" anchor="t">
             <a:spAutoFit/>
           </a:bodyPr>
           <a:lstStyle/>
@@ -11391,7 +11764,7 @@
               </a:lnSpc>
             </a:pPr>
             <a:r>
-              <a:rPr sz="1350" b="1" i="0">
+              <a:rPr sz="900" b="1" i="0">
                 <a:solidFill>
                   <a:srgbClr val="1C3A36"/>
                 </a:solidFill>
@@ -11410,8 +11783,82 @@
         </p:nvSpPr>
         <p:spPr>
           <a:xfrm>
+            <a:off x="965198" y="2397218"/>
+            <a:ext cx="3406072" cy="518119"/>
+          </a:xfrm>
+          <a:prstGeom prst="rect">
+            <a:avLst/>
+          </a:prstGeom>
+          <a:noFill/>
+        </p:spPr>
+        <p:txBody>
+          <a:bodyPr wrap="square" lIns="0" rIns="0" tIns="0" bIns="0" anchor="t">
+            <a:spAutoFit/>
+          </a:bodyPr>
+          <a:lstStyle/>
+          <a:p>
+            <a:pPr algn="l">
+              <a:lnSpc>
+                <a:spcPct val="145000"/>
+              </a:lnSpc>
+            </a:pPr>
+            <a:r>
+              <a:rPr sz="1400" b="0" i="0">
+                <a:solidFill>
+                  <a:srgbClr val="3A3532"/>
+                </a:solidFill>
+                <a:latin typeface="Outfit"/>
+              </a:rPr>
+              <a:t>Prendi una penna nera, una rossa e una del colore che vuoi.</a:t>
+            </a:r>
+          </a:p>
+        </p:txBody>
+      </p:sp>
+      <p:sp>
+        <p:nvSpPr>
+          <p:cNvPr id="11" name="TextBox 10"/>
+          <p:cNvSpPr txBox="1"/>
+          <p:nvPr/>
+        </p:nvSpPr>
+        <p:spPr>
+          <a:xfrm>
             <a:off x="596899" y="2384518"/>
-            <a:ext cx="4102090" cy="553639"/>
+            <a:ext cx="368299" cy="228599"/>
+          </a:xfrm>
+          <a:prstGeom prst="rect">
+            <a:avLst/>
+          </a:prstGeom>
+          <a:noFill/>
+        </p:spPr>
+        <p:txBody>
+          <a:bodyPr wrap="square" lIns="0" rIns="0" tIns="0" bIns="0" anchor="t">
+            <a:spAutoFit/>
+          </a:bodyPr>
+          <a:lstStyle/>
+          <a:p>
+            <a:pPr algn="l"/>
+            <a:r>
+              <a:rPr sz="1000" b="1" i="0">
+                <a:solidFill>
+                  <a:srgbClr val="7A4F5E"/>
+                </a:solidFill>
+                <a:latin typeface="Outfit"/>
+              </a:rPr>
+              <a:t>01</a:t>
+            </a:r>
+          </a:p>
+        </p:txBody>
+      </p:sp>
+      <p:sp>
+        <p:nvSpPr>
+          <p:cNvPr id="12" name="TextBox 11"/>
+          <p:cNvSpPr txBox="1"/>
+          <p:nvPr/>
+        </p:nvSpPr>
+        <p:spPr>
+          <a:xfrm>
+            <a:off x="965198" y="3039757"/>
+            <a:ext cx="3623559" cy="518119"/>
           </a:xfrm>
           <a:prstGeom prst="rect">
             <a:avLst/>
@@ -11430,27 +11877,27 @@
               </a:lnSpc>
             </a:pPr>
             <a:r>
-              <a:rPr sz="2100" b="0" i="0">
+              <a:rPr sz="1400" b="0" i="0">
                 <a:solidFill>
                   <a:srgbClr val="3A3532"/>
                 </a:solidFill>
                 <a:latin typeface="Outfit"/>
               </a:rPr>
-              <a:t>Prendi una penna nera, una rossa e una del colore che vuoi.</a:t>
-            </a:r>
-          </a:p>
-        </p:txBody>
-      </p:sp>
-      <p:sp>
-        <p:nvSpPr>
-          <p:cNvPr id="11" name="TextBox 10"/>
-          <p:cNvSpPr txBox="1"/>
-          <p:nvPr/>
-        </p:nvSpPr>
-        <p:spPr>
-          <a:xfrm>
-            <a:off x="596899" y="2384518"/>
-            <a:ext cx="355599" cy="228599"/>
+              <a:t>Guarda le porte del tuo Disegno, sia rosse che nere, e colorale.</a:t>
+            </a:r>
+          </a:p>
+        </p:txBody>
+      </p:sp>
+      <p:sp>
+        <p:nvSpPr>
+          <p:cNvPr id="13" name="TextBox 12"/>
+          <p:cNvSpPr txBox="1"/>
+          <p:nvPr/>
+        </p:nvSpPr>
+        <p:spPr>
+          <a:xfrm>
+            <a:off x="596899" y="3027057"/>
+            <a:ext cx="368299" cy="228599"/>
           </a:xfrm>
           <a:prstGeom prst="rect">
             <a:avLst/>
@@ -11465,27 +11912,27 @@
           <a:p>
             <a:pPr algn="l"/>
             <a:r>
-              <a:rPr sz="1500" b="1" i="0">
+              <a:rPr sz="1000" b="1" i="0">
                 <a:solidFill>
                   <a:srgbClr val="7A4F5E"/>
                 </a:solidFill>
                 <a:latin typeface="Outfit"/>
               </a:rPr>
-              <a:t>01</a:t>
-            </a:r>
-          </a:p>
-        </p:txBody>
-      </p:sp>
-      <p:sp>
-        <p:nvSpPr>
-          <p:cNvPr id="12" name="TextBox 11"/>
-          <p:cNvSpPr txBox="1"/>
-          <p:nvPr/>
-        </p:nvSpPr>
-        <p:spPr>
-          <a:xfrm>
-            <a:off x="596899" y="3027057"/>
-            <a:ext cx="4102090" cy="553639"/>
+              <a:t>02</a:t>
+            </a:r>
+          </a:p>
+        </p:txBody>
+      </p:sp>
+      <p:sp>
+        <p:nvSpPr>
+          <p:cNvPr id="14" name="TextBox 13"/>
+          <p:cNvSpPr txBox="1"/>
+          <p:nvPr/>
+        </p:nvSpPr>
+        <p:spPr>
+          <a:xfrm>
+            <a:off x="965198" y="3682296"/>
+            <a:ext cx="1146668" cy="260349"/>
           </a:xfrm>
           <a:prstGeom prst="rect">
             <a:avLst/>
@@ -11504,27 +11951,27 @@
               </a:lnSpc>
             </a:pPr>
             <a:r>
-              <a:rPr sz="2100" b="0" i="0">
+              <a:rPr sz="1400" b="0" i="0">
                 <a:solidFill>
                   <a:srgbClr val="3A3532"/>
                 </a:solidFill>
                 <a:latin typeface="Outfit"/>
               </a:rPr>
-              <a:t>Guarda le porte del tuo Disegno, sia rosse che nere, e colorale.</a:t>
-            </a:r>
-          </a:p>
-        </p:txBody>
-      </p:sp>
-      <p:sp>
-        <p:nvSpPr>
-          <p:cNvPr id="13" name="TextBox 12"/>
-          <p:cNvSpPr txBox="1"/>
-          <p:nvPr/>
-        </p:nvSpPr>
-        <p:spPr>
-          <a:xfrm>
-            <a:off x="596899" y="3027057"/>
-            <a:ext cx="355599" cy="228599"/>
+              <a:t>Unisci i canali.</a:t>
+            </a:r>
+          </a:p>
+        </p:txBody>
+      </p:sp>
+      <p:sp>
+        <p:nvSpPr>
+          <p:cNvPr id="15" name="TextBox 14"/>
+          <p:cNvSpPr txBox="1"/>
+          <p:nvPr/>
+        </p:nvSpPr>
+        <p:spPr>
+          <a:xfrm>
+            <a:off x="596899" y="3669596"/>
+            <a:ext cx="368299" cy="228599"/>
           </a:xfrm>
           <a:prstGeom prst="rect">
             <a:avLst/>
@@ -11539,27 +11986,27 @@
           <a:p>
             <a:pPr algn="l"/>
             <a:r>
-              <a:rPr sz="1500" b="1" i="0">
+              <a:rPr sz="1000" b="1" i="0">
                 <a:solidFill>
                   <a:srgbClr val="7A4F5E"/>
                 </a:solidFill>
                 <a:latin typeface="Outfit"/>
               </a:rPr>
-              <a:t>02</a:t>
-            </a:r>
-          </a:p>
-        </p:txBody>
-      </p:sp>
-      <p:sp>
-        <p:nvSpPr>
-          <p:cNvPr id="14" name="TextBox 13"/>
-          <p:cNvSpPr txBox="1"/>
-          <p:nvPr/>
-        </p:nvSpPr>
-        <p:spPr>
-          <a:xfrm>
-            <a:off x="596899" y="3669596"/>
-            <a:ext cx="4102090" cy="295870"/>
+              <a:t>03</a:t>
+            </a:r>
+          </a:p>
+        </p:txBody>
+      </p:sp>
+      <p:sp>
+        <p:nvSpPr>
+          <p:cNvPr id="16" name="TextBox 15"/>
+          <p:cNvSpPr txBox="1"/>
+          <p:nvPr/>
+        </p:nvSpPr>
+        <p:spPr>
+          <a:xfrm>
+            <a:off x="965198" y="4067066"/>
+            <a:ext cx="2851738" cy="518119"/>
           </a:xfrm>
           <a:prstGeom prst="rect">
             <a:avLst/>
@@ -11578,27 +12025,27 @@
               </a:lnSpc>
             </a:pPr>
             <a:r>
-              <a:rPr sz="2100" b="0" i="0">
+              <a:rPr sz="1400" b="0" i="0">
                 <a:solidFill>
                   <a:srgbClr val="3A3532"/>
                 </a:solidFill>
                 <a:latin typeface="Outfit"/>
               </a:rPr>
-              <a:t>Unisci i canali.</a:t>
-            </a:r>
-          </a:p>
-        </p:txBody>
-      </p:sp>
-      <p:sp>
-        <p:nvSpPr>
-          <p:cNvPr id="15" name="TextBox 14"/>
-          <p:cNvSpPr txBox="1"/>
-          <p:nvPr/>
-        </p:nvSpPr>
-        <p:spPr>
-          <a:xfrm>
-            <a:off x="596899" y="3669596"/>
-            <a:ext cx="355599" cy="228599"/>
+              <a:t>Colora col terzo colore i centri che si definiscono attraverso i canali.</a:t>
+            </a:r>
+          </a:p>
+        </p:txBody>
+      </p:sp>
+      <p:sp>
+        <p:nvSpPr>
+          <p:cNvPr id="17" name="TextBox 16"/>
+          <p:cNvSpPr txBox="1"/>
+          <p:nvPr/>
+        </p:nvSpPr>
+        <p:spPr>
+          <a:xfrm>
+            <a:off x="596899" y="4054366"/>
+            <a:ext cx="368299" cy="228599"/>
           </a:xfrm>
           <a:prstGeom prst="rect">
             <a:avLst/>
@@ -11613,27 +12060,27 @@
           <a:p>
             <a:pPr algn="l"/>
             <a:r>
-              <a:rPr sz="1500" b="1" i="0">
+              <a:rPr sz="1000" b="1" i="0">
                 <a:solidFill>
                   <a:srgbClr val="7A4F5E"/>
                 </a:solidFill>
                 <a:latin typeface="Outfit"/>
               </a:rPr>
-              <a:t>03</a:t>
-            </a:r>
-          </a:p>
-        </p:txBody>
-      </p:sp>
-      <p:sp>
-        <p:nvSpPr>
-          <p:cNvPr id="16" name="TextBox 15"/>
-          <p:cNvSpPr txBox="1"/>
-          <p:nvPr/>
-        </p:nvSpPr>
-        <p:spPr>
-          <a:xfrm>
-            <a:off x="596899" y="4054366"/>
-            <a:ext cx="4102090" cy="553639"/>
+              <a:t>04</a:t>
+            </a:r>
+          </a:p>
+        </p:txBody>
+      </p:sp>
+      <p:sp>
+        <p:nvSpPr>
+          <p:cNvPr id="18" name="TextBox 17"/>
+          <p:cNvSpPr txBox="1"/>
+          <p:nvPr/>
+        </p:nvSpPr>
+        <p:spPr>
+          <a:xfrm>
+            <a:off x="965198" y="4709605"/>
+            <a:ext cx="3483066" cy="518119"/>
           </a:xfrm>
           <a:prstGeom prst="rect">
             <a:avLst/>
@@ -11652,27 +12099,27 @@
               </a:lnSpc>
             </a:pPr>
             <a:r>
-              <a:rPr sz="2100" b="0" i="0">
+              <a:rPr sz="1400" b="0" i="0">
                 <a:solidFill>
                   <a:srgbClr val="3A3532"/>
                 </a:solidFill>
                 <a:latin typeface="Outfit"/>
               </a:rPr>
-              <a:t>Colora col terzo colore i centri che si definiscono attraverso i canali.</a:t>
-            </a:r>
-          </a:p>
-        </p:txBody>
-      </p:sp>
-      <p:sp>
-        <p:nvSpPr>
-          <p:cNvPr id="17" name="TextBox 16"/>
-          <p:cNvSpPr txBox="1"/>
-          <p:nvPr/>
-        </p:nvSpPr>
-        <p:spPr>
-          <a:xfrm>
-            <a:off x="596899" y="4054366"/>
-            <a:ext cx="355599" cy="228599"/>
+              <a:t>Verifica che il Disegno combaci con quello di qualsiasi calcolatore.</a:t>
+            </a:r>
+          </a:p>
+        </p:txBody>
+      </p:sp>
+      <p:sp>
+        <p:nvSpPr>
+          <p:cNvPr id="19" name="TextBox 18"/>
+          <p:cNvSpPr txBox="1"/>
+          <p:nvPr/>
+        </p:nvSpPr>
+        <p:spPr>
+          <a:xfrm>
+            <a:off x="596899" y="4696905"/>
+            <a:ext cx="368299" cy="228599"/>
           </a:xfrm>
           <a:prstGeom prst="rect">
             <a:avLst/>
@@ -11687,86 +12134,12 @@
           <a:p>
             <a:pPr algn="l"/>
             <a:r>
-              <a:rPr sz="1500" b="1" i="0">
+              <a:rPr sz="1000" b="1" i="0">
                 <a:solidFill>
                   <a:srgbClr val="7A4F5E"/>
                 </a:solidFill>
                 <a:latin typeface="Outfit"/>
               </a:rPr>
-              <a:t>04</a:t>
-            </a:r>
-          </a:p>
-        </p:txBody>
-      </p:sp>
-      <p:sp>
-        <p:nvSpPr>
-          <p:cNvPr id="18" name="TextBox 17"/>
-          <p:cNvSpPr txBox="1"/>
-          <p:nvPr/>
-        </p:nvSpPr>
-        <p:spPr>
-          <a:xfrm>
-            <a:off x="596899" y="4696905"/>
-            <a:ext cx="4102090" cy="553639"/>
-          </a:xfrm>
-          <a:prstGeom prst="rect">
-            <a:avLst/>
-          </a:prstGeom>
-          <a:noFill/>
-        </p:spPr>
-        <p:txBody>
-          <a:bodyPr wrap="square" lIns="0" rIns="0" tIns="0" bIns="0" anchor="t">
-            <a:spAutoFit/>
-          </a:bodyPr>
-          <a:lstStyle/>
-          <a:p>
-            <a:pPr algn="l">
-              <a:lnSpc>
-                <a:spcPct val="145000"/>
-              </a:lnSpc>
-            </a:pPr>
-            <a:r>
-              <a:rPr sz="2100" b="0" i="0">
-                <a:solidFill>
-                  <a:srgbClr val="3A3532"/>
-                </a:solidFill>
-                <a:latin typeface="Outfit"/>
-              </a:rPr>
-              <a:t>Verifica che il Disegno combaci con quello di qualsiasi calcolatore.</a:t>
-            </a:r>
-          </a:p>
-        </p:txBody>
-      </p:sp>
-      <p:sp>
-        <p:nvSpPr>
-          <p:cNvPr id="19" name="TextBox 18"/>
-          <p:cNvSpPr txBox="1"/>
-          <p:nvPr/>
-        </p:nvSpPr>
-        <p:spPr>
-          <a:xfrm>
-            <a:off x="596899" y="4696905"/>
-            <a:ext cx="355599" cy="228599"/>
-          </a:xfrm>
-          <a:prstGeom prst="rect">
-            <a:avLst/>
-          </a:prstGeom>
-          <a:noFill/>
-        </p:spPr>
-        <p:txBody>
-          <a:bodyPr wrap="square" lIns="0" rIns="0" tIns="0" bIns="0" anchor="t">
-            <a:spAutoFit/>
-          </a:bodyPr>
-          <a:lstStyle/>
-          <a:p>
-            <a:pPr algn="l"/>
-            <a:r>
-              <a:rPr sz="1500" b="1" i="0">
-                <a:solidFill>
-                  <a:srgbClr val="7A4F5E"/>
-                </a:solidFill>
-                <a:latin typeface="Outfit"/>
-              </a:rPr>
               <a:t>05</a:t>
             </a:r>
           </a:p>
@@ -11780,8 +12153,8 @@
         </p:nvSpPr>
         <p:spPr>
           <a:xfrm>
-            <a:off x="8648678" y="6057885"/>
-            <a:ext cx="2745872" cy="215899"/>
+            <a:off x="8648678" y="6064235"/>
+            <a:ext cx="2758572" cy="196850"/>
           </a:xfrm>
           <a:prstGeom prst="rect">
             <a:avLst/>
@@ -11800,7 +12173,7 @@
               </a:lnSpc>
             </a:pPr>
             <a:r>
-              <a:rPr sz="1500" b="0" i="0">
+              <a:rPr sz="1000" b="0" i="0">
                 <a:solidFill>
                   <a:srgbClr val="6B625D"/>
                 </a:solidFill>
@@ -11819,8 +12192,8 @@
         </p:nvSpPr>
         <p:spPr>
           <a:xfrm>
-            <a:off x="596899" y="6426184"/>
-            <a:ext cx="175518" cy="152400"/>
+            <a:off x="596899" y="6407134"/>
+            <a:ext cx="188217" cy="184150"/>
           </a:xfrm>
           <a:prstGeom prst="rect">
             <a:avLst/>
@@ -11839,7 +12212,7 @@
               </a:lnSpc>
             </a:pPr>
             <a:r>
-              <a:rPr sz="1350" b="0" i="0">
+              <a:rPr sz="900" b="0" i="0">
                 <a:solidFill>
                   <a:srgbClr val="6B625D"/>
                 </a:solidFill>
@@ -11858,8 +12231,8 @@
         </p:nvSpPr>
         <p:spPr>
           <a:xfrm>
-            <a:off x="9960545" y="6407134"/>
-            <a:ext cx="1266227" cy="152400"/>
+            <a:off x="9960545" y="6388084"/>
+            <a:ext cx="1278926" cy="184150"/>
           </a:xfrm>
           <a:prstGeom prst="rect">
             <a:avLst/>
@@ -11878,7 +12251,7 @@
               </a:lnSpc>
             </a:pPr>
             <a:r>
-              <a:rPr sz="1350" b="0" i="0">
+              <a:rPr sz="900" b="0" i="0">
                 <a:solidFill>
                   <a:srgbClr val="6B625D"/>
                 </a:solidFill>
@@ -12019,8 +12392,8 @@
         </p:nvSpPr>
         <p:spPr>
           <a:xfrm>
-            <a:off x="596899" y="444499"/>
-            <a:ext cx="3172313" cy="177800"/>
+            <a:off x="596899" y="425449"/>
+            <a:ext cx="3185013" cy="215899"/>
           </a:xfrm>
           <a:prstGeom prst="rect">
             <a:avLst/>
@@ -12039,7 +12412,7 @@
               </a:lnSpc>
             </a:pPr>
             <a:r>
-              <a:rPr sz="1650" b="1" i="0">
+              <a:rPr sz="1100" b="1" i="0">
                 <a:solidFill>
                   <a:srgbClr val="7A4F5E"/>
                 </a:solidFill>
@@ -12058,8 +12431,8 @@
         </p:nvSpPr>
         <p:spPr>
           <a:xfrm>
-            <a:off x="596899" y="673098"/>
-            <a:ext cx="1713305" cy="485079"/>
+            <a:off x="596899" y="622298"/>
+            <a:ext cx="1726005" cy="577849"/>
           </a:xfrm>
           <a:prstGeom prst="rect">
             <a:avLst/>
@@ -12078,7 +12451,7 @@
               </a:lnSpc>
             </a:pPr>
             <a:r>
-              <a:rPr sz="4800" b="1" i="0">
+              <a:rPr sz="3200" b="1" i="0">
                 <a:solidFill>
                   <a:srgbClr val="3A3532"/>
                 </a:solidFill>
@@ -12097,8 +12470,8 @@
         </p:nvSpPr>
         <p:spPr>
           <a:xfrm>
-            <a:off x="2437203" y="692148"/>
-            <a:ext cx="250725" cy="444499"/>
+            <a:off x="2437203" y="622298"/>
+            <a:ext cx="263425" cy="577849"/>
           </a:xfrm>
           <a:prstGeom prst="rect">
             <a:avLst/>
@@ -12117,7 +12490,7 @@
               </a:lnSpc>
             </a:pPr>
             <a:r>
-              <a:rPr sz="4800" b="1" i="0">
+              <a:rPr sz="3200" b="1" i="0">
                 <a:solidFill>
                   <a:srgbClr val="7A4F5E"/>
                 </a:solidFill>
@@ -12136,8 +12509,8 @@
         </p:nvSpPr>
         <p:spPr>
           <a:xfrm>
-            <a:off x="9509597" y="444499"/>
-            <a:ext cx="2098174" cy="266699"/>
+            <a:off x="9522297" y="425449"/>
+            <a:ext cx="2085474" cy="298449"/>
           </a:xfrm>
           <a:prstGeom prst="rect">
             <a:avLst/>
@@ -12147,7 +12520,7 @@
           </a:solidFill>
         </p:spPr>
         <p:txBody>
-          <a:bodyPr wrap="square" lIns="76200" rIns="76200" tIns="38100" bIns="38100" anchor="t">
+          <a:bodyPr wrap="square" lIns="114300" rIns="114300" tIns="57150" bIns="57150" anchor="t">
             <a:spAutoFit/>
           </a:bodyPr>
           <a:lstStyle/>
@@ -12158,7 +12531,7 @@
               </a:lnSpc>
             </a:pPr>
             <a:r>
-              <a:rPr sz="1350" b="1" i="0">
+              <a:rPr sz="900" b="1" i="0">
                 <a:solidFill>
                   <a:srgbClr val="1C3A36"/>
                 </a:solidFill>
@@ -12177,8 +12550,82 @@
         </p:nvSpPr>
         <p:spPr>
           <a:xfrm>
+            <a:off x="965198" y="2385114"/>
+            <a:ext cx="1940119" cy="260349"/>
+          </a:xfrm>
+          <a:prstGeom prst="rect">
+            <a:avLst/>
+          </a:prstGeom>
+          <a:noFill/>
+        </p:spPr>
+        <p:txBody>
+          <a:bodyPr wrap="square" lIns="0" rIns="0" tIns="0" bIns="0" anchor="t">
+            <a:spAutoFit/>
+          </a:bodyPr>
+          <a:lstStyle/>
+          <a:p>
+            <a:pPr algn="l">
+              <a:lnSpc>
+                <a:spcPct val="145000"/>
+              </a:lnSpc>
+            </a:pPr>
+            <a:r>
+              <a:rPr sz="1400" b="0" i="0">
+                <a:solidFill>
+                  <a:srgbClr val="3A3532"/>
+                </a:solidFill>
+                <a:latin typeface="Outfit"/>
+              </a:rPr>
+              <a:t>Prendi una penna rossa.</a:t>
+            </a:r>
+          </a:p>
+        </p:txBody>
+      </p:sp>
+      <p:sp>
+        <p:nvSpPr>
+          <p:cNvPr id="11" name="TextBox 10"/>
+          <p:cNvSpPr txBox="1"/>
+          <p:nvPr/>
+        </p:nvSpPr>
+        <p:spPr>
+          <a:xfrm>
             <a:off x="596899" y="2372414"/>
-            <a:ext cx="4102090" cy="295870"/>
+            <a:ext cx="368299" cy="228599"/>
+          </a:xfrm>
+          <a:prstGeom prst="rect">
+            <a:avLst/>
+          </a:prstGeom>
+          <a:noFill/>
+        </p:spPr>
+        <p:txBody>
+          <a:bodyPr wrap="square" lIns="0" rIns="0" tIns="0" bIns="0" anchor="t">
+            <a:spAutoFit/>
+          </a:bodyPr>
+          <a:lstStyle/>
+          <a:p>
+            <a:pPr algn="l"/>
+            <a:r>
+              <a:rPr sz="1000" b="1" i="0">
+                <a:solidFill>
+                  <a:srgbClr val="7A4F5E"/>
+                </a:solidFill>
+                <a:latin typeface="Outfit"/>
+              </a:rPr>
+              <a:t>01</a:t>
+            </a:r>
+          </a:p>
+        </p:txBody>
+      </p:sp>
+      <p:sp>
+        <p:nvSpPr>
+          <p:cNvPr id="12" name="TextBox 11"/>
+          <p:cNvSpPr txBox="1"/>
+          <p:nvPr/>
+        </p:nvSpPr>
+        <p:spPr>
+          <a:xfrm>
+            <a:off x="965198" y="2769883"/>
+            <a:ext cx="3137487" cy="518119"/>
           </a:xfrm>
           <a:prstGeom prst="rect">
             <a:avLst/>
@@ -12197,27 +12644,27 @@
               </a:lnSpc>
             </a:pPr>
             <a:r>
-              <a:rPr sz="2100" b="0" i="0">
+              <a:rPr sz="1400" b="0" i="0">
                 <a:solidFill>
                   <a:srgbClr val="3A3532"/>
                 </a:solidFill>
                 <a:latin typeface="Outfit"/>
               </a:rPr>
-              <a:t>Prendi una penna rossa.</a:t>
-            </a:r>
-          </a:p>
-        </p:txBody>
-      </p:sp>
-      <p:sp>
-        <p:nvSpPr>
-          <p:cNvPr id="11" name="TextBox 10"/>
-          <p:cNvSpPr txBox="1"/>
-          <p:nvPr/>
-        </p:nvSpPr>
-        <p:spPr>
-          <a:xfrm>
-            <a:off x="596899" y="2372414"/>
-            <a:ext cx="355599" cy="228599"/>
+              <a:t>Guarda le porte rosse del tuo Disegno e colorale.</a:t>
+            </a:r>
+          </a:p>
+        </p:txBody>
+      </p:sp>
+      <p:sp>
+        <p:nvSpPr>
+          <p:cNvPr id="13" name="TextBox 12"/>
+          <p:cNvSpPr txBox="1"/>
+          <p:nvPr/>
+        </p:nvSpPr>
+        <p:spPr>
+          <a:xfrm>
+            <a:off x="596899" y="2757183"/>
+            <a:ext cx="368299" cy="228599"/>
           </a:xfrm>
           <a:prstGeom prst="rect">
             <a:avLst/>
@@ -12232,27 +12679,27 @@
           <a:p>
             <a:pPr algn="l"/>
             <a:r>
-              <a:rPr sz="1500" b="1" i="0">
+              <a:rPr sz="1000" b="1" i="0">
                 <a:solidFill>
                   <a:srgbClr val="7A4F5E"/>
                 </a:solidFill>
                 <a:latin typeface="Outfit"/>
               </a:rPr>
-              <a:t>01</a:t>
-            </a:r>
-          </a:p>
-        </p:txBody>
-      </p:sp>
-      <p:sp>
-        <p:nvSpPr>
-          <p:cNvPr id="12" name="TextBox 11"/>
-          <p:cNvSpPr txBox="1"/>
-          <p:nvPr/>
-        </p:nvSpPr>
-        <p:spPr>
-          <a:xfrm>
-            <a:off x="596899" y="2757183"/>
-            <a:ext cx="4102090" cy="553639"/>
+              <a:t>02</a:t>
+            </a:r>
+          </a:p>
+        </p:txBody>
+      </p:sp>
+      <p:sp>
+        <p:nvSpPr>
+          <p:cNvPr id="14" name="TextBox 13"/>
+          <p:cNvSpPr txBox="1"/>
+          <p:nvPr/>
+        </p:nvSpPr>
+        <p:spPr>
+          <a:xfrm>
+            <a:off x="965198" y="3412422"/>
+            <a:ext cx="2039139" cy="260349"/>
           </a:xfrm>
           <a:prstGeom prst="rect">
             <a:avLst/>
@@ -12271,27 +12718,27 @@
               </a:lnSpc>
             </a:pPr>
             <a:r>
-              <a:rPr sz="2100" b="0" i="0">
+              <a:rPr sz="1400" b="0" i="0">
                 <a:solidFill>
                   <a:srgbClr val="3A3532"/>
                 </a:solidFill>
                 <a:latin typeface="Outfit"/>
               </a:rPr>
-              <a:t>Guarda le porte rosse del tuo Disegno e colorale.</a:t>
-            </a:r>
-          </a:p>
-        </p:txBody>
-      </p:sp>
-      <p:sp>
-        <p:nvSpPr>
-          <p:cNvPr id="13" name="TextBox 12"/>
-          <p:cNvSpPr txBox="1"/>
-          <p:nvPr/>
-        </p:nvSpPr>
-        <p:spPr>
-          <a:xfrm>
-            <a:off x="596899" y="2757183"/>
-            <a:ext cx="355599" cy="228599"/>
+              <a:t>Unisci gli eventuali canali.</a:t>
+            </a:r>
+          </a:p>
+        </p:txBody>
+      </p:sp>
+      <p:sp>
+        <p:nvSpPr>
+          <p:cNvPr id="15" name="TextBox 14"/>
+          <p:cNvSpPr txBox="1"/>
+          <p:nvPr/>
+        </p:nvSpPr>
+        <p:spPr>
+          <a:xfrm>
+            <a:off x="596899" y="3399722"/>
+            <a:ext cx="368299" cy="228599"/>
           </a:xfrm>
           <a:prstGeom prst="rect">
             <a:avLst/>
@@ -12306,27 +12753,27 @@
           <a:p>
             <a:pPr algn="l"/>
             <a:r>
-              <a:rPr sz="1500" b="1" i="0">
+              <a:rPr sz="1000" b="1" i="0">
                 <a:solidFill>
                   <a:srgbClr val="7A4F5E"/>
                 </a:solidFill>
                 <a:latin typeface="Outfit"/>
               </a:rPr>
-              <a:t>02</a:t>
-            </a:r>
-          </a:p>
-        </p:txBody>
-      </p:sp>
-      <p:sp>
-        <p:nvSpPr>
-          <p:cNvPr id="14" name="TextBox 13"/>
-          <p:cNvSpPr txBox="1"/>
-          <p:nvPr/>
-        </p:nvSpPr>
-        <p:spPr>
-          <a:xfrm>
-            <a:off x="596899" y="3399722"/>
-            <a:ext cx="4102090" cy="295870"/>
+              <a:t>03</a:t>
+            </a:r>
+          </a:p>
+        </p:txBody>
+      </p:sp>
+      <p:sp>
+        <p:nvSpPr>
+          <p:cNvPr id="16" name="TextBox 15"/>
+          <p:cNvSpPr txBox="1"/>
+          <p:nvPr/>
+        </p:nvSpPr>
+        <p:spPr>
+          <a:xfrm>
+            <a:off x="965198" y="3797191"/>
+            <a:ext cx="3444866" cy="518119"/>
           </a:xfrm>
           <a:prstGeom prst="rect">
             <a:avLst/>
@@ -12345,27 +12792,27 @@
               </a:lnSpc>
             </a:pPr>
             <a:r>
-              <a:rPr sz="2100" b="0" i="0">
+              <a:rPr sz="1400" b="0" i="0">
                 <a:solidFill>
                   <a:srgbClr val="3A3532"/>
                 </a:solidFill>
                 <a:latin typeface="Outfit"/>
               </a:rPr>
-              <a:t>Unisci gli eventuali canali.</a:t>
-            </a:r>
-          </a:p>
-        </p:txBody>
-      </p:sp>
-      <p:sp>
-        <p:nvSpPr>
-          <p:cNvPr id="15" name="TextBox 14"/>
-          <p:cNvSpPr txBox="1"/>
-          <p:nvPr/>
-        </p:nvSpPr>
-        <p:spPr>
-          <a:xfrm>
-            <a:off x="596899" y="3399722"/>
-            <a:ext cx="355599" cy="228599"/>
+              <a:t>Colora gli eventuali centri che si definiscono attraverso i canali.</a:t>
+            </a:r>
+          </a:p>
+        </p:txBody>
+      </p:sp>
+      <p:sp>
+        <p:nvSpPr>
+          <p:cNvPr id="17" name="TextBox 16"/>
+          <p:cNvSpPr txBox="1"/>
+          <p:nvPr/>
+        </p:nvSpPr>
+        <p:spPr>
+          <a:xfrm>
+            <a:off x="596899" y="3784491"/>
+            <a:ext cx="368299" cy="228599"/>
           </a:xfrm>
           <a:prstGeom prst="rect">
             <a:avLst/>
@@ -12380,123 +12827,49 @@
           <a:p>
             <a:pPr algn="l"/>
             <a:r>
-              <a:rPr sz="1500" b="1" i="0">
+              <a:rPr sz="1000" b="1" i="0">
                 <a:solidFill>
                   <a:srgbClr val="7A4F5E"/>
                 </a:solidFill>
                 <a:latin typeface="Outfit"/>
               </a:rPr>
-              <a:t>03</a:t>
-            </a:r>
-          </a:p>
-        </p:txBody>
-      </p:sp>
-      <p:sp>
-        <p:nvSpPr>
-          <p:cNvPr id="16" name="TextBox 15"/>
-          <p:cNvSpPr txBox="1"/>
-          <p:nvPr/>
-        </p:nvSpPr>
-        <p:spPr>
-          <a:xfrm>
-            <a:off x="596899" y="3784491"/>
-            <a:ext cx="4102090" cy="553639"/>
-          </a:xfrm>
-          <a:prstGeom prst="rect">
-            <a:avLst/>
-          </a:prstGeom>
-          <a:noFill/>
-        </p:spPr>
-        <p:txBody>
-          <a:bodyPr wrap="square" lIns="0" rIns="0" tIns="0" bIns="0" anchor="t">
-            <a:spAutoFit/>
-          </a:bodyPr>
-          <a:lstStyle/>
-          <a:p>
-            <a:pPr algn="l">
-              <a:lnSpc>
-                <a:spcPct val="145000"/>
-              </a:lnSpc>
-            </a:pPr>
-            <a:r>
-              <a:rPr sz="2100" b="0" i="0">
-                <a:solidFill>
-                  <a:srgbClr val="3A3532"/>
-                </a:solidFill>
-                <a:latin typeface="Outfit"/>
-              </a:rPr>
-              <a:t>Colora gli eventuali centri che si definiscono attraverso i canali.</a:t>
-            </a:r>
-          </a:p>
-        </p:txBody>
-      </p:sp>
-      <p:sp>
-        <p:nvSpPr>
-          <p:cNvPr id="17" name="TextBox 16"/>
-          <p:cNvSpPr txBox="1"/>
-          <p:nvPr/>
-        </p:nvSpPr>
-        <p:spPr>
-          <a:xfrm>
-            <a:off x="596899" y="3784491"/>
-            <a:ext cx="355599" cy="228599"/>
-          </a:xfrm>
-          <a:prstGeom prst="rect">
-            <a:avLst/>
-          </a:prstGeom>
-          <a:noFill/>
-        </p:spPr>
-        <p:txBody>
-          <a:bodyPr wrap="square" lIns="0" rIns="0" tIns="0" bIns="0" anchor="t">
-            <a:spAutoFit/>
-          </a:bodyPr>
-          <a:lstStyle/>
-          <a:p>
-            <a:pPr algn="l"/>
-            <a:r>
-              <a:rPr sz="1500" b="1" i="0">
+              <a:t>04</a:t>
+            </a:r>
+          </a:p>
+        </p:txBody>
+      </p:sp>
+      <p:sp>
+        <p:nvSpPr>
+          <p:cNvPr id="18" name="TextBox 17"/>
+          <p:cNvSpPr txBox="1"/>
+          <p:nvPr/>
+        </p:nvSpPr>
+        <p:spPr>
+          <a:xfrm>
+            <a:off x="596899" y="4528630"/>
+            <a:ext cx="4446676" cy="748008"/>
+          </a:xfrm>
+          <a:prstGeom prst="rect">
+            <a:avLst/>
+          </a:prstGeom>
+          <a:noFill/>
+        </p:spPr>
+        <p:txBody>
+          <a:bodyPr wrap="square" lIns="0" rIns="0" tIns="0" bIns="0" anchor="t">
+            <a:spAutoFit/>
+          </a:bodyPr>
+          <a:lstStyle/>
+          <a:p>
+            <a:pPr algn="l">
+              <a:lnSpc>
+                <a:spcPct val="120000"/>
+              </a:lnSpc>
+            </a:pPr>
+            <a:r>
+              <a:rPr sz="2200" b="1" i="1">
                 <a:solidFill>
                   <a:srgbClr val="7A4F5E"/>
                 </a:solidFill>
-                <a:latin typeface="Outfit"/>
-              </a:rPr>
-              <a:t>04</a:t>
-            </a:r>
-          </a:p>
-        </p:txBody>
-      </p:sp>
-      <p:sp>
-        <p:nvSpPr>
-          <p:cNvPr id="18" name="TextBox 17"/>
-          <p:cNvSpPr txBox="1"/>
-          <p:nvPr/>
-        </p:nvSpPr>
-        <p:spPr>
-          <a:xfrm>
-            <a:off x="596899" y="4554030"/>
-            <a:ext cx="5245087" cy="708619"/>
-          </a:xfrm>
-          <a:prstGeom prst="rect">
-            <a:avLst/>
-          </a:prstGeom>
-          <a:noFill/>
-        </p:spPr>
-        <p:txBody>
-          <a:bodyPr wrap="square" lIns="0" rIns="0" tIns="0" bIns="0" anchor="t">
-            <a:spAutoFit/>
-          </a:bodyPr>
-          <a:lstStyle/>
-          <a:p>
-            <a:pPr algn="l">
-              <a:lnSpc>
-                <a:spcPct val="120000"/>
-              </a:lnSpc>
-            </a:pPr>
-            <a:r>
-              <a:rPr sz="3300" b="1" i="1">
-                <a:solidFill>
-                  <a:srgbClr val="7A4F5E"/>
-                </a:solidFill>
                 <a:latin typeface="Playfair Display"/>
               </a:rPr>
               <a:t>Questa è la mappa genetica del tuo inconscio.</a:t>
@@ -12512,8 +12885,8 @@
         </p:nvSpPr>
         <p:spPr>
           <a:xfrm>
-            <a:off x="8648678" y="6057885"/>
-            <a:ext cx="1705566" cy="215899"/>
+            <a:off x="8648678" y="6064235"/>
+            <a:ext cx="1718266" cy="196850"/>
           </a:xfrm>
           <a:prstGeom prst="rect">
             <a:avLst/>
@@ -12532,7 +12905,7 @@
               </a:lnSpc>
             </a:pPr>
             <a:r>
-              <a:rPr sz="1500" b="0" i="0">
+              <a:rPr sz="1000" b="0" i="0">
                 <a:solidFill>
                   <a:srgbClr val="6B625D"/>
                 </a:solidFill>
@@ -12551,8 +12924,8 @@
         </p:nvSpPr>
         <p:spPr>
           <a:xfrm>
-            <a:off x="596899" y="6426184"/>
-            <a:ext cx="175418" cy="152400"/>
+            <a:off x="596899" y="6407134"/>
+            <a:ext cx="188118" cy="184150"/>
           </a:xfrm>
           <a:prstGeom prst="rect">
             <a:avLst/>
@@ -12571,7 +12944,7 @@
               </a:lnSpc>
             </a:pPr>
             <a:r>
-              <a:rPr sz="1350" b="0" i="0">
+              <a:rPr sz="900" b="0" i="0">
                 <a:solidFill>
                   <a:srgbClr val="6B625D"/>
                 </a:solidFill>
@@ -12590,8 +12963,8 @@
         </p:nvSpPr>
         <p:spPr>
           <a:xfrm>
-            <a:off x="9960545" y="6407134"/>
-            <a:ext cx="1266227" cy="152400"/>
+            <a:off x="9960545" y="6388084"/>
+            <a:ext cx="1278926" cy="184150"/>
           </a:xfrm>
           <a:prstGeom prst="rect">
             <a:avLst/>
@@ -12610,7 +12983,7 @@
               </a:lnSpc>
             </a:pPr>
             <a:r>
-              <a:rPr sz="1350" b="0" i="0">
+              <a:rPr sz="900" b="0" i="0">
                 <a:solidFill>
                   <a:srgbClr val="6B625D"/>
                 </a:solidFill>
@@ -12751,8 +13124,8 @@
         </p:nvSpPr>
         <p:spPr>
           <a:xfrm>
-            <a:off x="596899" y="444499"/>
-            <a:ext cx="3172313" cy="177800"/>
+            <a:off x="596899" y="425449"/>
+            <a:ext cx="3185013" cy="215899"/>
           </a:xfrm>
           <a:prstGeom prst="rect">
             <a:avLst/>
@@ -12771,7 +13144,7 @@
               </a:lnSpc>
             </a:pPr>
             <a:r>
-              <a:rPr sz="1650" b="1" i="0">
+              <a:rPr sz="1100" b="1" i="0">
                 <a:solidFill>
                   <a:srgbClr val="7A4F5E"/>
                 </a:solidFill>
@@ -12790,8 +13163,8 @@
         </p:nvSpPr>
         <p:spPr>
           <a:xfrm>
-            <a:off x="596899" y="673098"/>
-            <a:ext cx="1713305" cy="485079"/>
+            <a:off x="596899" y="622298"/>
+            <a:ext cx="1726005" cy="577849"/>
           </a:xfrm>
           <a:prstGeom prst="rect">
             <a:avLst/>
@@ -12810,7 +13183,7 @@
               </a:lnSpc>
             </a:pPr>
             <a:r>
-              <a:rPr sz="4800" b="1" i="0">
+              <a:rPr sz="3200" b="1" i="0">
                 <a:solidFill>
                   <a:srgbClr val="3A3532"/>
                 </a:solidFill>
@@ -12829,8 +13202,8 @@
         </p:nvSpPr>
         <p:spPr>
           <a:xfrm>
-            <a:off x="2437203" y="692148"/>
-            <a:ext cx="236438" cy="444499"/>
+            <a:off x="2437203" y="622298"/>
+            <a:ext cx="249138" cy="577849"/>
           </a:xfrm>
           <a:prstGeom prst="rect">
             <a:avLst/>
@@ -12849,7 +13222,7 @@
               </a:lnSpc>
             </a:pPr>
             <a:r>
-              <a:rPr sz="4800" b="1" i="0">
+              <a:rPr sz="3200" b="1" i="0">
                 <a:solidFill>
                   <a:srgbClr val="7A4F5E"/>
                 </a:solidFill>
@@ -12868,8 +13241,8 @@
         </p:nvSpPr>
         <p:spPr>
           <a:xfrm>
-            <a:off x="9509597" y="444499"/>
-            <a:ext cx="2098174" cy="266699"/>
+            <a:off x="9522297" y="425449"/>
+            <a:ext cx="2085474" cy="298449"/>
           </a:xfrm>
           <a:prstGeom prst="rect">
             <a:avLst/>
@@ -12879,7 +13252,7 @@
           </a:solidFill>
         </p:spPr>
         <p:txBody>
-          <a:bodyPr wrap="square" lIns="76200" rIns="76200" tIns="38100" bIns="38100" anchor="t">
+          <a:bodyPr wrap="square" lIns="114300" rIns="114300" tIns="57150" bIns="57150" anchor="t">
             <a:spAutoFit/>
           </a:bodyPr>
           <a:lstStyle/>
@@ -12890,7 +13263,7 @@
               </a:lnSpc>
             </a:pPr>
             <a:r>
-              <a:rPr sz="1350" b="1" i="0">
+              <a:rPr sz="900" b="1" i="0">
                 <a:solidFill>
                   <a:srgbClr val="1C3A36"/>
                 </a:solidFill>
@@ -12909,8 +13282,82 @@
         </p:nvSpPr>
         <p:spPr>
           <a:xfrm>
+            <a:off x="965198" y="2385114"/>
+            <a:ext cx="1880389" cy="260349"/>
+          </a:xfrm>
+          <a:prstGeom prst="rect">
+            <a:avLst/>
+          </a:prstGeom>
+          <a:noFill/>
+        </p:spPr>
+        <p:txBody>
+          <a:bodyPr wrap="square" lIns="0" rIns="0" tIns="0" bIns="0" anchor="t">
+            <a:spAutoFit/>
+          </a:bodyPr>
+          <a:lstStyle/>
+          <a:p>
+            <a:pPr algn="l">
+              <a:lnSpc>
+                <a:spcPct val="145000"/>
+              </a:lnSpc>
+            </a:pPr>
+            <a:r>
+              <a:rPr sz="1400" b="0" i="0">
+                <a:solidFill>
+                  <a:srgbClr val="3A3532"/>
+                </a:solidFill>
+                <a:latin typeface="Outfit"/>
+              </a:rPr>
+              <a:t>Prendi una penna nera.</a:t>
+            </a:r>
+          </a:p>
+        </p:txBody>
+      </p:sp>
+      <p:sp>
+        <p:nvSpPr>
+          <p:cNvPr id="11" name="TextBox 10"/>
+          <p:cNvSpPr txBox="1"/>
+          <p:nvPr/>
+        </p:nvSpPr>
+        <p:spPr>
+          <a:xfrm>
             <a:off x="596899" y="2372414"/>
-            <a:ext cx="4102090" cy="295870"/>
+            <a:ext cx="368299" cy="228599"/>
+          </a:xfrm>
+          <a:prstGeom prst="rect">
+            <a:avLst/>
+          </a:prstGeom>
+          <a:noFill/>
+        </p:spPr>
+        <p:txBody>
+          <a:bodyPr wrap="square" lIns="0" rIns="0" tIns="0" bIns="0" anchor="t">
+            <a:spAutoFit/>
+          </a:bodyPr>
+          <a:lstStyle/>
+          <a:p>
+            <a:pPr algn="l"/>
+            <a:r>
+              <a:rPr sz="1000" b="1" i="0">
+                <a:solidFill>
+                  <a:srgbClr val="7A4F5E"/>
+                </a:solidFill>
+                <a:latin typeface="Outfit"/>
+              </a:rPr>
+              <a:t>01</a:t>
+            </a:r>
+          </a:p>
+        </p:txBody>
+      </p:sp>
+      <p:sp>
+        <p:nvSpPr>
+          <p:cNvPr id="12" name="TextBox 11"/>
+          <p:cNvSpPr txBox="1"/>
+          <p:nvPr/>
+        </p:nvSpPr>
+        <p:spPr>
+          <a:xfrm>
+            <a:off x="965198" y="2769883"/>
+            <a:ext cx="3077659" cy="518119"/>
           </a:xfrm>
           <a:prstGeom prst="rect">
             <a:avLst/>
@@ -12929,27 +13376,27 @@
               </a:lnSpc>
             </a:pPr>
             <a:r>
-              <a:rPr sz="2100" b="0" i="0">
+              <a:rPr sz="1400" b="0" i="0">
                 <a:solidFill>
                   <a:srgbClr val="3A3532"/>
                 </a:solidFill>
                 <a:latin typeface="Outfit"/>
               </a:rPr>
-              <a:t>Prendi una penna nera.</a:t>
-            </a:r>
-          </a:p>
-        </p:txBody>
-      </p:sp>
-      <p:sp>
-        <p:nvSpPr>
-          <p:cNvPr id="11" name="TextBox 10"/>
-          <p:cNvSpPr txBox="1"/>
-          <p:nvPr/>
-        </p:nvSpPr>
-        <p:spPr>
-          <a:xfrm>
-            <a:off x="596899" y="2372414"/>
-            <a:ext cx="355599" cy="228599"/>
+              <a:t>Guarda le porte nere del tuo Disegno e colorale.</a:t>
+            </a:r>
+          </a:p>
+        </p:txBody>
+      </p:sp>
+      <p:sp>
+        <p:nvSpPr>
+          <p:cNvPr id="13" name="TextBox 12"/>
+          <p:cNvSpPr txBox="1"/>
+          <p:nvPr/>
+        </p:nvSpPr>
+        <p:spPr>
+          <a:xfrm>
+            <a:off x="596899" y="2757183"/>
+            <a:ext cx="368299" cy="228599"/>
           </a:xfrm>
           <a:prstGeom prst="rect">
             <a:avLst/>
@@ -12964,27 +13411,27 @@
           <a:p>
             <a:pPr algn="l"/>
             <a:r>
-              <a:rPr sz="1500" b="1" i="0">
+              <a:rPr sz="1000" b="1" i="0">
                 <a:solidFill>
                   <a:srgbClr val="7A4F5E"/>
                 </a:solidFill>
                 <a:latin typeface="Outfit"/>
               </a:rPr>
-              <a:t>01</a:t>
-            </a:r>
-          </a:p>
-        </p:txBody>
-      </p:sp>
-      <p:sp>
-        <p:nvSpPr>
-          <p:cNvPr id="12" name="TextBox 11"/>
-          <p:cNvSpPr txBox="1"/>
-          <p:nvPr/>
-        </p:nvSpPr>
-        <p:spPr>
-          <a:xfrm>
-            <a:off x="596899" y="2757183"/>
-            <a:ext cx="4102090" cy="553639"/>
+              <a:t>02</a:t>
+            </a:r>
+          </a:p>
+        </p:txBody>
+      </p:sp>
+      <p:sp>
+        <p:nvSpPr>
+          <p:cNvPr id="14" name="TextBox 13"/>
+          <p:cNvSpPr txBox="1"/>
+          <p:nvPr/>
+        </p:nvSpPr>
+        <p:spPr>
+          <a:xfrm>
+            <a:off x="965198" y="3412422"/>
+            <a:ext cx="2039139" cy="260349"/>
           </a:xfrm>
           <a:prstGeom prst="rect">
             <a:avLst/>
@@ -13003,27 +13450,27 @@
               </a:lnSpc>
             </a:pPr>
             <a:r>
-              <a:rPr sz="2100" b="0" i="0">
+              <a:rPr sz="1400" b="0" i="0">
                 <a:solidFill>
                   <a:srgbClr val="3A3532"/>
                 </a:solidFill>
                 <a:latin typeface="Outfit"/>
               </a:rPr>
-              <a:t>Guarda le porte nere del tuo Disegno e colorale.</a:t>
-            </a:r>
-          </a:p>
-        </p:txBody>
-      </p:sp>
-      <p:sp>
-        <p:nvSpPr>
-          <p:cNvPr id="13" name="TextBox 12"/>
-          <p:cNvSpPr txBox="1"/>
-          <p:nvPr/>
-        </p:nvSpPr>
-        <p:spPr>
-          <a:xfrm>
-            <a:off x="596899" y="2757183"/>
-            <a:ext cx="355599" cy="228599"/>
+              <a:t>Unisci gli eventuali canali.</a:t>
+            </a:r>
+          </a:p>
+        </p:txBody>
+      </p:sp>
+      <p:sp>
+        <p:nvSpPr>
+          <p:cNvPr id="15" name="TextBox 14"/>
+          <p:cNvSpPr txBox="1"/>
+          <p:nvPr/>
+        </p:nvSpPr>
+        <p:spPr>
+          <a:xfrm>
+            <a:off x="596899" y="3399722"/>
+            <a:ext cx="368299" cy="228599"/>
           </a:xfrm>
           <a:prstGeom prst="rect">
             <a:avLst/>
@@ -13038,27 +13485,27 @@
           <a:p>
             <a:pPr algn="l"/>
             <a:r>
-              <a:rPr sz="1500" b="1" i="0">
+              <a:rPr sz="1000" b="1" i="0">
                 <a:solidFill>
                   <a:srgbClr val="7A4F5E"/>
                 </a:solidFill>
                 <a:latin typeface="Outfit"/>
               </a:rPr>
-              <a:t>02</a:t>
-            </a:r>
-          </a:p>
-        </p:txBody>
-      </p:sp>
-      <p:sp>
-        <p:nvSpPr>
-          <p:cNvPr id="14" name="TextBox 13"/>
-          <p:cNvSpPr txBox="1"/>
-          <p:nvPr/>
-        </p:nvSpPr>
-        <p:spPr>
-          <a:xfrm>
-            <a:off x="596899" y="3399722"/>
-            <a:ext cx="4102090" cy="295870"/>
+              <a:t>03</a:t>
+            </a:r>
+          </a:p>
+        </p:txBody>
+      </p:sp>
+      <p:sp>
+        <p:nvSpPr>
+          <p:cNvPr id="16" name="TextBox 15"/>
+          <p:cNvSpPr txBox="1"/>
+          <p:nvPr/>
+        </p:nvSpPr>
+        <p:spPr>
+          <a:xfrm>
+            <a:off x="965198" y="3797191"/>
+            <a:ext cx="3444866" cy="518119"/>
           </a:xfrm>
           <a:prstGeom prst="rect">
             <a:avLst/>
@@ -13077,27 +13524,27 @@
               </a:lnSpc>
             </a:pPr>
             <a:r>
-              <a:rPr sz="2100" b="0" i="0">
+              <a:rPr sz="1400" b="0" i="0">
                 <a:solidFill>
                   <a:srgbClr val="3A3532"/>
                 </a:solidFill>
                 <a:latin typeface="Outfit"/>
               </a:rPr>
-              <a:t>Unisci gli eventuali canali.</a:t>
-            </a:r>
-          </a:p>
-        </p:txBody>
-      </p:sp>
-      <p:sp>
-        <p:nvSpPr>
-          <p:cNvPr id="15" name="TextBox 14"/>
-          <p:cNvSpPr txBox="1"/>
-          <p:nvPr/>
-        </p:nvSpPr>
-        <p:spPr>
-          <a:xfrm>
-            <a:off x="596899" y="3399722"/>
-            <a:ext cx="355599" cy="228599"/>
+              <a:t>Colora gli eventuali centri che si definiscono attraverso i canali.</a:t>
+            </a:r>
+          </a:p>
+        </p:txBody>
+      </p:sp>
+      <p:sp>
+        <p:nvSpPr>
+          <p:cNvPr id="17" name="TextBox 16"/>
+          <p:cNvSpPr txBox="1"/>
+          <p:nvPr/>
+        </p:nvSpPr>
+        <p:spPr>
+          <a:xfrm>
+            <a:off x="596899" y="3784491"/>
+            <a:ext cx="368299" cy="228599"/>
           </a:xfrm>
           <a:prstGeom prst="rect">
             <a:avLst/>
@@ -13112,123 +13559,49 @@
           <a:p>
             <a:pPr algn="l"/>
             <a:r>
-              <a:rPr sz="1500" b="1" i="0">
+              <a:rPr sz="1000" b="1" i="0">
                 <a:solidFill>
                   <a:srgbClr val="7A4F5E"/>
                 </a:solidFill>
                 <a:latin typeface="Outfit"/>
               </a:rPr>
-              <a:t>03</a:t>
-            </a:r>
-          </a:p>
-        </p:txBody>
-      </p:sp>
-      <p:sp>
-        <p:nvSpPr>
-          <p:cNvPr id="16" name="TextBox 15"/>
-          <p:cNvSpPr txBox="1"/>
-          <p:nvPr/>
-        </p:nvSpPr>
-        <p:spPr>
-          <a:xfrm>
-            <a:off x="596899" y="3784491"/>
-            <a:ext cx="4102090" cy="553639"/>
-          </a:xfrm>
-          <a:prstGeom prst="rect">
-            <a:avLst/>
-          </a:prstGeom>
-          <a:noFill/>
-        </p:spPr>
-        <p:txBody>
-          <a:bodyPr wrap="square" lIns="0" rIns="0" tIns="0" bIns="0" anchor="t">
-            <a:spAutoFit/>
-          </a:bodyPr>
-          <a:lstStyle/>
-          <a:p>
-            <a:pPr algn="l">
-              <a:lnSpc>
-                <a:spcPct val="145000"/>
-              </a:lnSpc>
-            </a:pPr>
-            <a:r>
-              <a:rPr sz="2100" b="0" i="0">
-                <a:solidFill>
-                  <a:srgbClr val="3A3532"/>
-                </a:solidFill>
-                <a:latin typeface="Outfit"/>
-              </a:rPr>
-              <a:t>Colora gli eventuali centri che si definiscono attraverso i canali.</a:t>
-            </a:r>
-          </a:p>
-        </p:txBody>
-      </p:sp>
-      <p:sp>
-        <p:nvSpPr>
-          <p:cNvPr id="17" name="TextBox 16"/>
-          <p:cNvSpPr txBox="1"/>
-          <p:nvPr/>
-        </p:nvSpPr>
-        <p:spPr>
-          <a:xfrm>
-            <a:off x="596899" y="3784491"/>
-            <a:ext cx="355599" cy="228599"/>
-          </a:xfrm>
-          <a:prstGeom prst="rect">
-            <a:avLst/>
-          </a:prstGeom>
-          <a:noFill/>
-        </p:spPr>
-        <p:txBody>
-          <a:bodyPr wrap="square" lIns="0" rIns="0" tIns="0" bIns="0" anchor="t">
-            <a:spAutoFit/>
-          </a:bodyPr>
-          <a:lstStyle/>
-          <a:p>
-            <a:pPr algn="l"/>
-            <a:r>
-              <a:rPr sz="1500" b="1" i="0">
+              <a:t>04</a:t>
+            </a:r>
+          </a:p>
+        </p:txBody>
+      </p:sp>
+      <p:sp>
+        <p:nvSpPr>
+          <p:cNvPr id="18" name="TextBox 17"/>
+          <p:cNvSpPr txBox="1"/>
+          <p:nvPr/>
+        </p:nvSpPr>
+        <p:spPr>
+          <a:xfrm>
+            <a:off x="596899" y="4528630"/>
+            <a:ext cx="5108562" cy="748008"/>
+          </a:xfrm>
+          <a:prstGeom prst="rect">
+            <a:avLst/>
+          </a:prstGeom>
+          <a:noFill/>
+        </p:spPr>
+        <p:txBody>
+          <a:bodyPr wrap="square" lIns="0" rIns="0" tIns="0" bIns="0" anchor="t">
+            <a:spAutoFit/>
+          </a:bodyPr>
+          <a:lstStyle/>
+          <a:p>
+            <a:pPr algn="l">
+              <a:lnSpc>
+                <a:spcPct val="120000"/>
+              </a:lnSpc>
+            </a:pPr>
+            <a:r>
+              <a:rPr sz="2200" b="1" i="1">
                 <a:solidFill>
                   <a:srgbClr val="7A4F5E"/>
                 </a:solidFill>
-                <a:latin typeface="Outfit"/>
-              </a:rPr>
-              <a:t>04</a:t>
-            </a:r>
-          </a:p>
-        </p:txBody>
-      </p:sp>
-      <p:sp>
-        <p:nvSpPr>
-          <p:cNvPr id="18" name="TextBox 17"/>
-          <p:cNvSpPr txBox="1"/>
-          <p:nvPr/>
-        </p:nvSpPr>
-        <p:spPr>
-          <a:xfrm>
-            <a:off x="596899" y="4554030"/>
-            <a:ext cx="5245087" cy="708619"/>
-          </a:xfrm>
-          <a:prstGeom prst="rect">
-            <a:avLst/>
-          </a:prstGeom>
-          <a:noFill/>
-        </p:spPr>
-        <p:txBody>
-          <a:bodyPr wrap="square" lIns="0" rIns="0" tIns="0" bIns="0" anchor="t">
-            <a:spAutoFit/>
-          </a:bodyPr>
-          <a:lstStyle/>
-          <a:p>
-            <a:pPr algn="l">
-              <a:lnSpc>
-                <a:spcPct val="120000"/>
-              </a:lnSpc>
-            </a:pPr>
-            <a:r>
-              <a:rPr sz="3300" b="1" i="1">
-                <a:solidFill>
-                  <a:srgbClr val="7A4F5E"/>
-                </a:solidFill>
                 <a:latin typeface="Playfair Display"/>
               </a:rPr>
               <a:t>Questa è la mappa della tua personalità conscia.</a:t>
@@ -13244,8 +13617,8 @@
         </p:nvSpPr>
         <p:spPr>
           <a:xfrm>
-            <a:off x="8648678" y="6057885"/>
-            <a:ext cx="1662604" cy="215899"/>
+            <a:off x="8648678" y="6064235"/>
+            <a:ext cx="1675304" cy="196850"/>
           </a:xfrm>
           <a:prstGeom prst="rect">
             <a:avLst/>
@@ -13264,7 +13637,7 @@
               </a:lnSpc>
             </a:pPr>
             <a:r>
-              <a:rPr sz="1500" b="0" i="0">
+              <a:rPr sz="1000" b="0" i="0">
                 <a:solidFill>
                   <a:srgbClr val="6B625D"/>
                 </a:solidFill>
@@ -13283,8 +13656,8 @@
         </p:nvSpPr>
         <p:spPr>
           <a:xfrm>
-            <a:off x="596899" y="6426184"/>
-            <a:ext cx="182165" cy="152400"/>
+            <a:off x="596899" y="6407134"/>
+            <a:ext cx="194865" cy="184150"/>
           </a:xfrm>
           <a:prstGeom prst="rect">
             <a:avLst/>
@@ -13303,7 +13676,7 @@
               </a:lnSpc>
             </a:pPr>
             <a:r>
-              <a:rPr sz="1350" b="0" i="0">
+              <a:rPr sz="900" b="0" i="0">
                 <a:solidFill>
                   <a:srgbClr val="6B625D"/>
                 </a:solidFill>
@@ -13322,8 +13695,8 @@
         </p:nvSpPr>
         <p:spPr>
           <a:xfrm>
-            <a:off x="9960545" y="6407134"/>
-            <a:ext cx="1266227" cy="152400"/>
+            <a:off x="9960545" y="6388084"/>
+            <a:ext cx="1278926" cy="184150"/>
           </a:xfrm>
           <a:prstGeom prst="rect">
             <a:avLst/>
@@ -13342,7 +13715,7 @@
               </a:lnSpc>
             </a:pPr>
             <a:r>
-              <a:rPr sz="1350" b="0" i="0">
+              <a:rPr sz="900" b="0" i="0">
                 <a:solidFill>
                   <a:srgbClr val="6B625D"/>
                 </a:solidFill>
@@ -13483,8 +13856,8 @@
         </p:nvSpPr>
         <p:spPr>
           <a:xfrm>
-            <a:off x="596899" y="444499"/>
-            <a:ext cx="3172313" cy="177800"/>
+            <a:off x="596899" y="425449"/>
+            <a:ext cx="3185013" cy="215899"/>
           </a:xfrm>
           <a:prstGeom prst="rect">
             <a:avLst/>
@@ -13503,7 +13876,7 @@
               </a:lnSpc>
             </a:pPr>
             <a:r>
-              <a:rPr sz="1650" b="1" i="0">
+              <a:rPr sz="1100" b="1" i="0">
                 <a:solidFill>
                   <a:srgbClr val="7A4F5E"/>
                 </a:solidFill>
@@ -13522,8 +13895,8 @@
         </p:nvSpPr>
         <p:spPr>
           <a:xfrm>
-            <a:off x="596899" y="673098"/>
-            <a:ext cx="1713305" cy="485079"/>
+            <a:off x="596899" y="622298"/>
+            <a:ext cx="1726005" cy="577849"/>
           </a:xfrm>
           <a:prstGeom prst="rect">
             <a:avLst/>
@@ -13542,7 +13915,7 @@
               </a:lnSpc>
             </a:pPr>
             <a:r>
-              <a:rPr sz="4800" b="1" i="0">
+              <a:rPr sz="3200" b="1" i="0">
                 <a:solidFill>
                   <a:srgbClr val="3A3532"/>
                 </a:solidFill>
@@ -13561,8 +13934,8 @@
         </p:nvSpPr>
         <p:spPr>
           <a:xfrm>
-            <a:off x="2437203" y="692148"/>
-            <a:ext cx="252710" cy="444499"/>
+            <a:off x="2437203" y="622298"/>
+            <a:ext cx="265409" cy="577849"/>
           </a:xfrm>
           <a:prstGeom prst="rect">
             <a:avLst/>
@@ -13581,7 +13954,7 @@
               </a:lnSpc>
             </a:pPr>
             <a:r>
-              <a:rPr sz="4800" b="1" i="0">
+              <a:rPr sz="3200" b="1" i="0">
                 <a:solidFill>
                   <a:srgbClr val="7A4F5E"/>
                 </a:solidFill>
@@ -13600,8 +13973,8 @@
         </p:nvSpPr>
         <p:spPr>
           <a:xfrm>
-            <a:off x="9509597" y="444499"/>
-            <a:ext cx="2098174" cy="266699"/>
+            <a:off x="9522297" y="425449"/>
+            <a:ext cx="2085474" cy="298449"/>
           </a:xfrm>
           <a:prstGeom prst="rect">
             <a:avLst/>
@@ -13611,7 +13984,7 @@
           </a:solidFill>
         </p:spPr>
         <p:txBody>
-          <a:bodyPr wrap="square" lIns="76200" rIns="76200" tIns="38100" bIns="38100" anchor="t">
+          <a:bodyPr wrap="square" lIns="114300" rIns="114300" tIns="57150" bIns="57150" anchor="t">
             <a:spAutoFit/>
           </a:bodyPr>
           <a:lstStyle/>
@@ -13622,7 +13995,7 @@
               </a:lnSpc>
             </a:pPr>
             <a:r>
-              <a:rPr sz="1350" b="1" i="0">
+              <a:rPr sz="900" b="1" i="0">
                 <a:solidFill>
                   <a:srgbClr val="1C3A36"/>
                 </a:solidFill>
@@ -13641,8 +14014,82 @@
         </p:nvSpPr>
         <p:spPr>
           <a:xfrm>
+            <a:off x="965198" y="2385114"/>
+            <a:ext cx="2957505" cy="260349"/>
+          </a:xfrm>
+          <a:prstGeom prst="rect">
+            <a:avLst/>
+          </a:prstGeom>
+          <a:noFill/>
+        </p:spPr>
+        <p:txBody>
+          <a:bodyPr wrap="square" lIns="0" rIns="0" tIns="0" bIns="0" anchor="t">
+            <a:spAutoFit/>
+          </a:bodyPr>
+          <a:lstStyle/>
+          <a:p>
+            <a:pPr algn="l">
+              <a:lnSpc>
+                <a:spcPct val="145000"/>
+              </a:lnSpc>
+            </a:pPr>
+            <a:r>
+              <a:rPr sz="1400" b="0" i="0">
+                <a:solidFill>
+                  <a:srgbClr val="3A3532"/>
+                </a:solidFill>
+                <a:latin typeface="Outfit"/>
+              </a:rPr>
+              <a:t>Prendi una penna del colore che vuoi.</a:t>
+            </a:r>
+          </a:p>
+        </p:txBody>
+      </p:sp>
+      <p:sp>
+        <p:nvSpPr>
+          <p:cNvPr id="11" name="TextBox 10"/>
+          <p:cNvSpPr txBox="1"/>
+          <p:nvPr/>
+        </p:nvSpPr>
+        <p:spPr>
+          <a:xfrm>
             <a:off x="596899" y="2372414"/>
-            <a:ext cx="4102090" cy="295870"/>
+            <a:ext cx="368299" cy="228599"/>
+          </a:xfrm>
+          <a:prstGeom prst="rect">
+            <a:avLst/>
+          </a:prstGeom>
+          <a:noFill/>
+        </p:spPr>
+        <p:txBody>
+          <a:bodyPr wrap="square" lIns="0" rIns="0" tIns="0" bIns="0" anchor="t">
+            <a:spAutoFit/>
+          </a:bodyPr>
+          <a:lstStyle/>
+          <a:p>
+            <a:pPr algn="l"/>
+            <a:r>
+              <a:rPr sz="1000" b="1" i="0">
+                <a:solidFill>
+                  <a:srgbClr val="7A4F5E"/>
+                </a:solidFill>
+                <a:latin typeface="Outfit"/>
+              </a:rPr>
+              <a:t>01</a:t>
+            </a:r>
+          </a:p>
+        </p:txBody>
+      </p:sp>
+      <p:sp>
+        <p:nvSpPr>
+          <p:cNvPr id="12" name="TextBox 11"/>
+          <p:cNvSpPr txBox="1"/>
+          <p:nvPr/>
+        </p:nvSpPr>
+        <p:spPr>
+          <a:xfrm>
+            <a:off x="965198" y="2769883"/>
+            <a:ext cx="3606593" cy="518119"/>
           </a:xfrm>
           <a:prstGeom prst="rect">
             <a:avLst/>
@@ -13661,27 +14108,27 @@
               </a:lnSpc>
             </a:pPr>
             <a:r>
-              <a:rPr sz="2100" b="0" i="0">
+              <a:rPr sz="1400" b="0" i="0">
                 <a:solidFill>
                   <a:srgbClr val="3A3532"/>
                 </a:solidFill>
                 <a:latin typeface="Outfit"/>
               </a:rPr>
-              <a:t>Prendi una penna del colore che vuoi.</a:t>
-            </a:r>
-          </a:p>
-        </p:txBody>
-      </p:sp>
-      <p:sp>
-        <p:nvSpPr>
-          <p:cNvPr id="11" name="TextBox 10"/>
-          <p:cNvSpPr txBox="1"/>
-          <p:nvPr/>
-        </p:nvSpPr>
-        <p:spPr>
-          <a:xfrm>
-            <a:off x="596899" y="2372414"/>
-            <a:ext cx="355599" cy="228599"/>
+              <a:t>Guarda le porte che nel tuo Disegno non sono definite e colorale.</a:t>
+            </a:r>
+          </a:p>
+        </p:txBody>
+      </p:sp>
+      <p:sp>
+        <p:nvSpPr>
+          <p:cNvPr id="13" name="TextBox 12"/>
+          <p:cNvSpPr txBox="1"/>
+          <p:nvPr/>
+        </p:nvSpPr>
+        <p:spPr>
+          <a:xfrm>
+            <a:off x="596899" y="2757183"/>
+            <a:ext cx="368299" cy="228599"/>
           </a:xfrm>
           <a:prstGeom prst="rect">
             <a:avLst/>
@@ -13696,27 +14143,27 @@
           <a:p>
             <a:pPr algn="l"/>
             <a:r>
-              <a:rPr sz="1500" b="1" i="0">
+              <a:rPr sz="1000" b="1" i="0">
                 <a:solidFill>
                   <a:srgbClr val="7A4F5E"/>
                 </a:solidFill>
                 <a:latin typeface="Outfit"/>
               </a:rPr>
-              <a:t>01</a:t>
-            </a:r>
-          </a:p>
-        </p:txBody>
-      </p:sp>
-      <p:sp>
-        <p:nvSpPr>
-          <p:cNvPr id="12" name="TextBox 11"/>
-          <p:cNvSpPr txBox="1"/>
-          <p:nvPr/>
-        </p:nvSpPr>
-        <p:spPr>
-          <a:xfrm>
-            <a:off x="596899" y="2757183"/>
-            <a:ext cx="4102090" cy="553639"/>
+              <a:t>02</a:t>
+            </a:r>
+          </a:p>
+        </p:txBody>
+      </p:sp>
+      <p:sp>
+        <p:nvSpPr>
+          <p:cNvPr id="14" name="TextBox 13"/>
+          <p:cNvSpPr txBox="1"/>
+          <p:nvPr/>
+        </p:nvSpPr>
+        <p:spPr>
+          <a:xfrm>
+            <a:off x="965198" y="3412422"/>
+            <a:ext cx="2039139" cy="260349"/>
           </a:xfrm>
           <a:prstGeom prst="rect">
             <a:avLst/>
@@ -13735,27 +14182,27 @@
               </a:lnSpc>
             </a:pPr>
             <a:r>
-              <a:rPr sz="2100" b="0" i="0">
+              <a:rPr sz="1400" b="0" i="0">
                 <a:solidFill>
                   <a:srgbClr val="3A3532"/>
                 </a:solidFill>
                 <a:latin typeface="Outfit"/>
               </a:rPr>
-              <a:t>Guarda le porte che nel tuo Disegno non sono definite e colorale.</a:t>
-            </a:r>
-          </a:p>
-        </p:txBody>
-      </p:sp>
-      <p:sp>
-        <p:nvSpPr>
-          <p:cNvPr id="13" name="TextBox 12"/>
-          <p:cNvSpPr txBox="1"/>
-          <p:nvPr/>
-        </p:nvSpPr>
-        <p:spPr>
-          <a:xfrm>
-            <a:off x="596899" y="2757183"/>
-            <a:ext cx="355599" cy="228599"/>
+              <a:t>Unisci gli eventuali canali.</a:t>
+            </a:r>
+          </a:p>
+        </p:txBody>
+      </p:sp>
+      <p:sp>
+        <p:nvSpPr>
+          <p:cNvPr id="15" name="TextBox 14"/>
+          <p:cNvSpPr txBox="1"/>
+          <p:nvPr/>
+        </p:nvSpPr>
+        <p:spPr>
+          <a:xfrm>
+            <a:off x="596899" y="3399722"/>
+            <a:ext cx="368299" cy="228599"/>
           </a:xfrm>
           <a:prstGeom prst="rect">
             <a:avLst/>
@@ -13770,27 +14217,27 @@
           <a:p>
             <a:pPr algn="l"/>
             <a:r>
-              <a:rPr sz="1500" b="1" i="0">
+              <a:rPr sz="1000" b="1" i="0">
                 <a:solidFill>
                   <a:srgbClr val="7A4F5E"/>
                 </a:solidFill>
                 <a:latin typeface="Outfit"/>
               </a:rPr>
-              <a:t>02</a:t>
-            </a:r>
-          </a:p>
-        </p:txBody>
-      </p:sp>
-      <p:sp>
-        <p:nvSpPr>
-          <p:cNvPr id="14" name="TextBox 13"/>
-          <p:cNvSpPr txBox="1"/>
-          <p:nvPr/>
-        </p:nvSpPr>
-        <p:spPr>
-          <a:xfrm>
-            <a:off x="596899" y="3399722"/>
-            <a:ext cx="4102090" cy="295870"/>
+              <a:t>03</a:t>
+            </a:r>
+          </a:p>
+        </p:txBody>
+      </p:sp>
+      <p:sp>
+        <p:nvSpPr>
+          <p:cNvPr id="16" name="TextBox 15"/>
+          <p:cNvSpPr txBox="1"/>
+          <p:nvPr/>
+        </p:nvSpPr>
+        <p:spPr>
+          <a:xfrm>
+            <a:off x="965198" y="3797191"/>
+            <a:ext cx="3444866" cy="518119"/>
           </a:xfrm>
           <a:prstGeom prst="rect">
             <a:avLst/>
@@ -13809,27 +14256,27 @@
               </a:lnSpc>
             </a:pPr>
             <a:r>
-              <a:rPr sz="2100" b="0" i="0">
+              <a:rPr sz="1400" b="0" i="0">
                 <a:solidFill>
                   <a:srgbClr val="3A3532"/>
                 </a:solidFill>
                 <a:latin typeface="Outfit"/>
               </a:rPr>
-              <a:t>Unisci gli eventuali canali.</a:t>
-            </a:r>
-          </a:p>
-        </p:txBody>
-      </p:sp>
-      <p:sp>
-        <p:nvSpPr>
-          <p:cNvPr id="15" name="TextBox 14"/>
-          <p:cNvSpPr txBox="1"/>
-          <p:nvPr/>
-        </p:nvSpPr>
-        <p:spPr>
-          <a:xfrm>
-            <a:off x="596899" y="3399722"/>
-            <a:ext cx="355599" cy="228599"/>
+              <a:t>Colora gli eventuali centri che si definiscono attraverso i canali.</a:t>
+            </a:r>
+          </a:p>
+        </p:txBody>
+      </p:sp>
+      <p:sp>
+        <p:nvSpPr>
+          <p:cNvPr id="17" name="TextBox 16"/>
+          <p:cNvSpPr txBox="1"/>
+          <p:nvPr/>
+        </p:nvSpPr>
+        <p:spPr>
+          <a:xfrm>
+            <a:off x="596899" y="3784491"/>
+            <a:ext cx="368299" cy="228599"/>
           </a:xfrm>
           <a:prstGeom prst="rect">
             <a:avLst/>
@@ -13844,123 +14291,49 @@
           <a:p>
             <a:pPr algn="l"/>
             <a:r>
-              <a:rPr sz="1500" b="1" i="0">
+              <a:rPr sz="1000" b="1" i="0">
                 <a:solidFill>
                   <a:srgbClr val="7A4F5E"/>
                 </a:solidFill>
                 <a:latin typeface="Outfit"/>
               </a:rPr>
-              <a:t>03</a:t>
-            </a:r>
-          </a:p>
-        </p:txBody>
-      </p:sp>
-      <p:sp>
-        <p:nvSpPr>
-          <p:cNvPr id="16" name="TextBox 15"/>
-          <p:cNvSpPr txBox="1"/>
-          <p:nvPr/>
-        </p:nvSpPr>
-        <p:spPr>
-          <a:xfrm>
-            <a:off x="596899" y="3784491"/>
-            <a:ext cx="4102090" cy="553639"/>
-          </a:xfrm>
-          <a:prstGeom prst="rect">
-            <a:avLst/>
-          </a:prstGeom>
-          <a:noFill/>
-        </p:spPr>
-        <p:txBody>
-          <a:bodyPr wrap="square" lIns="0" rIns="0" tIns="0" bIns="0" anchor="t">
-            <a:spAutoFit/>
-          </a:bodyPr>
-          <a:lstStyle/>
-          <a:p>
-            <a:pPr algn="l">
-              <a:lnSpc>
-                <a:spcPct val="145000"/>
-              </a:lnSpc>
-            </a:pPr>
-            <a:r>
-              <a:rPr sz="2100" b="0" i="0">
-                <a:solidFill>
-                  <a:srgbClr val="3A3532"/>
-                </a:solidFill>
-                <a:latin typeface="Outfit"/>
-              </a:rPr>
-              <a:t>Colora gli eventuali centri che si definiscono attraverso i canali.</a:t>
-            </a:r>
-          </a:p>
-        </p:txBody>
-      </p:sp>
-      <p:sp>
-        <p:nvSpPr>
-          <p:cNvPr id="17" name="TextBox 16"/>
-          <p:cNvSpPr txBox="1"/>
-          <p:nvPr/>
-        </p:nvSpPr>
-        <p:spPr>
-          <a:xfrm>
-            <a:off x="596899" y="3784491"/>
-            <a:ext cx="355599" cy="228599"/>
-          </a:xfrm>
-          <a:prstGeom prst="rect">
-            <a:avLst/>
-          </a:prstGeom>
-          <a:noFill/>
-        </p:spPr>
-        <p:txBody>
-          <a:bodyPr wrap="square" lIns="0" rIns="0" tIns="0" bIns="0" anchor="t">
-            <a:spAutoFit/>
-          </a:bodyPr>
-          <a:lstStyle/>
-          <a:p>
-            <a:pPr algn="l"/>
-            <a:r>
-              <a:rPr sz="1500" b="1" i="0">
+              <a:t>04</a:t>
+            </a:r>
+          </a:p>
+        </p:txBody>
+      </p:sp>
+      <p:sp>
+        <p:nvSpPr>
+          <p:cNvPr id="18" name="TextBox 17"/>
+          <p:cNvSpPr txBox="1"/>
+          <p:nvPr/>
+        </p:nvSpPr>
+        <p:spPr>
+          <a:xfrm>
+            <a:off x="596899" y="4528630"/>
+            <a:ext cx="5228914" cy="748008"/>
+          </a:xfrm>
+          <a:prstGeom prst="rect">
+            <a:avLst/>
+          </a:prstGeom>
+          <a:noFill/>
+        </p:spPr>
+        <p:txBody>
+          <a:bodyPr wrap="square" lIns="0" rIns="0" tIns="0" bIns="0" anchor="t">
+            <a:spAutoFit/>
+          </a:bodyPr>
+          <a:lstStyle/>
+          <a:p>
+            <a:pPr algn="l">
+              <a:lnSpc>
+                <a:spcPct val="120000"/>
+              </a:lnSpc>
+            </a:pPr>
+            <a:r>
+              <a:rPr sz="2200" b="1" i="1">
                 <a:solidFill>
                   <a:srgbClr val="7A4F5E"/>
                 </a:solidFill>
-                <a:latin typeface="Outfit"/>
-              </a:rPr>
-              <a:t>04</a:t>
-            </a:r>
-          </a:p>
-        </p:txBody>
-      </p:sp>
-      <p:sp>
-        <p:nvSpPr>
-          <p:cNvPr id="18" name="TextBox 17"/>
-          <p:cNvSpPr txBox="1"/>
-          <p:nvPr/>
-        </p:nvSpPr>
-        <p:spPr>
-          <a:xfrm>
-            <a:off x="596899" y="4554030"/>
-            <a:ext cx="5245087" cy="708619"/>
-          </a:xfrm>
-          <a:prstGeom prst="rect">
-            <a:avLst/>
-          </a:prstGeom>
-          <a:noFill/>
-        </p:spPr>
-        <p:txBody>
-          <a:bodyPr wrap="square" lIns="0" rIns="0" tIns="0" bIns="0" anchor="t">
-            <a:spAutoFit/>
-          </a:bodyPr>
-          <a:lstStyle/>
-          <a:p>
-            <a:pPr algn="l">
-              <a:lnSpc>
-                <a:spcPct val="120000"/>
-              </a:lnSpc>
-            </a:pPr>
-            <a:r>
-              <a:rPr sz="3300" b="1" i="1">
-                <a:solidFill>
-                  <a:srgbClr val="7A4F5E"/>
-                </a:solidFill>
                 <a:latin typeface="Playfair Display"/>
               </a:rPr>
               <a:t>Questo è ciò che non è la tua natura, ed è dove vieni condizionato dagli altri.</a:t>
@@ -13976,8 +14349,8 @@
         </p:nvSpPr>
         <p:spPr>
           <a:xfrm>
-            <a:off x="8648678" y="6057885"/>
-            <a:ext cx="2394639" cy="215899"/>
+            <a:off x="8648678" y="6064235"/>
+            <a:ext cx="2407339" cy="196850"/>
           </a:xfrm>
           <a:prstGeom prst="rect">
             <a:avLst/>
@@ -13996,7 +14369,7 @@
               </a:lnSpc>
             </a:pPr>
             <a:r>
-              <a:rPr sz="1500" b="0" i="0">
+              <a:rPr sz="1000" b="0" i="0">
                 <a:solidFill>
                   <a:srgbClr val="6B625D"/>
                 </a:solidFill>
@@ -14015,8 +14388,8 @@
         </p:nvSpPr>
         <p:spPr>
           <a:xfrm>
-            <a:off x="596899" y="6426184"/>
-            <a:ext cx="176014" cy="152400"/>
+            <a:off x="596899" y="6407134"/>
+            <a:ext cx="188714" cy="184150"/>
           </a:xfrm>
           <a:prstGeom prst="rect">
             <a:avLst/>
@@ -14035,7 +14408,7 @@
               </a:lnSpc>
             </a:pPr>
             <a:r>
-              <a:rPr sz="1350" b="0" i="0">
+              <a:rPr sz="900" b="0" i="0">
                 <a:solidFill>
                   <a:srgbClr val="6B625D"/>
                 </a:solidFill>
@@ -14054,8 +14427,8 @@
         </p:nvSpPr>
         <p:spPr>
           <a:xfrm>
-            <a:off x="9960545" y="6407134"/>
-            <a:ext cx="1266227" cy="152400"/>
+            <a:off x="9960545" y="6388084"/>
+            <a:ext cx="1278926" cy="184150"/>
           </a:xfrm>
           <a:prstGeom prst="rect">
             <a:avLst/>
@@ -14074,7 +14447,7 @@
               </a:lnSpc>
             </a:pPr>
             <a:r>
-              <a:rPr sz="1350" b="0" i="0">
+              <a:rPr sz="900" b="0" i="0">
                 <a:solidFill>
                   <a:srgbClr val="6B625D"/>
                 </a:solidFill>
@@ -14210,8 +14583,8 @@
         </p:nvSpPr>
         <p:spPr>
           <a:xfrm>
-            <a:off x="596899" y="2078032"/>
-            <a:ext cx="11010872" cy="177800"/>
+            <a:off x="596899" y="2058982"/>
+            <a:ext cx="4104074" cy="215899"/>
           </a:xfrm>
           <a:prstGeom prst="rect">
             <a:avLst/>
@@ -14230,7 +14603,7 @@
               </a:lnSpc>
             </a:pPr>
             <a:r>
-              <a:rPr sz="1650" b="1" i="0">
+              <a:rPr sz="1100" b="1" i="0">
                 <a:solidFill>
                   <a:srgbClr val="FEBD59"/>
                 </a:solidFill>
@@ -14249,8 +14622,8 @@
         </p:nvSpPr>
         <p:spPr>
           <a:xfrm>
-            <a:off x="596899" y="2433631"/>
-            <a:ext cx="9563076" cy="1330322"/>
+            <a:off x="596899" y="2344732"/>
+            <a:ext cx="6491867" cy="1497009"/>
           </a:xfrm>
           <a:prstGeom prst="rect">
             <a:avLst/>
@@ -14269,7 +14642,7 @@
               </a:lnSpc>
             </a:pPr>
             <a:r>
-              <a:rPr sz="7200" b="1" i="0">
+              <a:rPr sz="4800" b="1" i="0">
                 <a:solidFill>
                   <a:srgbClr val="FBF7F5"/>
                 </a:solidFill>
@@ -14285,7 +14658,7 @@
               </a:lnSpc>
             </a:pPr>
             <a:r>
-              <a:rPr sz="7200" b="1" i="0">
+              <a:rPr sz="4800" b="1" i="0">
                 <a:solidFill>
                   <a:srgbClr val="FBF7F5"/>
                 </a:solidFill>
@@ -14304,8 +14677,8 @@
         </p:nvSpPr>
         <p:spPr>
           <a:xfrm>
-            <a:off x="596899" y="3979853"/>
-            <a:ext cx="11010872" cy="304799"/>
+            <a:off x="596899" y="3992553"/>
+            <a:ext cx="4383176" cy="279399"/>
           </a:xfrm>
           <a:prstGeom prst="rect">
             <a:avLst/>
@@ -14324,7 +14697,7 @@
               </a:lnSpc>
             </a:pPr>
             <a:r>
-              <a:rPr sz="2250" b="0" i="0">
+              <a:rPr sz="1500" b="0" i="0">
                 <a:solidFill>
                   <a:srgbClr val="E9D7DC"/>
                 </a:solidFill>
@@ -14343,8 +14716,8 @@
         </p:nvSpPr>
         <p:spPr>
           <a:xfrm>
-            <a:off x="596899" y="6426184"/>
-            <a:ext cx="177899" cy="152400"/>
+            <a:off x="596899" y="6407134"/>
+            <a:ext cx="190599" cy="184150"/>
           </a:xfrm>
           <a:prstGeom prst="rect">
             <a:avLst/>
@@ -14363,7 +14736,7 @@
               </a:lnSpc>
             </a:pPr>
             <a:r>
-              <a:rPr sz="1350" b="0" i="0">
+              <a:rPr sz="900" b="0" i="0">
                 <a:solidFill>
                   <a:srgbClr val="D9C4CB"/>
                 </a:solidFill>
@@ -14382,8 +14755,8 @@
         </p:nvSpPr>
         <p:spPr>
           <a:xfrm>
-            <a:off x="9960545" y="6407134"/>
-            <a:ext cx="1266227" cy="152400"/>
+            <a:off x="9960545" y="6388084"/>
+            <a:ext cx="1278926" cy="184150"/>
           </a:xfrm>
           <a:prstGeom prst="rect">
             <a:avLst/>
@@ -14402,7 +14775,7 @@
               </a:lnSpc>
             </a:pPr>
             <a:r>
-              <a:rPr sz="1350" b="0" i="0">
+              <a:rPr sz="900" b="0" i="0">
                 <a:solidFill>
                   <a:srgbClr val="D9C4CB"/>
                 </a:solidFill>
@@ -14667,8 +15040,8 @@
         </p:nvSpPr>
         <p:spPr>
           <a:xfrm>
-            <a:off x="596899" y="444499"/>
-            <a:ext cx="11010872" cy="177800"/>
+            <a:off x="596899" y="425449"/>
+            <a:ext cx="2322904" cy="215899"/>
           </a:xfrm>
           <a:prstGeom prst="rect">
             <a:avLst/>
@@ -14687,7 +15060,7 @@
               </a:lnSpc>
             </a:pPr>
             <a:r>
-              <a:rPr sz="1650" b="1" i="0">
+              <a:rPr sz="1100" b="1" i="0">
                 <a:solidFill>
                   <a:srgbClr val="7A4F5E"/>
                 </a:solidFill>
@@ -14706,8 +15079,8 @@
         </p:nvSpPr>
         <p:spPr>
           <a:xfrm>
-            <a:off x="596899" y="698498"/>
-            <a:ext cx="11010872" cy="485079"/>
+            <a:off x="596899" y="647698"/>
+            <a:ext cx="4547283" cy="577849"/>
           </a:xfrm>
           <a:prstGeom prst="rect">
             <a:avLst/>
@@ -14726,7 +15099,7 @@
               </a:lnSpc>
             </a:pPr>
             <a:r>
-              <a:rPr sz="4800" b="1" i="0">
+              <a:rPr sz="3200" b="1" i="0">
                 <a:solidFill>
                   <a:srgbClr val="3A3532"/>
                 </a:solidFill>
@@ -14745,21 +15118,16 @@
         </p:nvSpPr>
         <p:spPr>
           <a:xfrm>
-            <a:off x="596899" y="1501077"/>
-            <a:ext cx="2590794" cy="1321888"/>
-          </a:xfrm>
-          <a:prstGeom prst="rect">
-            <a:avLst/>
-          </a:prstGeom>
-          <a:noFill/>
-          <a:ln w="19050">
-            <a:solidFill>
-              <a:srgbClr val="C48A3A"/>
-            </a:solidFill>
-          </a:ln>
-        </p:spPr>
-        <p:txBody>
-          <a:bodyPr wrap="square" lIns="114300" rIns="114300" tIns="50800" bIns="50800" anchor="t">
+            <a:off x="596899" y="2097975"/>
+            <a:ext cx="2486912" cy="709809"/>
+          </a:xfrm>
+          <a:prstGeom prst="rect">
+            <a:avLst/>
+          </a:prstGeom>
+          <a:noFill/>
+        </p:spPr>
+        <p:txBody>
+          <a:bodyPr wrap="square" lIns="0" rIns="0" tIns="0" bIns="0" anchor="t">
             <a:spAutoFit/>
           </a:bodyPr>
           <a:lstStyle/>
@@ -14770,7 +15138,7 @@
               </a:lnSpc>
             </a:pPr>
             <a:r>
-              <a:rPr sz="1950" b="0" i="0">
+              <a:rPr sz="1300" b="0" i="0">
                 <a:solidFill>
                   <a:srgbClr val="3A3532"/>
                 </a:solidFill>
@@ -14789,8 +15157,8 @@
         </p:nvSpPr>
         <p:spPr>
           <a:xfrm>
-            <a:off x="596899" y="1501077"/>
-            <a:ext cx="355599" cy="228599"/>
+            <a:off x="596899" y="1640776"/>
+            <a:ext cx="812798" cy="393699"/>
           </a:xfrm>
           <a:prstGeom prst="rect">
             <a:avLst/>
@@ -14805,11 +15173,11 @@
           <a:p>
             <a:pPr algn="l"/>
             <a:r>
-              <a:rPr sz="1500" b="1" i="0">
+              <a:rPr sz="2600" b="1" i="0">
                 <a:solidFill>
                   <a:srgbClr val="7A4F5E"/>
                 </a:solidFill>
-                <a:latin typeface="Outfit"/>
+                <a:latin typeface="Playfair Display"/>
               </a:rPr>
               <a:t>01</a:t>
             </a:r>
@@ -14824,21 +15192,16 @@
         </p:nvSpPr>
         <p:spPr>
           <a:xfrm>
-            <a:off x="3403591" y="1501077"/>
-            <a:ext cx="2590794" cy="1321888"/>
-          </a:xfrm>
-          <a:prstGeom prst="rect">
-            <a:avLst/>
-          </a:prstGeom>
-          <a:noFill/>
-          <a:ln w="19050">
-            <a:solidFill>
-              <a:srgbClr val="C48A3A"/>
-            </a:solidFill>
-          </a:ln>
-        </p:spPr>
-        <p:txBody>
-          <a:bodyPr wrap="square" lIns="114300" rIns="114300" tIns="50800" bIns="50800" anchor="t">
+            <a:off x="3403591" y="2097975"/>
+            <a:ext cx="2535628" cy="709809"/>
+          </a:xfrm>
+          <a:prstGeom prst="rect">
+            <a:avLst/>
+          </a:prstGeom>
+          <a:noFill/>
+        </p:spPr>
+        <p:txBody>
+          <a:bodyPr wrap="square" lIns="0" rIns="0" tIns="0" bIns="0" anchor="t">
             <a:spAutoFit/>
           </a:bodyPr>
           <a:lstStyle/>
@@ -14849,7 +15212,7 @@
               </a:lnSpc>
             </a:pPr>
             <a:r>
-              <a:rPr sz="1950" b="0" i="0">
+              <a:rPr sz="1300" b="0" i="0">
                 <a:solidFill>
                   <a:srgbClr val="3A3532"/>
                 </a:solidFill>
@@ -14868,8 +15231,8 @@
         </p:nvSpPr>
         <p:spPr>
           <a:xfrm>
-            <a:off x="3403591" y="1501077"/>
-            <a:ext cx="355599" cy="228599"/>
+            <a:off x="3403591" y="1640776"/>
+            <a:ext cx="812798" cy="393699"/>
           </a:xfrm>
           <a:prstGeom prst="rect">
             <a:avLst/>
@@ -14884,11 +15247,11 @@
           <a:p>
             <a:pPr algn="l"/>
             <a:r>
-              <a:rPr sz="1500" b="1" i="0">
+              <a:rPr sz="2600" b="1" i="0">
                 <a:solidFill>
                   <a:srgbClr val="7A4F5E"/>
                 </a:solidFill>
-                <a:latin typeface="Outfit"/>
+                <a:latin typeface="Playfair Display"/>
               </a:rPr>
               <a:t>02</a:t>
             </a:r>
@@ -14903,21 +15266,16 @@
         </p:nvSpPr>
         <p:spPr>
           <a:xfrm>
-            <a:off x="6210284" y="1501077"/>
-            <a:ext cx="2590794" cy="1321888"/>
-          </a:xfrm>
-          <a:prstGeom prst="rect">
-            <a:avLst/>
-          </a:prstGeom>
-          <a:noFill/>
-          <a:ln w="19050">
-            <a:solidFill>
-              <a:srgbClr val="C48A3A"/>
-            </a:solidFill>
-          </a:ln>
-        </p:spPr>
-        <p:txBody>
-          <a:bodyPr wrap="square" lIns="114300" rIns="114300" tIns="50800" bIns="50800" anchor="t">
+            <a:off x="6210284" y="2097975"/>
+            <a:ext cx="2587122" cy="709809"/>
+          </a:xfrm>
+          <a:prstGeom prst="rect">
+            <a:avLst/>
+          </a:prstGeom>
+          <a:noFill/>
+        </p:spPr>
+        <p:txBody>
+          <a:bodyPr wrap="square" lIns="0" rIns="0" tIns="0" bIns="0" anchor="t">
             <a:spAutoFit/>
           </a:bodyPr>
           <a:lstStyle/>
@@ -14928,7 +15286,7 @@
               </a:lnSpc>
             </a:pPr>
             <a:r>
-              <a:rPr sz="1950" b="0" i="0">
+              <a:rPr sz="1300" b="0" i="0">
                 <a:solidFill>
                   <a:srgbClr val="3A3532"/>
                 </a:solidFill>
@@ -14947,8 +15305,8 @@
         </p:nvSpPr>
         <p:spPr>
           <a:xfrm>
-            <a:off x="6210284" y="1501077"/>
-            <a:ext cx="355599" cy="228599"/>
+            <a:off x="6210284" y="1640776"/>
+            <a:ext cx="812798" cy="393699"/>
           </a:xfrm>
           <a:prstGeom prst="rect">
             <a:avLst/>
@@ -14963,11 +15321,11 @@
           <a:p>
             <a:pPr algn="l"/>
             <a:r>
-              <a:rPr sz="1500" b="1" i="0">
+              <a:rPr sz="2600" b="1" i="0">
                 <a:solidFill>
                   <a:srgbClr val="7A4F5E"/>
                 </a:solidFill>
-                <a:latin typeface="Outfit"/>
+                <a:latin typeface="Playfair Display"/>
               </a:rPr>
               <a:t>03</a:t>
             </a:r>
@@ -14982,21 +15340,16 @@
         </p:nvSpPr>
         <p:spPr>
           <a:xfrm>
-            <a:off x="9016977" y="1501077"/>
-            <a:ext cx="2590794" cy="1321888"/>
-          </a:xfrm>
-          <a:prstGeom prst="rect">
-            <a:avLst/>
-          </a:prstGeom>
-          <a:noFill/>
-          <a:ln w="19050">
-            <a:solidFill>
-              <a:srgbClr val="C48A3A"/>
-            </a:solidFill>
-          </a:ln>
-        </p:spPr>
-        <p:txBody>
-          <a:bodyPr wrap="square" lIns="114300" rIns="114300" tIns="50800" bIns="50800" anchor="t">
+            <a:off x="9016977" y="2097975"/>
+            <a:ext cx="2361698" cy="709809"/>
+          </a:xfrm>
+          <a:prstGeom prst="rect">
+            <a:avLst/>
+          </a:prstGeom>
+          <a:noFill/>
+        </p:spPr>
+        <p:txBody>
+          <a:bodyPr wrap="square" lIns="0" rIns="0" tIns="0" bIns="0" anchor="t">
             <a:spAutoFit/>
           </a:bodyPr>
           <a:lstStyle/>
@@ -15007,7 +15360,7 @@
               </a:lnSpc>
             </a:pPr>
             <a:r>
-              <a:rPr sz="1950" b="0" i="0">
+              <a:rPr sz="1300" b="0" i="0">
                 <a:solidFill>
                   <a:srgbClr val="3A3532"/>
                 </a:solidFill>
@@ -15026,8 +15379,8 @@
         </p:nvSpPr>
         <p:spPr>
           <a:xfrm>
-            <a:off x="9016977" y="1501077"/>
-            <a:ext cx="355599" cy="228599"/>
+            <a:off x="9016977" y="1640776"/>
+            <a:ext cx="812798" cy="393699"/>
           </a:xfrm>
           <a:prstGeom prst="rect">
             <a:avLst/>
@@ -15042,11 +15395,11 @@
           <a:p>
             <a:pPr algn="l"/>
             <a:r>
-              <a:rPr sz="1500" b="1" i="0">
+              <a:rPr sz="2600" b="1" i="0">
                 <a:solidFill>
                   <a:srgbClr val="7A4F5E"/>
                 </a:solidFill>
-                <a:latin typeface="Outfit"/>
+                <a:latin typeface="Playfair Display"/>
               </a:rPr>
               <a:t>04</a:t>
             </a:r>
@@ -15061,8 +15414,8 @@
         </p:nvSpPr>
         <p:spPr>
           <a:xfrm>
-            <a:off x="596899" y="5605845"/>
-            <a:ext cx="1532231" cy="667939"/>
+            <a:off x="596899" y="6037644"/>
+            <a:ext cx="1544931" cy="228599"/>
           </a:xfrm>
           <a:prstGeom prst="rect">
             <a:avLst/>
@@ -15081,7 +15434,7 @@
               </a:lnSpc>
             </a:pPr>
             <a:r>
-              <a:rPr sz="1800" b="0" i="0">
+              <a:rPr sz="1200" b="0" i="0">
                 <a:solidFill>
                   <a:srgbClr val="6B625D"/>
                 </a:solidFill>
@@ -15100,8 +15453,8 @@
         </p:nvSpPr>
         <p:spPr>
           <a:xfrm>
-            <a:off x="596899" y="5605845"/>
-            <a:ext cx="1532231" cy="419099"/>
+            <a:off x="596899" y="5542346"/>
+            <a:ext cx="1047946" cy="546099"/>
           </a:xfrm>
           <a:prstGeom prst="rect">
             <a:avLst/>
@@ -15120,7 +15473,7 @@
               </a:lnSpc>
             </a:pPr>
             <a:r>
-              <a:rPr sz="4500" b="1" i="0">
+              <a:rPr sz="3000" b="1" i="0">
                 <a:solidFill>
                   <a:srgbClr val="3A3532"/>
                 </a:solidFill>
@@ -15139,8 +15492,8 @@
         </p:nvSpPr>
         <p:spPr>
           <a:xfrm>
-            <a:off x="2599029" y="5605845"/>
-            <a:ext cx="2107401" cy="667939"/>
+            <a:off x="2599029" y="6037644"/>
+            <a:ext cx="2120101" cy="228599"/>
           </a:xfrm>
           <a:prstGeom prst="rect">
             <a:avLst/>
@@ -15159,7 +15512,7 @@
               </a:lnSpc>
             </a:pPr>
             <a:r>
-              <a:rPr sz="1800" b="0" i="0">
+              <a:rPr sz="1200" b="0" i="0">
                 <a:solidFill>
                   <a:srgbClr val="6B625D"/>
                 </a:solidFill>
@@ -15178,8 +15531,8 @@
         </p:nvSpPr>
         <p:spPr>
           <a:xfrm>
-            <a:off x="2599029" y="5605845"/>
-            <a:ext cx="2107401" cy="419099"/>
+            <a:off x="2599029" y="5542346"/>
+            <a:ext cx="1322583" cy="546099"/>
           </a:xfrm>
           <a:prstGeom prst="rect">
             <a:avLst/>
@@ -15198,7 +15551,7 @@
               </a:lnSpc>
             </a:pPr>
             <a:r>
-              <a:rPr sz="4500" b="1" i="0">
+              <a:rPr sz="3000" b="1" i="0">
                 <a:solidFill>
                   <a:srgbClr val="3A3532"/>
                 </a:solidFill>
@@ -15217,8 +15570,8 @@
         </p:nvSpPr>
         <p:spPr>
           <a:xfrm>
-            <a:off x="7769007" y="6070585"/>
-            <a:ext cx="3838764" cy="203199"/>
+            <a:off x="7769007" y="6045185"/>
+            <a:ext cx="3851464" cy="247649"/>
           </a:xfrm>
           <a:prstGeom prst="rect">
             <a:avLst/>
@@ -15237,7 +15590,7 @@
               </a:lnSpc>
             </a:pPr>
             <a:r>
-              <a:rPr sz="1950" b="1" i="0">
+              <a:rPr sz="1300" b="1" i="0">
                 <a:solidFill>
                   <a:srgbClr val="7A4F5E"/>
                 </a:solidFill>
@@ -15256,8 +15609,8 @@
         </p:nvSpPr>
         <p:spPr>
           <a:xfrm>
-            <a:off x="596899" y="6426184"/>
-            <a:ext cx="170854" cy="152400"/>
+            <a:off x="596899" y="6407134"/>
+            <a:ext cx="183554" cy="184150"/>
           </a:xfrm>
           <a:prstGeom prst="rect">
             <a:avLst/>
@@ -15276,7 +15629,7 @@
               </a:lnSpc>
             </a:pPr>
             <a:r>
-              <a:rPr sz="1350" b="0" i="0">
+              <a:rPr sz="900" b="0" i="0">
                 <a:solidFill>
                   <a:srgbClr val="6B625D"/>
                 </a:solidFill>
@@ -15295,8 +15648,8 @@
         </p:nvSpPr>
         <p:spPr>
           <a:xfrm>
-            <a:off x="9960545" y="6407134"/>
-            <a:ext cx="1266227" cy="152400"/>
+            <a:off x="9960545" y="6388084"/>
+            <a:ext cx="1278926" cy="184150"/>
           </a:xfrm>
           <a:prstGeom prst="rect">
             <a:avLst/>
@@ -15315,7 +15668,7 @@
               </a:lnSpc>
             </a:pPr>
             <a:r>
-              <a:rPr sz="1350" b="0" i="0">
+              <a:rPr sz="900" b="0" i="0">
                 <a:solidFill>
                   <a:srgbClr val="6B625D"/>
                 </a:solidFill>
@@ -15456,8 +15809,8 @@
         </p:nvSpPr>
         <p:spPr>
           <a:xfrm>
-            <a:off x="596899" y="444499"/>
-            <a:ext cx="11010872" cy="177800"/>
+            <a:off x="596899" y="425449"/>
+            <a:ext cx="2322904" cy="215899"/>
           </a:xfrm>
           <a:prstGeom prst="rect">
             <a:avLst/>
@@ -15476,7 +15829,7 @@
               </a:lnSpc>
             </a:pPr>
             <a:r>
-              <a:rPr sz="1650" b="1" i="0">
+              <a:rPr sz="1100" b="1" i="0">
                 <a:solidFill>
                   <a:srgbClr val="7A4F5E"/>
                 </a:solidFill>
@@ -15495,8 +15848,8 @@
         </p:nvSpPr>
         <p:spPr>
           <a:xfrm>
-            <a:off x="596899" y="698498"/>
-            <a:ext cx="11010872" cy="485079"/>
+            <a:off x="596899" y="647698"/>
+            <a:ext cx="5620927" cy="577849"/>
           </a:xfrm>
           <a:prstGeom prst="rect">
             <a:avLst/>
@@ -15515,7 +15868,7 @@
               </a:lnSpc>
             </a:pPr>
             <a:r>
-              <a:rPr sz="4800" b="1" i="0">
+              <a:rPr sz="3200" b="1" i="0">
                 <a:solidFill>
                   <a:srgbClr val="3A3532"/>
                 </a:solidFill>
@@ -15534,8 +15887,8 @@
         </p:nvSpPr>
         <p:spPr>
           <a:xfrm>
-            <a:off x="596899" y="5103701"/>
-            <a:ext cx="5397487" cy="449460"/>
+            <a:off x="596899" y="5110051"/>
+            <a:ext cx="5023334" cy="434279"/>
           </a:xfrm>
           <a:prstGeom prst="rect">
             <a:avLst/>
@@ -15554,7 +15907,7 @@
               </a:lnSpc>
             </a:pPr>
             <a:r>
-              <a:rPr sz="1800" b="0" i="0">
+              <a:rPr sz="1200" b="0" i="0">
                 <a:solidFill>
                   <a:srgbClr val="3A3532"/>
                 </a:solidFill>
@@ -15573,8 +15926,8 @@
         </p:nvSpPr>
         <p:spPr>
           <a:xfrm>
-            <a:off x="6210284" y="5103701"/>
-            <a:ext cx="5397487" cy="243780"/>
+            <a:off x="6210284" y="5110051"/>
+            <a:ext cx="4430205" cy="228599"/>
           </a:xfrm>
           <a:prstGeom prst="rect">
             <a:avLst/>
@@ -15593,7 +15946,7 @@
               </a:lnSpc>
             </a:pPr>
             <a:r>
-              <a:rPr sz="1800" b="0" i="0">
+              <a:rPr sz="1200" b="0" i="0">
                 <a:solidFill>
                   <a:srgbClr val="3A3532"/>
                 </a:solidFill>
@@ -15612,8 +15965,8 @@
         </p:nvSpPr>
         <p:spPr>
           <a:xfrm>
-            <a:off x="596899" y="6022365"/>
-            <a:ext cx="11010872" cy="251420"/>
+            <a:off x="596899" y="6028715"/>
+            <a:ext cx="5175733" cy="228599"/>
           </a:xfrm>
           <a:prstGeom prst="rect">
             <a:avLst/>
@@ -15632,7 +15985,7 @@
               </a:lnSpc>
             </a:pPr>
             <a:r>
-              <a:rPr sz="1800" b="0" i="0">
+              <a:rPr sz="1200" b="0" i="0">
                 <a:solidFill>
                   <a:srgbClr val="3A3532"/>
                 </a:solidFill>
@@ -15651,8 +16004,8 @@
         </p:nvSpPr>
         <p:spPr>
           <a:xfrm>
-            <a:off x="596899" y="6426184"/>
-            <a:ext cx="176311" cy="152400"/>
+            <a:off x="596899" y="6407134"/>
+            <a:ext cx="189011" cy="184150"/>
           </a:xfrm>
           <a:prstGeom prst="rect">
             <a:avLst/>
@@ -15671,7 +16024,7 @@
               </a:lnSpc>
             </a:pPr>
             <a:r>
-              <a:rPr sz="1350" b="0" i="0">
+              <a:rPr sz="900" b="0" i="0">
                 <a:solidFill>
                   <a:srgbClr val="6B625D"/>
                 </a:solidFill>
@@ -15690,8 +16043,8 @@
         </p:nvSpPr>
         <p:spPr>
           <a:xfrm>
-            <a:off x="9960545" y="6407134"/>
-            <a:ext cx="1266227" cy="152400"/>
+            <a:off x="9960545" y="6388084"/>
+            <a:ext cx="1278926" cy="184150"/>
           </a:xfrm>
           <a:prstGeom prst="rect">
             <a:avLst/>
@@ -15710,7 +16063,7 @@
               </a:lnSpc>
             </a:pPr>
             <a:r>
-              <a:rPr sz="1350" b="0" i="0">
+              <a:rPr sz="900" b="0" i="0">
                 <a:solidFill>
                   <a:srgbClr val="6B625D"/>
                 </a:solidFill>
@@ -15803,8 +16156,8 @@
         </p:nvSpPr>
         <p:spPr>
           <a:xfrm>
-            <a:off x="5312952" y="2755893"/>
-            <a:ext cx="1578666" cy="177800"/>
+            <a:off x="5312952" y="2736843"/>
+            <a:ext cx="1591366" cy="215899"/>
           </a:xfrm>
           <a:prstGeom prst="rect">
             <a:avLst/>
@@ -15823,7 +16176,7 @@
               </a:lnSpc>
             </a:pPr>
             <a:r>
-              <a:rPr sz="1650" b="1" i="0">
+              <a:rPr sz="1100" b="1" i="0">
                 <a:solidFill>
                   <a:srgbClr val="FBF7F5"/>
                 </a:solidFill>
@@ -15842,8 +16195,8 @@
         </p:nvSpPr>
         <p:spPr>
           <a:xfrm>
-            <a:off x="2656873" y="3086092"/>
-            <a:ext cx="6890824" cy="876298"/>
+            <a:off x="2656873" y="2997193"/>
+            <a:ext cx="6903524" cy="1054097"/>
           </a:xfrm>
           <a:prstGeom prst="rect">
             <a:avLst/>
@@ -15862,7 +16215,7 @@
               </a:lnSpc>
             </a:pPr>
             <a:r>
-              <a:rPr sz="9000" b="1" i="0">
+              <a:rPr sz="6000" b="1" i="0">
                 <a:solidFill>
                   <a:srgbClr val="FBF7F5"/>
                 </a:solidFill>
@@ -15881,8 +16234,8 @@
         </p:nvSpPr>
         <p:spPr>
           <a:xfrm>
-            <a:off x="596899" y="6426184"/>
-            <a:ext cx="177899" cy="152400"/>
+            <a:off x="596899" y="6407134"/>
+            <a:ext cx="190599" cy="184150"/>
           </a:xfrm>
           <a:prstGeom prst="rect">
             <a:avLst/>
@@ -15901,7 +16254,7 @@
               </a:lnSpc>
             </a:pPr>
             <a:r>
-              <a:rPr sz="1350" b="0" i="0">
+              <a:rPr sz="900" b="0" i="0">
                 <a:solidFill>
                   <a:srgbClr val="8E8580"/>
                 </a:solidFill>
@@ -15920,8 +16273,8 @@
         </p:nvSpPr>
         <p:spPr>
           <a:xfrm>
-            <a:off x="9960545" y="6407134"/>
-            <a:ext cx="1266227" cy="152400"/>
+            <a:off x="9960545" y="6388084"/>
+            <a:ext cx="1278926" cy="184150"/>
           </a:xfrm>
           <a:prstGeom prst="rect">
             <a:avLst/>
@@ -15940,7 +16293,7 @@
               </a:lnSpc>
             </a:pPr>
             <a:r>
-              <a:rPr sz="1350" b="0" i="0">
+              <a:rPr sz="900" b="0" i="0">
                 <a:solidFill>
                   <a:srgbClr val="8E8580"/>
                 </a:solidFill>
@@ -16057,8 +16410,8 @@
         </p:nvSpPr>
         <p:spPr>
           <a:xfrm>
-            <a:off x="596899" y="1283590"/>
-            <a:ext cx="6591284" cy="177800"/>
+            <a:off x="596899" y="1264540"/>
+            <a:ext cx="1672328" cy="215899"/>
           </a:xfrm>
           <a:prstGeom prst="rect">
             <a:avLst/>
@@ -16077,7 +16430,7 @@
               </a:lnSpc>
             </a:pPr>
             <a:r>
-              <a:rPr sz="1650" b="1" i="0">
+              <a:rPr sz="1100" b="1" i="0">
                 <a:solidFill>
                   <a:srgbClr val="7A4F5E"/>
                 </a:solidFill>
@@ -16096,8 +16449,8 @@
         </p:nvSpPr>
         <p:spPr>
           <a:xfrm>
-            <a:off x="596899" y="1537589"/>
-            <a:ext cx="6591284" cy="624779"/>
+            <a:off x="596899" y="1474089"/>
+            <a:ext cx="3886488" cy="749298"/>
           </a:xfrm>
           <a:prstGeom prst="rect">
             <a:avLst/>
@@ -16116,7 +16469,7 @@
               </a:lnSpc>
             </a:pPr>
             <a:r>
-              <a:rPr sz="6300" b="1" i="0">
+              <a:rPr sz="4200" b="1" i="0">
                 <a:solidFill>
                   <a:srgbClr val="3A3532"/>
                 </a:solidFill>
@@ -16135,8 +16488,8 @@
         </p:nvSpPr>
         <p:spPr>
           <a:xfrm>
-            <a:off x="596899" y="2213168"/>
-            <a:ext cx="6591284" cy="500260"/>
+            <a:off x="596899" y="2219518"/>
+            <a:ext cx="3575438" cy="478729"/>
           </a:xfrm>
           <a:prstGeom prst="rect">
             <a:avLst/>
@@ -16155,7 +16508,7 @@
               </a:lnSpc>
             </a:pPr>
             <a:r>
-              <a:rPr sz="1950" b="0" i="0">
+              <a:rPr sz="1300" b="0" i="0">
                 <a:solidFill>
                   <a:srgbClr val="6B625D"/>
                 </a:solidFill>
@@ -16171,7 +16524,7 @@
               </a:lnSpc>
             </a:pPr>
             <a:r>
-              <a:rPr sz="1950" b="0" i="0">
+              <a:rPr sz="1300" b="0" i="0">
                 <a:solidFill>
                   <a:srgbClr val="6B625D"/>
                 </a:solidFill>
@@ -16190,8 +16543,8 @@
         </p:nvSpPr>
         <p:spPr>
           <a:xfrm>
-            <a:off x="596899" y="2903927"/>
-            <a:ext cx="5245087" cy="811409"/>
+            <a:off x="596899" y="2916627"/>
+            <a:ext cx="5242210" cy="775889"/>
           </a:xfrm>
           <a:prstGeom prst="rect">
             <a:avLst/>
@@ -16210,7 +16563,7 @@
               </a:lnSpc>
             </a:pPr>
             <a:r>
-              <a:rPr sz="2100" b="0" i="0">
+              <a:rPr sz="1400" b="0" i="0">
                 <a:solidFill>
                   <a:srgbClr val="3A3532"/>
                 </a:solidFill>
@@ -16229,8 +16582,8 @@
         </p:nvSpPr>
         <p:spPr>
           <a:xfrm>
-            <a:off x="596899" y="3804236"/>
-            <a:ext cx="5245087" cy="553639"/>
+            <a:off x="596899" y="3816936"/>
+            <a:ext cx="5210559" cy="518119"/>
           </a:xfrm>
           <a:prstGeom prst="rect">
             <a:avLst/>
@@ -16249,7 +16602,7 @@
               </a:lnSpc>
             </a:pPr>
             <a:r>
-              <a:rPr sz="2100" b="0" i="0">
+              <a:rPr sz="1400" b="0" i="0">
                 <a:solidFill>
                   <a:srgbClr val="3A3532"/>
                 </a:solidFill>
@@ -16268,8 +16621,8 @@
         </p:nvSpPr>
         <p:spPr>
           <a:xfrm>
-            <a:off x="596899" y="4573775"/>
-            <a:ext cx="5245087" cy="860820"/>
+            <a:off x="596899" y="4554725"/>
+            <a:ext cx="5188433" cy="891379"/>
           </a:xfrm>
           <a:prstGeom prst="rect">
             <a:avLst/>
@@ -16288,7 +16641,7 @@
               </a:lnSpc>
             </a:pPr>
             <a:r>
-              <a:rPr sz="2700" b="1" i="1">
+              <a:rPr sz="1800" b="1" i="1">
                 <a:solidFill>
                   <a:srgbClr val="7A4F5E"/>
                 </a:solidFill>
@@ -16307,8 +16660,8 @@
         </p:nvSpPr>
         <p:spPr>
           <a:xfrm>
-            <a:off x="596899" y="6426184"/>
-            <a:ext cx="188416" cy="152400"/>
+            <a:off x="596899" y="6407134"/>
+            <a:ext cx="201116" cy="184150"/>
           </a:xfrm>
           <a:prstGeom prst="rect">
             <a:avLst/>
@@ -16327,7 +16680,7 @@
               </a:lnSpc>
             </a:pPr>
             <a:r>
-              <a:rPr sz="1350" b="0" i="0">
+              <a:rPr sz="900" b="0" i="0">
                 <a:solidFill>
                   <a:srgbClr val="6B625D"/>
                 </a:solidFill>
@@ -16346,8 +16699,8 @@
         </p:nvSpPr>
         <p:spPr>
           <a:xfrm>
-            <a:off x="9960545" y="6407134"/>
-            <a:ext cx="1266227" cy="152400"/>
+            <a:off x="9960545" y="6388084"/>
+            <a:ext cx="1278926" cy="184150"/>
           </a:xfrm>
           <a:prstGeom prst="rect">
             <a:avLst/>
@@ -16366,7 +16719,7 @@
               </a:lnSpc>
             </a:pPr>
             <a:r>
-              <a:rPr sz="1350" b="0" i="0">
+              <a:rPr sz="900" b="0" i="0">
                 <a:solidFill>
                   <a:srgbClr val="6B625D"/>
                 </a:solidFill>
@@ -16459,8 +16812,8 @@
         </p:nvSpPr>
         <p:spPr>
           <a:xfrm>
-            <a:off x="9319395" y="2375390"/>
-            <a:ext cx="2288376" cy="876298"/>
+            <a:off x="9319395" y="2286490"/>
+            <a:ext cx="2301075" cy="1054097"/>
           </a:xfrm>
           <a:prstGeom prst="rect">
             <a:avLst/>
@@ -16479,7 +16832,7 @@
               </a:lnSpc>
             </a:pPr>
             <a:r>
-              <a:rPr sz="9000" b="1" i="0">
+              <a:rPr sz="6000" b="1" i="0">
                 <a:solidFill>
                   <a:srgbClr val="FBF7F5"/>
                 </a:solidFill>
@@ -16499,7 +16852,7 @@
         <p:spPr>
           <a:xfrm>
             <a:off x="8396961" y="3429488"/>
-            <a:ext cx="3210810" cy="428227"/>
+            <a:ext cx="3223510" cy="419099"/>
           </a:xfrm>
           <a:prstGeom prst="rect">
             <a:avLst/>
@@ -16518,11 +16871,11 @@
               </a:lnSpc>
             </a:pPr>
             <a:r>
-              <a:rPr sz="3600" b="0" i="1">
+              <a:rPr sz="2400" b="0" i="1">
                 <a:solidFill>
                   <a:srgbClr val="C9BFB8"/>
                 </a:solidFill>
-                <a:latin typeface="IM Fell English"/>
+                <a:latin typeface="Playfair Display"/>
               </a:rPr>
               <a:t>A mete eccelse per anguste vie</a:t>
             </a:r>
@@ -16537,8 +16890,8 @@
         </p:nvSpPr>
         <p:spPr>
           <a:xfrm>
-            <a:off x="10415561" y="4073614"/>
-            <a:ext cx="1192210" cy="269180"/>
+            <a:off x="10415561" y="4079964"/>
+            <a:ext cx="1204909" cy="247649"/>
           </a:xfrm>
           <a:prstGeom prst="rect">
             <a:avLst/>
@@ -16557,7 +16910,7 @@
               </a:lnSpc>
             </a:pPr>
             <a:r>
-              <a:rPr sz="1950" b="0" i="0">
+              <a:rPr sz="1300" b="0" i="0">
                 <a:solidFill>
                   <a:srgbClr val="FBF7F5"/>
                 </a:solidFill>
@@ -16576,8 +16929,8 @@
         </p:nvSpPr>
         <p:spPr>
           <a:xfrm>
-            <a:off x="596899" y="6515084"/>
-            <a:ext cx="188416" cy="152400"/>
+            <a:off x="596899" y="6496034"/>
+            <a:ext cx="201116" cy="184150"/>
           </a:xfrm>
           <a:prstGeom prst="rect">
             <a:avLst/>
@@ -16596,7 +16949,7 @@
               </a:lnSpc>
             </a:pPr>
             <a:r>
-              <a:rPr sz="1350" b="0" i="0">
+              <a:rPr sz="900" b="0" i="0">
                 <a:solidFill>
                   <a:srgbClr val="8E8580"/>
                 </a:solidFill>
@@ -16615,8 +16968,8 @@
         </p:nvSpPr>
         <p:spPr>
           <a:xfrm>
-            <a:off x="9960545" y="6407134"/>
-            <a:ext cx="1266227" cy="152400"/>
+            <a:off x="9960545" y="6388084"/>
+            <a:ext cx="1278926" cy="184150"/>
           </a:xfrm>
           <a:prstGeom prst="rect">
             <a:avLst/>
@@ -16635,7 +16988,7 @@
               </a:lnSpc>
             </a:pPr>
             <a:r>
-              <a:rPr sz="1350" b="0" i="0">
+              <a:rPr sz="900" b="0" i="0">
                 <a:solidFill>
                   <a:srgbClr val="8E8580"/>
                 </a:solidFill>
@@ -16771,8 +17124,8 @@
         </p:nvSpPr>
         <p:spPr>
           <a:xfrm>
-            <a:off x="596899" y="1954009"/>
-            <a:ext cx="11010872" cy="177800"/>
+            <a:off x="596899" y="1934959"/>
+            <a:ext cx="2109485" cy="215899"/>
           </a:xfrm>
           <a:prstGeom prst="rect">
             <a:avLst/>
@@ -16791,7 +17144,7 @@
               </a:lnSpc>
             </a:pPr>
             <a:r>
-              <a:rPr sz="1650" b="1" i="0">
+              <a:rPr sz="1100" b="1" i="0">
                 <a:solidFill>
                   <a:srgbClr val="7A4F5E"/>
                 </a:solidFill>
@@ -16810,8 +17163,8 @@
         </p:nvSpPr>
         <p:spPr>
           <a:xfrm>
-            <a:off x="596899" y="2322308"/>
-            <a:ext cx="8928078" cy="2086267"/>
+            <a:off x="596899" y="2252458"/>
+            <a:ext cx="6475396" cy="2216343"/>
           </a:xfrm>
           <a:prstGeom prst="rect">
             <a:avLst/>
@@ -16830,7 +17183,7 @@
               </a:lnSpc>
             </a:pPr>
             <a:r>
-              <a:rPr sz="7200" b="1" i="1">
+              <a:rPr sz="4800" b="1" i="1">
                 <a:solidFill>
                   <a:srgbClr val="3A3532"/>
                 </a:solidFill>
@@ -16849,8 +17202,8 @@
         </p:nvSpPr>
         <p:spPr>
           <a:xfrm>
-            <a:off x="596899" y="6426184"/>
-            <a:ext cx="195163" cy="152400"/>
+            <a:off x="596899" y="6407134"/>
+            <a:ext cx="207863" cy="184150"/>
           </a:xfrm>
           <a:prstGeom prst="rect">
             <a:avLst/>
@@ -16869,7 +17222,7 @@
               </a:lnSpc>
             </a:pPr>
             <a:r>
-              <a:rPr sz="1350" b="0" i="0">
+              <a:rPr sz="900" b="0" i="0">
                 <a:solidFill>
                   <a:srgbClr val="6B625D"/>
                 </a:solidFill>
@@ -16888,8 +17241,8 @@
         </p:nvSpPr>
         <p:spPr>
           <a:xfrm>
-            <a:off x="9960545" y="6407134"/>
-            <a:ext cx="1266227" cy="152400"/>
+            <a:off x="9960545" y="6388084"/>
+            <a:ext cx="1278926" cy="184150"/>
           </a:xfrm>
           <a:prstGeom prst="rect">
             <a:avLst/>
@@ -16908,7 +17261,7 @@
               </a:lnSpc>
             </a:pPr>
             <a:r>
-              <a:rPr sz="1350" b="0" i="0">
+              <a:rPr sz="900" b="0" i="0">
                 <a:solidFill>
                   <a:srgbClr val="6B625D"/>
                 </a:solidFill>
@@ -17019,14 +17372,315 @@
       </p:pic>
       <p:sp>
         <p:nvSpPr>
-          <p:cNvPr id="5" name="TextBox 4"/>
-          <p:cNvSpPr txBox="1"/>
-          <p:nvPr/>
-        </p:nvSpPr>
-        <p:spPr>
-          <a:xfrm>
-            <a:off x="596899" y="444499"/>
-            <a:ext cx="11010872" cy="177800"/>
+          <p:cNvPr id="5" name="Rectangle 4"/>
+          <p:cNvSpPr/>
+          <p:nvPr/>
+        </p:nvSpPr>
+        <p:spPr>
+          <a:xfrm>
+            <a:off x="609598" y="2449209"/>
+            <a:ext cx="6908783" cy="6350"/>
+          </a:xfrm>
+          <a:prstGeom prst="rect">
+            <a:avLst/>
+          </a:prstGeom>
+          <a:solidFill>
+            <a:srgbClr val="E8DDD9"/>
+          </a:solidFill>
+          <a:ln>
+            <a:noFill/>
+          </a:ln>
+        </p:spPr>
+        <p:style>
+          <a:lnRef idx="1">
+            <a:schemeClr val="accent1"/>
+          </a:lnRef>
+          <a:fillRef idx="3">
+            <a:schemeClr val="accent1"/>
+          </a:fillRef>
+          <a:effectRef idx="2">
+            <a:schemeClr val="accent1"/>
+          </a:effectRef>
+          <a:fontRef idx="minor">
+            <a:schemeClr val="lt1"/>
+          </a:fontRef>
+        </p:style>
+        <p:txBody>
+          <a:bodyPr rtlCol="0" anchor="ctr"/>
+          <a:lstStyle/>
+          <a:p>
+            <a:pPr algn="ctr"/>
+          </a:p>
+        </p:txBody>
+      </p:sp>
+      <p:sp>
+        <p:nvSpPr>
+          <p:cNvPr id="6" name="Rectangle 5"/>
+          <p:cNvSpPr/>
+          <p:nvPr/>
+        </p:nvSpPr>
+        <p:spPr>
+          <a:xfrm>
+            <a:off x="609598" y="2973678"/>
+            <a:ext cx="6908783" cy="6350"/>
+          </a:xfrm>
+          <a:prstGeom prst="rect">
+            <a:avLst/>
+          </a:prstGeom>
+          <a:solidFill>
+            <a:srgbClr val="E8DDD9"/>
+          </a:solidFill>
+          <a:ln>
+            <a:noFill/>
+          </a:ln>
+        </p:spPr>
+        <p:style>
+          <a:lnRef idx="1">
+            <a:schemeClr val="accent1"/>
+          </a:lnRef>
+          <a:fillRef idx="3">
+            <a:schemeClr val="accent1"/>
+          </a:fillRef>
+          <a:effectRef idx="2">
+            <a:schemeClr val="accent1"/>
+          </a:effectRef>
+          <a:fontRef idx="minor">
+            <a:schemeClr val="lt1"/>
+          </a:fontRef>
+        </p:style>
+        <p:txBody>
+          <a:bodyPr rtlCol="0" anchor="ctr"/>
+          <a:lstStyle/>
+          <a:p>
+            <a:pPr algn="ctr"/>
+          </a:p>
+        </p:txBody>
+      </p:sp>
+      <p:sp>
+        <p:nvSpPr>
+          <p:cNvPr id="7" name="Rectangle 6"/>
+          <p:cNvSpPr/>
+          <p:nvPr/>
+        </p:nvSpPr>
+        <p:spPr>
+          <a:xfrm>
+            <a:off x="609598" y="3498147"/>
+            <a:ext cx="6908783" cy="6350"/>
+          </a:xfrm>
+          <a:prstGeom prst="rect">
+            <a:avLst/>
+          </a:prstGeom>
+          <a:solidFill>
+            <a:srgbClr val="E8DDD9"/>
+          </a:solidFill>
+          <a:ln>
+            <a:noFill/>
+          </a:ln>
+        </p:spPr>
+        <p:style>
+          <a:lnRef idx="1">
+            <a:schemeClr val="accent1"/>
+          </a:lnRef>
+          <a:fillRef idx="3">
+            <a:schemeClr val="accent1"/>
+          </a:fillRef>
+          <a:effectRef idx="2">
+            <a:schemeClr val="accent1"/>
+          </a:effectRef>
+          <a:fontRef idx="minor">
+            <a:schemeClr val="lt1"/>
+          </a:fontRef>
+        </p:style>
+        <p:txBody>
+          <a:bodyPr rtlCol="0" anchor="ctr"/>
+          <a:lstStyle/>
+          <a:p>
+            <a:pPr algn="ctr"/>
+          </a:p>
+        </p:txBody>
+      </p:sp>
+      <p:sp>
+        <p:nvSpPr>
+          <p:cNvPr id="8" name="Rectangle 7"/>
+          <p:cNvSpPr/>
+          <p:nvPr/>
+        </p:nvSpPr>
+        <p:spPr>
+          <a:xfrm>
+            <a:off x="609598" y="4022616"/>
+            <a:ext cx="6908783" cy="6350"/>
+          </a:xfrm>
+          <a:prstGeom prst="rect">
+            <a:avLst/>
+          </a:prstGeom>
+          <a:solidFill>
+            <a:srgbClr val="E8DDD9"/>
+          </a:solidFill>
+          <a:ln>
+            <a:noFill/>
+          </a:ln>
+        </p:spPr>
+        <p:style>
+          <a:lnRef idx="1">
+            <a:schemeClr val="accent1"/>
+          </a:lnRef>
+          <a:fillRef idx="3">
+            <a:schemeClr val="accent1"/>
+          </a:fillRef>
+          <a:effectRef idx="2">
+            <a:schemeClr val="accent1"/>
+          </a:effectRef>
+          <a:fontRef idx="minor">
+            <a:schemeClr val="lt1"/>
+          </a:fontRef>
+        </p:style>
+        <p:txBody>
+          <a:bodyPr rtlCol="0" anchor="ctr"/>
+          <a:lstStyle/>
+          <a:p>
+            <a:pPr algn="ctr"/>
+          </a:p>
+        </p:txBody>
+      </p:sp>
+      <p:sp>
+        <p:nvSpPr>
+          <p:cNvPr id="9" name="Rectangle 8"/>
+          <p:cNvSpPr/>
+          <p:nvPr/>
+        </p:nvSpPr>
+        <p:spPr>
+          <a:xfrm>
+            <a:off x="609598" y="4547085"/>
+            <a:ext cx="6908783" cy="6350"/>
+          </a:xfrm>
+          <a:prstGeom prst="rect">
+            <a:avLst/>
+          </a:prstGeom>
+          <a:solidFill>
+            <a:srgbClr val="E8DDD9"/>
+          </a:solidFill>
+          <a:ln>
+            <a:noFill/>
+          </a:ln>
+        </p:spPr>
+        <p:style>
+          <a:lnRef idx="1">
+            <a:schemeClr val="accent1"/>
+          </a:lnRef>
+          <a:fillRef idx="3">
+            <a:schemeClr val="accent1"/>
+          </a:fillRef>
+          <a:effectRef idx="2">
+            <a:schemeClr val="accent1"/>
+          </a:effectRef>
+          <a:fontRef idx="minor">
+            <a:schemeClr val="lt1"/>
+          </a:fontRef>
+        </p:style>
+        <p:txBody>
+          <a:bodyPr rtlCol="0" anchor="ctr"/>
+          <a:lstStyle/>
+          <a:p>
+            <a:pPr algn="ctr"/>
+          </a:p>
+        </p:txBody>
+      </p:sp>
+      <p:sp>
+        <p:nvSpPr>
+          <p:cNvPr id="10" name="Rectangle 9"/>
+          <p:cNvSpPr/>
+          <p:nvPr/>
+        </p:nvSpPr>
+        <p:spPr>
+          <a:xfrm>
+            <a:off x="609598" y="5071554"/>
+            <a:ext cx="6908783" cy="6350"/>
+          </a:xfrm>
+          <a:prstGeom prst="rect">
+            <a:avLst/>
+          </a:prstGeom>
+          <a:solidFill>
+            <a:srgbClr val="E8DDD9"/>
+          </a:solidFill>
+          <a:ln>
+            <a:noFill/>
+          </a:ln>
+        </p:spPr>
+        <p:style>
+          <a:lnRef idx="1">
+            <a:schemeClr val="accent1"/>
+          </a:lnRef>
+          <a:fillRef idx="3">
+            <a:schemeClr val="accent1"/>
+          </a:fillRef>
+          <a:effectRef idx="2">
+            <a:schemeClr val="accent1"/>
+          </a:effectRef>
+          <a:fontRef idx="minor">
+            <a:schemeClr val="lt1"/>
+          </a:fontRef>
+        </p:style>
+        <p:txBody>
+          <a:bodyPr rtlCol="0" anchor="ctr"/>
+          <a:lstStyle/>
+          <a:p>
+            <a:pPr algn="ctr"/>
+          </a:p>
+        </p:txBody>
+      </p:sp>
+      <p:sp>
+        <p:nvSpPr>
+          <p:cNvPr id="11" name="Rectangle 10"/>
+          <p:cNvSpPr/>
+          <p:nvPr/>
+        </p:nvSpPr>
+        <p:spPr>
+          <a:xfrm>
+            <a:off x="609598" y="5596023"/>
+            <a:ext cx="6908783" cy="6350"/>
+          </a:xfrm>
+          <a:prstGeom prst="rect">
+            <a:avLst/>
+          </a:prstGeom>
+          <a:solidFill>
+            <a:srgbClr val="E8DDD9"/>
+          </a:solidFill>
+          <a:ln>
+            <a:noFill/>
+          </a:ln>
+        </p:spPr>
+        <p:style>
+          <a:lnRef idx="1">
+            <a:schemeClr val="accent1"/>
+          </a:lnRef>
+          <a:fillRef idx="3">
+            <a:schemeClr val="accent1"/>
+          </a:fillRef>
+          <a:effectRef idx="2">
+            <a:schemeClr val="accent1"/>
+          </a:effectRef>
+          <a:fontRef idx="minor">
+            <a:schemeClr val="lt1"/>
+          </a:fontRef>
+        </p:style>
+        <p:txBody>
+          <a:bodyPr rtlCol="0" anchor="ctr"/>
+          <a:lstStyle/>
+          <a:p>
+            <a:pPr algn="ctr"/>
+          </a:p>
+        </p:txBody>
+      </p:sp>
+      <p:sp>
+        <p:nvSpPr>
+          <p:cNvPr id="12" name="TextBox 11"/>
+          <p:cNvSpPr txBox="1"/>
+          <p:nvPr/>
+        </p:nvSpPr>
+        <p:spPr>
+          <a:xfrm>
+            <a:off x="596899" y="425449"/>
+            <a:ext cx="1352844" cy="215899"/>
           </a:xfrm>
           <a:prstGeom prst="rect">
             <a:avLst/>
@@ -17045,7 +17699,7 @@
               </a:lnSpc>
             </a:pPr>
             <a:r>
-              <a:rPr sz="1650" b="1" i="0">
+              <a:rPr sz="1100" b="1" i="0">
                 <a:solidFill>
                   <a:srgbClr val="7A4F5E"/>
                 </a:solidFill>
@@ -17058,14 +17712,14 @@
       </p:sp>
       <p:sp>
         <p:nvSpPr>
-          <p:cNvPr id="6" name="TextBox 5"/>
-          <p:cNvSpPr txBox="1"/>
-          <p:nvPr/>
-        </p:nvSpPr>
-        <p:spPr>
-          <a:xfrm>
-            <a:off x="596899" y="698498"/>
-            <a:ext cx="11010872" cy="485079"/>
+          <p:cNvPr id="13" name="TextBox 12"/>
+          <p:cNvSpPr txBox="1"/>
+          <p:nvPr/>
+        </p:nvSpPr>
+        <p:spPr>
+          <a:xfrm>
+            <a:off x="596899" y="647698"/>
+            <a:ext cx="3937685" cy="577849"/>
           </a:xfrm>
           <a:prstGeom prst="rect">
             <a:avLst/>
@@ -17084,7 +17738,7 @@
               </a:lnSpc>
             </a:pPr>
             <a:r>
-              <a:rPr sz="4800" b="1" i="0">
+              <a:rPr sz="3200" b="1" i="0">
                 <a:solidFill>
                   <a:srgbClr val="3A3532"/>
                 </a:solidFill>
@@ -17097,14 +17751,14 @@
       </p:sp>
       <p:sp>
         <p:nvSpPr>
-          <p:cNvPr id="7" name="TextBox 6"/>
-          <p:cNvSpPr txBox="1"/>
-          <p:nvPr/>
-        </p:nvSpPr>
-        <p:spPr>
-          <a:xfrm>
-            <a:off x="596899" y="1918390"/>
-            <a:ext cx="6946883" cy="562569"/>
+          <p:cNvPr id="14" name="TextBox 13"/>
+          <p:cNvSpPr txBox="1"/>
+          <p:nvPr/>
+        </p:nvSpPr>
+        <p:spPr>
+          <a:xfrm>
+            <a:off x="1054097" y="2045389"/>
+            <a:ext cx="2707673" cy="292099"/>
           </a:xfrm>
           <a:prstGeom prst="rect">
             <a:avLst/>
@@ -17123,7 +17777,7 @@
               </a:lnSpc>
             </a:pPr>
             <a:r>
-              <a:rPr sz="2400" b="0" i="0">
+              <a:rPr sz="1600" b="0" i="0">
                 <a:solidFill>
                   <a:srgbClr val="3A3532"/>
                 </a:solidFill>
@@ -17136,14 +17790,14 @@
       </p:sp>
       <p:sp>
         <p:nvSpPr>
-          <p:cNvPr id="8" name="TextBox 7"/>
-          <p:cNvSpPr txBox="1"/>
-          <p:nvPr/>
-        </p:nvSpPr>
-        <p:spPr>
-          <a:xfrm>
-            <a:off x="596899" y="1918390"/>
-            <a:ext cx="355599" cy="228599"/>
+          <p:cNvPr id="15" name="TextBox 14"/>
+          <p:cNvSpPr txBox="1"/>
+          <p:nvPr/>
+        </p:nvSpPr>
+        <p:spPr>
+          <a:xfrm>
+            <a:off x="596899" y="2083489"/>
+            <a:ext cx="368299" cy="203199"/>
           </a:xfrm>
           <a:prstGeom prst="rect">
             <a:avLst/>
@@ -17158,7 +17812,7 @@
           <a:p>
             <a:pPr algn="l"/>
             <a:r>
-              <a:rPr sz="1500" b="1" i="0">
+              <a:rPr sz="1100" b="1" i="0">
                 <a:solidFill>
                   <a:srgbClr val="7A4F5E"/>
                 </a:solidFill>
@@ -17171,14 +17825,14 @@
       </p:sp>
       <p:sp>
         <p:nvSpPr>
-          <p:cNvPr id="9" name="TextBox 8"/>
-          <p:cNvSpPr txBox="1"/>
-          <p:nvPr/>
-        </p:nvSpPr>
-        <p:spPr>
-          <a:xfrm>
-            <a:off x="596899" y="2442859"/>
-            <a:ext cx="6946883" cy="562569"/>
+          <p:cNvPr id="16" name="TextBox 15"/>
+          <p:cNvSpPr txBox="1"/>
+          <p:nvPr/>
+        </p:nvSpPr>
+        <p:spPr>
+          <a:xfrm>
+            <a:off x="1054097" y="2569858"/>
+            <a:ext cx="4285148" cy="292099"/>
           </a:xfrm>
           <a:prstGeom prst="rect">
             <a:avLst/>
@@ -17197,7 +17851,7 @@
               </a:lnSpc>
             </a:pPr>
             <a:r>
-              <a:rPr sz="2400" b="0" i="0">
+              <a:rPr sz="1600" b="0" i="0">
                 <a:solidFill>
                   <a:srgbClr val="3A3532"/>
                 </a:solidFill>
@@ -17210,14 +17864,14 @@
       </p:sp>
       <p:sp>
         <p:nvSpPr>
-          <p:cNvPr id="10" name="TextBox 9"/>
-          <p:cNvSpPr txBox="1"/>
-          <p:nvPr/>
-        </p:nvSpPr>
-        <p:spPr>
-          <a:xfrm>
-            <a:off x="596899" y="2442859"/>
-            <a:ext cx="355599" cy="228599"/>
+          <p:cNvPr id="17" name="TextBox 16"/>
+          <p:cNvSpPr txBox="1"/>
+          <p:nvPr/>
+        </p:nvSpPr>
+        <p:spPr>
+          <a:xfrm>
+            <a:off x="596899" y="2607958"/>
+            <a:ext cx="368299" cy="203199"/>
           </a:xfrm>
           <a:prstGeom prst="rect">
             <a:avLst/>
@@ -17232,7 +17886,7 @@
           <a:p>
             <a:pPr algn="l"/>
             <a:r>
-              <a:rPr sz="1500" b="1" i="0">
+              <a:rPr sz="1100" b="1" i="0">
                 <a:solidFill>
                   <a:srgbClr val="7A4F5E"/>
                 </a:solidFill>
@@ -17245,14 +17899,14 @@
       </p:sp>
       <p:sp>
         <p:nvSpPr>
-          <p:cNvPr id="11" name="TextBox 10"/>
-          <p:cNvSpPr txBox="1"/>
-          <p:nvPr/>
-        </p:nvSpPr>
-        <p:spPr>
-          <a:xfrm>
-            <a:off x="596899" y="2967328"/>
-            <a:ext cx="6946883" cy="562569"/>
+          <p:cNvPr id="18" name="TextBox 17"/>
+          <p:cNvSpPr txBox="1"/>
+          <p:nvPr/>
+        </p:nvSpPr>
+        <p:spPr>
+          <a:xfrm>
+            <a:off x="1054097" y="3094327"/>
+            <a:ext cx="2872872" cy="292099"/>
           </a:xfrm>
           <a:prstGeom prst="rect">
             <a:avLst/>
@@ -17271,7 +17925,7 @@
               </a:lnSpc>
             </a:pPr>
             <a:r>
-              <a:rPr sz="2400" b="0" i="0">
+              <a:rPr sz="1600" b="0" i="0">
                 <a:solidFill>
                   <a:srgbClr val="3A3532"/>
                 </a:solidFill>
@@ -17284,14 +17938,14 @@
       </p:sp>
       <p:sp>
         <p:nvSpPr>
-          <p:cNvPr id="12" name="TextBox 11"/>
-          <p:cNvSpPr txBox="1"/>
-          <p:nvPr/>
-        </p:nvSpPr>
-        <p:spPr>
-          <a:xfrm>
-            <a:off x="596899" y="2967328"/>
-            <a:ext cx="355599" cy="228599"/>
+          <p:cNvPr id="19" name="TextBox 18"/>
+          <p:cNvSpPr txBox="1"/>
+          <p:nvPr/>
+        </p:nvSpPr>
+        <p:spPr>
+          <a:xfrm>
+            <a:off x="596899" y="3132427"/>
+            <a:ext cx="368299" cy="203199"/>
           </a:xfrm>
           <a:prstGeom prst="rect">
             <a:avLst/>
@@ -17306,7 +17960,7 @@
           <a:p>
             <a:pPr algn="l"/>
             <a:r>
-              <a:rPr sz="1500" b="1" i="0">
+              <a:rPr sz="1100" b="1" i="0">
                 <a:solidFill>
                   <a:srgbClr val="7A4F5E"/>
                 </a:solidFill>
@@ -17319,14 +17973,14 @@
       </p:sp>
       <p:sp>
         <p:nvSpPr>
-          <p:cNvPr id="13" name="TextBox 12"/>
-          <p:cNvSpPr txBox="1"/>
-          <p:nvPr/>
-        </p:nvSpPr>
-        <p:spPr>
-          <a:xfrm>
-            <a:off x="596899" y="3491797"/>
-            <a:ext cx="6946883" cy="562569"/>
+          <p:cNvPr id="20" name="TextBox 19"/>
+          <p:cNvSpPr txBox="1"/>
+          <p:nvPr/>
+        </p:nvSpPr>
+        <p:spPr>
+          <a:xfrm>
+            <a:off x="1054097" y="3618796"/>
+            <a:ext cx="3215275" cy="292099"/>
           </a:xfrm>
           <a:prstGeom prst="rect">
             <a:avLst/>
@@ -17345,7 +17999,7 @@
               </a:lnSpc>
             </a:pPr>
             <a:r>
-              <a:rPr sz="2400" b="0" i="0">
+              <a:rPr sz="1600" b="0" i="0">
                 <a:solidFill>
                   <a:srgbClr val="3A3532"/>
                 </a:solidFill>
@@ -17358,14 +18012,14 @@
       </p:sp>
       <p:sp>
         <p:nvSpPr>
-          <p:cNvPr id="14" name="TextBox 13"/>
-          <p:cNvSpPr txBox="1"/>
-          <p:nvPr/>
-        </p:nvSpPr>
-        <p:spPr>
-          <a:xfrm>
-            <a:off x="596899" y="3491797"/>
-            <a:ext cx="355599" cy="228599"/>
+          <p:cNvPr id="21" name="TextBox 20"/>
+          <p:cNvSpPr txBox="1"/>
+          <p:nvPr/>
+        </p:nvSpPr>
+        <p:spPr>
+          <a:xfrm>
+            <a:off x="596899" y="3656896"/>
+            <a:ext cx="368299" cy="203199"/>
           </a:xfrm>
           <a:prstGeom prst="rect">
             <a:avLst/>
@@ -17380,7 +18034,7 @@
           <a:p>
             <a:pPr algn="l"/>
             <a:r>
-              <a:rPr sz="1500" b="1" i="0">
+              <a:rPr sz="1100" b="1" i="0">
                 <a:solidFill>
                   <a:srgbClr val="7A4F5E"/>
                 </a:solidFill>
@@ -17393,14 +18047,14 @@
       </p:sp>
       <p:sp>
         <p:nvSpPr>
-          <p:cNvPr id="15" name="TextBox 14"/>
-          <p:cNvSpPr txBox="1"/>
-          <p:nvPr/>
-        </p:nvSpPr>
-        <p:spPr>
-          <a:xfrm>
-            <a:off x="596899" y="4016266"/>
-            <a:ext cx="6946883" cy="562569"/>
+          <p:cNvPr id="22" name="TextBox 21"/>
+          <p:cNvSpPr txBox="1"/>
+          <p:nvPr/>
+        </p:nvSpPr>
+        <p:spPr>
+          <a:xfrm>
+            <a:off x="1054097" y="4143265"/>
+            <a:ext cx="2129626" cy="292099"/>
           </a:xfrm>
           <a:prstGeom prst="rect">
             <a:avLst/>
@@ -17419,7 +18073,7 @@
               </a:lnSpc>
             </a:pPr>
             <a:r>
-              <a:rPr sz="2400" b="0" i="0">
+              <a:rPr sz="1600" b="0" i="0">
                 <a:solidFill>
                   <a:srgbClr val="3A3532"/>
                 </a:solidFill>
@@ -17432,14 +18086,14 @@
       </p:sp>
       <p:sp>
         <p:nvSpPr>
-          <p:cNvPr id="16" name="TextBox 15"/>
-          <p:cNvSpPr txBox="1"/>
-          <p:nvPr/>
-        </p:nvSpPr>
-        <p:spPr>
-          <a:xfrm>
-            <a:off x="596899" y="4016266"/>
-            <a:ext cx="355599" cy="228599"/>
+          <p:cNvPr id="23" name="TextBox 22"/>
+          <p:cNvSpPr txBox="1"/>
+          <p:nvPr/>
+        </p:nvSpPr>
+        <p:spPr>
+          <a:xfrm>
+            <a:off x="596899" y="4181365"/>
+            <a:ext cx="368299" cy="203199"/>
           </a:xfrm>
           <a:prstGeom prst="rect">
             <a:avLst/>
@@ -17454,7 +18108,7 @@
           <a:p>
             <a:pPr algn="l"/>
             <a:r>
-              <a:rPr sz="1500" b="1" i="0">
+              <a:rPr sz="1100" b="1" i="0">
                 <a:solidFill>
                   <a:srgbClr val="7A4F5E"/>
                 </a:solidFill>
@@ -17467,14 +18121,14 @@
       </p:sp>
       <p:sp>
         <p:nvSpPr>
-          <p:cNvPr id="17" name="TextBox 16"/>
-          <p:cNvSpPr txBox="1"/>
-          <p:nvPr/>
-        </p:nvSpPr>
-        <p:spPr>
-          <a:xfrm>
-            <a:off x="596899" y="4540735"/>
-            <a:ext cx="6946883" cy="562569"/>
+          <p:cNvPr id="24" name="TextBox 23"/>
+          <p:cNvSpPr txBox="1"/>
+          <p:nvPr/>
+        </p:nvSpPr>
+        <p:spPr>
+          <a:xfrm>
+            <a:off x="1054097" y="4667734"/>
+            <a:ext cx="2179731" cy="292099"/>
           </a:xfrm>
           <a:prstGeom prst="rect">
             <a:avLst/>
@@ -17493,7 +18147,7 @@
               </a:lnSpc>
             </a:pPr>
             <a:r>
-              <a:rPr sz="2400" b="0" i="0">
+              <a:rPr sz="1600" b="0" i="0">
                 <a:solidFill>
                   <a:srgbClr val="3A3532"/>
                 </a:solidFill>
@@ -17506,14 +18160,14 @@
       </p:sp>
       <p:sp>
         <p:nvSpPr>
-          <p:cNvPr id="18" name="TextBox 17"/>
-          <p:cNvSpPr txBox="1"/>
-          <p:nvPr/>
-        </p:nvSpPr>
-        <p:spPr>
-          <a:xfrm>
-            <a:off x="596899" y="4540735"/>
-            <a:ext cx="355599" cy="228599"/>
+          <p:cNvPr id="25" name="TextBox 24"/>
+          <p:cNvSpPr txBox="1"/>
+          <p:nvPr/>
+        </p:nvSpPr>
+        <p:spPr>
+          <a:xfrm>
+            <a:off x="596899" y="4705834"/>
+            <a:ext cx="368299" cy="203199"/>
           </a:xfrm>
           <a:prstGeom prst="rect">
             <a:avLst/>
@@ -17528,7 +18182,7 @@
           <a:p>
             <a:pPr algn="l"/>
             <a:r>
-              <a:rPr sz="1500" b="1" i="0">
+              <a:rPr sz="1100" b="1" i="0">
                 <a:solidFill>
                   <a:srgbClr val="7A4F5E"/>
                 </a:solidFill>
@@ -17541,14 +18195,14 @@
       </p:sp>
       <p:sp>
         <p:nvSpPr>
-          <p:cNvPr id="19" name="TextBox 18"/>
-          <p:cNvSpPr txBox="1"/>
-          <p:nvPr/>
-        </p:nvSpPr>
-        <p:spPr>
-          <a:xfrm>
-            <a:off x="596899" y="5065204"/>
-            <a:ext cx="6946883" cy="562569"/>
+          <p:cNvPr id="26" name="TextBox 25"/>
+          <p:cNvSpPr txBox="1"/>
+          <p:nvPr/>
+        </p:nvSpPr>
+        <p:spPr>
+          <a:xfrm>
+            <a:off x="1054097" y="5192203"/>
+            <a:ext cx="1854691" cy="292099"/>
           </a:xfrm>
           <a:prstGeom prst="rect">
             <a:avLst/>
@@ -17567,7 +18221,7 @@
               </a:lnSpc>
             </a:pPr>
             <a:r>
-              <a:rPr sz="2400" b="0" i="0">
+              <a:rPr sz="1600" b="0" i="0">
                 <a:solidFill>
                   <a:srgbClr val="3A3532"/>
                 </a:solidFill>
@@ -17580,14 +18234,14 @@
       </p:sp>
       <p:sp>
         <p:nvSpPr>
-          <p:cNvPr id="20" name="TextBox 19"/>
-          <p:cNvSpPr txBox="1"/>
-          <p:nvPr/>
-        </p:nvSpPr>
-        <p:spPr>
-          <a:xfrm>
-            <a:off x="596899" y="5065204"/>
-            <a:ext cx="355599" cy="228599"/>
+          <p:cNvPr id="27" name="TextBox 26"/>
+          <p:cNvSpPr txBox="1"/>
+          <p:nvPr/>
+        </p:nvSpPr>
+        <p:spPr>
+          <a:xfrm>
+            <a:off x="596899" y="5230303"/>
+            <a:ext cx="368299" cy="203199"/>
           </a:xfrm>
           <a:prstGeom prst="rect">
             <a:avLst/>
@@ -17602,7 +18256,7 @@
           <a:p>
             <a:pPr algn="l"/>
             <a:r>
-              <a:rPr sz="1500" b="1" i="0">
+              <a:rPr sz="1100" b="1" i="0">
                 <a:solidFill>
                   <a:srgbClr val="7A4F5E"/>
                 </a:solidFill>
@@ -17615,14 +18269,14 @@
       </p:sp>
       <p:sp>
         <p:nvSpPr>
-          <p:cNvPr id="21" name="TextBox 20"/>
-          <p:cNvSpPr txBox="1"/>
-          <p:nvPr/>
-        </p:nvSpPr>
-        <p:spPr>
-          <a:xfrm>
-            <a:off x="8013680" y="5373277"/>
-            <a:ext cx="3594091" cy="215899"/>
+          <p:cNvPr id="28" name="TextBox 27"/>
+          <p:cNvSpPr txBox="1"/>
+          <p:nvPr/>
+        </p:nvSpPr>
+        <p:spPr>
+          <a:xfrm>
+            <a:off x="8275319" y="5379627"/>
+            <a:ext cx="3083513" cy="196850"/>
           </a:xfrm>
           <a:prstGeom prst="rect">
             <a:avLst/>
@@ -17641,7 +18295,7 @@
               </a:lnSpc>
             </a:pPr>
             <a:r>
-              <a:rPr sz="1500" b="0" i="0">
+              <a:rPr sz="1000" b="0" i="0">
                 <a:solidFill>
                   <a:srgbClr val="6B625D"/>
                 </a:solidFill>
@@ -17654,14 +18308,14 @@
       </p:sp>
       <p:sp>
         <p:nvSpPr>
-          <p:cNvPr id="22" name="TextBox 21"/>
-          <p:cNvSpPr txBox="1"/>
-          <p:nvPr/>
-        </p:nvSpPr>
-        <p:spPr>
-          <a:xfrm>
-            <a:off x="596899" y="6426184"/>
-            <a:ext cx="189011" cy="152400"/>
+          <p:cNvPr id="29" name="TextBox 28"/>
+          <p:cNvSpPr txBox="1"/>
+          <p:nvPr/>
+        </p:nvSpPr>
+        <p:spPr>
+          <a:xfrm>
+            <a:off x="596899" y="6407134"/>
+            <a:ext cx="201711" cy="184150"/>
           </a:xfrm>
           <a:prstGeom prst="rect">
             <a:avLst/>
@@ -17680,7 +18334,7 @@
               </a:lnSpc>
             </a:pPr>
             <a:r>
-              <a:rPr sz="1350" b="0" i="0">
+              <a:rPr sz="900" b="0" i="0">
                 <a:solidFill>
                   <a:srgbClr val="6B625D"/>
                 </a:solidFill>
@@ -17693,14 +18347,14 @@
       </p:sp>
       <p:sp>
         <p:nvSpPr>
-          <p:cNvPr id="23" name="TextBox 22"/>
-          <p:cNvSpPr txBox="1"/>
-          <p:nvPr/>
-        </p:nvSpPr>
-        <p:spPr>
-          <a:xfrm>
-            <a:off x="9960545" y="6407134"/>
-            <a:ext cx="1266227" cy="152400"/>
+          <p:cNvPr id="30" name="TextBox 29"/>
+          <p:cNvSpPr txBox="1"/>
+          <p:nvPr/>
+        </p:nvSpPr>
+        <p:spPr>
+          <a:xfrm>
+            <a:off x="9960545" y="6388084"/>
+            <a:ext cx="1278926" cy="184150"/>
           </a:xfrm>
           <a:prstGeom prst="rect">
             <a:avLst/>
@@ -17719,7 +18373,7 @@
               </a:lnSpc>
             </a:pPr>
             <a:r>
-              <a:rPr sz="1350" b="0" i="0">
+              <a:rPr sz="900" b="0" i="0">
                 <a:solidFill>
                   <a:srgbClr val="6B625D"/>
                 </a:solidFill>
@@ -17855,8 +18509,8 @@
         </p:nvSpPr>
         <p:spPr>
           <a:xfrm>
-            <a:off x="596899" y="1403148"/>
-            <a:ext cx="11010872" cy="177800"/>
+            <a:off x="596899" y="1384098"/>
+            <a:ext cx="2301175" cy="215899"/>
           </a:xfrm>
           <a:prstGeom prst="rect">
             <a:avLst/>
@@ -17875,7 +18529,7 @@
               </a:lnSpc>
             </a:pPr>
             <a:r>
-              <a:rPr sz="1650" b="1" i="0">
+              <a:rPr sz="1100" b="1" i="0">
                 <a:solidFill>
                   <a:srgbClr val="FBF7F5"/>
                 </a:solidFill>
@@ -17895,7 +18549,7 @@
         <p:spPr>
           <a:xfrm>
             <a:off x="596899" y="1771447"/>
-            <a:ext cx="9563076" cy="2232317"/>
+            <a:ext cx="9246172" cy="2231623"/>
           </a:xfrm>
           <a:prstGeom prst="rect">
             <a:avLst/>
@@ -17914,11 +18568,11 @@
               </a:lnSpc>
             </a:pPr>
             <a:r>
-              <a:rPr sz="4050" b="0" i="1">
+              <a:rPr sz="2700" b="0" i="1">
                 <a:solidFill>
                   <a:srgbClr val="FBF7F5"/>
                 </a:solidFill>
-                <a:latin typeface="IM Fell English"/>
+                <a:latin typeface="Playfair Display"/>
               </a:rPr>
               <a:t>L'attuale direzione verso la quale stiamo andando è, e sarà, uno shock. È un mondo che abbraccerà coloro che vivono e operano come loro stessi. Ciò significherà molto disordine, caos e confusione per coloro che sono persi nella dipendenza da schemi e relazioni. Tutto nella nostra specie è radicato nella dipendenza.</a:t>
             </a:r>
@@ -17933,8 +18587,8 @@
         </p:nvSpPr>
         <p:spPr>
           <a:xfrm>
-            <a:off x="596899" y="4245064"/>
-            <a:ext cx="11010872" cy="177800"/>
+            <a:off x="596899" y="4226014"/>
+            <a:ext cx="865880" cy="215899"/>
           </a:xfrm>
           <a:prstGeom prst="rect">
             <a:avLst/>
@@ -17953,7 +18607,7 @@
               </a:lnSpc>
             </a:pPr>
             <a:r>
-              <a:rPr sz="1650" b="1" i="0">
+              <a:rPr sz="1100" b="1" i="0">
                 <a:solidFill>
                   <a:srgbClr val="FBF7F5"/>
                 </a:solidFill>
@@ -17972,8 +18626,8 @@
         </p:nvSpPr>
         <p:spPr>
           <a:xfrm>
-            <a:off x="596899" y="4664163"/>
-            <a:ext cx="7023082" cy="295274"/>
+            <a:off x="596899" y="4670513"/>
+            <a:ext cx="5794559" cy="279399"/>
           </a:xfrm>
           <a:prstGeom prst="rect">
             <a:avLst/>
@@ -17992,7 +18646,7 @@
               </a:lnSpc>
             </a:pPr>
             <a:r>
-              <a:rPr sz="2250" b="0" i="0">
+              <a:rPr sz="1500" b="0" i="0">
                 <a:solidFill>
                   <a:srgbClr val="FBF7F5"/>
                 </a:solidFill>
@@ -18011,8 +18665,8 @@
         </p:nvSpPr>
         <p:spPr>
           <a:xfrm>
-            <a:off x="596899" y="6426184"/>
-            <a:ext cx="190996" cy="152400"/>
+            <a:off x="596899" y="6407134"/>
+            <a:ext cx="203696" cy="184150"/>
           </a:xfrm>
           <a:prstGeom prst="rect">
             <a:avLst/>
@@ -18031,7 +18685,7 @@
               </a:lnSpc>
             </a:pPr>
             <a:r>
-              <a:rPr sz="1350" b="0" i="0">
+              <a:rPr sz="900" b="0" i="0">
                 <a:solidFill>
                   <a:srgbClr val="8E8580"/>
                 </a:solidFill>
@@ -18050,8 +18704,8 @@
         </p:nvSpPr>
         <p:spPr>
           <a:xfrm>
-            <a:off x="9960545" y="6407134"/>
-            <a:ext cx="1266227" cy="152400"/>
+            <a:off x="9960545" y="6388084"/>
+            <a:ext cx="1278926" cy="184150"/>
           </a:xfrm>
           <a:prstGeom prst="rect">
             <a:avLst/>
@@ -18070,7 +18724,7 @@
               </a:lnSpc>
             </a:pPr>
             <a:r>
-              <a:rPr sz="1350" b="0" i="0">
+              <a:rPr sz="900" b="0" i="0">
                 <a:solidFill>
                   <a:srgbClr val="8E8580"/>
                 </a:solidFill>
@@ -18206,8 +18860,8 @@
         </p:nvSpPr>
         <p:spPr>
           <a:xfrm>
-            <a:off x="596899" y="444499"/>
-            <a:ext cx="11010872" cy="177800"/>
+            <a:off x="596899" y="425449"/>
+            <a:ext cx="2301175" cy="215899"/>
           </a:xfrm>
           <a:prstGeom prst="rect">
             <a:avLst/>
@@ -18226,7 +18880,7 @@
               </a:lnSpc>
             </a:pPr>
             <a:r>
-              <a:rPr sz="1650" b="1" i="0">
+              <a:rPr sz="1100" b="1" i="0">
                 <a:solidFill>
                   <a:srgbClr val="7A4F5E"/>
                 </a:solidFill>
@@ -18245,8 +18899,8 @@
         </p:nvSpPr>
         <p:spPr>
           <a:xfrm>
-            <a:off x="596899" y="698498"/>
-            <a:ext cx="11010872" cy="485079"/>
+            <a:off x="596899" y="647698"/>
+            <a:ext cx="8679138" cy="577849"/>
           </a:xfrm>
           <a:prstGeom prst="rect">
             <a:avLst/>
@@ -18265,7 +18919,7 @@
               </a:lnSpc>
             </a:pPr>
             <a:r>
-              <a:rPr sz="4800" b="1" i="0">
+              <a:rPr sz="3200" b="1" i="0">
                 <a:solidFill>
                   <a:srgbClr val="3A3532"/>
                 </a:solidFill>
@@ -18284,8 +18938,8 @@
         </p:nvSpPr>
         <p:spPr>
           <a:xfrm>
-            <a:off x="596899" y="1424877"/>
-            <a:ext cx="5114912" cy="281880"/>
+            <a:off x="596899" y="1418527"/>
+            <a:ext cx="4131458" cy="292099"/>
           </a:xfrm>
           <a:prstGeom prst="rect">
             <a:avLst/>
@@ -18304,7 +18958,7 @@
               </a:lnSpc>
             </a:pPr>
             <a:r>
-              <a:rPr sz="2400" b="1" i="0">
+              <a:rPr sz="1600" b="1" i="0">
                 <a:solidFill>
                   <a:srgbClr val="6B625D"/>
                 </a:solidFill>
@@ -18323,8 +18977,8 @@
         </p:nvSpPr>
         <p:spPr>
           <a:xfrm>
-            <a:off x="596899" y="1833756"/>
-            <a:ext cx="5114912" cy="811409"/>
+            <a:off x="596899" y="1846456"/>
+            <a:ext cx="4499956" cy="775889"/>
           </a:xfrm>
           <a:prstGeom prst="rect">
             <a:avLst/>
@@ -18343,7 +18997,7 @@
               </a:lnSpc>
             </a:pPr>
             <a:r>
-              <a:rPr sz="2100" b="0" i="0">
+              <a:rPr sz="1400" b="0" i="0">
                 <a:solidFill>
                   <a:srgbClr val="6B625D"/>
                 </a:solidFill>
@@ -18362,8 +19016,8 @@
         </p:nvSpPr>
         <p:spPr>
           <a:xfrm>
-            <a:off x="6492859" y="1424877"/>
-            <a:ext cx="5114912" cy="281880"/>
+            <a:off x="6492859" y="1418527"/>
+            <a:ext cx="2783873" cy="292099"/>
           </a:xfrm>
           <a:prstGeom prst="rect">
             <a:avLst/>
@@ -18382,7 +19036,7 @@
               </a:lnSpc>
             </a:pPr>
             <a:r>
-              <a:rPr sz="2400" b="1" i="0">
+              <a:rPr sz="1600" b="1" i="0">
                 <a:solidFill>
                   <a:srgbClr val="7A4F5E"/>
                 </a:solidFill>
@@ -18401,8 +19055,8 @@
         </p:nvSpPr>
         <p:spPr>
           <a:xfrm>
-            <a:off x="6492859" y="1833756"/>
-            <a:ext cx="5114912" cy="1584718"/>
+            <a:off x="6492859" y="1846456"/>
+            <a:ext cx="4953682" cy="1549198"/>
           </a:xfrm>
           <a:prstGeom prst="rect">
             <a:avLst/>
@@ -18421,7 +19075,7 @@
               </a:lnSpc>
             </a:pPr>
             <a:r>
-              <a:rPr sz="2100" b="0" i="0">
+              <a:rPr sz="1400" b="0" i="0">
                 <a:solidFill>
                   <a:srgbClr val="3A3532"/>
                 </a:solidFill>
@@ -18440,8 +19094,8 @@
         </p:nvSpPr>
         <p:spPr>
           <a:xfrm>
-            <a:off x="596899" y="5961444"/>
-            <a:ext cx="5245087" cy="312340"/>
+            <a:off x="596899" y="5942395"/>
+            <a:ext cx="2339374" cy="342899"/>
           </a:xfrm>
           <a:prstGeom prst="rect">
             <a:avLst/>
@@ -18460,7 +19114,7 @@
               </a:lnSpc>
             </a:pPr>
             <a:r>
-              <a:rPr sz="2700" b="1" i="1">
+              <a:rPr sz="1800" b="1" i="1">
                 <a:solidFill>
                   <a:srgbClr val="7A4F5E"/>
                 </a:solidFill>
@@ -18479,8 +19133,8 @@
         </p:nvSpPr>
         <p:spPr>
           <a:xfrm>
-            <a:off x="596899" y="6426184"/>
-            <a:ext cx="182364" cy="152400"/>
+            <a:off x="596899" y="6407134"/>
+            <a:ext cx="195064" cy="184150"/>
           </a:xfrm>
           <a:prstGeom prst="rect">
             <a:avLst/>
@@ -18499,7 +19153,7 @@
               </a:lnSpc>
             </a:pPr>
             <a:r>
-              <a:rPr sz="1350" b="0" i="0">
+              <a:rPr sz="900" b="0" i="0">
                 <a:solidFill>
                   <a:srgbClr val="6B625D"/>
                 </a:solidFill>
@@ -18518,8 +19172,8 @@
         </p:nvSpPr>
         <p:spPr>
           <a:xfrm>
-            <a:off x="9960545" y="6407134"/>
-            <a:ext cx="1266227" cy="152400"/>
+            <a:off x="9960545" y="6388084"/>
+            <a:ext cx="1278926" cy="184150"/>
           </a:xfrm>
           <a:prstGeom prst="rect">
             <a:avLst/>
@@ -18538,7 +19192,7 @@
               </a:lnSpc>
             </a:pPr>
             <a:r>
-              <a:rPr sz="1350" b="0" i="0">
+              <a:rPr sz="900" b="0" i="0">
                 <a:solidFill>
                   <a:srgbClr val="6B625D"/>
                 </a:solidFill>
@@ -19324,8 +19978,8 @@
         </p:nvSpPr>
         <p:spPr>
           <a:xfrm>
-            <a:off x="596899" y="444499"/>
-            <a:ext cx="11010872" cy="177800"/>
+            <a:off x="596899" y="425449"/>
+            <a:ext cx="1589183" cy="215899"/>
           </a:xfrm>
           <a:prstGeom prst="rect">
             <a:avLst/>
@@ -19344,7 +19998,7 @@
               </a:lnSpc>
             </a:pPr>
             <a:r>
-              <a:rPr sz="1650" b="1" i="0">
+              <a:rPr sz="1100" b="1" i="0">
                 <a:solidFill>
                   <a:srgbClr val="7A4F5E"/>
                 </a:solidFill>
@@ -19363,8 +20017,8 @@
         </p:nvSpPr>
         <p:spPr>
           <a:xfrm>
-            <a:off x="596899" y="698498"/>
-            <a:ext cx="11010872" cy="485079"/>
+            <a:off x="596899" y="647698"/>
+            <a:ext cx="4042459" cy="577849"/>
           </a:xfrm>
           <a:prstGeom prst="rect">
             <a:avLst/>
@@ -19383,7 +20037,7 @@
               </a:lnSpc>
             </a:pPr>
             <a:r>
-              <a:rPr sz="4800" b="1" i="0">
+              <a:rPr sz="3200" b="1" i="0">
                 <a:solidFill>
                   <a:srgbClr val="3A3532"/>
                 </a:solidFill>
@@ -19402,8 +20056,8 @@
         </p:nvSpPr>
         <p:spPr>
           <a:xfrm>
-            <a:off x="596899" y="1424877"/>
-            <a:ext cx="5114912" cy="281880"/>
+            <a:off x="596899" y="1418527"/>
+            <a:ext cx="4443203" cy="292099"/>
           </a:xfrm>
           <a:prstGeom prst="rect">
             <a:avLst/>
@@ -19422,7 +20076,7 @@
               </a:lnSpc>
             </a:pPr>
             <a:r>
-              <a:rPr sz="2400" b="1" i="0">
+              <a:rPr sz="1600" b="1" i="0">
                 <a:solidFill>
                   <a:srgbClr val="6B625D"/>
                 </a:solidFill>
@@ -19441,8 +20095,8 @@
         </p:nvSpPr>
         <p:spPr>
           <a:xfrm>
-            <a:off x="596899" y="1833756"/>
-            <a:ext cx="5114912" cy="295870"/>
+            <a:off x="812798" y="1846456"/>
+            <a:ext cx="1047946" cy="260349"/>
           </a:xfrm>
           <a:prstGeom prst="rect">
             <a:avLst/>
@@ -19461,7 +20115,7 @@
               </a:lnSpc>
             </a:pPr>
             <a:r>
-              <a:rPr sz="2100" b="0" i="0">
+              <a:rPr sz="1400" b="0" i="0">
                 <a:solidFill>
                   <a:srgbClr val="6B625D"/>
                 </a:solidFill>
@@ -19480,8 +20134,8 @@
         </p:nvSpPr>
         <p:spPr>
           <a:xfrm>
-            <a:off x="596899" y="2180426"/>
-            <a:ext cx="5114912" cy="295870"/>
+            <a:off x="812798" y="2193126"/>
+            <a:ext cx="412848" cy="260349"/>
           </a:xfrm>
           <a:prstGeom prst="rect">
             <a:avLst/>
@@ -19500,7 +20154,7 @@
               </a:lnSpc>
             </a:pPr>
             <a:r>
-              <a:rPr sz="2100" b="0" i="0">
+              <a:rPr sz="1400" b="0" i="0">
                 <a:solidFill>
                   <a:srgbClr val="6B625D"/>
                 </a:solidFill>
@@ -19519,8 +20173,8 @@
         </p:nvSpPr>
         <p:spPr>
           <a:xfrm>
-            <a:off x="596899" y="2527095"/>
-            <a:ext cx="5114912" cy="295870"/>
+            <a:off x="812798" y="2539795"/>
+            <a:ext cx="1694751" cy="260349"/>
           </a:xfrm>
           <a:prstGeom prst="rect">
             <a:avLst/>
@@ -19539,7 +20193,7 @@
               </a:lnSpc>
             </a:pPr>
             <a:r>
-              <a:rPr sz="2100" b="0" i="0">
+              <a:rPr sz="1400" b="0" i="0">
                 <a:solidFill>
                   <a:srgbClr val="6B625D"/>
                 </a:solidFill>
@@ -19558,8 +20212,8 @@
         </p:nvSpPr>
         <p:spPr>
           <a:xfrm>
-            <a:off x="596899" y="2873765"/>
-            <a:ext cx="5114912" cy="295870"/>
+            <a:off x="812798" y="2886465"/>
+            <a:ext cx="2194217" cy="260349"/>
           </a:xfrm>
           <a:prstGeom prst="rect">
             <a:avLst/>
@@ -19578,7 +20232,7 @@
               </a:lnSpc>
             </a:pPr>
             <a:r>
-              <a:rPr sz="2100" b="0" i="0">
+              <a:rPr sz="1400" b="0" i="0">
                 <a:solidFill>
                   <a:srgbClr val="6B625D"/>
                 </a:solidFill>
@@ -19597,8 +20251,8 @@
         </p:nvSpPr>
         <p:spPr>
           <a:xfrm>
-            <a:off x="596899" y="3220434"/>
-            <a:ext cx="5114912" cy="295870"/>
+            <a:off x="812798" y="3233134"/>
+            <a:ext cx="1355920" cy="260349"/>
           </a:xfrm>
           <a:prstGeom prst="rect">
             <a:avLst/>
@@ -19617,7 +20271,7 @@
               </a:lnSpc>
             </a:pPr>
             <a:r>
-              <a:rPr sz="2100" b="0" i="0">
+              <a:rPr sz="1400" b="0" i="0">
                 <a:solidFill>
                   <a:srgbClr val="6B625D"/>
                 </a:solidFill>
@@ -19636,8 +20290,8 @@
         </p:nvSpPr>
         <p:spPr>
           <a:xfrm>
-            <a:off x="596899" y="3567104"/>
-            <a:ext cx="5114912" cy="295870"/>
+            <a:off x="812798" y="3579804"/>
+            <a:ext cx="1207390" cy="260349"/>
           </a:xfrm>
           <a:prstGeom prst="rect">
             <a:avLst/>
@@ -19656,7 +20310,7 @@
               </a:lnSpc>
             </a:pPr>
             <a:r>
-              <a:rPr sz="2100" b="0" i="0">
+              <a:rPr sz="1400" b="0" i="0">
                 <a:solidFill>
                   <a:srgbClr val="6B625D"/>
                 </a:solidFill>
@@ -19675,8 +20329,8 @@
         </p:nvSpPr>
         <p:spPr>
           <a:xfrm>
-            <a:off x="596899" y="3913773"/>
-            <a:ext cx="5114912" cy="295870"/>
+            <a:off x="812798" y="3926473"/>
+            <a:ext cx="1491155" cy="260349"/>
           </a:xfrm>
           <a:prstGeom prst="rect">
             <a:avLst/>
@@ -19695,7 +20349,7 @@
               </a:lnSpc>
             </a:pPr>
             <a:r>
-              <a:rPr sz="2100" b="0" i="0">
+              <a:rPr sz="1400" b="0" i="0">
                 <a:solidFill>
                   <a:srgbClr val="6B625D"/>
                 </a:solidFill>
@@ -19714,8 +20368,8 @@
         </p:nvSpPr>
         <p:spPr>
           <a:xfrm>
-            <a:off x="6492859" y="1424877"/>
-            <a:ext cx="5114912" cy="281880"/>
+            <a:off x="6492859" y="1418527"/>
+            <a:ext cx="4503726" cy="292099"/>
           </a:xfrm>
           <a:prstGeom prst="rect">
             <a:avLst/>
@@ -19734,7 +20388,7 @@
               </a:lnSpc>
             </a:pPr>
             <a:r>
-              <a:rPr sz="2400" b="1" i="0">
+              <a:rPr sz="1600" b="1" i="0">
                 <a:solidFill>
                   <a:srgbClr val="7A4F5E"/>
                 </a:solidFill>
@@ -19753,8 +20407,8 @@
         </p:nvSpPr>
         <p:spPr>
           <a:xfrm>
-            <a:off x="6492859" y="1833756"/>
-            <a:ext cx="5114912" cy="295870"/>
+            <a:off x="6708758" y="1846456"/>
+            <a:ext cx="763982" cy="260349"/>
           </a:xfrm>
           <a:prstGeom prst="rect">
             <a:avLst/>
@@ -19773,7 +20427,7 @@
               </a:lnSpc>
             </a:pPr>
             <a:r>
-              <a:rPr sz="2100" b="0" i="0">
+              <a:rPr sz="1400" b="0" i="0">
                 <a:solidFill>
                   <a:srgbClr val="3A3532"/>
                 </a:solidFill>
@@ -19792,8 +20446,8 @@
         </p:nvSpPr>
         <p:spPr>
           <a:xfrm>
-            <a:off x="6492859" y="2180426"/>
-            <a:ext cx="5114912" cy="295870"/>
+            <a:off x="6708758" y="2193126"/>
+            <a:ext cx="1698125" cy="260349"/>
           </a:xfrm>
           <a:prstGeom prst="rect">
             <a:avLst/>
@@ -19812,7 +20466,7 @@
               </a:lnSpc>
             </a:pPr>
             <a:r>
-              <a:rPr sz="2100" b="0" i="0">
+              <a:rPr sz="1400" b="0" i="0">
                 <a:solidFill>
                   <a:srgbClr val="3A3532"/>
                 </a:solidFill>
@@ -19831,8 +20485,8 @@
         </p:nvSpPr>
         <p:spPr>
           <a:xfrm>
-            <a:off x="6492859" y="2527095"/>
-            <a:ext cx="5114912" cy="295870"/>
+            <a:off x="6708758" y="2539795"/>
+            <a:ext cx="1336473" cy="260349"/>
           </a:xfrm>
           <a:prstGeom prst="rect">
             <a:avLst/>
@@ -19851,7 +20505,7 @@
               </a:lnSpc>
             </a:pPr>
             <a:r>
-              <a:rPr sz="2100" b="0" i="0">
+              <a:rPr sz="1400" b="0" i="0">
                 <a:solidFill>
                   <a:srgbClr val="3A3532"/>
                 </a:solidFill>
@@ -19870,8 +20524,8 @@
         </p:nvSpPr>
         <p:spPr>
           <a:xfrm>
-            <a:off x="6492859" y="2873765"/>
-            <a:ext cx="5114912" cy="295870"/>
+            <a:off x="6708758" y="2886465"/>
+            <a:ext cx="1776408" cy="260349"/>
           </a:xfrm>
           <a:prstGeom prst="rect">
             <a:avLst/>
@@ -19890,7 +20544,7 @@
               </a:lnSpc>
             </a:pPr>
             <a:r>
-              <a:rPr sz="2100" b="0" i="0">
+              <a:rPr sz="1400" b="0" i="0">
                 <a:solidFill>
                   <a:srgbClr val="3A3532"/>
                 </a:solidFill>
@@ -19909,8 +20563,8 @@
         </p:nvSpPr>
         <p:spPr>
           <a:xfrm>
-            <a:off x="6492859" y="3220434"/>
-            <a:ext cx="5114912" cy="295870"/>
+            <a:off x="6708758" y="3233134"/>
+            <a:ext cx="2027232" cy="260349"/>
           </a:xfrm>
           <a:prstGeom prst="rect">
             <a:avLst/>
@@ -19929,7 +20583,7 @@
               </a:lnSpc>
             </a:pPr>
             <a:r>
-              <a:rPr sz="2100" b="0" i="0">
+              <a:rPr sz="1400" b="0" i="0">
                 <a:solidFill>
                   <a:srgbClr val="3A3532"/>
                 </a:solidFill>
@@ -19948,8 +20602,8 @@
         </p:nvSpPr>
         <p:spPr>
           <a:xfrm>
-            <a:off x="6492859" y="3567104"/>
-            <a:ext cx="5114912" cy="295870"/>
+            <a:off x="6708758" y="3579804"/>
+            <a:ext cx="1511495" cy="260349"/>
           </a:xfrm>
           <a:prstGeom prst="rect">
             <a:avLst/>
@@ -19968,7 +20622,7 @@
               </a:lnSpc>
             </a:pPr>
             <a:r>
-              <a:rPr sz="2100" b="0" i="0">
+              <a:rPr sz="1400" b="0" i="0">
                 <a:solidFill>
                   <a:srgbClr val="3A3532"/>
                 </a:solidFill>
@@ -19987,8 +20641,8 @@
         </p:nvSpPr>
         <p:spPr>
           <a:xfrm>
-            <a:off x="6492859" y="3913773"/>
-            <a:ext cx="5114912" cy="295870"/>
+            <a:off x="6708758" y="3926473"/>
+            <a:ext cx="3463519" cy="260349"/>
           </a:xfrm>
           <a:prstGeom prst="rect">
             <a:avLst/>
@@ -20007,7 +20661,7 @@
               </a:lnSpc>
             </a:pPr>
             <a:r>
-              <a:rPr sz="2100" b="0" i="0">
+              <a:rPr sz="1400" b="0" i="0">
                 <a:solidFill>
                   <a:srgbClr val="3A3532"/>
                 </a:solidFill>
@@ -20026,8 +20680,8 @@
         </p:nvSpPr>
         <p:spPr>
           <a:xfrm>
-            <a:off x="596899" y="6426184"/>
-            <a:ext cx="189408" cy="152400"/>
+            <a:off x="596899" y="6407134"/>
+            <a:ext cx="202108" cy="184150"/>
           </a:xfrm>
           <a:prstGeom prst="rect">
             <a:avLst/>
@@ -20046,7 +20700,7 @@
               </a:lnSpc>
             </a:pPr>
             <a:r>
-              <a:rPr sz="1350" b="0" i="0">
+              <a:rPr sz="900" b="0" i="0">
                 <a:solidFill>
                   <a:srgbClr val="6B625D"/>
                 </a:solidFill>
@@ -20065,8 +20719,8 @@
         </p:nvSpPr>
         <p:spPr>
           <a:xfrm>
-            <a:off x="9960545" y="6407134"/>
-            <a:ext cx="1266227" cy="152400"/>
+            <a:off x="9960545" y="6388084"/>
+            <a:ext cx="1278926" cy="184150"/>
           </a:xfrm>
           <a:prstGeom prst="rect">
             <a:avLst/>
@@ -20085,7 +20739,7 @@
               </a:lnSpc>
             </a:pPr>
             <a:r>
-              <a:rPr sz="1350" b="0" i="0">
+              <a:rPr sz="900" b="0" i="0">
                 <a:solidFill>
                   <a:srgbClr val="6B625D"/>
                 </a:solidFill>
@@ -20565,8 +21219,8 @@
         </p:nvSpPr>
         <p:spPr>
           <a:xfrm>
-            <a:off x="596899" y="444499"/>
-            <a:ext cx="11010872" cy="177800"/>
+            <a:off x="596899" y="425449"/>
+            <a:ext cx="946842" cy="215899"/>
           </a:xfrm>
           <a:prstGeom prst="rect">
             <a:avLst/>
@@ -20585,7 +21239,7 @@
               </a:lnSpc>
             </a:pPr>
             <a:r>
-              <a:rPr sz="1650" b="1" i="0">
+              <a:rPr sz="1100" b="1" i="0">
                 <a:solidFill>
                   <a:srgbClr val="7A4F5E"/>
                 </a:solidFill>
@@ -20604,8 +21258,8 @@
         </p:nvSpPr>
         <p:spPr>
           <a:xfrm>
-            <a:off x="596899" y="698498"/>
-            <a:ext cx="11010872" cy="485079"/>
+            <a:off x="596899" y="647698"/>
+            <a:ext cx="9710912" cy="577849"/>
           </a:xfrm>
           <a:prstGeom prst="rect">
             <a:avLst/>
@@ -20624,7 +21278,7 @@
               </a:lnSpc>
             </a:pPr>
             <a:r>
-              <a:rPr sz="4800" b="1" i="0">
+              <a:rPr sz="3200" b="1" i="0">
                 <a:solidFill>
                   <a:srgbClr val="3A3532"/>
                 </a:solidFill>
@@ -20643,8 +21297,8 @@
         </p:nvSpPr>
         <p:spPr>
           <a:xfrm>
-            <a:off x="596899" y="1424877"/>
-            <a:ext cx="4873117" cy="553639"/>
+            <a:off x="812798" y="1437577"/>
+            <a:ext cx="3869819" cy="518119"/>
           </a:xfrm>
           <a:prstGeom prst="rect">
             <a:avLst/>
@@ -20663,7 +21317,7 @@
               </a:lnSpc>
             </a:pPr>
             <a:r>
-              <a:rPr sz="2100" b="0" i="0">
+              <a:rPr sz="1400" b="0" i="0">
                 <a:solidFill>
                   <a:srgbClr val="3A3532"/>
                 </a:solidFill>
@@ -20682,8 +21336,8 @@
         </p:nvSpPr>
         <p:spPr>
           <a:xfrm>
-            <a:off x="596899" y="2080116"/>
-            <a:ext cx="4873117" cy="553639"/>
+            <a:off x="812798" y="2092816"/>
+            <a:ext cx="4248735" cy="518119"/>
           </a:xfrm>
           <a:prstGeom prst="rect">
             <a:avLst/>
@@ -20702,7 +21356,7 @@
               </a:lnSpc>
             </a:pPr>
             <a:r>
-              <a:rPr sz="2100" b="0" i="0">
+              <a:rPr sz="1400" b="0" i="0">
                 <a:solidFill>
                   <a:srgbClr val="3A3532"/>
                 </a:solidFill>
@@ -20721,8 +21375,8 @@
         </p:nvSpPr>
         <p:spPr>
           <a:xfrm>
-            <a:off x="596899" y="2735355"/>
-            <a:ext cx="4873117" cy="553639"/>
+            <a:off x="812798" y="2748055"/>
+            <a:ext cx="4265205" cy="518119"/>
           </a:xfrm>
           <a:prstGeom prst="rect">
             <a:avLst/>
@@ -20741,7 +21395,7 @@
               </a:lnSpc>
             </a:pPr>
             <a:r>
-              <a:rPr sz="2100" b="0" i="0">
+              <a:rPr sz="1400" b="0" i="0">
                 <a:solidFill>
                   <a:srgbClr val="3A3532"/>
                 </a:solidFill>
@@ -20760,8 +21414,8 @@
         </p:nvSpPr>
         <p:spPr>
           <a:xfrm>
-            <a:off x="6251063" y="1424877"/>
-            <a:ext cx="5356708" cy="525660"/>
+            <a:off x="6251063" y="1418527"/>
+            <a:ext cx="4607806" cy="535879"/>
           </a:xfrm>
           <a:prstGeom prst="rect">
             <a:avLst/>
@@ -20780,7 +21434,7 @@
               </a:lnSpc>
             </a:pPr>
             <a:r>
-              <a:rPr sz="2400" b="1" i="0">
+              <a:rPr sz="1600" b="1" i="0">
                 <a:solidFill>
                   <a:srgbClr val="6B625D"/>
                 </a:solidFill>
@@ -20799,8 +21453,8 @@
         </p:nvSpPr>
         <p:spPr>
           <a:xfrm>
-            <a:off x="6251063" y="2077536"/>
-            <a:ext cx="5356708" cy="295870"/>
+            <a:off x="6466963" y="2090236"/>
+            <a:ext cx="2633061" cy="260349"/>
           </a:xfrm>
           <a:prstGeom prst="rect">
             <a:avLst/>
@@ -20819,7 +21473,7 @@
               </a:lnSpc>
             </a:pPr>
             <a:r>
-              <a:rPr sz="2100" b="0" i="0">
+              <a:rPr sz="1400" b="0" i="0">
                 <a:solidFill>
                   <a:srgbClr val="3A3532"/>
                 </a:solidFill>
@@ -20838,8 +21492,8 @@
         </p:nvSpPr>
         <p:spPr>
           <a:xfrm>
-            <a:off x="6251063" y="2424206"/>
-            <a:ext cx="5356708" cy="295870"/>
+            <a:off x="6466963" y="2436906"/>
+            <a:ext cx="4556610" cy="260349"/>
           </a:xfrm>
           <a:prstGeom prst="rect">
             <a:avLst/>
@@ -20858,7 +21512,7 @@
               </a:lnSpc>
             </a:pPr>
             <a:r>
-              <a:rPr sz="2100" b="0" i="0">
+              <a:rPr sz="1400" b="0" i="0">
                 <a:solidFill>
                   <a:srgbClr val="3A3532"/>
                 </a:solidFill>
@@ -20877,8 +21531,8 @@
         </p:nvSpPr>
         <p:spPr>
           <a:xfrm>
-            <a:off x="6251063" y="2770875"/>
-            <a:ext cx="5356708" cy="295870"/>
+            <a:off x="6466963" y="2783575"/>
+            <a:ext cx="4332475" cy="260349"/>
           </a:xfrm>
           <a:prstGeom prst="rect">
             <a:avLst/>
@@ -20897,7 +21551,7 @@
               </a:lnSpc>
             </a:pPr>
             <a:r>
-              <a:rPr sz="2100" b="0" i="0">
+              <a:rPr sz="1400" b="0" i="0">
                 <a:solidFill>
                   <a:srgbClr val="3A3532"/>
                 </a:solidFill>
@@ -20916,8 +21570,8 @@
         </p:nvSpPr>
         <p:spPr>
           <a:xfrm>
-            <a:off x="6251063" y="3282644"/>
-            <a:ext cx="5356708" cy="525660"/>
+            <a:off x="6251063" y="3276294"/>
+            <a:ext cx="5057862" cy="535879"/>
           </a:xfrm>
           <a:prstGeom prst="rect">
             <a:avLst/>
@@ -20936,7 +21590,7 @@
               </a:lnSpc>
             </a:pPr>
             <a:r>
-              <a:rPr sz="2400" b="1" i="0">
+              <a:rPr sz="1600" b="1" i="0">
                 <a:solidFill>
                   <a:srgbClr val="6B625D"/>
                 </a:solidFill>
@@ -20955,8 +21609,8 @@
         </p:nvSpPr>
         <p:spPr>
           <a:xfrm>
-            <a:off x="6251063" y="3935303"/>
-            <a:ext cx="5356708" cy="295870"/>
+            <a:off x="6466963" y="3948003"/>
+            <a:ext cx="2857394" cy="260349"/>
           </a:xfrm>
           <a:prstGeom prst="rect">
             <a:avLst/>
@@ -20975,7 +21629,7 @@
               </a:lnSpc>
             </a:pPr>
             <a:r>
-              <a:rPr sz="2100" b="0" i="0">
+              <a:rPr sz="1400" b="0" i="0">
                 <a:solidFill>
                   <a:srgbClr val="3A3532"/>
                 </a:solidFill>
@@ -20994,8 +21648,8 @@
         </p:nvSpPr>
         <p:spPr>
           <a:xfrm>
-            <a:off x="6251063" y="4281973"/>
-            <a:ext cx="5356708" cy="295870"/>
+            <a:off x="6466963" y="4294673"/>
+            <a:ext cx="3772387" cy="260349"/>
           </a:xfrm>
           <a:prstGeom prst="rect">
             <a:avLst/>
@@ -21014,7 +21668,7 @@
               </a:lnSpc>
             </a:pPr>
             <a:r>
-              <a:rPr sz="2100" b="0" i="0">
+              <a:rPr sz="1400" b="0" i="0">
                 <a:solidFill>
                   <a:srgbClr val="3A3532"/>
                 </a:solidFill>
@@ -21033,8 +21687,8 @@
         </p:nvSpPr>
         <p:spPr>
           <a:xfrm>
-            <a:off x="596899" y="6426184"/>
-            <a:ext cx="190996" cy="152400"/>
+            <a:off x="596899" y="6407134"/>
+            <a:ext cx="203696" cy="184150"/>
           </a:xfrm>
           <a:prstGeom prst="rect">
             <a:avLst/>
@@ -21053,7 +21707,7 @@
               </a:lnSpc>
             </a:pPr>
             <a:r>
-              <a:rPr sz="1350" b="0" i="0">
+              <a:rPr sz="900" b="0" i="0">
                 <a:solidFill>
                   <a:srgbClr val="6B625D"/>
                 </a:solidFill>
@@ -21072,8 +21726,8 @@
         </p:nvSpPr>
         <p:spPr>
           <a:xfrm>
-            <a:off x="9960545" y="6407134"/>
-            <a:ext cx="1266227" cy="152400"/>
+            <a:off x="9960545" y="6388084"/>
+            <a:ext cx="1278926" cy="184150"/>
           </a:xfrm>
           <a:prstGeom prst="rect">
             <a:avLst/>
@@ -21092,7 +21746,7 @@
               </a:lnSpc>
             </a:pPr>
             <a:r>
-              <a:rPr sz="1350" b="0" i="0">
+              <a:rPr sz="900" b="0" i="0">
                 <a:solidFill>
                   <a:srgbClr val="6B625D"/>
                 </a:solidFill>

--- a/grav-site/root/kit-corso/corso-base-hd.pptx
+++ b/grav-site/root/kit-corso/corso-base-hd.pptx
@@ -3221,7 +3221,7 @@
         <p:spPr>
           <a:xfrm>
             <a:off x="596899" y="2045290"/>
-            <a:ext cx="6381591" cy="2463397"/>
+            <a:ext cx="6942305" cy="2463397"/>
           </a:xfrm>
           <a:prstGeom prst="rect">
             <a:avLst/>
@@ -3530,7 +3530,7 @@
         <p:spPr>
           <a:xfrm>
             <a:off x="596899" y="647698"/>
-            <a:ext cx="6512274" cy="577849"/>
+            <a:ext cx="7084655" cy="577849"/>
           </a:xfrm>
           <a:prstGeom prst="rect">
             <a:avLst/>
@@ -3901,7 +3901,7 @@
         <p:spPr>
           <a:xfrm>
             <a:off x="596899" y="647698"/>
-            <a:ext cx="3770271" cy="577849"/>
+            <a:ext cx="4097831" cy="577849"/>
           </a:xfrm>
           <a:prstGeom prst="rect">
             <a:avLst/>
@@ -3979,7 +3979,7 @@
         <p:spPr>
           <a:xfrm>
             <a:off x="596899" y="4228296"/>
-            <a:ext cx="5440143" cy="748008"/>
+            <a:ext cx="5916798" cy="748008"/>
           </a:xfrm>
           <a:prstGeom prst="rect">
             <a:avLst/>
@@ -4577,7 +4577,7 @@
         <p:spPr>
           <a:xfrm>
             <a:off x="596899" y="647698"/>
-            <a:ext cx="5607385" cy="577849"/>
+            <a:ext cx="6098973" cy="577849"/>
           </a:xfrm>
           <a:prstGeom prst="rect">
             <a:avLst/>
@@ -5227,7 +5227,7 @@
         <p:spPr>
           <a:xfrm>
             <a:off x="596899" y="647698"/>
-            <a:ext cx="3083409" cy="577849"/>
+            <a:ext cx="3349642" cy="577849"/>
           </a:xfrm>
           <a:prstGeom prst="rect">
             <a:avLst/>
@@ -5304,8 +5304,8 @@
         </p:nvSpPr>
         <p:spPr>
           <a:xfrm>
-            <a:off x="4749010" y="1855584"/>
-            <a:ext cx="369077" cy="615948"/>
+            <a:off x="4725128" y="1855584"/>
+            <a:ext cx="392959" cy="615948"/>
           </a:xfrm>
           <a:prstGeom prst="rect">
             <a:avLst/>
@@ -5398,8 +5398,8 @@
         </p:nvSpPr>
         <p:spPr>
           <a:xfrm>
-            <a:off x="4761123" y="2632763"/>
-            <a:ext cx="356964" cy="615948"/>
+            <a:off x="4738322" y="2632763"/>
+            <a:ext cx="379765" cy="615948"/>
           </a:xfrm>
           <a:prstGeom prst="rect">
             <a:avLst/>
@@ -5492,8 +5492,8 @@
         </p:nvSpPr>
         <p:spPr>
           <a:xfrm>
-            <a:off x="4509092" y="3409941"/>
-            <a:ext cx="608995" cy="615948"/>
+            <a:off x="4463789" y="3409941"/>
+            <a:ext cx="654298" cy="615948"/>
           </a:xfrm>
           <a:prstGeom prst="rect">
             <a:avLst/>
@@ -5586,8 +5586,8 @@
         </p:nvSpPr>
         <p:spPr>
           <a:xfrm>
-            <a:off x="4489756" y="4187120"/>
-            <a:ext cx="628331" cy="615948"/>
+            <a:off x="4442727" y="4187120"/>
+            <a:ext cx="675360" cy="615948"/>
           </a:xfrm>
           <a:prstGeom prst="rect">
             <a:avLst/>
@@ -5680,8 +5680,8 @@
         </p:nvSpPr>
         <p:spPr>
           <a:xfrm>
-            <a:off x="4253727" y="4964299"/>
-            <a:ext cx="864360" cy="615948"/>
+            <a:off x="4185624" y="4964299"/>
+            <a:ext cx="932463" cy="615948"/>
           </a:xfrm>
           <a:prstGeom prst="rect">
             <a:avLst/>
@@ -6353,7 +6353,7 @@
         <p:spPr>
           <a:xfrm>
             <a:off x="596899" y="647698"/>
-            <a:ext cx="7581405" cy="577849"/>
+            <a:ext cx="8249245" cy="577849"/>
           </a:xfrm>
           <a:prstGeom prst="rect">
             <a:avLst/>
@@ -6997,7 +6997,7 @@
         <p:spPr>
           <a:xfrm>
             <a:off x="596899" y="647698"/>
-            <a:ext cx="6701519" cy="577849"/>
+            <a:ext cx="7290798" cy="577849"/>
           </a:xfrm>
           <a:prstGeom prst="rect">
             <a:avLst/>
@@ -7560,7 +7560,7 @@
         <p:spPr>
           <a:xfrm>
             <a:off x="596899" y="647698"/>
-            <a:ext cx="6791197" cy="577849"/>
+            <a:ext cx="7388482" cy="577849"/>
           </a:xfrm>
           <a:prstGeom prst="rect">
             <a:avLst/>
@@ -7637,8 +7637,8 @@
         </p:nvSpPr>
         <p:spPr>
           <a:xfrm>
-            <a:off x="3979841" y="3512732"/>
-            <a:ext cx="362965" cy="577849"/>
+            <a:off x="3968173" y="3512732"/>
+            <a:ext cx="386301" cy="577849"/>
           </a:xfrm>
           <a:prstGeom prst="rect">
             <a:avLst/>
@@ -7715,8 +7715,8 @@
         </p:nvSpPr>
         <p:spPr>
           <a:xfrm>
-            <a:off x="7835180" y="3512732"/>
-            <a:ext cx="390635" cy="577849"/>
+            <a:off x="7822277" y="3512732"/>
+            <a:ext cx="416442" cy="577849"/>
           </a:xfrm>
           <a:prstGeom prst="rect">
             <a:avLst/>
@@ -8009,7 +8009,7 @@
         <p:spPr>
           <a:xfrm>
             <a:off x="596899" y="647698"/>
-            <a:ext cx="4072975" cy="577849"/>
+            <a:ext cx="4427562" cy="577849"/>
           </a:xfrm>
           <a:prstGeom prst="rect">
             <a:avLst/>
@@ -8458,7 +8458,7 @@
         <p:spPr>
           <a:xfrm>
             <a:off x="596899" y="647698"/>
-            <a:ext cx="3672482" cy="577849"/>
+            <a:ext cx="3991310" cy="577849"/>
           </a:xfrm>
           <a:prstGeom prst="rect">
             <a:avLst/>
@@ -9315,7 +9315,7 @@
         <p:spPr>
           <a:xfrm>
             <a:off x="596899" y="647698"/>
-            <a:ext cx="6447599" cy="577849"/>
+            <a:ext cx="7014206" cy="577849"/>
           </a:xfrm>
           <a:prstGeom prst="rect">
             <a:avLst/>
@@ -10105,7 +10105,7 @@
         <p:spPr>
           <a:xfrm>
             <a:off x="596899" y="647698"/>
-            <a:ext cx="2975174" cy="577849"/>
+            <a:ext cx="3231743" cy="577849"/>
           </a:xfrm>
           <a:prstGeom prst="rect">
             <a:avLst/>
@@ -10562,7 +10562,7 @@
         <p:spPr>
           <a:xfrm>
             <a:off x="596899" y="647698"/>
-            <a:ext cx="5539933" cy="577849"/>
+            <a:ext cx="6025498" cy="577849"/>
           </a:xfrm>
           <a:prstGeom prst="rect">
             <a:avLst/>
@@ -10933,7 +10933,7 @@
         <p:spPr>
           <a:xfrm>
             <a:off x="596899" y="647698"/>
-            <a:ext cx="3555467" cy="577849"/>
+            <a:ext cx="3863848" cy="577849"/>
           </a:xfrm>
           <a:prstGeom prst="rect">
             <a:avLst/>
@@ -11665,7 +11665,7 @@
         <p:spPr>
           <a:xfrm>
             <a:off x="596899" y="622298"/>
-            <a:ext cx="1977830" cy="577849"/>
+            <a:ext cx="2145350" cy="577849"/>
           </a:xfrm>
           <a:prstGeom prst="rect">
             <a:avLst/>
@@ -11704,7 +11704,7 @@
         <p:spPr>
           <a:xfrm>
             <a:off x="2437203" y="622298"/>
-            <a:ext cx="275954" cy="577849"/>
+            <a:ext cx="291522" cy="577849"/>
           </a:xfrm>
           <a:prstGeom prst="rect">
             <a:avLst/>
@@ -12432,7 +12432,7 @@
         <p:spPr>
           <a:xfrm>
             <a:off x="596899" y="622298"/>
-            <a:ext cx="1977830" cy="577849"/>
+            <a:ext cx="2145350" cy="577849"/>
           </a:xfrm>
           <a:prstGeom prst="rect">
             <a:avLst/>
@@ -12471,7 +12471,7 @@
         <p:spPr>
           <a:xfrm>
             <a:off x="2437203" y="622298"/>
-            <a:ext cx="339740" cy="577849"/>
+            <a:ext cx="361003" cy="577849"/>
           </a:xfrm>
           <a:prstGeom prst="rect">
             <a:avLst/>
@@ -12847,7 +12847,7 @@
         <p:spPr>
           <a:xfrm>
             <a:off x="596899" y="4528630"/>
-            <a:ext cx="5024981" cy="748008"/>
+            <a:ext cx="5464568" cy="748008"/>
           </a:xfrm>
           <a:prstGeom prst="rect">
             <a:avLst/>
@@ -13164,7 +13164,7 @@
         <p:spPr>
           <a:xfrm>
             <a:off x="596899" y="622298"/>
-            <a:ext cx="1977830" cy="577849"/>
+            <a:ext cx="2145350" cy="577849"/>
           </a:xfrm>
           <a:prstGeom prst="rect">
             <a:avLst/>
@@ -13203,7 +13203,7 @@
         <p:spPr>
           <a:xfrm>
             <a:off x="2437203" y="622298"/>
-            <a:ext cx="323738" cy="577849"/>
+            <a:ext cx="343572" cy="577849"/>
           </a:xfrm>
           <a:prstGeom prst="rect">
             <a:avLst/>
@@ -13579,7 +13579,7 @@
         <p:spPr>
           <a:xfrm>
             <a:off x="596899" y="4528630"/>
-            <a:ext cx="5766294" cy="748008"/>
+            <a:ext cx="6272070" cy="748008"/>
           </a:xfrm>
           <a:prstGeom prst="rect">
             <a:avLst/>
@@ -13896,7 +13896,7 @@
         <p:spPr>
           <a:xfrm>
             <a:off x="596899" y="622298"/>
-            <a:ext cx="1977830" cy="577849"/>
+            <a:ext cx="2145350" cy="577849"/>
           </a:xfrm>
           <a:prstGeom prst="rect">
             <a:avLst/>
@@ -13935,7 +13935,7 @@
         <p:spPr>
           <a:xfrm>
             <a:off x="2437203" y="622298"/>
-            <a:ext cx="341963" cy="577849"/>
+            <a:ext cx="363423" cy="577849"/>
           </a:xfrm>
           <a:prstGeom prst="rect">
             <a:avLst/>
@@ -14311,7 +14311,7 @@
         <p:spPr>
           <a:xfrm>
             <a:off x="596899" y="4528630"/>
-            <a:ext cx="5901088" cy="748008"/>
+            <a:ext cx="6418899" cy="748008"/>
           </a:xfrm>
           <a:prstGeom prst="rect">
             <a:avLst/>
@@ -14623,7 +14623,7 @@
         <p:spPr>
           <a:xfrm>
             <a:off x="596899" y="2344732"/>
-            <a:ext cx="7315594" cy="1497009"/>
+            <a:ext cx="7959701" cy="1497009"/>
           </a:xfrm>
           <a:prstGeom prst="rect">
             <a:avLst/>
@@ -15080,7 +15080,7 @@
         <p:spPr>
           <a:xfrm>
             <a:off x="596899" y="647698"/>
-            <a:ext cx="5137661" cy="577849"/>
+            <a:ext cx="5587309" cy="577849"/>
           </a:xfrm>
           <a:prstGeom prst="rect">
             <a:avLst/>
@@ -15158,7 +15158,7 @@
         <p:spPr>
           <a:xfrm>
             <a:off x="596899" y="1640776"/>
-            <a:ext cx="955038" cy="393699"/>
+            <a:ext cx="1031237" cy="393699"/>
           </a:xfrm>
           <a:prstGeom prst="rect">
             <a:avLst/>
@@ -15232,7 +15232,7 @@
         <p:spPr>
           <a:xfrm>
             <a:off x="3403591" y="1640776"/>
-            <a:ext cx="955038" cy="393699"/>
+            <a:ext cx="1031237" cy="393699"/>
           </a:xfrm>
           <a:prstGeom prst="rect">
             <a:avLst/>
@@ -15306,7 +15306,7 @@
         <p:spPr>
           <a:xfrm>
             <a:off x="6210284" y="1640776"/>
-            <a:ext cx="955038" cy="393699"/>
+            <a:ext cx="1031237" cy="393699"/>
           </a:xfrm>
           <a:prstGeom prst="rect">
             <a:avLst/>
@@ -15380,7 +15380,7 @@
         <p:spPr>
           <a:xfrm>
             <a:off x="9016977" y="1640776"/>
-            <a:ext cx="955038" cy="393699"/>
+            <a:ext cx="1031237" cy="393699"/>
           </a:xfrm>
           <a:prstGeom prst="rect">
             <a:avLst/>
@@ -15454,7 +15454,7 @@
         <p:spPr>
           <a:xfrm>
             <a:off x="596899" y="5542346"/>
-            <a:ext cx="1218403" cy="546099"/>
+            <a:ext cx="1318118" cy="546099"/>
           </a:xfrm>
           <a:prstGeom prst="rect">
             <a:avLst/>
@@ -15532,7 +15532,7 @@
         <p:spPr>
           <a:xfrm>
             <a:off x="2599029" y="5542346"/>
-            <a:ext cx="1525996" cy="546099"/>
+            <a:ext cx="1653175" cy="546099"/>
           </a:xfrm>
           <a:prstGeom prst="rect">
             <a:avLst/>
@@ -15849,7 +15849,7 @@
         <p:spPr>
           <a:xfrm>
             <a:off x="596899" y="647698"/>
-            <a:ext cx="6340142" cy="577849"/>
+            <a:ext cx="6897154" cy="577849"/>
           </a:xfrm>
           <a:prstGeom prst="rect">
             <a:avLst/>
@@ -16195,8 +16195,8 @@
         </p:nvSpPr>
         <p:spPr>
           <a:xfrm>
-            <a:off x="2207610" y="2997193"/>
-            <a:ext cx="7776651" cy="1054097"/>
+            <a:off x="1864973" y="2997193"/>
+            <a:ext cx="8461923" cy="1054097"/>
           </a:xfrm>
           <a:prstGeom prst="rect">
             <a:avLst/>
@@ -16450,7 +16450,7 @@
         <p:spPr>
           <a:xfrm>
             <a:off x="596899" y="1474089"/>
-            <a:ext cx="4397570" cy="749298"/>
+            <a:ext cx="4781139" cy="749298"/>
           </a:xfrm>
           <a:prstGeom prst="rect">
             <a:avLst/>
@@ -16622,7 +16622,7 @@
         <p:spPr>
           <a:xfrm>
             <a:off x="596899" y="4554725"/>
-            <a:ext cx="5855749" cy="891379"/>
+            <a:ext cx="6369512" cy="891379"/>
           </a:xfrm>
           <a:prstGeom prst="rect">
             <a:avLst/>
@@ -16812,8 +16812,8 @@
         </p:nvSpPr>
         <p:spPr>
           <a:xfrm>
-            <a:off x="8960463" y="2286490"/>
-            <a:ext cx="2621908" cy="1054097"/>
+            <a:off x="8735435" y="2286490"/>
+            <a:ext cx="2846936" cy="1054097"/>
           </a:xfrm>
           <a:prstGeom prst="rect">
             <a:avLst/>
@@ -16851,8 +16851,8 @@
         </p:nvSpPr>
         <p:spPr>
           <a:xfrm>
-            <a:off x="7927336" y="3429488"/>
-            <a:ext cx="3655035" cy="419099"/>
+            <a:off x="7610065" y="3429488"/>
+            <a:ext cx="3972306" cy="419099"/>
           </a:xfrm>
           <a:prstGeom prst="rect">
             <a:avLst/>
@@ -17164,7 +17164,7 @@
         <p:spPr>
           <a:xfrm>
             <a:off x="596899" y="2252458"/>
-            <a:ext cx="7297148" cy="2216343"/>
+            <a:ext cx="7939607" cy="2216343"/>
           </a:xfrm>
           <a:prstGeom prst="rect">
             <a:avLst/>
@@ -17719,7 +17719,7 @@
         <p:spPr>
           <a:xfrm>
             <a:off x="596899" y="647698"/>
-            <a:ext cx="4454911" cy="577849"/>
+            <a:ext cx="4843599" cy="577849"/>
           </a:xfrm>
           <a:prstGeom prst="rect">
             <a:avLst/>
@@ -18549,7 +18549,7 @@
         <p:spPr>
           <a:xfrm>
             <a:off x="596899" y="1771447"/>
-            <a:ext cx="10400417" cy="2231623"/>
+            <a:ext cx="11319954" cy="2231623"/>
           </a:xfrm>
           <a:prstGeom prst="rect">
             <a:avLst/>
@@ -18900,7 +18900,7 @@
         <p:spPr>
           <a:xfrm>
             <a:off x="596899" y="647698"/>
-            <a:ext cx="9765339" cy="577849"/>
+            <a:ext cx="10628173" cy="577849"/>
           </a:xfrm>
           <a:prstGeom prst="rect">
             <a:avLst/>
@@ -19095,7 +19095,7 @@
         <p:spPr>
           <a:xfrm>
             <a:off x="596899" y="5942395"/>
-            <a:ext cx="2664803" cy="342899"/>
+            <a:ext cx="2893660" cy="342899"/>
           </a:xfrm>
           <a:prstGeom prst="rect">
             <a:avLst/>
@@ -20018,7 +20018,7 @@
         <p:spPr>
           <a:xfrm>
             <a:off x="596899" y="647698"/>
-            <a:ext cx="4572258" cy="577849"/>
+            <a:ext cx="4971424" cy="577849"/>
           </a:xfrm>
           <a:prstGeom prst="rect">
             <a:avLst/>
@@ -21259,7 +21259,7 @@
         <p:spPr>
           <a:xfrm>
             <a:off x="596899" y="647698"/>
-            <a:ext cx="10920925" cy="577849"/>
+            <a:ext cx="11886936" cy="577849"/>
           </a:xfrm>
           <a:prstGeom prst="rect">
             <a:avLst/>

--- a/grav-site/root/kit-corso/corso-base-hd.pptx
+++ b/grav-site/root/kit-corso/corso-base-hd.pptx
@@ -3262,7 +3262,7 @@
                 </a:solidFill>
                 <a:latin typeface="Playfair Display"/>
               </a:rPr>
-              <a:t>di Human Design</a:t>
+              <a:t>di Human Design</a:t>
             </a:r>
           </a:p>
         </p:txBody>
@@ -5379,9 +5379,9 @@
               </a:lnSpc>
             </a:pPr>
             <a:r>
-              <a:rPr sz="1400" b="0" i="0">
-                <a:solidFill>
-                  <a:srgbClr val="3A3532"/>
+              <a:rPr sz="1000" b="0" i="0">
+                <a:solidFill>
+                  <a:srgbClr val="6B625D"/>
                 </a:solidFill>
                 <a:latin typeface="Outfit"/>
               </a:rPr>
@@ -5473,9 +5473,9 @@
               </a:lnSpc>
             </a:pPr>
             <a:r>
-              <a:rPr sz="1400" b="0" i="0">
-                <a:solidFill>
-                  <a:srgbClr val="3A3532"/>
+              <a:rPr sz="1000" b="0" i="0">
+                <a:solidFill>
+                  <a:srgbClr val="6B625D"/>
                 </a:solidFill>
                 <a:latin typeface="Outfit"/>
               </a:rPr>
@@ -5567,9 +5567,9 @@
               </a:lnSpc>
             </a:pPr>
             <a:r>
-              <a:rPr sz="1400" b="0" i="0">
-                <a:solidFill>
-                  <a:srgbClr val="3A3532"/>
+              <a:rPr sz="1000" b="0" i="0">
+                <a:solidFill>
+                  <a:srgbClr val="6B625D"/>
                 </a:solidFill>
                 <a:latin typeface="Outfit"/>
               </a:rPr>
@@ -5661,9 +5661,9 @@
               </a:lnSpc>
             </a:pPr>
             <a:r>
-              <a:rPr sz="1400" b="0" i="0">
-                <a:solidFill>
-                  <a:srgbClr val="3A3532"/>
+              <a:rPr sz="1000" b="0" i="0">
+                <a:solidFill>
+                  <a:srgbClr val="6B625D"/>
                 </a:solidFill>
                 <a:latin typeface="Outfit"/>
               </a:rPr>
@@ -5755,9 +5755,9 @@
               </a:lnSpc>
             </a:pPr>
             <a:r>
-              <a:rPr sz="1400" b="0" i="0">
-                <a:solidFill>
-                  <a:srgbClr val="3A3532"/>
+              <a:rPr sz="1000" b="0" i="0">
+                <a:solidFill>
+                  <a:srgbClr val="6B625D"/>
                 </a:solidFill>
                 <a:latin typeface="Outfit"/>
               </a:rPr>
@@ -7618,13 +7618,22 @@
               </a:lnSpc>
             </a:pPr>
             <a:r>
+              <a:rPr sz="1000" b="1" i="0">
+                <a:solidFill>
+                  <a:srgbClr val="C0392B"/>
+                </a:solidFill>
+                <a:latin typeface="Outfit"/>
+              </a:rPr>
+              <a:t>13 porte</a:t>
+            </a:r>
+            <a:r>
               <a:rPr sz="1000" b="0" i="0">
                 <a:solidFill>
                   <a:srgbClr val="6B625D"/>
                 </a:solidFill>
                 <a:latin typeface="Outfit"/>
               </a:rPr>
-              <a:t>13 porte · Mappa genetica inconscia</a:t>
+              <a:t>· Mappa genetica inconscia</a:t>
             </a:r>
           </a:p>
         </p:txBody>
@@ -7696,13 +7705,22 @@
               </a:lnSpc>
             </a:pPr>
             <a:r>
+              <a:rPr sz="1000" b="1" i="0">
+                <a:solidFill>
+                  <a:srgbClr val="1A1A2E"/>
+                </a:solidFill>
+                <a:latin typeface="Outfit"/>
+              </a:rPr>
+              <a:t>13 porte</a:t>
+            </a:r>
+            <a:r>
               <a:rPr sz="1000" b="0" i="0">
                 <a:solidFill>
                   <a:srgbClr val="6B625D"/>
                 </a:solidFill>
                 <a:latin typeface="Outfit"/>
               </a:rPr>
-              <a:t>13 porte · Mappa della personalità conscia</a:t>
+              <a:t>· Mappa della personalità conscia</a:t>
             </a:r>
           </a:p>
         </p:txBody>
@@ -7774,13 +7792,22 @@
               </a:lnSpc>
             </a:pPr>
             <a:r>
+              <a:rPr sz="1000" b="1" i="0">
+                <a:solidFill>
+                  <a:srgbClr val="6B625D"/>
+                </a:solidFill>
+                <a:latin typeface="Outfit"/>
+              </a:rPr>
+              <a:t>26 porte</a:t>
+            </a:r>
+            <a:r>
               <a:rPr sz="1000" b="0" i="0">
                 <a:solidFill>
                   <a:srgbClr val="6B625D"/>
                 </a:solidFill>
                 <a:latin typeface="Outfit"/>
               </a:rPr>
-              <a:t>26 porte · Canali e centri definiti</a:t>
+              <a:t>· Canali e centri definiti</a:t>
             </a:r>
           </a:p>
         </p:txBody>
@@ -9391,7 +9418,7 @@
             <a:r>
               <a:rPr sz="1600" b="1" i="0">
                 <a:solidFill>
-                  <a:srgbClr val="6B625D"/>
+                  <a:srgbClr val="7A4F5E"/>
                 </a:solidFill>
                 <a:latin typeface="Outfit"/>
               </a:rPr>
@@ -9647,7 +9674,7 @@
             <a:r>
               <a:rPr sz="1600" b="1" i="0">
                 <a:solidFill>
-                  <a:srgbClr val="6B625D"/>
+                  <a:srgbClr val="7A4F5E"/>
                 </a:solidFill>
                 <a:latin typeface="Outfit"/>
               </a:rPr>
@@ -10247,7 +10274,16 @@
                 </a:solidFill>
                 <a:latin typeface="Outfit"/>
               </a:rPr>
-              <a:t>Se non ce l'hai, vai su valentinarussobg5.com/calcolo-human-design</a:t>
+              <a:t>Se non ce l'hai, vai su</a:t>
+            </a:r>
+            <a:r>
+              <a:rPr sz="1400" b="1" i="0">
+                <a:solidFill>
+                  <a:srgbClr val="7A4F5E"/>
+                </a:solidFill>
+                <a:latin typeface="Outfit"/>
+              </a:rPr>
+              <a:t>valentinarussobg5.com/calcolo-human-design</a:t>
             </a:r>
           </a:p>
         </p:txBody>
@@ -14114,7 +14150,25 @@
                 </a:solidFill>
                 <a:latin typeface="Outfit"/>
               </a:rPr>
-              <a:t>Guarda le porte che nel tuo Disegno non sono definite e colorale.</a:t>
+              <a:t>Guarda le porte che nel tuo Disegno</a:t>
+            </a:r>
+            <a:r>
+              <a:rPr sz="1400" b="0" i="0">
+                <a:solidFill>
+                  <a:srgbClr val="3A3532"/>
+                </a:solidFill>
+                <a:latin typeface="Outfit"/>
+              </a:rPr>
+              <a:t>non</a:t>
+            </a:r>
+            <a:r>
+              <a:rPr sz="1400" b="0" i="0">
+                <a:solidFill>
+                  <a:srgbClr val="3A3532"/>
+                </a:solidFill>
+                <a:latin typeface="Outfit"/>
+              </a:rPr>
+              <a:t>sono definite e colorale.</a:t>
             </a:r>
           </a:p>
         </p:txBody>
@@ -14664,7 +14718,7 @@
                 </a:solidFill>
                 <a:latin typeface="Playfair Display"/>
               </a:rPr>
-              <a:t>del valore di 210 €</a:t>
+              <a:t>del valore di 210 €</a:t>
             </a:r>
           </a:p>
         </p:txBody>

--- a/grav-site/root/kit-corso/corso-base-hd.pptx
+++ b/grav-site/root/kit-corso/corso-base-hd.pptx
@@ -3182,7 +3182,7 @@
         <p:spPr>
           <a:xfrm>
             <a:off x="596899" y="1778591"/>
-            <a:ext cx="3879951" cy="215899"/>
+            <a:ext cx="4318510" cy="215899"/>
           </a:xfrm>
           <a:prstGeom prst="rect">
             <a:avLst/>
@@ -3221,15 +3221,15 @@
         <p:spPr>
           <a:xfrm>
             <a:off x="596899" y="2045290"/>
-            <a:ext cx="6942305" cy="2463397"/>
-          </a:xfrm>
-          <a:prstGeom prst="rect">
-            <a:avLst/>
-          </a:prstGeom>
-          <a:noFill/>
-        </p:spPr>
-        <p:txBody>
-          <a:bodyPr wrap="square" lIns="0" rIns="0" tIns="0" bIns="0" anchor="t">
+            <a:ext cx="7110519" cy="2463397"/>
+          </a:xfrm>
+          <a:prstGeom prst="rect">
+            <a:avLst/>
+          </a:prstGeom>
+          <a:noFill/>
+        </p:spPr>
+        <p:txBody>
+          <a:bodyPr wrap="none" lIns="0" rIns="0" tIns="0" bIns="0" anchor="t">
             <a:spAutoFit/>
           </a:bodyPr>
           <a:lstStyle/>
@@ -3246,7 +3246,7 @@
                 </a:solidFill>
                 <a:latin typeface="Playfair Display"/>
               </a:rPr>
-              <a:t>Benvenuti al corso base</a:t>
+              <a:t>Benvenuti al</a:t>
             </a:r>
           </a:p>
           <a:p>
@@ -3262,6 +3262,22 @@
                 </a:solidFill>
                 <a:latin typeface="Playfair Display"/>
               </a:rPr>
+              <a:t>corso base</a:t>
+            </a:r>
+          </a:p>
+          <a:p>
+            <a:pPr algn="l">
+              <a:lnSpc>
+                <a:spcPct val="104000"/>
+              </a:lnSpc>
+            </a:pPr>
+            <a:r>
+              <a:rPr sz="5600" b="1" i="0">
+                <a:solidFill>
+                  <a:srgbClr val="FBF7F5"/>
+                </a:solidFill>
+                <a:latin typeface="Playfair Display"/>
+              </a:rPr>
               <a:t>di Human Design</a:t>
             </a:r>
           </a:p>
@@ -3276,7 +3292,7 @@
         <p:spPr>
           <a:xfrm>
             <a:off x="596899" y="4657713"/>
-            <a:ext cx="2403771" cy="247649"/>
+            <a:ext cx="2670987" cy="247649"/>
           </a:xfrm>
           <a:prstGeom prst="rect">
             <a:avLst/>
@@ -3315,7 +3331,7 @@
         <p:spPr>
           <a:xfrm>
             <a:off x="596899" y="6496034"/>
-            <a:ext cx="246284" cy="184150"/>
+            <a:ext cx="263078" cy="184150"/>
           </a:xfrm>
           <a:prstGeom prst="rect">
             <a:avLst/>
@@ -3354,7 +3370,7 @@
         <p:spPr>
           <a:xfrm>
             <a:off x="9960545" y="6388084"/>
-            <a:ext cx="1477102" cy="184150"/>
+            <a:ext cx="1636758" cy="184150"/>
           </a:xfrm>
           <a:prstGeom prst="rect">
             <a:avLst/>
@@ -3491,7 +3507,7 @@
         <p:spPr>
           <a:xfrm>
             <a:off x="596899" y="425449"/>
-            <a:ext cx="1105167" cy="215899"/>
+            <a:ext cx="1221653" cy="215899"/>
           </a:xfrm>
           <a:prstGeom prst="rect">
             <a:avLst/>
@@ -3530,7 +3546,7 @@
         <p:spPr>
           <a:xfrm>
             <a:off x="596899" y="647698"/>
-            <a:ext cx="7084655" cy="577849"/>
+            <a:ext cx="7256370" cy="577849"/>
           </a:xfrm>
           <a:prstGeom prst="rect">
             <a:avLst/>
@@ -3569,15 +3585,15 @@
         <p:spPr>
           <a:xfrm>
             <a:off x="596899" y="2505168"/>
-            <a:ext cx="5638611" cy="518119"/>
-          </a:xfrm>
-          <a:prstGeom prst="rect">
-            <a:avLst/>
-          </a:prstGeom>
-          <a:noFill/>
-        </p:spPr>
-        <p:txBody>
-          <a:bodyPr wrap="square" lIns="0" rIns="0" tIns="0" bIns="0" anchor="t">
+            <a:ext cx="6281300" cy="518119"/>
+          </a:xfrm>
+          <a:prstGeom prst="rect">
+            <a:avLst/>
+          </a:prstGeom>
+          <a:noFill/>
+        </p:spPr>
+        <p:txBody>
+          <a:bodyPr wrap="none" lIns="0" rIns="0" tIns="0" bIns="0" anchor="t">
             <a:spAutoFit/>
           </a:bodyPr>
           <a:lstStyle/>
@@ -3594,7 +3610,23 @@
                 </a:solidFill>
                 <a:latin typeface="Outfit"/>
               </a:rPr>
-              <a:t>Per auto-realizzarci relazionalmente e materialmente abbiamo bisogno di connetterci con gli altri.</a:t>
+              <a:t>Per auto-realizzarci relazionalmente e materialmente abbiamo</a:t>
+            </a:r>
+          </a:p>
+          <a:p>
+            <a:pPr algn="l">
+              <a:lnSpc>
+                <a:spcPct val="145000"/>
+              </a:lnSpc>
+            </a:pPr>
+            <a:r>
+              <a:rPr sz="1400" b="0" i="0">
+                <a:solidFill>
+                  <a:srgbClr val="3A3532"/>
+                </a:solidFill>
+                <a:latin typeface="Outfit"/>
+              </a:rPr>
+              <a:t>bisogno di connetterci con gli altri.</a:t>
             </a:r>
           </a:p>
         </p:txBody>
@@ -3608,15 +3640,15 @@
         <p:spPr>
           <a:xfrm>
             <a:off x="596899" y="3185807"/>
-            <a:ext cx="5930980" cy="775889"/>
-          </a:xfrm>
-          <a:prstGeom prst="rect">
-            <a:avLst/>
-          </a:prstGeom>
-          <a:noFill/>
-        </p:spPr>
-        <p:txBody>
-          <a:bodyPr wrap="square" lIns="0" rIns="0" tIns="0" bIns="0" anchor="t">
+            <a:ext cx="6607605" cy="775889"/>
+          </a:xfrm>
+          <a:prstGeom prst="rect">
+            <a:avLst/>
+          </a:prstGeom>
+          <a:noFill/>
+        </p:spPr>
+        <p:txBody>
+          <a:bodyPr wrap="none" lIns="0" rIns="0" tIns="0" bIns="0" anchor="t">
             <a:spAutoFit/>
           </a:bodyPr>
           <a:lstStyle/>
@@ -3633,7 +3665,39 @@
                 </a:solidFill>
                 <a:latin typeface="Outfit"/>
               </a:rPr>
-              <a:t>Quando sei allineato con ciò che è corretto per te, entri in relazione proprio con chi sei fatto per connetterti. In questo modo ci si può influenzare reciprocamente in modo costruttivo.</a:t>
+              <a:t>Quando sei allineato con ciò che è corretto per te, entri in relazione</a:t>
+            </a:r>
+          </a:p>
+          <a:p>
+            <a:pPr algn="l">
+              <a:lnSpc>
+                <a:spcPct val="145000"/>
+              </a:lnSpc>
+            </a:pPr>
+            <a:r>
+              <a:rPr sz="1400" b="0" i="0">
+                <a:solidFill>
+                  <a:srgbClr val="3A3532"/>
+                </a:solidFill>
+                <a:latin typeface="Outfit"/>
+              </a:rPr>
+              <a:t>proprio con chi sei fatto per connetterti. In questo modo ci si può</a:t>
+            </a:r>
+          </a:p>
+          <a:p>
+            <a:pPr algn="l">
+              <a:lnSpc>
+                <a:spcPct val="145000"/>
+              </a:lnSpc>
+            </a:pPr>
+            <a:r>
+              <a:rPr sz="1400" b="0" i="0">
+                <a:solidFill>
+                  <a:srgbClr val="3A3532"/>
+                </a:solidFill>
+                <a:latin typeface="Outfit"/>
+              </a:rPr>
+              <a:t>influenzare reciprocamente in modo costruttivo.</a:t>
             </a:r>
           </a:p>
         </p:txBody>
@@ -3647,15 +3711,15 @@
         <p:spPr>
           <a:xfrm>
             <a:off x="596899" y="4124215"/>
-            <a:ext cx="5780629" cy="1033658"/>
-          </a:xfrm>
-          <a:prstGeom prst="rect">
-            <a:avLst/>
-          </a:prstGeom>
-          <a:noFill/>
-        </p:spPr>
-        <p:txBody>
-          <a:bodyPr wrap="square" lIns="0" rIns="0" tIns="0" bIns="0" anchor="t">
+            <a:ext cx="6439802" cy="1033658"/>
+          </a:xfrm>
+          <a:prstGeom prst="rect">
+            <a:avLst/>
+          </a:prstGeom>
+          <a:noFill/>
+        </p:spPr>
+        <p:txBody>
+          <a:bodyPr wrap="none" lIns="0" rIns="0" tIns="0" bIns="0" anchor="t">
             <a:spAutoFit/>
           </a:bodyPr>
           <a:lstStyle/>
@@ -3672,7 +3736,55 @@
                 </a:solidFill>
                 <a:latin typeface="Outfit"/>
               </a:rPr>
-              <a:t>Conoscere sé stessi significa poter ottimizzare la propria energia, porre i confini sani che servono a ciascuno di noi e raggiungere il benessere e la prosperità che sostengano la soddisfazione, il successo, la pace o la sorpresa personale.</a:t>
+              <a:t>Conoscere sé stessi significa poter ottimizzare la propria energia,</a:t>
+            </a:r>
+          </a:p>
+          <a:p>
+            <a:pPr algn="l">
+              <a:lnSpc>
+                <a:spcPct val="145000"/>
+              </a:lnSpc>
+            </a:pPr>
+            <a:r>
+              <a:rPr sz="1400" b="0" i="0">
+                <a:solidFill>
+                  <a:srgbClr val="3A3532"/>
+                </a:solidFill>
+                <a:latin typeface="Outfit"/>
+              </a:rPr>
+              <a:t>porre i confini sani che servono a ciascuno di noi e raggiungere il</a:t>
+            </a:r>
+          </a:p>
+          <a:p>
+            <a:pPr algn="l">
+              <a:lnSpc>
+                <a:spcPct val="145000"/>
+              </a:lnSpc>
+            </a:pPr>
+            <a:r>
+              <a:rPr sz="1400" b="0" i="0">
+                <a:solidFill>
+                  <a:srgbClr val="3A3532"/>
+                </a:solidFill>
+                <a:latin typeface="Outfit"/>
+              </a:rPr>
+              <a:t>benessere e la prosperità che sostengano la soddisfazione, il</a:t>
+            </a:r>
+          </a:p>
+          <a:p>
+            <a:pPr algn="l">
+              <a:lnSpc>
+                <a:spcPct val="145000"/>
+              </a:lnSpc>
+            </a:pPr>
+            <a:r>
+              <a:rPr sz="1400" b="0" i="0">
+                <a:solidFill>
+                  <a:srgbClr val="3A3532"/>
+                </a:solidFill>
+                <a:latin typeface="Outfit"/>
+              </a:rPr>
+              <a:t>successo, la pace o la sorpresa personale.</a:t>
             </a:r>
           </a:p>
         </p:txBody>
@@ -3686,7 +3798,7 @@
         <p:spPr>
           <a:xfrm>
             <a:off x="596899" y="6407134"/>
-            <a:ext cx="246284" cy="184150"/>
+            <a:ext cx="263078" cy="184150"/>
           </a:xfrm>
           <a:prstGeom prst="rect">
             <a:avLst/>
@@ -3725,7 +3837,7 @@
         <p:spPr>
           <a:xfrm>
             <a:off x="9960545" y="6388084"/>
-            <a:ext cx="1477102" cy="184150"/>
+            <a:ext cx="1636758" cy="184150"/>
           </a:xfrm>
           <a:prstGeom prst="rect">
             <a:avLst/>
@@ -3862,7 +3974,7 @@
         <p:spPr>
           <a:xfrm>
             <a:off x="596899" y="425449"/>
-            <a:ext cx="3869617" cy="215899"/>
+            <a:ext cx="4306976" cy="215899"/>
           </a:xfrm>
           <a:prstGeom prst="rect">
             <a:avLst/>
@@ -3901,7 +4013,7 @@
         <p:spPr>
           <a:xfrm>
             <a:off x="596899" y="647698"/>
-            <a:ext cx="4097831" cy="577849"/>
+            <a:ext cx="4196099" cy="577849"/>
           </a:xfrm>
           <a:prstGeom prst="rect">
             <a:avLst/>
@@ -3940,15 +4052,15 @@
         <p:spPr>
           <a:xfrm>
             <a:off x="596899" y="2723548"/>
-            <a:ext cx="6128894" cy="1291428"/>
-          </a:xfrm>
-          <a:prstGeom prst="rect">
-            <a:avLst/>
-          </a:prstGeom>
-          <a:noFill/>
-        </p:spPr>
-        <p:txBody>
-          <a:bodyPr wrap="square" lIns="0" rIns="0" tIns="0" bIns="0" anchor="t">
+            <a:ext cx="6828490" cy="1291428"/>
+          </a:xfrm>
+          <a:prstGeom prst="rect">
+            <a:avLst/>
+          </a:prstGeom>
+          <a:noFill/>
+        </p:spPr>
+        <p:txBody>
+          <a:bodyPr wrap="none" lIns="0" rIns="0" tIns="0" bIns="0" anchor="t">
             <a:spAutoFit/>
           </a:bodyPr>
           <a:lstStyle/>
@@ -3965,7 +4077,71 @@
                 </a:solidFill>
                 <a:latin typeface="Outfit"/>
               </a:rPr>
-              <a:t>Non esiste una scorciatoia per diventare bravi in questa materia. Le AI possono fornire informazioni sommarie e spesso scorrette, quindi l'unica opzione è imparare "alla vecchia maniera": applicando ciò che si apprende nella vita quotidiana, facendo gli esercizi settimanali e discutendo in classe delle proprie osservazioni.</a:t>
+              <a:t>Non esiste una scorciatoia per diventare bravi in questa materia. Le</a:t>
+            </a:r>
+          </a:p>
+          <a:p>
+            <a:pPr algn="l">
+              <a:lnSpc>
+                <a:spcPct val="145000"/>
+              </a:lnSpc>
+            </a:pPr>
+            <a:r>
+              <a:rPr sz="1400" b="0" i="0">
+                <a:solidFill>
+                  <a:srgbClr val="3A3532"/>
+                </a:solidFill>
+                <a:latin typeface="Outfit"/>
+              </a:rPr>
+              <a:t>AI possono fornire informazioni sommarie e spesso scorrette, quindi</a:t>
+            </a:r>
+          </a:p>
+          <a:p>
+            <a:pPr algn="l">
+              <a:lnSpc>
+                <a:spcPct val="145000"/>
+              </a:lnSpc>
+            </a:pPr>
+            <a:r>
+              <a:rPr sz="1400" b="0" i="0">
+                <a:solidFill>
+                  <a:srgbClr val="3A3532"/>
+                </a:solidFill>
+                <a:latin typeface="Outfit"/>
+              </a:rPr>
+              <a:t>l'unica opzione è imparare "alla vecchia maniera": applicando ciò che</a:t>
+            </a:r>
+          </a:p>
+          <a:p>
+            <a:pPr algn="l">
+              <a:lnSpc>
+                <a:spcPct val="145000"/>
+              </a:lnSpc>
+            </a:pPr>
+            <a:r>
+              <a:rPr sz="1400" b="0" i="0">
+                <a:solidFill>
+                  <a:srgbClr val="3A3532"/>
+                </a:solidFill>
+                <a:latin typeface="Outfit"/>
+              </a:rPr>
+              <a:t>si apprende nella vita quotidiana, facendo gli esercizi settimanali e</a:t>
+            </a:r>
+          </a:p>
+          <a:p>
+            <a:pPr algn="l">
+              <a:lnSpc>
+                <a:spcPct val="145000"/>
+              </a:lnSpc>
+            </a:pPr>
+            <a:r>
+              <a:rPr sz="1400" b="0" i="0">
+                <a:solidFill>
+                  <a:srgbClr val="3A3532"/>
+                </a:solidFill>
+                <a:latin typeface="Outfit"/>
+              </a:rPr>
+              <a:t>discutendo in classe delle proprie osservazioni.</a:t>
             </a:r>
           </a:p>
         </p:txBody>
@@ -3979,15 +4155,15 @@
         <p:spPr>
           <a:xfrm>
             <a:off x="596899" y="4228296"/>
-            <a:ext cx="5916798" cy="748008"/>
-          </a:xfrm>
-          <a:prstGeom prst="rect">
-            <a:avLst/>
-          </a:prstGeom>
-          <a:noFill/>
-        </p:spPr>
-        <p:txBody>
-          <a:bodyPr wrap="square" lIns="0" rIns="0" tIns="0" bIns="0" anchor="t">
+            <a:ext cx="6059795" cy="748008"/>
+          </a:xfrm>
+          <a:prstGeom prst="rect">
+            <a:avLst/>
+          </a:prstGeom>
+          <a:noFill/>
+        </p:spPr>
+        <p:txBody>
+          <a:bodyPr wrap="none" lIns="0" rIns="0" tIns="0" bIns="0" anchor="t">
             <a:spAutoFit/>
           </a:bodyPr>
           <a:lstStyle/>
@@ -4004,7 +4180,23 @@
                 </a:solidFill>
                 <a:latin typeface="Playfair Display"/>
               </a:rPr>
-              <a:t>Non serve essere perfetti. Serve essere onesti con sé stessi.</a:t>
+              <a:t>Non serve essere perfetti. Serve essere</a:t>
+            </a:r>
+          </a:p>
+          <a:p>
+            <a:pPr algn="l">
+              <a:lnSpc>
+                <a:spcPct val="120000"/>
+              </a:lnSpc>
+            </a:pPr>
+            <a:r>
+              <a:rPr sz="2200" b="1" i="1">
+                <a:solidFill>
+                  <a:srgbClr val="7A4F5E"/>
+                </a:solidFill>
+                <a:latin typeface="Playfair Display"/>
+              </a:rPr>
+              <a:t>onesti con sé stessi.</a:t>
             </a:r>
           </a:p>
         </p:txBody>
@@ -4018,7 +4210,7 @@
         <p:spPr>
           <a:xfrm>
             <a:off x="596899" y="6407134"/>
-            <a:ext cx="207946" cy="184150"/>
+            <a:ext cx="220290" cy="184150"/>
           </a:xfrm>
           <a:prstGeom prst="rect">
             <a:avLst/>
@@ -4057,7 +4249,7 @@
         <p:spPr>
           <a:xfrm>
             <a:off x="9960545" y="6388084"/>
-            <a:ext cx="1477102" cy="184150"/>
+            <a:ext cx="1636758" cy="184150"/>
           </a:xfrm>
           <a:prstGeom prst="rect">
             <a:avLst/>
@@ -4538,7 +4730,7 @@
         <p:spPr>
           <a:xfrm>
             <a:off x="596899" y="425449"/>
-            <a:ext cx="3382557" cy="215899"/>
+            <a:ext cx="3763383" cy="215899"/>
           </a:xfrm>
           <a:prstGeom prst="rect">
             <a:avLst/>
@@ -4577,7 +4769,7 @@
         <p:spPr>
           <a:xfrm>
             <a:off x="596899" y="647698"/>
-            <a:ext cx="6098973" cy="577849"/>
+            <a:ext cx="6246450" cy="577849"/>
           </a:xfrm>
           <a:prstGeom prst="rect">
             <a:avLst/>
@@ -4616,7 +4808,7 @@
         <p:spPr>
           <a:xfrm>
             <a:off x="825498" y="5651486"/>
-            <a:ext cx="600327" cy="190500"/>
+            <a:ext cx="658216" cy="190500"/>
           </a:xfrm>
           <a:prstGeom prst="rect">
             <a:avLst/>
@@ -4655,7 +4847,7 @@
         <p:spPr>
           <a:xfrm>
             <a:off x="1715289" y="5651486"/>
-            <a:ext cx="799463" cy="190500"/>
+            <a:ext cx="880465" cy="190500"/>
           </a:xfrm>
           <a:prstGeom prst="rect">
             <a:avLst/>
@@ -4694,7 +4886,7 @@
         <p:spPr>
           <a:xfrm>
             <a:off x="2782881" y="5651486"/>
-            <a:ext cx="686894" cy="190500"/>
+            <a:ext cx="754830" cy="190500"/>
           </a:xfrm>
           <a:prstGeom prst="rect">
             <a:avLst/>
@@ -4733,15 +4925,15 @@
         <p:spPr>
           <a:xfrm>
             <a:off x="596899" y="5886435"/>
-            <a:ext cx="3321994" cy="374649"/>
-          </a:xfrm>
-          <a:prstGeom prst="rect">
-            <a:avLst/>
-          </a:prstGeom>
-          <a:noFill/>
-        </p:spPr>
-        <p:txBody>
-          <a:bodyPr wrap="square" lIns="0" rIns="0" tIns="0" bIns="0" anchor="t">
+            <a:ext cx="3695790" cy="374649"/>
+          </a:xfrm>
+          <a:prstGeom prst="rect">
+            <a:avLst/>
+          </a:prstGeom>
+          <a:noFill/>
+        </p:spPr>
+        <p:txBody>
+          <a:bodyPr wrap="none" lIns="0" rIns="0" tIns="0" bIns="0" anchor="t">
             <a:spAutoFit/>
           </a:bodyPr>
           <a:lstStyle/>
@@ -4758,7 +4950,23 @@
                 </a:solidFill>
                 <a:latin typeface="Outfit"/>
               </a:rPr>
-              <a:t>Fig. 2 — La carta di Valentina Russo, 21 giugno 1988, Saluzzo.</a:t>
+              <a:t>Fig. 2 — La carta di Valentina Russo, 21 giugno 1988,</a:t>
+            </a:r>
+          </a:p>
+          <a:p>
+            <a:pPr algn="l">
+              <a:lnSpc>
+                <a:spcPct val="140000"/>
+              </a:lnSpc>
+            </a:pPr>
+            <a:r>
+              <a:rPr sz="1000" b="0" i="0">
+                <a:solidFill>
+                  <a:srgbClr val="6B625D"/>
+                </a:solidFill>
+                <a:latin typeface="Outfit"/>
+              </a:rPr>
+              <a:t>Saluzzo.</a:t>
             </a:r>
           </a:p>
         </p:txBody>
@@ -4772,7 +4980,7 @@
         <p:spPr>
           <a:xfrm>
             <a:off x="4368789" y="2561623"/>
-            <a:ext cx="3443565" cy="260349"/>
+            <a:ext cx="3831471" cy="260349"/>
           </a:xfrm>
           <a:prstGeom prst="rect">
             <a:avLst/>
@@ -4811,7 +5019,7 @@
         <p:spPr>
           <a:xfrm>
             <a:off x="4368789" y="2946393"/>
-            <a:ext cx="3574136" cy="260349"/>
+            <a:ext cx="3977198" cy="260349"/>
           </a:xfrm>
           <a:prstGeom prst="rect">
             <a:avLst/>
@@ -4850,7 +5058,7 @@
         <p:spPr>
           <a:xfrm>
             <a:off x="4368789" y="3331162"/>
-            <a:ext cx="4035971" cy="260349"/>
+            <a:ext cx="4492639" cy="260349"/>
           </a:xfrm>
           <a:prstGeom prst="rect">
             <a:avLst/>
@@ -4889,7 +5097,7 @@
         <p:spPr>
           <a:xfrm>
             <a:off x="4368789" y="3715931"/>
-            <a:ext cx="4207658" cy="260349"/>
+            <a:ext cx="4684254" cy="260349"/>
           </a:xfrm>
           <a:prstGeom prst="rect">
             <a:avLst/>
@@ -4928,15 +5136,15 @@
         <p:spPr>
           <a:xfrm>
             <a:off x="4368789" y="4100701"/>
-            <a:ext cx="4002744" cy="518119"/>
-          </a:xfrm>
-          <a:prstGeom prst="rect">
-            <a:avLst/>
-          </a:prstGeom>
-          <a:noFill/>
-        </p:spPr>
-        <p:txBody>
-          <a:bodyPr wrap="square" lIns="0" rIns="0" tIns="0" bIns="0" anchor="t">
+            <a:ext cx="4455556" cy="518119"/>
+          </a:xfrm>
+          <a:prstGeom prst="rect">
+            <a:avLst/>
+          </a:prstGeom>
+          <a:noFill/>
+        </p:spPr>
+        <p:txBody>
+          <a:bodyPr wrap="none" lIns="0" rIns="0" tIns="0" bIns="0" anchor="t">
             <a:spAutoFit/>
           </a:bodyPr>
           <a:lstStyle/>
@@ -4953,7 +5161,23 @@
                 </a:solidFill>
                 <a:latin typeface="Outfit"/>
               </a:rPr>
-              <a:t>Ci dice se il Disegno è tutto collegato, e come assimili le informazioni.</a:t>
+              <a:t>Ci dice se il Disegno è tutto collegato, e come</a:t>
+            </a:r>
+          </a:p>
+          <a:p>
+            <a:pPr algn="l">
+              <a:lnSpc>
+                <a:spcPct val="145000"/>
+              </a:lnSpc>
+            </a:pPr>
+            <a:r>
+              <a:rPr sz="1400" b="0" i="0">
+                <a:solidFill>
+                  <a:srgbClr val="3A3532"/>
+                </a:solidFill>
+                <a:latin typeface="Outfit"/>
+              </a:rPr>
+              <a:t>assimili le informazioni.</a:t>
             </a:r>
           </a:p>
         </p:txBody>
@@ -4967,7 +5191,7 @@
         <p:spPr>
           <a:xfrm>
             <a:off x="4203689" y="4800390"/>
-            <a:ext cx="3096094" cy="311149"/>
+            <a:ext cx="3417135" cy="311149"/>
           </a:xfrm>
           <a:prstGeom prst="rect">
             <a:avLst/>
@@ -5012,7 +5236,7 @@
         <p:spPr>
           <a:xfrm>
             <a:off x="596899" y="6407134"/>
-            <a:ext cx="231727" cy="184150"/>
+            <a:ext cx="246831" cy="184150"/>
           </a:xfrm>
           <a:prstGeom prst="rect">
             <a:avLst/>
@@ -5051,7 +5275,7 @@
         <p:spPr>
           <a:xfrm>
             <a:off x="9960545" y="6388084"/>
-            <a:ext cx="1477102" cy="184150"/>
+            <a:ext cx="1636758" cy="184150"/>
           </a:xfrm>
           <a:prstGeom prst="rect">
             <a:avLst/>
@@ -5188,7 +5412,7 @@
         <p:spPr>
           <a:xfrm>
             <a:off x="596899" y="425449"/>
-            <a:ext cx="3382557" cy="215899"/>
+            <a:ext cx="3763383" cy="215899"/>
           </a:xfrm>
           <a:prstGeom prst="rect">
             <a:avLst/>
@@ -5227,7 +5451,7 @@
         <p:spPr>
           <a:xfrm>
             <a:off x="596899" y="647698"/>
-            <a:ext cx="3349642" cy="577849"/>
+            <a:ext cx="3429512" cy="577849"/>
           </a:xfrm>
           <a:prstGeom prst="rect">
             <a:avLst/>
@@ -5266,7 +5490,7 @@
         <p:spPr>
           <a:xfrm>
             <a:off x="596899" y="6064235"/>
-            <a:ext cx="3089521" cy="196850"/>
+            <a:ext cx="3436334" cy="196850"/>
           </a:xfrm>
           <a:prstGeom prst="rect">
             <a:avLst/>
@@ -5304,8 +5528,8 @@
         </p:nvSpPr>
         <p:spPr>
           <a:xfrm>
-            <a:off x="4725128" y="1855584"/>
-            <a:ext cx="392959" cy="615948"/>
+            <a:off x="4717964" y="1855584"/>
+            <a:ext cx="400123" cy="615948"/>
           </a:xfrm>
           <a:prstGeom prst="rect">
             <a:avLst/>
@@ -5344,15 +5568,15 @@
         <p:spPr>
           <a:xfrm>
             <a:off x="5270487" y="2147684"/>
-            <a:ext cx="737455" cy="453329"/>
-          </a:xfrm>
-          <a:prstGeom prst="rect">
-            <a:avLst/>
-          </a:prstGeom>
-          <a:noFill/>
-        </p:spPr>
-        <p:txBody>
-          <a:bodyPr wrap="square" lIns="0" rIns="0" tIns="0" bIns="0" anchor="t">
+            <a:ext cx="811260" cy="453329"/>
+          </a:xfrm>
+          <a:prstGeom prst="rect">
+            <a:avLst/>
+          </a:prstGeom>
+          <a:noFill/>
+        </p:spPr>
+        <p:txBody>
+          <a:bodyPr wrap="none" lIns="0" rIns="0" tIns="0" bIns="0" anchor="t">
             <a:spAutoFit/>
           </a:bodyPr>
           <a:lstStyle/>
@@ -5398,8 +5622,8 @@
         </p:nvSpPr>
         <p:spPr>
           <a:xfrm>
-            <a:off x="4738322" y="2632763"/>
-            <a:ext cx="379765" cy="615948"/>
+            <a:off x="4731482" y="2632763"/>
+            <a:ext cx="386605" cy="615948"/>
           </a:xfrm>
           <a:prstGeom prst="rect">
             <a:avLst/>
@@ -5438,15 +5662,15 @@
         <p:spPr>
           <a:xfrm>
             <a:off x="5270487" y="2924862"/>
-            <a:ext cx="3161530" cy="453329"/>
-          </a:xfrm>
-          <a:prstGeom prst="rect">
-            <a:avLst/>
-          </a:prstGeom>
-          <a:noFill/>
-        </p:spPr>
-        <p:txBody>
-          <a:bodyPr wrap="square" lIns="0" rIns="0" tIns="0" bIns="0" anchor="t">
+            <a:ext cx="3516701" cy="453329"/>
+          </a:xfrm>
+          <a:prstGeom prst="rect">
+            <a:avLst/>
+          </a:prstGeom>
+          <a:noFill/>
+        </p:spPr>
+        <p:txBody>
+          <a:bodyPr wrap="none" lIns="0" rIns="0" tIns="0" bIns="0" anchor="t">
             <a:spAutoFit/>
           </a:bodyPr>
           <a:lstStyle/>
@@ -5492,8 +5716,8 @@
         </p:nvSpPr>
         <p:spPr>
           <a:xfrm>
-            <a:off x="4463789" y="3409941"/>
-            <a:ext cx="654298" cy="615948"/>
+            <a:off x="4450198" y="3409941"/>
+            <a:ext cx="667889" cy="615948"/>
           </a:xfrm>
           <a:prstGeom prst="rect">
             <a:avLst/>
@@ -5532,15 +5756,15 @@
         <p:spPr>
           <a:xfrm>
             <a:off x="5270487" y="3702041"/>
-            <a:ext cx="992598" cy="453329"/>
-          </a:xfrm>
-          <a:prstGeom prst="rect">
-            <a:avLst/>
-          </a:prstGeom>
-          <a:noFill/>
-        </p:spPr>
-        <p:txBody>
-          <a:bodyPr wrap="square" lIns="0" rIns="0" tIns="0" bIns="0" anchor="t">
+            <a:ext cx="1096017" cy="453329"/>
+          </a:xfrm>
+          <a:prstGeom prst="rect">
+            <a:avLst/>
+          </a:prstGeom>
+          <a:noFill/>
+        </p:spPr>
+        <p:txBody>
+          <a:bodyPr wrap="none" lIns="0" rIns="0" tIns="0" bIns="0" anchor="t">
             <a:spAutoFit/>
           </a:bodyPr>
           <a:lstStyle/>
@@ -5586,8 +5810,8 @@
         </p:nvSpPr>
         <p:spPr>
           <a:xfrm>
-            <a:off x="4442727" y="4187120"/>
-            <a:ext cx="675360" cy="615948"/>
+            <a:off x="4428618" y="4187120"/>
+            <a:ext cx="689469" cy="615948"/>
           </a:xfrm>
           <a:prstGeom prst="rect">
             <a:avLst/>
@@ -5626,15 +5850,15 @@
         <p:spPr>
           <a:xfrm>
             <a:off x="5270487" y="4479219"/>
-            <a:ext cx="1209958" cy="453329"/>
-          </a:xfrm>
-          <a:prstGeom prst="rect">
-            <a:avLst/>
-          </a:prstGeom>
-          <a:noFill/>
-        </p:spPr>
-        <p:txBody>
-          <a:bodyPr wrap="square" lIns="0" rIns="0" tIns="0" bIns="0" anchor="t">
+            <a:ext cx="1338606" cy="453329"/>
+          </a:xfrm>
+          <a:prstGeom prst="rect">
+            <a:avLst/>
+          </a:prstGeom>
+          <a:noFill/>
+        </p:spPr>
+        <p:txBody>
+          <a:bodyPr wrap="none" lIns="0" rIns="0" tIns="0" bIns="0" anchor="t">
             <a:spAutoFit/>
           </a:bodyPr>
           <a:lstStyle/>
@@ -5680,8 +5904,8 @@
         </p:nvSpPr>
         <p:spPr>
           <a:xfrm>
-            <a:off x="4185624" y="4964299"/>
-            <a:ext cx="932463" cy="615948"/>
+            <a:off x="4165193" y="4964299"/>
+            <a:ext cx="952894" cy="615948"/>
           </a:xfrm>
           <a:prstGeom prst="rect">
             <a:avLst/>
@@ -5720,15 +5944,15 @@
         <p:spPr>
           <a:xfrm>
             <a:off x="5270487" y="5256398"/>
-            <a:ext cx="3422673" cy="453329"/>
-          </a:xfrm>
-          <a:prstGeom prst="rect">
-            <a:avLst/>
-          </a:prstGeom>
-          <a:noFill/>
-        </p:spPr>
-        <p:txBody>
-          <a:bodyPr wrap="square" lIns="0" rIns="0" tIns="0" bIns="0" anchor="t">
+            <a:ext cx="3808155" cy="453329"/>
+          </a:xfrm>
+          <a:prstGeom prst="rect">
+            <a:avLst/>
+          </a:prstGeom>
+          <a:noFill/>
+        </p:spPr>
+        <p:txBody>
+          <a:bodyPr wrap="none" lIns="0" rIns="0" tIns="0" bIns="0" anchor="t">
             <a:spAutoFit/>
           </a:bodyPr>
           <a:lstStyle/>
@@ -5775,7 +5999,7 @@
         <p:spPr>
           <a:xfrm>
             <a:off x="596899" y="6407134"/>
-            <a:ext cx="231616" cy="184150"/>
+            <a:ext cx="246707" cy="184150"/>
           </a:xfrm>
           <a:prstGeom prst="rect">
             <a:avLst/>
@@ -5814,7 +6038,7 @@
         <p:spPr>
           <a:xfrm>
             <a:off x="9960545" y="6388084"/>
-            <a:ext cx="1477102" cy="184150"/>
+            <a:ext cx="1636758" cy="184150"/>
           </a:xfrm>
           <a:prstGeom prst="rect">
             <a:avLst/>
@@ -6314,7 +6538,7 @@
         <p:spPr>
           <a:xfrm>
             <a:off x="596899" y="425449"/>
-            <a:ext cx="3382557" cy="215899"/>
+            <a:ext cx="3763383" cy="215899"/>
           </a:xfrm>
           <a:prstGeom prst="rect">
             <a:avLst/>
@@ -6353,7 +6577,7 @@
         <p:spPr>
           <a:xfrm>
             <a:off x="596899" y="647698"/>
-            <a:ext cx="8249245" cy="577849"/>
+            <a:ext cx="8449596" cy="577849"/>
           </a:xfrm>
           <a:prstGeom prst="rect">
             <a:avLst/>
@@ -6392,7 +6616,7 @@
         <p:spPr>
           <a:xfrm>
             <a:off x="596899" y="1418527"/>
-            <a:ext cx="2147628" cy="292099"/>
+            <a:ext cx="2385114" cy="292099"/>
           </a:xfrm>
           <a:prstGeom prst="rect">
             <a:avLst/>
@@ -6431,7 +6655,7 @@
         <p:spPr>
           <a:xfrm>
             <a:off x="812798" y="1846456"/>
-            <a:ext cx="3448565" cy="260349"/>
+            <a:ext cx="3837052" cy="260349"/>
           </a:xfrm>
           <a:prstGeom prst="rect">
             <a:avLst/>
@@ -6470,7 +6694,7 @@
         <p:spPr>
           <a:xfrm>
             <a:off x="812798" y="2243926"/>
-            <a:ext cx="2375434" cy="260349"/>
+            <a:ext cx="2639361" cy="260349"/>
           </a:xfrm>
           <a:prstGeom prst="rect">
             <a:avLst/>
@@ -6509,7 +6733,7 @@
         <p:spPr>
           <a:xfrm>
             <a:off x="812798" y="2641395"/>
-            <a:ext cx="2243307" cy="260349"/>
+            <a:ext cx="2491897" cy="260349"/>
           </a:xfrm>
           <a:prstGeom prst="rect">
             <a:avLst/>
@@ -6548,7 +6772,7 @@
         <p:spPr>
           <a:xfrm>
             <a:off x="812798" y="3038864"/>
-            <a:ext cx="2412661" cy="260349"/>
+            <a:ext cx="2680909" cy="260349"/>
           </a:xfrm>
           <a:prstGeom prst="rect">
             <a:avLst/>
@@ -6587,7 +6811,7 @@
         <p:spPr>
           <a:xfrm>
             <a:off x="6492859" y="1418527"/>
-            <a:ext cx="2575014" cy="292099"/>
+            <a:ext cx="2862107" cy="292099"/>
           </a:xfrm>
           <a:prstGeom prst="rect">
             <a:avLst/>
@@ -6626,7 +6850,7 @@
         <p:spPr>
           <a:xfrm>
             <a:off x="6708758" y="1846456"/>
-            <a:ext cx="2632910" cy="260349"/>
+            <a:ext cx="2926723" cy="260349"/>
           </a:xfrm>
           <a:prstGeom prst="rect">
             <a:avLst/>
@@ -6665,7 +6889,7 @@
         <p:spPr>
           <a:xfrm>
             <a:off x="6708758" y="2243926"/>
-            <a:ext cx="4540588" cy="260349"/>
+            <a:ext cx="5055828" cy="260349"/>
           </a:xfrm>
           <a:prstGeom prst="rect">
             <a:avLst/>
@@ -6704,7 +6928,7 @@
         <p:spPr>
           <a:xfrm>
             <a:off x="6708758" y="2641395"/>
-            <a:ext cx="1880373" cy="260349"/>
+            <a:ext cx="2086838" cy="260349"/>
           </a:xfrm>
           <a:prstGeom prst="rect">
             <a:avLst/>
@@ -6743,7 +6967,7 @@
         <p:spPr>
           <a:xfrm>
             <a:off x="6708758" y="3038864"/>
-            <a:ext cx="2292757" cy="260349"/>
+            <a:ext cx="2547088" cy="260349"/>
           </a:xfrm>
           <a:prstGeom prst="rect">
             <a:avLst/>
@@ -6782,7 +7006,7 @@
         <p:spPr>
           <a:xfrm>
             <a:off x="596899" y="6407134"/>
-            <a:ext cx="239172" cy="184150"/>
+            <a:ext cx="255140" cy="184150"/>
           </a:xfrm>
           <a:prstGeom prst="rect">
             <a:avLst/>
@@ -6821,7 +7045,7 @@
         <p:spPr>
           <a:xfrm>
             <a:off x="9960545" y="6388084"/>
-            <a:ext cx="1477102" cy="184150"/>
+            <a:ext cx="1636758" cy="184150"/>
           </a:xfrm>
           <a:prstGeom prst="rect">
             <a:avLst/>
@@ -6958,7 +7182,7 @@
         <p:spPr>
           <a:xfrm>
             <a:off x="596899" y="425449"/>
-            <a:ext cx="3382557" cy="215899"/>
+            <a:ext cx="3763383" cy="215899"/>
           </a:xfrm>
           <a:prstGeom prst="rect">
             <a:avLst/>
@@ -6997,7 +7221,7 @@
         <p:spPr>
           <a:xfrm>
             <a:off x="596899" y="647698"/>
-            <a:ext cx="7290798" cy="577849"/>
+            <a:ext cx="7467581" cy="577849"/>
           </a:xfrm>
           <a:prstGeom prst="rect">
             <a:avLst/>
@@ -7036,15 +7260,15 @@
         <p:spPr>
           <a:xfrm>
             <a:off x="4914888" y="2926747"/>
-            <a:ext cx="7369490" cy="535879"/>
-          </a:xfrm>
-          <a:prstGeom prst="rect">
-            <a:avLst/>
-          </a:prstGeom>
-          <a:noFill/>
-        </p:spPr>
-        <p:txBody>
-          <a:bodyPr wrap="square" lIns="0" rIns="0" tIns="0" bIns="0" anchor="t">
+            <a:ext cx="8213084" cy="535879"/>
+          </a:xfrm>
+          <a:prstGeom prst="rect">
+            <a:avLst/>
+          </a:prstGeom>
+          <a:noFill/>
+        </p:spPr>
+        <p:txBody>
+          <a:bodyPr wrap="none" lIns="0" rIns="0" tIns="0" bIns="0" anchor="t">
             <a:spAutoFit/>
           </a:bodyPr>
           <a:lstStyle/>
@@ -7061,7 +7285,23 @@
                 </a:solidFill>
                 <a:latin typeface="Outfit"/>
               </a:rPr>
-              <a:t>ESISTONO DIVERSI STRATI DI SINTESI, DI CUI TRE SONO QUELLI BASE</a:t>
+              <a:t>ESISTONO DIVERSI STRATI DI SINTESI, DI CUI TRE SONO QUELLI</a:t>
+            </a:r>
+          </a:p>
+          <a:p>
+            <a:pPr algn="l">
+              <a:lnSpc>
+                <a:spcPct val="120000"/>
+              </a:lnSpc>
+            </a:pPr>
+            <a:r>
+              <a:rPr sz="1600" b="1" i="0">
+                <a:solidFill>
+                  <a:srgbClr val="6B625D"/>
+                </a:solidFill>
+                <a:latin typeface="Outfit"/>
+              </a:rPr>
+              <a:t>BASE</a:t>
             </a:r>
           </a:p>
         </p:txBody>
@@ -7075,7 +7315,7 @@
         <p:spPr>
           <a:xfrm>
             <a:off x="5283187" y="3611157"/>
-            <a:ext cx="6719299" cy="260349"/>
+            <a:ext cx="7487425" cy="260349"/>
           </a:xfrm>
           <a:prstGeom prst="rect">
             <a:avLst/>
@@ -7114,7 +7354,7 @@
         <p:spPr>
           <a:xfrm>
             <a:off x="4914888" y="3598457"/>
-            <a:ext cx="457199" cy="228599"/>
+            <a:ext cx="498474" cy="228599"/>
           </a:xfrm>
           <a:prstGeom prst="rect">
             <a:avLst/>
@@ -7149,7 +7389,7 @@
         <p:spPr>
           <a:xfrm>
             <a:off x="5283187" y="4034026"/>
-            <a:ext cx="4143317" cy="260349"/>
+            <a:ext cx="4612445" cy="260349"/>
           </a:xfrm>
           <a:prstGeom prst="rect">
             <a:avLst/>
@@ -7188,7 +7428,7 @@
         <p:spPr>
           <a:xfrm>
             <a:off x="4914888" y="4021326"/>
-            <a:ext cx="457199" cy="228599"/>
+            <a:ext cx="498474" cy="228599"/>
           </a:xfrm>
           <a:prstGeom prst="rect">
             <a:avLst/>
@@ -7223,7 +7463,7 @@
         <p:spPr>
           <a:xfrm>
             <a:off x="5283187" y="4456895"/>
-            <a:ext cx="5985876" cy="260349"/>
+            <a:ext cx="6668872" cy="260349"/>
           </a:xfrm>
           <a:prstGeom prst="rect">
             <a:avLst/>
@@ -7262,7 +7502,7 @@
         <p:spPr>
           <a:xfrm>
             <a:off x="4914888" y="4444195"/>
-            <a:ext cx="457199" cy="228599"/>
+            <a:ext cx="498474" cy="228599"/>
           </a:xfrm>
           <a:prstGeom prst="rect">
             <a:avLst/>
@@ -7297,7 +7537,7 @@
         <p:spPr>
           <a:xfrm>
             <a:off x="596899" y="6407134"/>
-            <a:ext cx="232282" cy="184150"/>
+            <a:ext cx="247451" cy="184150"/>
           </a:xfrm>
           <a:prstGeom prst="rect">
             <a:avLst/>
@@ -7336,7 +7576,7 @@
         <p:spPr>
           <a:xfrm>
             <a:off x="9960545" y="6388084"/>
-            <a:ext cx="1477102" cy="184150"/>
+            <a:ext cx="1636758" cy="184150"/>
           </a:xfrm>
           <a:prstGeom prst="rect">
             <a:avLst/>
@@ -7521,7 +7761,7 @@
         <p:spPr>
           <a:xfrm>
             <a:off x="596899" y="425449"/>
-            <a:ext cx="1389091" cy="215899"/>
+            <a:ext cx="1538532" cy="215899"/>
           </a:xfrm>
           <a:prstGeom prst="rect">
             <a:avLst/>
@@ -7560,7 +7800,7 @@
         <p:spPr>
           <a:xfrm>
             <a:off x="596899" y="647698"/>
-            <a:ext cx="7388482" cy="577849"/>
+            <a:ext cx="7567668" cy="577849"/>
           </a:xfrm>
           <a:prstGeom prst="rect">
             <a:avLst/>
@@ -7598,8 +7838,8 @@
         </p:nvSpPr>
         <p:spPr>
           <a:xfrm>
-            <a:off x="1056941" y="6064235"/>
-            <a:ext cx="2339541" cy="196850"/>
+            <a:off x="927060" y="6064235"/>
+            <a:ext cx="2599302" cy="196850"/>
           </a:xfrm>
           <a:prstGeom prst="rect">
             <a:avLst/>
@@ -7646,8 +7886,8 @@
         </p:nvSpPr>
         <p:spPr>
           <a:xfrm>
-            <a:off x="3968173" y="3512732"/>
-            <a:ext cx="386301" cy="577849"/>
+            <a:off x="3964672" y="3512732"/>
+            <a:ext cx="393302" cy="577849"/>
           </a:xfrm>
           <a:prstGeom prst="rect">
             <a:avLst/>
@@ -7685,8 +7925,8 @@
         </p:nvSpPr>
         <p:spPr>
           <a:xfrm>
-            <a:off x="4729363" y="6064235"/>
-            <a:ext cx="2733144" cy="196850"/>
+            <a:off x="4576639" y="6064235"/>
+            <a:ext cx="3038591" cy="196850"/>
           </a:xfrm>
           <a:prstGeom prst="rect">
             <a:avLst/>
@@ -7733,8 +7973,8 @@
         </p:nvSpPr>
         <p:spPr>
           <a:xfrm>
-            <a:off x="7822277" y="3512732"/>
-            <a:ext cx="416442" cy="577849"/>
+            <a:off x="7818406" y="3512732"/>
+            <a:ext cx="424184" cy="577849"/>
           </a:xfrm>
           <a:prstGeom prst="rect">
             <a:avLst/>
@@ -7772,8 +8012,8 @@
         </p:nvSpPr>
         <p:spPr>
           <a:xfrm>
-            <a:off x="8914731" y="6064235"/>
-            <a:ext cx="2100956" cy="196850"/>
+            <a:off x="8798697" y="6064235"/>
+            <a:ext cx="2333024" cy="196850"/>
           </a:xfrm>
           <a:prstGeom prst="rect">
             <a:avLst/>
@@ -7821,7 +8061,7 @@
         <p:spPr>
           <a:xfrm>
             <a:off x="596899" y="6407134"/>
-            <a:ext cx="234394" cy="184150"/>
+            <a:ext cx="249807" cy="184150"/>
           </a:xfrm>
           <a:prstGeom prst="rect">
             <a:avLst/>
@@ -7860,7 +8100,7 @@
         <p:spPr>
           <a:xfrm>
             <a:off x="9960545" y="6388084"/>
-            <a:ext cx="1477102" cy="184150"/>
+            <a:ext cx="1636758" cy="184150"/>
           </a:xfrm>
           <a:prstGeom prst="rect">
             <a:avLst/>
@@ -7997,7 +8237,7 @@
         <p:spPr>
           <a:xfrm>
             <a:off x="596899" y="425449"/>
-            <a:ext cx="1685349" cy="215899"/>
+            <a:ext cx="1869177" cy="215899"/>
           </a:xfrm>
           <a:prstGeom prst="rect">
             <a:avLst/>
@@ -8036,7 +8276,7 @@
         <p:spPr>
           <a:xfrm>
             <a:off x="596899" y="647698"/>
-            <a:ext cx="4427562" cy="577849"/>
+            <a:ext cx="4533938" cy="577849"/>
           </a:xfrm>
           <a:prstGeom prst="rect">
             <a:avLst/>
@@ -8075,7 +8315,7 @@
         <p:spPr>
           <a:xfrm>
             <a:off x="596899" y="6064235"/>
-            <a:ext cx="2425107" cy="196850"/>
+            <a:ext cx="2694799" cy="196850"/>
           </a:xfrm>
           <a:prstGeom prst="rect">
             <a:avLst/>
@@ -8114,15 +8354,15 @@
         <p:spPr>
           <a:xfrm>
             <a:off x="4406889" y="2993422"/>
-            <a:ext cx="5784629" cy="1175838"/>
-          </a:xfrm>
-          <a:prstGeom prst="rect">
-            <a:avLst/>
-          </a:prstGeom>
-          <a:noFill/>
-        </p:spPr>
-        <p:txBody>
-          <a:bodyPr wrap="square" lIns="0" rIns="0" tIns="0" bIns="0" anchor="t">
+            <a:ext cx="6444267" cy="1175838"/>
+          </a:xfrm>
+          <a:prstGeom prst="rect">
+            <a:avLst/>
+          </a:prstGeom>
+          <a:noFill/>
+        </p:spPr>
+        <p:txBody>
+          <a:bodyPr wrap="none" lIns="0" rIns="0" tIns="0" bIns="0" anchor="t">
             <a:spAutoFit/>
           </a:bodyPr>
           <a:lstStyle/>
@@ -8139,7 +8379,55 @@
                 </a:solidFill>
                 <a:latin typeface="Outfit"/>
               </a:rPr>
-              <a:t>Quando due porte definite si incontrano, creano un canale. Quel canale determina un punto di forza, definito da un circuito di energia coerente, che a sua volta definisce due centri.</a:t>
+              <a:t>Quando due porte definite si incontrano, creano un</a:t>
+            </a:r>
+          </a:p>
+          <a:p>
+            <a:pPr algn="l">
+              <a:lnSpc>
+                <a:spcPct val="145000"/>
+              </a:lnSpc>
+            </a:pPr>
+            <a:r>
+              <a:rPr sz="1600" b="0" i="0">
+                <a:solidFill>
+                  <a:srgbClr val="3A3532"/>
+                </a:solidFill>
+                <a:latin typeface="Outfit"/>
+              </a:rPr>
+              <a:t>canale. Quel canale determina un punto di forza, definito</a:t>
+            </a:r>
+          </a:p>
+          <a:p>
+            <a:pPr algn="l">
+              <a:lnSpc>
+                <a:spcPct val="145000"/>
+              </a:lnSpc>
+            </a:pPr>
+            <a:r>
+              <a:rPr sz="1600" b="0" i="0">
+                <a:solidFill>
+                  <a:srgbClr val="3A3532"/>
+                </a:solidFill>
+                <a:latin typeface="Outfit"/>
+              </a:rPr>
+              <a:t>da un circuito di energia coerente, che a sua volta</a:t>
+            </a:r>
+          </a:p>
+          <a:p>
+            <a:pPr algn="l">
+              <a:lnSpc>
+                <a:spcPct val="145000"/>
+              </a:lnSpc>
+            </a:pPr>
+            <a:r>
+              <a:rPr sz="1600" b="0" i="0">
+                <a:solidFill>
+                  <a:srgbClr val="3A3532"/>
+                </a:solidFill>
+                <a:latin typeface="Outfit"/>
+              </a:rPr>
+              <a:t>definisce due centri.</a:t>
             </a:r>
           </a:p>
         </p:txBody>
@@ -8153,7 +8441,7 @@
         <p:spPr>
           <a:xfrm>
             <a:off x="4457689" y="4349541"/>
-            <a:ext cx="4310131" cy="311149"/>
+            <a:ext cx="4772087" cy="311149"/>
           </a:xfrm>
           <a:prstGeom prst="rect">
             <a:avLst/>
@@ -8198,7 +8486,7 @@
         <p:spPr>
           <a:xfrm>
             <a:off x="596899" y="6407134"/>
-            <a:ext cx="229282" cy="184150"/>
+            <a:ext cx="244102" cy="184150"/>
           </a:xfrm>
           <a:prstGeom prst="rect">
             <a:avLst/>
@@ -8237,7 +8525,7 @@
         <p:spPr>
           <a:xfrm>
             <a:off x="9960545" y="6388084"/>
-            <a:ext cx="1477102" cy="184150"/>
+            <a:ext cx="1636758" cy="184150"/>
           </a:xfrm>
           <a:prstGeom prst="rect">
             <a:avLst/>
@@ -8446,7 +8734,7 @@
         <p:spPr>
           <a:xfrm>
             <a:off x="596899" y="425449"/>
-            <a:ext cx="1685349" cy="215899"/>
+            <a:ext cx="1869177" cy="215899"/>
           </a:xfrm>
           <a:prstGeom prst="rect">
             <a:avLst/>
@@ -8485,7 +8773,7 @@
         <p:spPr>
           <a:xfrm>
             <a:off x="596899" y="647698"/>
-            <a:ext cx="3991310" cy="577849"/>
+            <a:ext cx="4086959" cy="577849"/>
           </a:xfrm>
           <a:prstGeom prst="rect">
             <a:avLst/>
@@ -8523,16 +8811,16 @@
         </p:nvSpPr>
         <p:spPr>
           <a:xfrm>
-            <a:off x="1269495" y="5533416"/>
-            <a:ext cx="1251852" cy="411459"/>
-          </a:xfrm>
-          <a:prstGeom prst="rect">
-            <a:avLst/>
-          </a:prstGeom>
-          <a:noFill/>
-        </p:spPr>
-        <p:txBody>
-          <a:bodyPr wrap="square" lIns="0" rIns="0" tIns="0" bIns="0" anchor="t">
+            <a:off x="1202739" y="5533416"/>
+            <a:ext cx="1385363" cy="411459"/>
+          </a:xfrm>
+          <a:prstGeom prst="rect">
+            <a:avLst/>
+          </a:prstGeom>
+          <a:noFill/>
+        </p:spPr>
+        <p:txBody>
+          <a:bodyPr wrap="none" lIns="0" rIns="0" tIns="0" bIns="0" anchor="t">
             <a:spAutoFit/>
           </a:bodyPr>
           <a:lstStyle/>
@@ -8578,16 +8866,16 @@
         </p:nvSpPr>
         <p:spPr>
           <a:xfrm>
-            <a:off x="3780685" y="5533416"/>
-            <a:ext cx="1830256" cy="411459"/>
-          </a:xfrm>
-          <a:prstGeom prst="rect">
-            <a:avLst/>
-          </a:prstGeom>
-          <a:noFill/>
-        </p:spPr>
-        <p:txBody>
-          <a:bodyPr wrap="square" lIns="0" rIns="0" tIns="0" bIns="0" anchor="t">
+            <a:off x="3680362" y="5533416"/>
+            <a:ext cx="2030904" cy="411459"/>
+          </a:xfrm>
+          <a:prstGeom prst="rect">
+            <a:avLst/>
+          </a:prstGeom>
+          <a:noFill/>
+        </p:spPr>
+        <p:txBody>
+          <a:bodyPr wrap="none" lIns="0" rIns="0" tIns="0" bIns="0" anchor="t">
             <a:spAutoFit/>
           </a:bodyPr>
           <a:lstStyle/>
@@ -8633,16 +8921,16 @@
         </p:nvSpPr>
         <p:spPr>
           <a:xfrm>
-            <a:off x="7049641" y="5533416"/>
-            <a:ext cx="893030" cy="411459"/>
-          </a:xfrm>
-          <a:prstGeom prst="rect">
-            <a:avLst/>
-          </a:prstGeom>
-          <a:noFill/>
-        </p:spPr>
-        <p:txBody>
-          <a:bodyPr wrap="square" lIns="0" rIns="0" tIns="0" bIns="0" anchor="t">
+            <a:off x="7003710" y="5533416"/>
+            <a:ext cx="984892" cy="411459"/>
+          </a:xfrm>
+          <a:prstGeom prst="rect">
+            <a:avLst/>
+          </a:prstGeom>
+          <a:noFill/>
+        </p:spPr>
+        <p:txBody>
+          <a:bodyPr wrap="none" lIns="0" rIns="0" tIns="0" bIns="0" anchor="t">
             <a:spAutoFit/>
           </a:bodyPr>
           <a:lstStyle/>
@@ -8688,16 +8976,16 @@
         </p:nvSpPr>
         <p:spPr>
           <a:xfrm>
-            <a:off x="9849984" y="5533416"/>
-            <a:ext cx="893030" cy="411459"/>
-          </a:xfrm>
-          <a:prstGeom prst="rect">
-            <a:avLst/>
-          </a:prstGeom>
-          <a:noFill/>
-        </p:spPr>
-        <p:txBody>
-          <a:bodyPr wrap="square" lIns="0" rIns="0" tIns="0" bIns="0" anchor="t">
+            <a:off x="9804053" y="5533416"/>
+            <a:ext cx="984892" cy="411459"/>
+          </a:xfrm>
+          <a:prstGeom prst="rect">
+            <a:avLst/>
+          </a:prstGeom>
+          <a:noFill/>
+        </p:spPr>
+        <p:txBody>
+          <a:bodyPr wrap="none" lIns="0" rIns="0" tIns="0" bIns="0" anchor="t">
             <a:spAutoFit/>
           </a:bodyPr>
           <a:lstStyle/>
@@ -8744,7 +9032,7 @@
         <p:spPr>
           <a:xfrm>
             <a:off x="596899" y="6064235"/>
-            <a:ext cx="4317672" cy="196850"/>
+            <a:ext cx="4807037" cy="196850"/>
           </a:xfrm>
           <a:prstGeom prst="rect">
             <a:avLst/>
@@ -8783,7 +9071,7 @@
         <p:spPr>
           <a:xfrm>
             <a:off x="596899" y="6407134"/>
-            <a:ext cx="232616" cy="184150"/>
+            <a:ext cx="247823" cy="184150"/>
           </a:xfrm>
           <a:prstGeom prst="rect">
             <a:avLst/>
@@ -8822,7 +9110,7 @@
         <p:spPr>
           <a:xfrm>
             <a:off x="9960545" y="6388084"/>
-            <a:ext cx="1477102" cy="184150"/>
+            <a:ext cx="1636758" cy="184150"/>
           </a:xfrm>
           <a:prstGeom prst="rect">
             <a:avLst/>
@@ -9303,7 +9591,7 @@
         <p:spPr>
           <a:xfrm>
             <a:off x="596899" y="425449"/>
-            <a:ext cx="1398870" cy="215899"/>
+            <a:ext cx="1549446" cy="215899"/>
           </a:xfrm>
           <a:prstGeom prst="rect">
             <a:avLst/>
@@ -9342,7 +9630,7 @@
         <p:spPr>
           <a:xfrm>
             <a:off x="596899" y="647698"/>
-            <a:ext cx="7014206" cy="577849"/>
+            <a:ext cx="7184188" cy="577849"/>
           </a:xfrm>
           <a:prstGeom prst="rect">
             <a:avLst/>
@@ -9381,15 +9669,15 @@
         <p:spPr>
           <a:xfrm>
             <a:off x="596899" y="2518463"/>
-            <a:ext cx="3856726" cy="535879"/>
-          </a:xfrm>
-          <a:prstGeom prst="rect">
-            <a:avLst/>
-          </a:prstGeom>
-          <a:noFill/>
-        </p:spPr>
-        <p:txBody>
-          <a:bodyPr wrap="square" lIns="0" rIns="0" tIns="0" bIns="0" anchor="t">
+            <a:ext cx="4292589" cy="535879"/>
+          </a:xfrm>
+          <a:prstGeom prst="rect">
+            <a:avLst/>
+          </a:prstGeom>
+          <a:noFill/>
+        </p:spPr>
+        <p:txBody>
+          <a:bodyPr wrap="none" lIns="0" rIns="0" tIns="0" bIns="0" anchor="t">
             <a:spAutoFit/>
           </a:bodyPr>
           <a:lstStyle/>
@@ -9436,7 +9724,7 @@
         <p:spPr>
           <a:xfrm>
             <a:off x="812798" y="3190172"/>
-            <a:ext cx="2165853" cy="260349"/>
+            <a:ext cx="2405453" cy="260349"/>
           </a:xfrm>
           <a:prstGeom prst="rect">
             <a:avLst/>
@@ -9475,7 +9763,7 @@
         <p:spPr>
           <a:xfrm>
             <a:off x="812798" y="3574942"/>
-            <a:ext cx="3447565" cy="260349"/>
+            <a:ext cx="3835936" cy="260349"/>
           </a:xfrm>
           <a:prstGeom prst="rect">
             <a:avLst/>
@@ -9514,7 +9802,7 @@
         <p:spPr>
           <a:xfrm>
             <a:off x="812798" y="3959711"/>
-            <a:ext cx="3887397" cy="260349"/>
+            <a:ext cx="4326820" cy="260349"/>
           </a:xfrm>
           <a:prstGeom prst="rect">
             <a:avLst/>
@@ -9553,7 +9841,7 @@
         <p:spPr>
           <a:xfrm>
             <a:off x="812798" y="4344481"/>
-            <a:ext cx="602661" cy="260349"/>
+            <a:ext cx="660820" cy="260349"/>
           </a:xfrm>
           <a:prstGeom prst="rect">
             <a:avLst/>
@@ -9592,7 +9880,7 @@
         <p:spPr>
           <a:xfrm>
             <a:off x="647698" y="4786400"/>
-            <a:ext cx="1450003" cy="311149"/>
+            <a:ext cx="1579980" cy="311149"/>
           </a:xfrm>
           <a:prstGeom prst="rect">
             <a:avLst/>
@@ -9637,15 +9925,15 @@
         <p:spPr>
           <a:xfrm>
             <a:off x="7772381" y="2389578"/>
-            <a:ext cx="4104646" cy="535879"/>
-          </a:xfrm>
-          <a:prstGeom prst="rect">
-            <a:avLst/>
-          </a:prstGeom>
-          <a:noFill/>
-        </p:spPr>
-        <p:txBody>
-          <a:bodyPr wrap="square" lIns="0" rIns="0" tIns="0" bIns="0" anchor="t">
+            <a:ext cx="4569285" cy="535879"/>
+          </a:xfrm>
+          <a:prstGeom prst="rect">
+            <a:avLst/>
+          </a:prstGeom>
+          <a:noFill/>
+        </p:spPr>
+        <p:txBody>
+          <a:bodyPr wrap="none" lIns="0" rIns="0" tIns="0" bIns="0" anchor="t">
             <a:spAutoFit/>
           </a:bodyPr>
           <a:lstStyle/>
@@ -9692,7 +9980,7 @@
         <p:spPr>
           <a:xfrm>
             <a:off x="7988280" y="3061288"/>
-            <a:ext cx="2427107" cy="260349"/>
+            <a:ext cx="2697032" cy="260349"/>
           </a:xfrm>
           <a:prstGeom prst="rect">
             <a:avLst/>
@@ -9731,7 +10019,7 @@
         <p:spPr>
           <a:xfrm>
             <a:off x="7988280" y="3446057"/>
-            <a:ext cx="3802386" cy="260349"/>
+            <a:ext cx="4231942" cy="260349"/>
           </a:xfrm>
           <a:prstGeom prst="rect">
             <a:avLst/>
@@ -9770,15 +10058,15 @@
         <p:spPr>
           <a:xfrm>
             <a:off x="7988280" y="3830826"/>
-            <a:ext cx="3420451" cy="518119"/>
-          </a:xfrm>
-          <a:prstGeom prst="rect">
-            <a:avLst/>
-          </a:prstGeom>
-          <a:noFill/>
-        </p:spPr>
-        <p:txBody>
-          <a:bodyPr wrap="square" lIns="0" rIns="0" tIns="0" bIns="0" anchor="t">
+            <a:ext cx="3805674" cy="518119"/>
+          </a:xfrm>
+          <a:prstGeom prst="rect">
+            <a:avLst/>
+          </a:prstGeom>
+          <a:noFill/>
+        </p:spPr>
+        <p:txBody>
+          <a:bodyPr wrap="none" lIns="0" rIns="0" tIns="0" bIns="0" anchor="t">
             <a:spAutoFit/>
           </a:bodyPr>
           <a:lstStyle/>
@@ -9795,7 +10083,23 @@
                 </a:solidFill>
                 <a:latin typeface="Outfit"/>
               </a:rPr>
-              <a:t>Una forma incoerente e inaffidabile di energia.</a:t>
+              <a:t>Una forma incoerente e inaffidabile di</a:t>
+            </a:r>
+          </a:p>
+          <a:p>
+            <a:pPr algn="l">
+              <a:lnSpc>
+                <a:spcPct val="145000"/>
+              </a:lnSpc>
+            </a:pPr>
+            <a:r>
+              <a:rPr sz="1400" b="0" i="0">
+                <a:solidFill>
+                  <a:srgbClr val="3A3532"/>
+                </a:solidFill>
+                <a:latin typeface="Outfit"/>
+              </a:rPr>
+              <a:t>energia.</a:t>
             </a:r>
           </a:p>
         </p:txBody>
@@ -9809,7 +10113,7 @@
         <p:spPr>
           <a:xfrm>
             <a:off x="7988280" y="4473365"/>
-            <a:ext cx="949148" cy="260349"/>
+            <a:ext cx="1047524" cy="260349"/>
           </a:xfrm>
           <a:prstGeom prst="rect">
             <a:avLst/>
@@ -9848,7 +10152,7 @@
         <p:spPr>
           <a:xfrm>
             <a:off x="7823180" y="4915285"/>
-            <a:ext cx="2222209" cy="311149"/>
+            <a:ext cx="2441817" cy="311149"/>
           </a:xfrm>
           <a:prstGeom prst="rect">
             <a:avLst/>
@@ -9893,7 +10197,7 @@
         <p:spPr>
           <a:xfrm>
             <a:off x="596899" y="6407134"/>
-            <a:ext cx="234394" cy="184150"/>
+            <a:ext cx="249807" cy="184150"/>
           </a:xfrm>
           <a:prstGeom prst="rect">
             <a:avLst/>
@@ -9932,7 +10236,7 @@
         <p:spPr>
           <a:xfrm>
             <a:off x="9960545" y="6388084"/>
-            <a:ext cx="1477102" cy="184150"/>
+            <a:ext cx="1636758" cy="184150"/>
           </a:xfrm>
           <a:prstGeom prst="rect">
             <a:avLst/>
@@ -10093,7 +10397,7 @@
         <p:spPr>
           <a:xfrm>
             <a:off x="596899" y="425449"/>
-            <a:ext cx="2037059" cy="215899"/>
+            <a:ext cx="2261711" cy="215899"/>
           </a:xfrm>
           <a:prstGeom prst="rect">
             <a:avLst/>
@@ -10132,7 +10436,7 @@
         <p:spPr>
           <a:xfrm>
             <a:off x="596899" y="647698"/>
-            <a:ext cx="3231743" cy="577849"/>
+            <a:ext cx="3308714" cy="577849"/>
           </a:xfrm>
           <a:prstGeom prst="rect">
             <a:avLst/>
@@ -10171,7 +10475,7 @@
         <p:spPr>
           <a:xfrm>
             <a:off x="596899" y="6064235"/>
-            <a:ext cx="2157629" cy="196850"/>
+            <a:ext cx="2396276" cy="196850"/>
           </a:xfrm>
           <a:prstGeom prst="rect">
             <a:avLst/>
@@ -10210,15 +10514,15 @@
         <p:spPr>
           <a:xfrm>
             <a:off x="3898890" y="1717175"/>
-            <a:ext cx="6058218" cy="518119"/>
-          </a:xfrm>
-          <a:prstGeom prst="rect">
-            <a:avLst/>
-          </a:prstGeom>
-          <a:noFill/>
-        </p:spPr>
-        <p:txBody>
-          <a:bodyPr wrap="square" lIns="0" rIns="0" tIns="0" bIns="0" anchor="t">
+            <a:ext cx="6749611" cy="518119"/>
+          </a:xfrm>
+          <a:prstGeom prst="rect">
+            <a:avLst/>
+          </a:prstGeom>
+          <a:noFill/>
+        </p:spPr>
+        <p:txBody>
+          <a:bodyPr wrap="none" lIns="0" rIns="0" tIns="0" bIns="0" anchor="t">
             <a:spAutoFit/>
           </a:bodyPr>
           <a:lstStyle/>
@@ -10235,7 +10539,23 @@
                 </a:solidFill>
                 <a:latin typeface="Outfit"/>
               </a:rPr>
-              <a:t>Per ottenere il massimo dalla lezione di oggi, assicurati di avere il tuo Disegno sotto mano.</a:t>
+              <a:t>Per ottenere il massimo dalla lezione di oggi, assicurati di avere il tuo</a:t>
+            </a:r>
+          </a:p>
+          <a:p>
+            <a:pPr algn="l">
+              <a:lnSpc>
+                <a:spcPct val="145000"/>
+              </a:lnSpc>
+            </a:pPr>
+            <a:r>
+              <a:rPr sz="1400" b="0" i="0">
+                <a:solidFill>
+                  <a:srgbClr val="3A3532"/>
+                </a:solidFill>
+                <a:latin typeface="Outfit"/>
+              </a:rPr>
+              <a:t>Disegno sotto mano.</a:t>
             </a:r>
           </a:p>
         </p:txBody>
@@ -10249,7 +10569,7 @@
         <p:spPr>
           <a:xfrm>
             <a:off x="3898890" y="2372414"/>
-            <a:ext cx="6230350" cy="260349"/>
+            <a:ext cx="6941723" cy="260349"/>
           </a:xfrm>
           <a:prstGeom prst="rect">
             <a:avLst/>
@@ -10297,7 +10617,7 @@
         <p:spPr>
           <a:xfrm>
             <a:off x="596899" y="6407134"/>
-            <a:ext cx="270176" cy="184150"/>
+            <a:ext cx="289743" cy="184150"/>
           </a:xfrm>
           <a:prstGeom prst="rect">
             <a:avLst/>
@@ -10336,7 +10656,7 @@
         <p:spPr>
           <a:xfrm>
             <a:off x="9960545" y="6388084"/>
-            <a:ext cx="1477102" cy="184150"/>
+            <a:ext cx="1636758" cy="184150"/>
           </a:xfrm>
           <a:prstGeom prst="rect">
             <a:avLst/>
@@ -10559,7 +10879,7 @@
         <p:spPr>
           <a:xfrm>
             <a:off x="596899" y="425449"/>
-            <a:ext cx="1398870" cy="215899"/>
+            <a:ext cx="1549446" cy="215899"/>
           </a:xfrm>
           <a:prstGeom prst="rect">
             <a:avLst/>
@@ -10598,7 +10918,7 @@
         <p:spPr>
           <a:xfrm>
             <a:off x="596899" y="647698"/>
-            <a:ext cx="6025498" cy="577849"/>
+            <a:ext cx="6171168" cy="577849"/>
           </a:xfrm>
           <a:prstGeom prst="rect">
             <a:avLst/>
@@ -10637,15 +10957,15 @@
         <p:spPr>
           <a:xfrm>
             <a:off x="5930885" y="3191462"/>
-            <a:ext cx="5200669" cy="613369"/>
-          </a:xfrm>
-          <a:prstGeom prst="rect">
-            <a:avLst/>
-          </a:prstGeom>
-          <a:noFill/>
-        </p:spPr>
-        <p:txBody>
-          <a:bodyPr wrap="square" lIns="0" rIns="0" tIns="0" bIns="0" anchor="t">
+            <a:ext cx="5792525" cy="613369"/>
+          </a:xfrm>
+          <a:prstGeom prst="rect">
+            <a:avLst/>
+          </a:prstGeom>
+          <a:noFill/>
+        </p:spPr>
+        <p:txBody>
+          <a:bodyPr wrap="none" lIns="0" rIns="0" tIns="0" bIns="0" anchor="t">
             <a:spAutoFit/>
           </a:bodyPr>
           <a:lstStyle/>
@@ -10662,7 +10982,23 @@
                 </a:solidFill>
                 <a:latin typeface="Outfit"/>
               </a:rPr>
-              <a:t>Il BG5 (Business Group 5) approfondisce proprio come siamo fatti per collegarci agli altri.</a:t>
+              <a:t>Il BG5 (Business Group 5) approfondisce proprio</a:t>
+            </a:r>
+          </a:p>
+          <a:p>
+            <a:pPr algn="l">
+              <a:lnSpc>
+                <a:spcPct val="140000"/>
+              </a:lnSpc>
+            </a:pPr>
+            <a:r>
+              <a:rPr sz="1700" b="0" i="0">
+                <a:solidFill>
+                  <a:srgbClr val="3A3532"/>
+                </a:solidFill>
+                <a:latin typeface="Outfit"/>
+              </a:rPr>
+              <a:t>come siamo fatti per collegarci agli altri.</a:t>
             </a:r>
           </a:p>
         </p:txBody>
@@ -10676,7 +11012,7 @@
         <p:spPr>
           <a:xfrm>
             <a:off x="6248384" y="4018151"/>
-            <a:ext cx="2016390" cy="228599"/>
+            <a:ext cx="2238642" cy="228599"/>
           </a:xfrm>
           <a:prstGeom prst="rect">
             <a:avLst/>
@@ -10715,7 +11051,7 @@
         <p:spPr>
           <a:xfrm>
             <a:off x="6248384" y="4284850"/>
-            <a:ext cx="2679249" cy="228599"/>
+            <a:ext cx="2978440" cy="228599"/>
           </a:xfrm>
           <a:prstGeom prst="rect">
             <a:avLst/>
@@ -10754,7 +11090,7 @@
         <p:spPr>
           <a:xfrm>
             <a:off x="596899" y="6407134"/>
-            <a:ext cx="270176" cy="184150"/>
+            <a:ext cx="289743" cy="184150"/>
           </a:xfrm>
           <a:prstGeom prst="rect">
             <a:avLst/>
@@ -10793,7 +11129,7 @@
         <p:spPr>
           <a:xfrm>
             <a:off x="9960545" y="6388084"/>
-            <a:ext cx="1477102" cy="184150"/>
+            <a:ext cx="1636758" cy="184150"/>
           </a:xfrm>
           <a:prstGeom prst="rect">
             <a:avLst/>
@@ -10930,7 +11266,7 @@
         <p:spPr>
           <a:xfrm>
             <a:off x="596899" y="425449"/>
-            <a:ext cx="1773582" cy="215899"/>
+            <a:ext cx="1967652" cy="215899"/>
           </a:xfrm>
           <a:prstGeom prst="rect">
             <a:avLst/>
@@ -10969,7 +11305,7 @@
         <p:spPr>
           <a:xfrm>
             <a:off x="596899" y="647698"/>
-            <a:ext cx="3863848" cy="577849"/>
+            <a:ext cx="3956363" cy="577849"/>
           </a:xfrm>
           <a:prstGeom prst="rect">
             <a:avLst/>
@@ -11008,7 +11344,7 @@
         <p:spPr>
           <a:xfrm>
             <a:off x="8793835" y="425449"/>
-            <a:ext cx="3168880" cy="298449"/>
+            <a:ext cx="3498370" cy="298449"/>
           </a:xfrm>
           <a:prstGeom prst="rect">
             <a:avLst/>
@@ -11049,15 +11385,15 @@
         <p:spPr>
           <a:xfrm>
             <a:off x="596899" y="2449903"/>
-            <a:ext cx="6798976" cy="518119"/>
-          </a:xfrm>
-          <a:prstGeom prst="rect">
-            <a:avLst/>
-          </a:prstGeom>
-          <a:noFill/>
-        </p:spPr>
-        <p:txBody>
-          <a:bodyPr wrap="square" lIns="0" rIns="0" tIns="0" bIns="0" anchor="t">
+            <a:ext cx="7576350" cy="518119"/>
+          </a:xfrm>
+          <a:prstGeom prst="rect">
+            <a:avLst/>
+          </a:prstGeom>
+          <a:noFill/>
+        </p:spPr>
+        <p:txBody>
+          <a:bodyPr wrap="none" lIns="0" rIns="0" tIns="0" bIns="0" anchor="t">
             <a:spAutoFit/>
           </a:bodyPr>
           <a:lstStyle/>
@@ -11074,7 +11410,23 @@
                 </a:solidFill>
                 <a:latin typeface="Outfit"/>
               </a:rPr>
-              <a:t>Stampa quattro copie della risorsa del corso, la trovi nella tua area riservata, e colora i quattro grafici in questa maniera:</a:t>
+              <a:t>Stampa quattro copie della risorsa del corso, la trovi nella tua area riservata,</a:t>
+            </a:r>
+          </a:p>
+          <a:p>
+            <a:pPr algn="l">
+              <a:lnSpc>
+                <a:spcPct val="145000"/>
+              </a:lnSpc>
+            </a:pPr>
+            <a:r>
+              <a:rPr sz="1400" b="0" i="0">
+                <a:solidFill>
+                  <a:srgbClr val="3A3532"/>
+                </a:solidFill>
+                <a:latin typeface="Outfit"/>
+              </a:rPr>
+              <a:t>e colora i quattro grafici in questa maniera:</a:t>
             </a:r>
           </a:p>
         </p:txBody>
@@ -11088,7 +11440,7 @@
         <p:spPr>
           <a:xfrm>
             <a:off x="965198" y="3143242"/>
-            <a:ext cx="4342230" cy="260349"/>
+            <a:ext cx="4834446" cy="260349"/>
           </a:xfrm>
           <a:prstGeom prst="rect">
             <a:avLst/>
@@ -11127,7 +11479,7 @@
         <p:spPr>
           <a:xfrm>
             <a:off x="596899" y="3130542"/>
-            <a:ext cx="457199" cy="228599"/>
+            <a:ext cx="498474" cy="228599"/>
           </a:xfrm>
           <a:prstGeom prst="rect">
             <a:avLst/>
@@ -11162,7 +11514,7 @@
         <p:spPr>
           <a:xfrm>
             <a:off x="965198" y="3502612"/>
-            <a:ext cx="3240984" cy="260349"/>
+            <a:ext cx="3605377" cy="260349"/>
           </a:xfrm>
           <a:prstGeom prst="rect">
             <a:avLst/>
@@ -11201,7 +11553,7 @@
         <p:spPr>
           <a:xfrm>
             <a:off x="596899" y="3489912"/>
-            <a:ext cx="457199" cy="228599"/>
+            <a:ext cx="498474" cy="228599"/>
           </a:xfrm>
           <a:prstGeom prst="rect">
             <a:avLst/>
@@ -11236,7 +11588,7 @@
         <p:spPr>
           <a:xfrm>
             <a:off x="965198" y="3861981"/>
-            <a:ext cx="3174087" cy="260349"/>
+            <a:ext cx="3530715" cy="260349"/>
           </a:xfrm>
           <a:prstGeom prst="rect">
             <a:avLst/>
@@ -11275,7 +11627,7 @@
         <p:spPr>
           <a:xfrm>
             <a:off x="596899" y="3849281"/>
-            <a:ext cx="457199" cy="228599"/>
+            <a:ext cx="498474" cy="228599"/>
           </a:xfrm>
           <a:prstGeom prst="rect">
             <a:avLst/>
@@ -11310,7 +11662,7 @@
         <p:spPr>
           <a:xfrm>
             <a:off x="965198" y="4221350"/>
-            <a:ext cx="6827868" cy="260349"/>
+            <a:ext cx="7608596" cy="260349"/>
           </a:xfrm>
           <a:prstGeom prst="rect">
             <a:avLst/>
@@ -11349,7 +11701,7 @@
         <p:spPr>
           <a:xfrm>
             <a:off x="596899" y="4208650"/>
-            <a:ext cx="457199" cy="228599"/>
+            <a:ext cx="498474" cy="228599"/>
           </a:xfrm>
           <a:prstGeom prst="rect">
             <a:avLst/>
@@ -11384,15 +11736,15 @@
         <p:spPr>
           <a:xfrm>
             <a:off x="596899" y="4669620"/>
-            <a:ext cx="6659736" cy="518119"/>
-          </a:xfrm>
-          <a:prstGeom prst="rect">
-            <a:avLst/>
-          </a:prstGeom>
-          <a:noFill/>
-        </p:spPr>
-        <p:txBody>
-          <a:bodyPr wrap="square" lIns="0" rIns="0" tIns="0" bIns="0" anchor="t">
+            <a:ext cx="7420949" cy="518119"/>
+          </a:xfrm>
+          <a:prstGeom prst="rect">
+            <a:avLst/>
+          </a:prstGeom>
+          <a:noFill/>
+        </p:spPr>
+        <p:txBody>
+          <a:bodyPr wrap="none" lIns="0" rIns="0" tIns="0" bIns="0" anchor="t">
             <a:spAutoFit/>
           </a:bodyPr>
           <a:lstStyle/>
@@ -11409,7 +11761,23 @@
                 </a:solidFill>
                 <a:latin typeface="Outfit"/>
               </a:rPr>
-              <a:t>Carica le foto o le scansioni dei quattro grafici nel forum e commenta con le sensazioni che hai provato svolgendo l'esercizio.</a:t>
+              <a:t>Carica le foto o le scansioni dei quattro grafici nel forum e commenta con le</a:t>
+            </a:r>
+          </a:p>
+          <a:p>
+            <a:pPr algn="l">
+              <a:lnSpc>
+                <a:spcPct val="145000"/>
+              </a:lnSpc>
+            </a:pPr>
+            <a:r>
+              <a:rPr sz="1400" b="0" i="0">
+                <a:solidFill>
+                  <a:srgbClr val="3A3532"/>
+                </a:solidFill>
+                <a:latin typeface="Outfit"/>
+              </a:rPr>
+              <a:t>sensazioni che hai provato svolgendo l'esercizio.</a:t>
             </a:r>
           </a:p>
         </p:txBody>
@@ -11423,7 +11791,7 @@
         <p:spPr>
           <a:xfrm>
             <a:off x="8902678" y="6064235"/>
-            <a:ext cx="2123625" cy="196850"/>
+            <a:ext cx="2358325" cy="196850"/>
           </a:xfrm>
           <a:prstGeom prst="rect">
             <a:avLst/>
@@ -11462,7 +11830,7 @@
         <p:spPr>
           <a:xfrm>
             <a:off x="596899" y="6407134"/>
-            <a:ext cx="231727" cy="184150"/>
+            <a:ext cx="246831" cy="184150"/>
           </a:xfrm>
           <a:prstGeom prst="rect">
             <a:avLst/>
@@ -11501,7 +11869,7 @@
         <p:spPr>
           <a:xfrm>
             <a:off x="9960545" y="6388084"/>
-            <a:ext cx="1477102" cy="184150"/>
+            <a:ext cx="1636758" cy="184150"/>
           </a:xfrm>
           <a:prstGeom prst="rect">
             <a:avLst/>
@@ -11662,7 +12030,7 @@
         <p:spPr>
           <a:xfrm>
             <a:off x="596899" y="425449"/>
-            <a:ext cx="3611919" cy="215899"/>
+            <a:ext cx="4019366" cy="215899"/>
           </a:xfrm>
           <a:prstGeom prst="rect">
             <a:avLst/>
@@ -11701,7 +12069,7 @@
         <p:spPr>
           <a:xfrm>
             <a:off x="596899" y="622298"/>
-            <a:ext cx="2145350" cy="577849"/>
+            <a:ext cx="2195606" cy="577849"/>
           </a:xfrm>
           <a:prstGeom prst="rect">
             <a:avLst/>
@@ -11740,7 +12108,7 @@
         <p:spPr>
           <a:xfrm>
             <a:off x="2437203" y="622298"/>
-            <a:ext cx="291522" cy="577849"/>
+            <a:ext cx="296192" cy="577849"/>
           </a:xfrm>
           <a:prstGeom prst="rect">
             <a:avLst/>
@@ -11778,8 +12146,8 @@
         </p:nvSpPr>
         <p:spPr>
           <a:xfrm>
-            <a:off x="9216669" y="425449"/>
-            <a:ext cx="2353002" cy="298449"/>
+            <a:off x="8981879" y="425449"/>
+            <a:ext cx="2587792" cy="298449"/>
           </a:xfrm>
           <a:prstGeom prst="rect">
             <a:avLst/>
@@ -11820,15 +12188,15 @@
         <p:spPr>
           <a:xfrm>
             <a:off x="965198" y="2397218"/>
-            <a:ext cx="3859504" cy="518119"/>
-          </a:xfrm>
-          <a:prstGeom prst="rect">
-            <a:avLst/>
-          </a:prstGeom>
-          <a:noFill/>
-        </p:spPr>
-        <p:txBody>
-          <a:bodyPr wrap="square" lIns="0" rIns="0" tIns="0" bIns="0" anchor="t">
+            <a:ext cx="4295690" cy="518119"/>
+          </a:xfrm>
+          <a:prstGeom prst="rect">
+            <a:avLst/>
+          </a:prstGeom>
+          <a:noFill/>
+        </p:spPr>
+        <p:txBody>
+          <a:bodyPr wrap="none" lIns="0" rIns="0" tIns="0" bIns="0" anchor="t">
             <a:spAutoFit/>
           </a:bodyPr>
           <a:lstStyle/>
@@ -11845,7 +12213,23 @@
                 </a:solidFill>
                 <a:latin typeface="Outfit"/>
               </a:rPr>
-              <a:t>Prendi una penna nera, una rossa e una del colore che vuoi.</a:t>
+              <a:t>Prendi una penna nera, una rossa e una del</a:t>
+            </a:r>
+          </a:p>
+          <a:p>
+            <a:pPr algn="l">
+              <a:lnSpc>
+                <a:spcPct val="145000"/>
+              </a:lnSpc>
+            </a:pPr>
+            <a:r>
+              <a:rPr sz="1400" b="0" i="0">
+                <a:solidFill>
+                  <a:srgbClr val="3A3532"/>
+                </a:solidFill>
+                <a:latin typeface="Outfit"/>
+              </a:rPr>
+              <a:t>colore che vuoi.</a:t>
             </a:r>
           </a:p>
         </p:txBody>
@@ -11859,7 +12243,7 @@
         <p:spPr>
           <a:xfrm>
             <a:off x="596899" y="2384518"/>
-            <a:ext cx="457199" cy="228599"/>
+            <a:ext cx="498474" cy="228599"/>
           </a:xfrm>
           <a:prstGeom prst="rect">
             <a:avLst/>
@@ -11894,15 +12278,15 @@
         <p:spPr>
           <a:xfrm>
             <a:off x="965198" y="3039757"/>
-            <a:ext cx="4103090" cy="518119"/>
-          </a:xfrm>
-          <a:prstGeom prst="rect">
-            <a:avLst/>
-          </a:prstGeom>
-          <a:noFill/>
-        </p:spPr>
-        <p:txBody>
-          <a:bodyPr wrap="square" lIns="0" rIns="0" tIns="0" bIns="0" anchor="t">
+            <a:ext cx="4567549" cy="518119"/>
+          </a:xfrm>
+          <a:prstGeom prst="rect">
+            <a:avLst/>
+          </a:prstGeom>
+          <a:noFill/>
+        </p:spPr>
+        <p:txBody>
+          <a:bodyPr wrap="none" lIns="0" rIns="0" tIns="0" bIns="0" anchor="t">
             <a:spAutoFit/>
           </a:bodyPr>
           <a:lstStyle/>
@@ -11919,7 +12303,23 @@
                 </a:solidFill>
                 <a:latin typeface="Outfit"/>
               </a:rPr>
-              <a:t>Guarda le porte del tuo Disegno, sia rosse che nere, e colorale.</a:t>
+              <a:t>Guarda le porte del tuo Disegno, sia rosse che</a:t>
+            </a:r>
+          </a:p>
+          <a:p>
+            <a:pPr algn="l">
+              <a:lnSpc>
+                <a:spcPct val="145000"/>
+              </a:lnSpc>
+            </a:pPr>
+            <a:r>
+              <a:rPr sz="1400" b="0" i="0">
+                <a:solidFill>
+                  <a:srgbClr val="3A3532"/>
+                </a:solidFill>
+                <a:latin typeface="Outfit"/>
+              </a:rPr>
+              <a:t>nere, e colorale.</a:t>
             </a:r>
           </a:p>
         </p:txBody>
@@ -11933,7 +12333,7 @@
         <p:spPr>
           <a:xfrm>
             <a:off x="596899" y="3027057"/>
-            <a:ext cx="457199" cy="228599"/>
+            <a:ext cx="498474" cy="228599"/>
           </a:xfrm>
           <a:prstGeom prst="rect">
             <a:avLst/>
@@ -11968,7 +12368,7 @@
         <p:spPr>
           <a:xfrm>
             <a:off x="965198" y="3682296"/>
-            <a:ext cx="1328972" cy="260349"/>
+            <a:ext cx="1471435" cy="260349"/>
           </a:xfrm>
           <a:prstGeom prst="rect">
             <a:avLst/>
@@ -12007,7 +12407,7 @@
         <p:spPr>
           <a:xfrm>
             <a:off x="596899" y="3669596"/>
-            <a:ext cx="457199" cy="228599"/>
+            <a:ext cx="498474" cy="228599"/>
           </a:xfrm>
           <a:prstGeom prst="rect">
             <a:avLst/>
@@ -12042,15 +12442,15 @@
         <p:spPr>
           <a:xfrm>
             <a:off x="965198" y="4067066"/>
-            <a:ext cx="3238651" cy="518119"/>
-          </a:xfrm>
-          <a:prstGeom prst="rect">
-            <a:avLst/>
-          </a:prstGeom>
-          <a:noFill/>
-        </p:spPr>
-        <p:txBody>
-          <a:bodyPr wrap="square" lIns="0" rIns="0" tIns="0" bIns="0" anchor="t">
+            <a:ext cx="3602773" cy="518119"/>
+          </a:xfrm>
+          <a:prstGeom prst="rect">
+            <a:avLst/>
+          </a:prstGeom>
+          <a:noFill/>
+        </p:spPr>
+        <p:txBody>
+          <a:bodyPr wrap="none" lIns="0" rIns="0" tIns="0" bIns="0" anchor="t">
             <a:spAutoFit/>
           </a:bodyPr>
           <a:lstStyle/>
@@ -12067,7 +12467,23 @@
                 </a:solidFill>
                 <a:latin typeface="Outfit"/>
               </a:rPr>
-              <a:t>Colora col terzo colore i centri che si definiscono attraverso i canali.</a:t>
+              <a:t>Colora col terzo colore i centri che si</a:t>
+            </a:r>
+          </a:p>
+          <a:p>
+            <a:pPr algn="l">
+              <a:lnSpc>
+                <a:spcPct val="145000"/>
+              </a:lnSpc>
+            </a:pPr>
+            <a:r>
+              <a:rPr sz="1400" b="0" i="0">
+                <a:solidFill>
+                  <a:srgbClr val="3A3532"/>
+                </a:solidFill>
+                <a:latin typeface="Outfit"/>
+              </a:rPr>
+              <a:t>definiscono attraverso i canali.</a:t>
             </a:r>
           </a:p>
         </p:txBody>
@@ -12081,7 +12497,7 @@
         <p:spPr>
           <a:xfrm>
             <a:off x="596899" y="4054366"/>
-            <a:ext cx="457199" cy="228599"/>
+            <a:ext cx="498474" cy="228599"/>
           </a:xfrm>
           <a:prstGeom prst="rect">
             <a:avLst/>
@@ -12116,15 +12532,15 @@
         <p:spPr>
           <a:xfrm>
             <a:off x="965198" y="4709605"/>
-            <a:ext cx="3945737" cy="518119"/>
-          </a:xfrm>
-          <a:prstGeom prst="rect">
-            <a:avLst/>
-          </a:prstGeom>
-          <a:noFill/>
-        </p:spPr>
-        <p:txBody>
-          <a:bodyPr wrap="square" lIns="0" rIns="0" tIns="0" bIns="0" anchor="t">
+            <a:ext cx="4391932" cy="518119"/>
+          </a:xfrm>
+          <a:prstGeom prst="rect">
+            <a:avLst/>
+          </a:prstGeom>
+          <a:noFill/>
+        </p:spPr>
+        <p:txBody>
+          <a:bodyPr wrap="none" lIns="0" rIns="0" tIns="0" bIns="0" anchor="t">
             <a:spAutoFit/>
           </a:bodyPr>
           <a:lstStyle/>
@@ -12141,7 +12557,23 @@
                 </a:solidFill>
                 <a:latin typeface="Outfit"/>
               </a:rPr>
-              <a:t>Verifica che il Disegno combaci con quello di qualsiasi calcolatore.</a:t>
+              <a:t>Verifica che il Disegno combaci con quello di</a:t>
+            </a:r>
+          </a:p>
+          <a:p>
+            <a:pPr algn="l">
+              <a:lnSpc>
+                <a:spcPct val="145000"/>
+              </a:lnSpc>
+            </a:pPr>
+            <a:r>
+              <a:rPr sz="1400" b="0" i="0">
+                <a:solidFill>
+                  <a:srgbClr val="3A3532"/>
+                </a:solidFill>
+                <a:latin typeface="Outfit"/>
+              </a:rPr>
+              <a:t>qualsiasi calcolatore.</a:t>
             </a:r>
           </a:p>
         </p:txBody>
@@ -12155,7 +12587,7 @@
         <p:spPr>
           <a:xfrm>
             <a:off x="596899" y="4696905"/>
-            <a:ext cx="457199" cy="228599"/>
+            <a:ext cx="498474" cy="228599"/>
           </a:xfrm>
           <a:prstGeom prst="rect">
             <a:avLst/>
@@ -12190,7 +12622,7 @@
         <p:spPr>
           <a:xfrm>
             <a:off x="8648678" y="6064235"/>
-            <a:ext cx="3134305" cy="196850"/>
+            <a:ext cx="3486315" cy="196850"/>
           </a:xfrm>
           <a:prstGeom prst="rect">
             <a:avLst/>
@@ -12229,7 +12661,7 @@
         <p:spPr>
           <a:xfrm>
             <a:off x="596899" y="6407134"/>
-            <a:ext cx="255507" cy="184150"/>
+            <a:ext cx="273372" cy="184150"/>
           </a:xfrm>
           <a:prstGeom prst="rect">
             <a:avLst/>
@@ -12268,7 +12700,7 @@
         <p:spPr>
           <a:xfrm>
             <a:off x="9960545" y="6388084"/>
-            <a:ext cx="1477102" cy="184150"/>
+            <a:ext cx="1636758" cy="184150"/>
           </a:xfrm>
           <a:prstGeom prst="rect">
             <a:avLst/>
@@ -12429,7 +12861,7 @@
         <p:spPr>
           <a:xfrm>
             <a:off x="596899" y="425449"/>
-            <a:ext cx="3611919" cy="215899"/>
+            <a:ext cx="4019366" cy="215899"/>
           </a:xfrm>
           <a:prstGeom prst="rect">
             <a:avLst/>
@@ -12468,7 +12900,7 @@
         <p:spPr>
           <a:xfrm>
             <a:off x="596899" y="622298"/>
-            <a:ext cx="2145350" cy="577849"/>
+            <a:ext cx="2195606" cy="577849"/>
           </a:xfrm>
           <a:prstGeom prst="rect">
             <a:avLst/>
@@ -12507,7 +12939,7 @@
         <p:spPr>
           <a:xfrm>
             <a:off x="2437203" y="622298"/>
-            <a:ext cx="361003" cy="577849"/>
+            <a:ext cx="367381" cy="577849"/>
           </a:xfrm>
           <a:prstGeom prst="rect">
             <a:avLst/>
@@ -12545,8 +12977,8 @@
         </p:nvSpPr>
         <p:spPr>
           <a:xfrm>
-            <a:off x="9216669" y="425449"/>
-            <a:ext cx="2353002" cy="298449"/>
+            <a:off x="8981879" y="425449"/>
+            <a:ext cx="2587792" cy="298449"/>
           </a:xfrm>
           <a:prstGeom prst="rect">
             <a:avLst/>
@@ -12587,7 +13019,7 @@
         <p:spPr>
           <a:xfrm>
             <a:off x="965198" y="2385114"/>
-            <a:ext cx="2217637" cy="260349"/>
+            <a:ext cx="2463248" cy="260349"/>
           </a:xfrm>
           <a:prstGeom prst="rect">
             <a:avLst/>
@@ -12626,7 +13058,7 @@
         <p:spPr>
           <a:xfrm>
             <a:off x="596899" y="2372414"/>
-            <a:ext cx="457199" cy="228599"/>
+            <a:ext cx="498474" cy="228599"/>
           </a:xfrm>
           <a:prstGeom prst="rect">
             <a:avLst/>
@@ -12661,15 +13093,15 @@
         <p:spPr>
           <a:xfrm>
             <a:off x="965198" y="2769883"/>
-            <a:ext cx="3558690" cy="518119"/>
-          </a:xfrm>
-          <a:prstGeom prst="rect">
-            <a:avLst/>
-          </a:prstGeom>
-          <a:noFill/>
-        </p:spPr>
-        <p:txBody>
-          <a:bodyPr wrap="square" lIns="0" rIns="0" tIns="0" bIns="0" anchor="t">
+            <a:ext cx="3959959" cy="518119"/>
+          </a:xfrm>
+          <a:prstGeom prst="rect">
+            <a:avLst/>
+          </a:prstGeom>
+          <a:noFill/>
+        </p:spPr>
+        <p:txBody>
+          <a:bodyPr wrap="none" lIns="0" rIns="0" tIns="0" bIns="0" anchor="t">
             <a:spAutoFit/>
           </a:bodyPr>
           <a:lstStyle/>
@@ -12686,7 +13118,23 @@
                 </a:solidFill>
                 <a:latin typeface="Outfit"/>
               </a:rPr>
-              <a:t>Guarda le porte rosse del tuo Disegno e colorale.</a:t>
+              <a:t>Guarda le porte rosse del tuo Disegno e</a:t>
+            </a:r>
+          </a:p>
+          <a:p>
+            <a:pPr algn="l">
+              <a:lnSpc>
+                <a:spcPct val="145000"/>
+              </a:lnSpc>
+            </a:pPr>
+            <a:r>
+              <a:rPr sz="1400" b="0" i="0">
+                <a:solidFill>
+                  <a:srgbClr val="3A3532"/>
+                </a:solidFill>
+                <a:latin typeface="Outfit"/>
+              </a:rPr>
+              <a:t>colorale.</a:t>
             </a:r>
           </a:p>
         </p:txBody>
@@ -12700,7 +13148,7 @@
         <p:spPr>
           <a:xfrm>
             <a:off x="596899" y="2757183"/>
-            <a:ext cx="457199" cy="228599"/>
+            <a:ext cx="498474" cy="228599"/>
           </a:xfrm>
           <a:prstGeom prst="rect">
             <a:avLst/>
@@ -12735,7 +13183,7 @@
         <p:spPr>
           <a:xfrm>
             <a:off x="965198" y="3412422"/>
-            <a:ext cx="2328539" cy="260349"/>
+            <a:ext cx="2587023" cy="260349"/>
           </a:xfrm>
           <a:prstGeom prst="rect">
             <a:avLst/>
@@ -12774,7 +13222,7 @@
         <p:spPr>
           <a:xfrm>
             <a:off x="596899" y="3399722"/>
-            <a:ext cx="457199" cy="228599"/>
+            <a:ext cx="498474" cy="228599"/>
           </a:xfrm>
           <a:prstGeom prst="rect">
             <a:avLst/>
@@ -12809,15 +13257,15 @@
         <p:spPr>
           <a:xfrm>
             <a:off x="965198" y="3797191"/>
-            <a:ext cx="3902954" cy="518119"/>
-          </a:xfrm>
-          <a:prstGeom prst="rect">
-            <a:avLst/>
-          </a:prstGeom>
-          <a:noFill/>
-        </p:spPr>
-        <p:txBody>
-          <a:bodyPr wrap="square" lIns="0" rIns="0" tIns="0" bIns="0" anchor="t">
+            <a:ext cx="4344183" cy="518119"/>
+          </a:xfrm>
+          <a:prstGeom prst="rect">
+            <a:avLst/>
+          </a:prstGeom>
+          <a:noFill/>
+        </p:spPr>
+        <p:txBody>
+          <a:bodyPr wrap="none" lIns="0" rIns="0" tIns="0" bIns="0" anchor="t">
             <a:spAutoFit/>
           </a:bodyPr>
           <a:lstStyle/>
@@ -12834,7 +13282,23 @@
                 </a:solidFill>
                 <a:latin typeface="Outfit"/>
               </a:rPr>
-              <a:t>Colora gli eventuali centri che si definiscono attraverso i canali.</a:t>
+              <a:t>Colora gli eventuali centri che si definiscono</a:t>
+            </a:r>
+          </a:p>
+          <a:p>
+            <a:pPr algn="l">
+              <a:lnSpc>
+                <a:spcPct val="145000"/>
+              </a:lnSpc>
+            </a:pPr>
+            <a:r>
+              <a:rPr sz="1400" b="0" i="0">
+                <a:solidFill>
+                  <a:srgbClr val="3A3532"/>
+                </a:solidFill>
+                <a:latin typeface="Outfit"/>
+              </a:rPr>
+              <a:t>attraverso i canali.</a:t>
             </a:r>
           </a:p>
         </p:txBody>
@@ -12848,7 +13312,7 @@
         <p:spPr>
           <a:xfrm>
             <a:off x="596899" y="3784491"/>
-            <a:ext cx="457199" cy="228599"/>
+            <a:ext cx="498474" cy="228599"/>
           </a:xfrm>
           <a:prstGeom prst="rect">
             <a:avLst/>
@@ -12883,15 +13347,15 @@
         <p:spPr>
           <a:xfrm>
             <a:off x="596899" y="4528630"/>
-            <a:ext cx="5464568" cy="748008"/>
-          </a:xfrm>
-          <a:prstGeom prst="rect">
-            <a:avLst/>
-          </a:prstGeom>
-          <a:noFill/>
-        </p:spPr>
-        <p:txBody>
-          <a:bodyPr wrap="square" lIns="0" rIns="0" tIns="0" bIns="0" anchor="t">
+            <a:ext cx="5596444" cy="748008"/>
+          </a:xfrm>
+          <a:prstGeom prst="rect">
+            <a:avLst/>
+          </a:prstGeom>
+          <a:noFill/>
+        </p:spPr>
+        <p:txBody>
+          <a:bodyPr wrap="none" lIns="0" rIns="0" tIns="0" bIns="0" anchor="t">
             <a:spAutoFit/>
           </a:bodyPr>
           <a:lstStyle/>
@@ -12908,7 +13372,23 @@
                 </a:solidFill>
                 <a:latin typeface="Playfair Display"/>
               </a:rPr>
-              <a:t>Questa è la mappa genetica del tuo inconscio.</a:t>
+              <a:t>Questa è la mappa genetica del tuo</a:t>
+            </a:r>
+          </a:p>
+          <a:p>
+            <a:pPr algn="l">
+              <a:lnSpc>
+                <a:spcPct val="120000"/>
+              </a:lnSpc>
+            </a:pPr>
+            <a:r>
+              <a:rPr sz="2200" b="1" i="1">
+                <a:solidFill>
+                  <a:srgbClr val="7A4F5E"/>
+                </a:solidFill>
+                <a:latin typeface="Playfair Display"/>
+              </a:rPr>
+              <a:t>inconscio.</a:t>
             </a:r>
           </a:p>
         </p:txBody>
@@ -12922,7 +13402,7 @@
         <p:spPr>
           <a:xfrm>
             <a:off x="8648678" y="6064235"/>
-            <a:ext cx="1969162" cy="196850"/>
+            <a:ext cx="2185932" cy="196850"/>
           </a:xfrm>
           <a:prstGeom prst="rect">
             <a:avLst/>
@@ -12961,7 +13441,7 @@
         <p:spPr>
           <a:xfrm>
             <a:off x="596899" y="6407134"/>
-            <a:ext cx="255396" cy="184150"/>
+            <a:ext cx="273248" cy="184150"/>
           </a:xfrm>
           <a:prstGeom prst="rect">
             <a:avLst/>
@@ -13000,7 +13480,7 @@
         <p:spPr>
           <a:xfrm>
             <a:off x="9960545" y="6388084"/>
-            <a:ext cx="1477102" cy="184150"/>
+            <a:ext cx="1636758" cy="184150"/>
           </a:xfrm>
           <a:prstGeom prst="rect">
             <a:avLst/>
@@ -13161,7 +13641,7 @@
         <p:spPr>
           <a:xfrm>
             <a:off x="596899" y="425449"/>
-            <a:ext cx="3611919" cy="215899"/>
+            <a:ext cx="4019366" cy="215899"/>
           </a:xfrm>
           <a:prstGeom prst="rect">
             <a:avLst/>
@@ -13200,7 +13680,7 @@
         <p:spPr>
           <a:xfrm>
             <a:off x="596899" y="622298"/>
-            <a:ext cx="2145350" cy="577849"/>
+            <a:ext cx="2195606" cy="577849"/>
           </a:xfrm>
           <a:prstGeom prst="rect">
             <a:avLst/>
@@ -13239,7 +13719,7 @@
         <p:spPr>
           <a:xfrm>
             <a:off x="2437203" y="622298"/>
-            <a:ext cx="343572" cy="577849"/>
+            <a:ext cx="349522" cy="577849"/>
           </a:xfrm>
           <a:prstGeom prst="rect">
             <a:avLst/>
@@ -13277,8 +13757,8 @@
         </p:nvSpPr>
         <p:spPr>
           <a:xfrm>
-            <a:off x="9216669" y="425449"/>
-            <a:ext cx="2353002" cy="298449"/>
+            <a:off x="8981879" y="425449"/>
+            <a:ext cx="2587792" cy="298449"/>
           </a:xfrm>
           <a:prstGeom prst="rect">
             <a:avLst/>
@@ -13319,7 +13799,7 @@
         <p:spPr>
           <a:xfrm>
             <a:off x="965198" y="2385114"/>
-            <a:ext cx="2150740" cy="260349"/>
+            <a:ext cx="2388586" cy="260349"/>
           </a:xfrm>
           <a:prstGeom prst="rect">
             <a:avLst/>
@@ -13358,7 +13838,7 @@
         <p:spPr>
           <a:xfrm>
             <a:off x="596899" y="2372414"/>
-            <a:ext cx="457199" cy="228599"/>
+            <a:ext cx="498474" cy="228599"/>
           </a:xfrm>
           <a:prstGeom prst="rect">
             <a:avLst/>
@@ -13393,15 +13873,15 @@
         <p:spPr>
           <a:xfrm>
             <a:off x="965198" y="2769883"/>
-            <a:ext cx="3491682" cy="518119"/>
-          </a:xfrm>
-          <a:prstGeom prst="rect">
-            <a:avLst/>
-          </a:prstGeom>
-          <a:noFill/>
-        </p:spPr>
-        <p:txBody>
-          <a:bodyPr wrap="square" lIns="0" rIns="0" tIns="0" bIns="0" anchor="t">
+            <a:ext cx="3885173" cy="518119"/>
+          </a:xfrm>
+          <a:prstGeom prst="rect">
+            <a:avLst/>
+          </a:prstGeom>
+          <a:noFill/>
+        </p:spPr>
+        <p:txBody>
+          <a:bodyPr wrap="none" lIns="0" rIns="0" tIns="0" bIns="0" anchor="t">
             <a:spAutoFit/>
           </a:bodyPr>
           <a:lstStyle/>
@@ -13418,7 +13898,23 @@
                 </a:solidFill>
                 <a:latin typeface="Outfit"/>
               </a:rPr>
-              <a:t>Guarda le porte nere del tuo Disegno e colorale.</a:t>
+              <a:t>Guarda le porte nere del tuo Disegno e</a:t>
+            </a:r>
+          </a:p>
+          <a:p>
+            <a:pPr algn="l">
+              <a:lnSpc>
+                <a:spcPct val="145000"/>
+              </a:lnSpc>
+            </a:pPr>
+            <a:r>
+              <a:rPr sz="1400" b="0" i="0">
+                <a:solidFill>
+                  <a:srgbClr val="3A3532"/>
+                </a:solidFill>
+                <a:latin typeface="Outfit"/>
+              </a:rPr>
+              <a:t>colorale.</a:t>
             </a:r>
           </a:p>
         </p:txBody>
@@ -13432,7 +13928,7 @@
         <p:spPr>
           <a:xfrm>
             <a:off x="596899" y="2757183"/>
-            <a:ext cx="457199" cy="228599"/>
+            <a:ext cx="498474" cy="228599"/>
           </a:xfrm>
           <a:prstGeom prst="rect">
             <a:avLst/>
@@ -13467,7 +13963,7 @@
         <p:spPr>
           <a:xfrm>
             <a:off x="965198" y="3412422"/>
-            <a:ext cx="2328539" cy="260349"/>
+            <a:ext cx="2587023" cy="260349"/>
           </a:xfrm>
           <a:prstGeom prst="rect">
             <a:avLst/>
@@ -13506,7 +14002,7 @@
         <p:spPr>
           <a:xfrm>
             <a:off x="596899" y="3399722"/>
-            <a:ext cx="457199" cy="228599"/>
+            <a:ext cx="498474" cy="228599"/>
           </a:xfrm>
           <a:prstGeom prst="rect">
             <a:avLst/>
@@ -13541,15 +14037,15 @@
         <p:spPr>
           <a:xfrm>
             <a:off x="965198" y="3797191"/>
-            <a:ext cx="3902954" cy="518119"/>
-          </a:xfrm>
-          <a:prstGeom prst="rect">
-            <a:avLst/>
-          </a:prstGeom>
-          <a:noFill/>
-        </p:spPr>
-        <p:txBody>
-          <a:bodyPr wrap="square" lIns="0" rIns="0" tIns="0" bIns="0" anchor="t">
+            <a:ext cx="4344183" cy="518119"/>
+          </a:xfrm>
+          <a:prstGeom prst="rect">
+            <a:avLst/>
+          </a:prstGeom>
+          <a:noFill/>
+        </p:spPr>
+        <p:txBody>
+          <a:bodyPr wrap="none" lIns="0" rIns="0" tIns="0" bIns="0" anchor="t">
             <a:spAutoFit/>
           </a:bodyPr>
           <a:lstStyle/>
@@ -13566,7 +14062,23 @@
                 </a:solidFill>
                 <a:latin typeface="Outfit"/>
               </a:rPr>
-              <a:t>Colora gli eventuali centri che si definiscono attraverso i canali.</a:t>
+              <a:t>Colora gli eventuali centri che si definiscono</a:t>
+            </a:r>
+          </a:p>
+          <a:p>
+            <a:pPr algn="l">
+              <a:lnSpc>
+                <a:spcPct val="145000"/>
+              </a:lnSpc>
+            </a:pPr>
+            <a:r>
+              <a:rPr sz="1400" b="0" i="0">
+                <a:solidFill>
+                  <a:srgbClr val="3A3532"/>
+                </a:solidFill>
+                <a:latin typeface="Outfit"/>
+              </a:rPr>
+              <a:t>attraverso i canali.</a:t>
             </a:r>
           </a:p>
         </p:txBody>
@@ -13580,7 +14092,7 @@
         <p:spPr>
           <a:xfrm>
             <a:off x="596899" y="3784491"/>
-            <a:ext cx="457199" cy="228599"/>
+            <a:ext cx="498474" cy="228599"/>
           </a:xfrm>
           <a:prstGeom prst="rect">
             <a:avLst/>
@@ -13615,15 +14127,15 @@
         <p:spPr>
           <a:xfrm>
             <a:off x="596899" y="4528630"/>
-            <a:ext cx="6272070" cy="748008"/>
-          </a:xfrm>
-          <a:prstGeom prst="rect">
-            <a:avLst/>
-          </a:prstGeom>
-          <a:noFill/>
-        </p:spPr>
-        <p:txBody>
-          <a:bodyPr wrap="square" lIns="0" rIns="0" tIns="0" bIns="0" anchor="t">
+            <a:ext cx="6423803" cy="748008"/>
+          </a:xfrm>
+          <a:prstGeom prst="rect">
+            <a:avLst/>
+          </a:prstGeom>
+          <a:noFill/>
+        </p:spPr>
+        <p:txBody>
+          <a:bodyPr wrap="none" lIns="0" rIns="0" tIns="0" bIns="0" anchor="t">
             <a:spAutoFit/>
           </a:bodyPr>
           <a:lstStyle/>
@@ -13640,7 +14152,23 @@
                 </a:solidFill>
                 <a:latin typeface="Playfair Display"/>
               </a:rPr>
-              <a:t>Questa è la mappa della tua personalità conscia.</a:t>
+              <a:t>Questa è la mappa della tua personalità</a:t>
+            </a:r>
+          </a:p>
+          <a:p>
+            <a:pPr algn="l">
+              <a:lnSpc>
+                <a:spcPct val="120000"/>
+              </a:lnSpc>
+            </a:pPr>
+            <a:r>
+              <a:rPr sz="2200" b="1" i="1">
+                <a:solidFill>
+                  <a:srgbClr val="7A4F5E"/>
+                </a:solidFill>
+                <a:latin typeface="Playfair Display"/>
+              </a:rPr>
+              <a:t>conscia.</a:t>
             </a:r>
           </a:p>
         </p:txBody>
@@ -13654,7 +14182,7 @@
         <p:spPr>
           <a:xfrm>
             <a:off x="8648678" y="6064235"/>
-            <a:ext cx="1921045" cy="196850"/>
+            <a:ext cx="2132230" cy="196850"/>
           </a:xfrm>
           <a:prstGeom prst="rect">
             <a:avLst/>
@@ -13693,7 +14221,7 @@
         <p:spPr>
           <a:xfrm>
             <a:off x="596899" y="6407134"/>
-            <a:ext cx="262953" cy="184150"/>
+            <a:ext cx="281681" cy="184150"/>
           </a:xfrm>
           <a:prstGeom prst="rect">
             <a:avLst/>
@@ -13732,7 +14260,7 @@
         <p:spPr>
           <a:xfrm>
             <a:off x="9960545" y="6388084"/>
-            <a:ext cx="1477102" cy="184150"/>
+            <a:ext cx="1636758" cy="184150"/>
           </a:xfrm>
           <a:prstGeom prst="rect">
             <a:avLst/>
@@ -13893,7 +14421,7 @@
         <p:spPr>
           <a:xfrm>
             <a:off x="596899" y="425449"/>
-            <a:ext cx="3611919" cy="215899"/>
+            <a:ext cx="4019366" cy="215899"/>
           </a:xfrm>
           <a:prstGeom prst="rect">
             <a:avLst/>
@@ -13932,7 +14460,7 @@
         <p:spPr>
           <a:xfrm>
             <a:off x="596899" y="622298"/>
-            <a:ext cx="2145350" cy="577849"/>
+            <a:ext cx="2195606" cy="577849"/>
           </a:xfrm>
           <a:prstGeom prst="rect">
             <a:avLst/>
@@ -13971,7 +14499,7 @@
         <p:spPr>
           <a:xfrm>
             <a:off x="2437203" y="622298"/>
-            <a:ext cx="363423" cy="577849"/>
+            <a:ext cx="369862" cy="577849"/>
           </a:xfrm>
           <a:prstGeom prst="rect">
             <a:avLst/>
@@ -14009,8 +14537,8 @@
         </p:nvSpPr>
         <p:spPr>
           <a:xfrm>
-            <a:off x="9216669" y="425449"/>
-            <a:ext cx="2353002" cy="298449"/>
+            <a:off x="8981879" y="425449"/>
+            <a:ext cx="2587792" cy="298449"/>
           </a:xfrm>
           <a:prstGeom prst="rect">
             <a:avLst/>
@@ -14051,7 +14579,7 @@
         <p:spPr>
           <a:xfrm>
             <a:off x="965198" y="2385114"/>
-            <a:ext cx="3357110" cy="260349"/>
+            <a:ext cx="3734981" cy="260349"/>
           </a:xfrm>
           <a:prstGeom prst="rect">
             <a:avLst/>
@@ -14090,7 +14618,7 @@
         <p:spPr>
           <a:xfrm>
             <a:off x="596899" y="2372414"/>
-            <a:ext cx="457199" cy="228599"/>
+            <a:ext cx="498474" cy="228599"/>
           </a:xfrm>
           <a:prstGeom prst="rect">
             <a:avLst/>
@@ -14125,15 +14653,15 @@
         <p:spPr>
           <a:xfrm>
             <a:off x="965198" y="2769883"/>
-            <a:ext cx="4084088" cy="518119"/>
-          </a:xfrm>
-          <a:prstGeom prst="rect">
-            <a:avLst/>
-          </a:prstGeom>
-          <a:noFill/>
-        </p:spPr>
-        <p:txBody>
-          <a:bodyPr wrap="square" lIns="0" rIns="0" tIns="0" bIns="0" anchor="t">
+            <a:ext cx="4546341" cy="518119"/>
+          </a:xfrm>
+          <a:prstGeom prst="rect">
+            <a:avLst/>
+          </a:prstGeom>
+          <a:noFill/>
+        </p:spPr>
+        <p:txBody>
+          <a:bodyPr wrap="none" lIns="0" rIns="0" tIns="0" bIns="0" anchor="t">
             <a:spAutoFit/>
           </a:bodyPr>
           <a:lstStyle/>
@@ -14168,7 +14696,23 @@
                 </a:solidFill>
                 <a:latin typeface="Outfit"/>
               </a:rPr>
-              <a:t>sono definite e colorale.</a:t>
+              <a:t>sono</a:t>
+            </a:r>
+          </a:p>
+          <a:p>
+            <a:pPr algn="l">
+              <a:lnSpc>
+                <a:spcPct val="145000"/>
+              </a:lnSpc>
+            </a:pPr>
+            <a:r>
+              <a:rPr sz="1400" b="0" i="0">
+                <a:solidFill>
+                  <a:srgbClr val="3A3532"/>
+                </a:solidFill>
+                <a:latin typeface="Outfit"/>
+              </a:rPr>
+              <a:t>definite e colorale.</a:t>
             </a:r>
           </a:p>
         </p:txBody>
@@ -14182,7 +14726,7 @@
         <p:spPr>
           <a:xfrm>
             <a:off x="596899" y="2757183"/>
-            <a:ext cx="457199" cy="228599"/>
+            <a:ext cx="498474" cy="228599"/>
           </a:xfrm>
           <a:prstGeom prst="rect">
             <a:avLst/>
@@ -14217,7 +14761,7 @@
         <p:spPr>
           <a:xfrm>
             <a:off x="965198" y="3412422"/>
-            <a:ext cx="2328539" cy="260349"/>
+            <a:ext cx="2587023" cy="260349"/>
           </a:xfrm>
           <a:prstGeom prst="rect">
             <a:avLst/>
@@ -14256,7 +14800,7 @@
         <p:spPr>
           <a:xfrm>
             <a:off x="596899" y="3399722"/>
-            <a:ext cx="457199" cy="228599"/>
+            <a:ext cx="498474" cy="228599"/>
           </a:xfrm>
           <a:prstGeom prst="rect">
             <a:avLst/>
@@ -14291,15 +14835,15 @@
         <p:spPr>
           <a:xfrm>
             <a:off x="965198" y="3797191"/>
-            <a:ext cx="3902954" cy="518119"/>
-          </a:xfrm>
-          <a:prstGeom prst="rect">
-            <a:avLst/>
-          </a:prstGeom>
-          <a:noFill/>
-        </p:spPr>
-        <p:txBody>
-          <a:bodyPr wrap="square" lIns="0" rIns="0" tIns="0" bIns="0" anchor="t">
+            <a:ext cx="4344183" cy="518119"/>
+          </a:xfrm>
+          <a:prstGeom prst="rect">
+            <a:avLst/>
+          </a:prstGeom>
+          <a:noFill/>
+        </p:spPr>
+        <p:txBody>
+          <a:bodyPr wrap="none" lIns="0" rIns="0" tIns="0" bIns="0" anchor="t">
             <a:spAutoFit/>
           </a:bodyPr>
           <a:lstStyle/>
@@ -14316,7 +14860,23 @@
                 </a:solidFill>
                 <a:latin typeface="Outfit"/>
               </a:rPr>
-              <a:t>Colora gli eventuali centri che si definiscono attraverso i canali.</a:t>
+              <a:t>Colora gli eventuali centri che si definiscono</a:t>
+            </a:r>
+          </a:p>
+          <a:p>
+            <a:pPr algn="l">
+              <a:lnSpc>
+                <a:spcPct val="145000"/>
+              </a:lnSpc>
+            </a:pPr>
+            <a:r>
+              <a:rPr sz="1400" b="0" i="0">
+                <a:solidFill>
+                  <a:srgbClr val="3A3532"/>
+                </a:solidFill>
+                <a:latin typeface="Outfit"/>
+              </a:rPr>
+              <a:t>attraverso i canali.</a:t>
             </a:r>
           </a:p>
         </p:txBody>
@@ -14330,7 +14890,7 @@
         <p:spPr>
           <a:xfrm>
             <a:off x="596899" y="3784491"/>
-            <a:ext cx="457199" cy="228599"/>
+            <a:ext cx="498474" cy="228599"/>
           </a:xfrm>
           <a:prstGeom prst="rect">
             <a:avLst/>
@@ -14365,15 +14925,15 @@
         <p:spPr>
           <a:xfrm>
             <a:off x="596899" y="4528630"/>
-            <a:ext cx="6418899" cy="748008"/>
-          </a:xfrm>
-          <a:prstGeom prst="rect">
-            <a:avLst/>
-          </a:prstGeom>
-          <a:noFill/>
-        </p:spPr>
-        <p:txBody>
-          <a:bodyPr wrap="square" lIns="0" rIns="0" tIns="0" bIns="0" anchor="t">
+            <a:ext cx="6574243" cy="748008"/>
+          </a:xfrm>
+          <a:prstGeom prst="rect">
+            <a:avLst/>
+          </a:prstGeom>
+          <a:noFill/>
+        </p:spPr>
+        <p:txBody>
+          <a:bodyPr wrap="none" lIns="0" rIns="0" tIns="0" bIns="0" anchor="t">
             <a:spAutoFit/>
           </a:bodyPr>
           <a:lstStyle/>
@@ -14390,7 +14950,23 @@
                 </a:solidFill>
                 <a:latin typeface="Playfair Display"/>
               </a:rPr>
-              <a:t>Questo è ciò che non è la tua natura, ed è dove vieni condizionato dagli altri.</a:t>
+              <a:t>Questo è ciò che non è la tua natura, ed è</a:t>
+            </a:r>
+          </a:p>
+          <a:p>
+            <a:pPr algn="l">
+              <a:lnSpc>
+                <a:spcPct val="120000"/>
+              </a:lnSpc>
+            </a:pPr>
+            <a:r>
+              <a:rPr sz="2200" b="1" i="1">
+                <a:solidFill>
+                  <a:srgbClr val="7A4F5E"/>
+                </a:solidFill>
+                <a:latin typeface="Playfair Display"/>
+              </a:rPr>
+              <a:t>dove vieni condizionato dagli altri.</a:t>
             </a:r>
           </a:p>
         </p:txBody>
@@ -14404,7 +14980,7 @@
         <p:spPr>
           <a:xfrm>
             <a:off x="8648678" y="6064235"/>
-            <a:ext cx="2740923" cy="196850"/>
+            <a:ext cx="3047273" cy="196850"/>
           </a:xfrm>
           <a:prstGeom prst="rect">
             <a:avLst/>
@@ -14443,7 +15019,7 @@
         <p:spPr>
           <a:xfrm>
             <a:off x="596899" y="6407134"/>
-            <a:ext cx="256063" cy="184150"/>
+            <a:ext cx="273992" cy="184150"/>
           </a:xfrm>
           <a:prstGeom prst="rect">
             <a:avLst/>
@@ -14482,7 +15058,7 @@
         <p:spPr>
           <a:xfrm>
             <a:off x="9960545" y="6388084"/>
-            <a:ext cx="1477102" cy="184150"/>
+            <a:ext cx="1636758" cy="184150"/>
           </a:xfrm>
           <a:prstGeom prst="rect">
             <a:avLst/>
@@ -14638,7 +15214,7 @@
         <p:spPr>
           <a:xfrm>
             <a:off x="596899" y="2058982"/>
-            <a:ext cx="4641267" cy="215899"/>
+            <a:ext cx="5168193" cy="215899"/>
           </a:xfrm>
           <a:prstGeom prst="rect">
             <a:avLst/>
@@ -14677,15 +15253,15 @@
         <p:spPr>
           <a:xfrm>
             <a:off x="596899" y="2344732"/>
-            <a:ext cx="7959701" cy="1497009"/>
-          </a:xfrm>
-          <a:prstGeom prst="rect">
-            <a:avLst/>
-          </a:prstGeom>
-          <a:noFill/>
-        </p:spPr>
-        <p:txBody>
-          <a:bodyPr wrap="square" lIns="0" rIns="0" tIns="0" bIns="0" anchor="t">
+            <a:ext cx="8152933" cy="1497009"/>
+          </a:xfrm>
+          <a:prstGeom prst="rect">
+            <a:avLst/>
+          </a:prstGeom>
+          <a:noFill/>
+        </p:spPr>
+        <p:txBody>
+          <a:bodyPr wrap="none" lIns="0" rIns="0" tIns="0" bIns="0" anchor="t">
             <a:spAutoFit/>
           </a:bodyPr>
           <a:lstStyle/>
@@ -14732,7 +15308,7 @@
         <p:spPr>
           <a:xfrm>
             <a:off x="596899" y="3992553"/>
-            <a:ext cx="4953861" cy="279399"/>
+            <a:ext cx="5517070" cy="279399"/>
           </a:xfrm>
           <a:prstGeom prst="rect">
             <a:avLst/>
@@ -14771,7 +15347,7 @@
         <p:spPr>
           <a:xfrm>
             <a:off x="596899" y="6407134"/>
-            <a:ext cx="258174" cy="184150"/>
+            <a:ext cx="276348" cy="184150"/>
           </a:xfrm>
           <a:prstGeom prst="rect">
             <a:avLst/>
@@ -14810,7 +15386,7 @@
         <p:spPr>
           <a:xfrm>
             <a:off x="9960545" y="6388084"/>
-            <a:ext cx="1477102" cy="184150"/>
+            <a:ext cx="1636758" cy="184150"/>
           </a:xfrm>
           <a:prstGeom prst="rect">
             <a:avLst/>
@@ -15095,7 +15671,7 @@
         <p:spPr>
           <a:xfrm>
             <a:off x="596899" y="425449"/>
-            <a:ext cx="2646356" cy="215899"/>
+            <a:ext cx="2941729" cy="215899"/>
           </a:xfrm>
           <a:prstGeom prst="rect">
             <a:avLst/>
@@ -15134,7 +15710,7 @@
         <p:spPr>
           <a:xfrm>
             <a:off x="596899" y="647698"/>
-            <a:ext cx="5587309" cy="577849"/>
+            <a:ext cx="5722204" cy="577849"/>
           </a:xfrm>
           <a:prstGeom prst="rect">
             <a:avLst/>
@@ -15173,15 +15749,15 @@
         <p:spPr>
           <a:xfrm>
             <a:off x="596899" y="2097975"/>
-            <a:ext cx="2830045" cy="709809"/>
-          </a:xfrm>
-          <a:prstGeom prst="rect">
-            <a:avLst/>
-          </a:prstGeom>
-          <a:noFill/>
-        </p:spPr>
-        <p:txBody>
-          <a:bodyPr wrap="square" lIns="0" rIns="0" tIns="0" bIns="0" anchor="t">
+            <a:ext cx="3146740" cy="709809"/>
+          </a:xfrm>
+          <a:prstGeom prst="rect">
+            <a:avLst/>
+          </a:prstGeom>
+          <a:noFill/>
+        </p:spPr>
+        <p:txBody>
+          <a:bodyPr wrap="none" lIns="0" rIns="0" tIns="0" bIns="0" anchor="t">
             <a:spAutoFit/>
           </a:bodyPr>
           <a:lstStyle/>
@@ -15198,7 +15774,39 @@
                 </a:solidFill>
                 <a:latin typeface="Outfit"/>
               </a:rPr>
-              <a:t>Vai sulla pagina del corso e scegli: un semestre, oppure il percorso completo.</a:t>
+              <a:t>Vai sulla pagina del corso e scegli:</a:t>
+            </a:r>
+          </a:p>
+          <a:p>
+            <a:pPr algn="l">
+              <a:lnSpc>
+                <a:spcPct val="140000"/>
+              </a:lnSpc>
+            </a:pPr>
+            <a:r>
+              <a:rPr sz="1300" b="0" i="0">
+                <a:solidFill>
+                  <a:srgbClr val="3A3532"/>
+                </a:solidFill>
+                <a:latin typeface="Outfit"/>
+              </a:rPr>
+              <a:t>un semestre, oppure il percorso</a:t>
+            </a:r>
+          </a:p>
+          <a:p>
+            <a:pPr algn="l">
+              <a:lnSpc>
+                <a:spcPct val="140000"/>
+              </a:lnSpc>
+            </a:pPr>
+            <a:r>
+              <a:rPr sz="1300" b="0" i="0">
+                <a:solidFill>
+                  <a:srgbClr val="3A3532"/>
+                </a:solidFill>
+                <a:latin typeface="Outfit"/>
+              </a:rPr>
+              <a:t>completo.</a:t>
             </a:r>
           </a:p>
         </p:txBody>
@@ -15212,7 +15820,7 @@
         <p:spPr>
           <a:xfrm>
             <a:off x="596899" y="1640776"/>
-            <a:ext cx="1031237" cy="393699"/>
+            <a:ext cx="1054097" cy="393699"/>
           </a:xfrm>
           <a:prstGeom prst="rect">
             <a:avLst/>
@@ -15247,15 +15855,15 @@
         <p:spPr>
           <a:xfrm>
             <a:off x="3403591" y="2097975"/>
-            <a:ext cx="2884607" cy="709809"/>
-          </a:xfrm>
-          <a:prstGeom prst="rect">
-            <a:avLst/>
-          </a:prstGeom>
-          <a:noFill/>
-        </p:spPr>
-        <p:txBody>
-          <a:bodyPr wrap="square" lIns="0" rIns="0" tIns="0" bIns="0" anchor="t">
+            <a:ext cx="3207635" cy="709809"/>
+          </a:xfrm>
+          <a:prstGeom prst="rect">
+            <a:avLst/>
+          </a:prstGeom>
+          <a:noFill/>
+        </p:spPr>
+        <p:txBody>
+          <a:bodyPr wrap="none" lIns="0" rIns="0" tIns="0" bIns="0" anchor="t">
             <a:spAutoFit/>
           </a:bodyPr>
           <a:lstStyle/>
@@ -15272,7 +15880,39 @@
                 </a:solidFill>
                 <a:latin typeface="Outfit"/>
               </a:rPr>
-              <a:t>Paghi con la carta, in modo sicuro: il pagamento passa da Stripe, noi non vediamo i tuoi dati.</a:t>
+              <a:t>Paghi con la carta, in modo sicuro:</a:t>
+            </a:r>
+          </a:p>
+          <a:p>
+            <a:pPr algn="l">
+              <a:lnSpc>
+                <a:spcPct val="140000"/>
+              </a:lnSpc>
+            </a:pPr>
+            <a:r>
+              <a:rPr sz="1300" b="0" i="0">
+                <a:solidFill>
+                  <a:srgbClr val="3A3532"/>
+                </a:solidFill>
+                <a:latin typeface="Outfit"/>
+              </a:rPr>
+              <a:t>il pagamento passa da Stripe, noi</a:t>
+            </a:r>
+          </a:p>
+          <a:p>
+            <a:pPr algn="l">
+              <a:lnSpc>
+                <a:spcPct val="140000"/>
+              </a:lnSpc>
+            </a:pPr>
+            <a:r>
+              <a:rPr sz="1300" b="0" i="0">
+                <a:solidFill>
+                  <a:srgbClr val="3A3532"/>
+                </a:solidFill>
+                <a:latin typeface="Outfit"/>
+              </a:rPr>
+              <a:t>non vediamo i tuoi dati.</a:t>
             </a:r>
           </a:p>
         </p:txBody>
@@ -15286,7 +15926,7 @@
         <p:spPr>
           <a:xfrm>
             <a:off x="3403591" y="1640776"/>
-            <a:ext cx="1031237" cy="393699"/>
+            <a:ext cx="1054097" cy="393699"/>
           </a:xfrm>
           <a:prstGeom prst="rect">
             <a:avLst/>
@@ -15321,15 +15961,15 @@
         <p:spPr>
           <a:xfrm>
             <a:off x="6210284" y="2097975"/>
-            <a:ext cx="2942281" cy="709809"/>
-          </a:xfrm>
-          <a:prstGeom prst="rect">
-            <a:avLst/>
-          </a:prstGeom>
-          <a:noFill/>
-        </p:spPr>
-        <p:txBody>
-          <a:bodyPr wrap="square" lIns="0" rIns="0" tIns="0" bIns="0" anchor="t">
+            <a:ext cx="3272003" cy="709809"/>
+          </a:xfrm>
+          <a:prstGeom prst="rect">
+            <a:avLst/>
+          </a:prstGeom>
+          <a:noFill/>
+        </p:spPr>
+        <p:txBody>
+          <a:bodyPr wrap="none" lIns="0" rIns="0" tIns="0" bIns="0" anchor="t">
             <a:spAutoFit/>
           </a:bodyPr>
           <a:lstStyle/>
@@ -15346,7 +15986,39 @@
                 </a:solidFill>
                 <a:latin typeface="Outfit"/>
               </a:rPr>
-              <a:t>Ricevi subito una mail con il link per attivare il tuo accesso e scegliere la password.</a:t>
+              <a:t>Ricevi subito una mail con il link per</a:t>
+            </a:r>
+          </a:p>
+          <a:p>
+            <a:pPr algn="l">
+              <a:lnSpc>
+                <a:spcPct val="140000"/>
+              </a:lnSpc>
+            </a:pPr>
+            <a:r>
+              <a:rPr sz="1300" b="0" i="0">
+                <a:solidFill>
+                  <a:srgbClr val="3A3532"/>
+                </a:solidFill>
+                <a:latin typeface="Outfit"/>
+              </a:rPr>
+              <a:t>attivare il tuo accesso e scegliere la</a:t>
+            </a:r>
+          </a:p>
+          <a:p>
+            <a:pPr algn="l">
+              <a:lnSpc>
+                <a:spcPct val="140000"/>
+              </a:lnSpc>
+            </a:pPr>
+            <a:r>
+              <a:rPr sz="1300" b="0" i="0">
+                <a:solidFill>
+                  <a:srgbClr val="3A3532"/>
+                </a:solidFill>
+                <a:latin typeface="Outfit"/>
+              </a:rPr>
+              <a:t>password.</a:t>
             </a:r>
           </a:p>
         </p:txBody>
@@ -15360,7 +16032,7 @@
         <p:spPr>
           <a:xfrm>
             <a:off x="6210284" y="1640776"/>
-            <a:ext cx="1031237" cy="393699"/>
+            <a:ext cx="1054097" cy="393699"/>
           </a:xfrm>
           <a:prstGeom prst="rect">
             <a:avLst/>
@@ -15395,15 +16067,15 @@
         <p:spPr>
           <a:xfrm>
             <a:off x="9016977" y="2097975"/>
-            <a:ext cx="2689806" cy="709809"/>
-          </a:xfrm>
-          <a:prstGeom prst="rect">
-            <a:avLst/>
-          </a:prstGeom>
-          <a:noFill/>
-        </p:spPr>
-        <p:txBody>
-          <a:bodyPr wrap="square" lIns="0" rIns="0" tIns="0" bIns="0" anchor="t">
+            <a:ext cx="2990222" cy="709809"/>
+          </a:xfrm>
+          <a:prstGeom prst="rect">
+            <a:avLst/>
+          </a:prstGeom>
+          <a:noFill/>
+        </p:spPr>
+        <p:txBody>
+          <a:bodyPr wrap="none" lIns="0" rIns="0" tIns="0" bIns="0" anchor="t">
             <a:spAutoFit/>
           </a:bodyPr>
           <a:lstStyle/>
@@ -15420,7 +16092,39 @@
                 </a:solidFill>
                 <a:latin typeface="Outfit"/>
               </a:rPr>
-              <a:t>Sei dentro: lezioni, registrazioni, materiali e forum nella tua area riservata.</a:t>
+              <a:t>Sei dentro: lezioni, registrazioni,</a:t>
+            </a:r>
+          </a:p>
+          <a:p>
+            <a:pPr algn="l">
+              <a:lnSpc>
+                <a:spcPct val="140000"/>
+              </a:lnSpc>
+            </a:pPr>
+            <a:r>
+              <a:rPr sz="1300" b="0" i="0">
+                <a:solidFill>
+                  <a:srgbClr val="3A3532"/>
+                </a:solidFill>
+                <a:latin typeface="Outfit"/>
+              </a:rPr>
+              <a:t>materiali e forum nella tua area</a:t>
+            </a:r>
+          </a:p>
+          <a:p>
+            <a:pPr algn="l">
+              <a:lnSpc>
+                <a:spcPct val="140000"/>
+              </a:lnSpc>
+            </a:pPr>
+            <a:r>
+              <a:rPr sz="1300" b="0" i="0">
+                <a:solidFill>
+                  <a:srgbClr val="3A3532"/>
+                </a:solidFill>
+                <a:latin typeface="Outfit"/>
+              </a:rPr>
+              <a:t>riservata.</a:t>
             </a:r>
           </a:p>
         </p:txBody>
@@ -15434,7 +16138,7 @@
         <p:spPr>
           <a:xfrm>
             <a:off x="9016977" y="1640776"/>
-            <a:ext cx="1031237" cy="393699"/>
+            <a:ext cx="1054097" cy="393699"/>
           </a:xfrm>
           <a:prstGeom prst="rect">
             <a:avLst/>
@@ -15469,7 +16173,7 @@
         <p:spPr>
           <a:xfrm>
             <a:off x="596899" y="6037644"/>
-            <a:ext cx="1775027" cy="228599"/>
+            <a:ext cx="1969264" cy="228599"/>
           </a:xfrm>
           <a:prstGeom prst="rect">
             <a:avLst/>
@@ -15508,7 +16212,7 @@
         <p:spPr>
           <a:xfrm>
             <a:off x="596899" y="5542346"/>
-            <a:ext cx="1318118" cy="546099"/>
+            <a:ext cx="1348032" cy="546099"/>
           </a:xfrm>
           <a:prstGeom prst="rect">
             <a:avLst/>
@@ -15547,7 +16251,7 @@
         <p:spPr>
           <a:xfrm>
             <a:off x="2599029" y="6037644"/>
-            <a:ext cx="2419217" cy="228599"/>
+            <a:ext cx="2688226" cy="228599"/>
           </a:xfrm>
           <a:prstGeom prst="rect">
             <a:avLst/>
@@ -15586,7 +16290,7 @@
         <p:spPr>
           <a:xfrm>
             <a:off x="2599029" y="5542346"/>
-            <a:ext cx="1653175" cy="546099"/>
+            <a:ext cx="1691328" cy="546099"/>
           </a:xfrm>
           <a:prstGeom prst="rect">
             <a:avLst/>
@@ -15625,7 +16329,7 @@
         <p:spPr>
           <a:xfrm>
             <a:off x="7769007" y="6045185"/>
-            <a:ext cx="4358343" cy="247649"/>
+            <a:ext cx="4852430" cy="247649"/>
           </a:xfrm>
           <a:prstGeom prst="rect">
             <a:avLst/>
@@ -15664,7 +16368,7 @@
         <p:spPr>
           <a:xfrm>
             <a:off x="596899" y="6407134"/>
-            <a:ext cx="250285" cy="184150"/>
+            <a:ext cx="267543" cy="184150"/>
           </a:xfrm>
           <a:prstGeom prst="rect">
             <a:avLst/>
@@ -15703,7 +16407,7 @@
         <p:spPr>
           <a:xfrm>
             <a:off x="9960545" y="6388084"/>
-            <a:ext cx="1477102" cy="184150"/>
+            <a:ext cx="1636758" cy="184150"/>
           </a:xfrm>
           <a:prstGeom prst="rect">
             <a:avLst/>
@@ -15864,7 +16568,7 @@
         <p:spPr>
           <a:xfrm>
             <a:off x="596899" y="425449"/>
-            <a:ext cx="2646356" cy="215899"/>
+            <a:ext cx="2941729" cy="215899"/>
           </a:xfrm>
           <a:prstGeom prst="rect">
             <a:avLst/>
@@ -15903,7 +16607,7 @@
         <p:spPr>
           <a:xfrm>
             <a:off x="596899" y="647698"/>
-            <a:ext cx="6897154" cy="577849"/>
+            <a:ext cx="7064258" cy="577849"/>
           </a:xfrm>
           <a:prstGeom prst="rect">
             <a:avLst/>
@@ -15942,15 +16646,15 @@
         <p:spPr>
           <a:xfrm>
             <a:off x="596899" y="5110051"/>
-            <a:ext cx="5670837" cy="434279"/>
-          </a:xfrm>
-          <a:prstGeom prst="rect">
-            <a:avLst/>
-          </a:prstGeom>
-          <a:noFill/>
-        </p:spPr>
-        <p:txBody>
-          <a:bodyPr wrap="square" lIns="0" rIns="0" tIns="0" bIns="0" anchor="t">
+            <a:ext cx="6317267" cy="434279"/>
+          </a:xfrm>
+          <a:prstGeom prst="rect">
+            <a:avLst/>
+          </a:prstGeom>
+          <a:noFill/>
+        </p:spPr>
+        <p:txBody>
+          <a:bodyPr wrap="none" lIns="0" rIns="0" tIns="0" bIns="0" anchor="t">
             <a:spAutoFit/>
           </a:bodyPr>
           <a:lstStyle/>
@@ -15967,7 +16671,23 @@
                 </a:solidFill>
                 <a:latin typeface="Outfit"/>
               </a:rPr>
-              <a:t>La tua classe: le lezioni in ordine, ognuna con la registrazione da rivedere e scaricare, e i materiali.</a:t>
+              <a:t>La tua classe: le lezioni in ordine, ognuna con la registrazione da rivedere e</a:t>
+            </a:r>
+          </a:p>
+          <a:p>
+            <a:pPr algn="l">
+              <a:lnSpc>
+                <a:spcPct val="135000"/>
+              </a:lnSpc>
+            </a:pPr>
+            <a:r>
+              <a:rPr sz="1200" b="0" i="0">
+                <a:solidFill>
+                  <a:srgbClr val="3A3532"/>
+                </a:solidFill>
+                <a:latin typeface="Outfit"/>
+              </a:rPr>
+              <a:t>scaricare, e i materiali.</a:t>
             </a:r>
           </a:p>
         </p:txBody>
@@ -15981,7 +16701,7 @@
         <p:spPr>
           <a:xfrm>
             <a:off x="6210284" y="5110051"/>
-            <a:ext cx="5006534" cy="228599"/>
+            <a:ext cx="5575857" cy="228599"/>
           </a:xfrm>
           <a:prstGeom prst="rect">
             <a:avLst/>
@@ -16020,7 +16740,7 @@
         <p:spPr>
           <a:xfrm>
             <a:off x="596899" y="6028715"/>
-            <a:ext cx="5841525" cy="228599"/>
+            <a:ext cx="6507766" cy="228599"/>
           </a:xfrm>
           <a:prstGeom prst="rect">
             <a:avLst/>
@@ -16059,7 +16779,7 @@
         <p:spPr>
           <a:xfrm>
             <a:off x="596899" y="6407134"/>
-            <a:ext cx="256396" cy="184150"/>
+            <a:ext cx="274364" cy="184150"/>
           </a:xfrm>
           <a:prstGeom prst="rect">
             <a:avLst/>
@@ -16098,7 +16818,7 @@
         <p:spPr>
           <a:xfrm>
             <a:off x="9960545" y="6388084"/>
-            <a:ext cx="1477102" cy="184150"/>
+            <a:ext cx="1636758" cy="184150"/>
           </a:xfrm>
           <a:prstGeom prst="rect">
             <a:avLst/>
@@ -16210,8 +16930,8 @@
         </p:nvSpPr>
         <p:spPr>
           <a:xfrm>
-            <a:off x="5182418" y="2736843"/>
-            <a:ext cx="1827033" cy="215899"/>
+            <a:off x="5082282" y="2736843"/>
+            <a:ext cx="2027307" cy="215899"/>
           </a:xfrm>
           <a:prstGeom prst="rect">
             <a:avLst/>
@@ -16249,8 +16969,8 @@
         </p:nvSpPr>
         <p:spPr>
           <a:xfrm>
-            <a:off x="1864973" y="2997193"/>
-            <a:ext cx="8461923" cy="1054097"/>
+            <a:off x="1762183" y="2997193"/>
+            <a:ext cx="8667505" cy="1054097"/>
           </a:xfrm>
           <a:prstGeom prst="rect">
             <a:avLst/>
@@ -16289,7 +17009,7 @@
         <p:spPr>
           <a:xfrm>
             <a:off x="596899" y="6407134"/>
-            <a:ext cx="258174" cy="184150"/>
+            <a:ext cx="276348" cy="184150"/>
           </a:xfrm>
           <a:prstGeom prst="rect">
             <a:avLst/>
@@ -16328,7 +17048,7 @@
         <p:spPr>
           <a:xfrm>
             <a:off x="9960545" y="6388084"/>
-            <a:ext cx="1477102" cy="184150"/>
+            <a:ext cx="1636758" cy="184150"/>
           </a:xfrm>
           <a:prstGeom prst="rect">
             <a:avLst/>
@@ -16465,7 +17185,7 @@
         <p:spPr>
           <a:xfrm>
             <a:off x="596899" y="1264540"/>
-            <a:ext cx="1917711" cy="215899"/>
+            <a:ext cx="2128510" cy="215899"/>
           </a:xfrm>
           <a:prstGeom prst="rect">
             <a:avLst/>
@@ -16504,7 +17224,7 @@
         <p:spPr>
           <a:xfrm>
             <a:off x="596899" y="1474089"/>
-            <a:ext cx="4781139" cy="749298"/>
+            <a:ext cx="4896210" cy="749298"/>
           </a:xfrm>
           <a:prstGeom prst="rect">
             <a:avLst/>
@@ -16543,15 +17263,15 @@
         <p:spPr>
           <a:xfrm>
             <a:off x="596899" y="2219518"/>
-            <a:ext cx="4049194" cy="478729"/>
-          </a:xfrm>
-          <a:prstGeom prst="rect">
-            <a:avLst/>
-          </a:prstGeom>
-          <a:noFill/>
-        </p:spPr>
-        <p:txBody>
-          <a:bodyPr wrap="square" lIns="0" rIns="0" tIns="0" bIns="0" anchor="t">
+            <a:ext cx="4507397" cy="478729"/>
+          </a:xfrm>
+          <a:prstGeom prst="rect">
+            <a:avLst/>
+          </a:prstGeom>
+          <a:noFill/>
+        </p:spPr>
+        <p:txBody>
+          <a:bodyPr wrap="none" lIns="0" rIns="0" tIns="0" bIns="0" anchor="t">
             <a:spAutoFit/>
           </a:bodyPr>
           <a:lstStyle/>
@@ -16598,15 +17318,15 @@
         <p:spPr>
           <a:xfrm>
             <a:off x="596899" y="2916627"/>
-            <a:ext cx="5915979" cy="775889"/>
-          </a:xfrm>
-          <a:prstGeom prst="rect">
-            <a:avLst/>
-          </a:prstGeom>
-          <a:noFill/>
-        </p:spPr>
-        <p:txBody>
-          <a:bodyPr wrap="square" lIns="0" rIns="0" tIns="0" bIns="0" anchor="t">
+            <a:ext cx="6590862" cy="775889"/>
+          </a:xfrm>
+          <a:prstGeom prst="rect">
+            <a:avLst/>
+          </a:prstGeom>
+          <a:noFill/>
+        </p:spPr>
+        <p:txBody>
+          <a:bodyPr wrap="none" lIns="0" rIns="0" tIns="0" bIns="0" anchor="t">
             <a:spAutoFit/>
           </a:bodyPr>
           <a:lstStyle/>
@@ -16623,7 +17343,39 @@
                 </a:solidFill>
                 <a:latin typeface="Outfit"/>
               </a:rPr>
-              <a:t>Questo corso arriva da diversi inviti che mi sono arrivati attraverso la divulgazione dello Human Design e del BG5 sul mio canale YouTube.</a:t>
+              <a:t>Questo corso arriva da diversi inviti che mi sono arrivati attraverso</a:t>
+            </a:r>
+          </a:p>
+          <a:p>
+            <a:pPr algn="l">
+              <a:lnSpc>
+                <a:spcPct val="145000"/>
+              </a:lnSpc>
+            </a:pPr>
+            <a:r>
+              <a:rPr sz="1400" b="0" i="0">
+                <a:solidFill>
+                  <a:srgbClr val="3A3532"/>
+                </a:solidFill>
+                <a:latin typeface="Outfit"/>
+              </a:rPr>
+              <a:t>la divulgazione dello Human Design e del BG5 sul mio canale</a:t>
+            </a:r>
+          </a:p>
+          <a:p>
+            <a:pPr algn="l">
+              <a:lnSpc>
+                <a:spcPct val="145000"/>
+              </a:lnSpc>
+            </a:pPr>
+            <a:r>
+              <a:rPr sz="1400" b="0" i="0">
+                <a:solidFill>
+                  <a:srgbClr val="3A3532"/>
+                </a:solidFill>
+                <a:latin typeface="Outfit"/>
+              </a:rPr>
+              <a:t>YouTube.</a:t>
             </a:r>
           </a:p>
         </p:txBody>
@@ -16637,15 +17389,15 @@
         <p:spPr>
           <a:xfrm>
             <a:off x="596899" y="3816936"/>
-            <a:ext cx="5880530" cy="518119"/>
-          </a:xfrm>
-          <a:prstGeom prst="rect">
-            <a:avLst/>
-          </a:prstGeom>
-          <a:noFill/>
-        </p:spPr>
-        <p:txBody>
-          <a:bodyPr wrap="square" lIns="0" rIns="0" tIns="0" bIns="0" anchor="t">
+            <a:ext cx="6551298" cy="518119"/>
+          </a:xfrm>
+          <a:prstGeom prst="rect">
+            <a:avLst/>
+          </a:prstGeom>
+          <a:noFill/>
+        </p:spPr>
+        <p:txBody>
+          <a:bodyPr wrap="none" lIns="0" rIns="0" tIns="0" bIns="0" anchor="t">
             <a:spAutoFit/>
           </a:bodyPr>
           <a:lstStyle/>
@@ -16662,7 +17414,23 @@
                 </a:solidFill>
                 <a:latin typeface="Outfit"/>
               </a:rPr>
-              <a:t>Mi sento chiamata ad essere al servizio delle persone, ma fuori dal sistema.</a:t>
+              <a:t>Mi sento chiamata ad essere al servizio delle persone, ma fuori dal</a:t>
+            </a:r>
+          </a:p>
+          <a:p>
+            <a:pPr algn="l">
+              <a:lnSpc>
+                <a:spcPct val="145000"/>
+              </a:lnSpc>
+            </a:pPr>
+            <a:r>
+              <a:rPr sz="1400" b="0" i="0">
+                <a:solidFill>
+                  <a:srgbClr val="3A3532"/>
+                </a:solidFill>
+                <a:latin typeface="Outfit"/>
+              </a:rPr>
+              <a:t>sistema.</a:t>
             </a:r>
           </a:p>
         </p:txBody>
@@ -16676,15 +17444,15 @@
         <p:spPr>
           <a:xfrm>
             <a:off x="596899" y="4554725"/>
-            <a:ext cx="6369512" cy="891379"/>
-          </a:xfrm>
-          <a:prstGeom prst="rect">
-            <a:avLst/>
-          </a:prstGeom>
-          <a:noFill/>
-        </p:spPr>
-        <p:txBody>
-          <a:bodyPr wrap="square" lIns="0" rIns="0" tIns="0" bIns="0" anchor="t">
+            <a:ext cx="6523641" cy="891379"/>
+          </a:xfrm>
+          <a:prstGeom prst="rect">
+            <a:avLst/>
+          </a:prstGeom>
+          <a:noFill/>
+        </p:spPr>
+        <p:txBody>
+          <a:bodyPr wrap="none" lIns="0" rIns="0" tIns="0" bIns="0" anchor="t">
             <a:spAutoFit/>
           </a:bodyPr>
           <a:lstStyle/>
@@ -16701,7 +17469,39 @@
                 </a:solidFill>
                 <a:latin typeface="Playfair Display"/>
               </a:rPr>
-              <a:t>Il mio obiettivo, con questo corso, è fornire gli strumenti base per leggere in autonomia qualsiasi tipo di Disegno, partendo dal vostro.</a:t>
+              <a:t>Il mio obiettivo, con questo corso, è fornire gli</a:t>
+            </a:r>
+          </a:p>
+          <a:p>
+            <a:pPr algn="l">
+              <a:lnSpc>
+                <a:spcPct val="120000"/>
+              </a:lnSpc>
+            </a:pPr>
+            <a:r>
+              <a:rPr sz="1800" b="1" i="1">
+                <a:solidFill>
+                  <a:srgbClr val="7A4F5E"/>
+                </a:solidFill>
+                <a:latin typeface="Playfair Display"/>
+              </a:rPr>
+              <a:t>strumenti base per leggere in autonomia qualsiasi</a:t>
+            </a:r>
+          </a:p>
+          <a:p>
+            <a:pPr algn="l">
+              <a:lnSpc>
+                <a:spcPct val="120000"/>
+              </a:lnSpc>
+            </a:pPr>
+            <a:r>
+              <a:rPr sz="1800" b="1" i="1">
+                <a:solidFill>
+                  <a:srgbClr val="7A4F5E"/>
+                </a:solidFill>
+                <a:latin typeface="Playfair Display"/>
+              </a:rPr>
+              <a:t>tipo di Disegno, partendo dal vostro.</a:t>
             </a:r>
           </a:p>
         </p:txBody>
@@ -16715,7 +17515,7 @@
         <p:spPr>
           <a:xfrm>
             <a:off x="596899" y="6407134"/>
-            <a:ext cx="269954" cy="184150"/>
+            <a:ext cx="289495" cy="184150"/>
           </a:xfrm>
           <a:prstGeom prst="rect">
             <a:avLst/>
@@ -16754,7 +17554,7 @@
         <p:spPr>
           <a:xfrm>
             <a:off x="9960545" y="6388084"/>
-            <a:ext cx="1477102" cy="184150"/>
+            <a:ext cx="1636758" cy="184150"/>
           </a:xfrm>
           <a:prstGeom prst="rect">
             <a:avLst/>
@@ -16866,8 +17666,8 @@
         </p:nvSpPr>
         <p:spPr>
           <a:xfrm>
-            <a:off x="8735435" y="2286490"/>
-            <a:ext cx="2846936" cy="1054097"/>
+            <a:off x="8667927" y="2286490"/>
+            <a:ext cx="2914444" cy="1054097"/>
           </a:xfrm>
           <a:prstGeom prst="rect">
             <a:avLst/>
@@ -16905,8 +17705,8 @@
         </p:nvSpPr>
         <p:spPr>
           <a:xfrm>
-            <a:off x="7610065" y="3429488"/>
-            <a:ext cx="3972306" cy="419099"/>
+            <a:off x="7514884" y="3429488"/>
+            <a:ext cx="4067487" cy="419099"/>
           </a:xfrm>
           <a:prstGeom prst="rect">
             <a:avLst/>
@@ -16944,8 +17744,8 @@
         </p:nvSpPr>
         <p:spPr>
           <a:xfrm>
-            <a:off x="10188169" y="4079964"/>
-            <a:ext cx="1394203" cy="247649"/>
+            <a:off x="10038134" y="4079964"/>
+            <a:ext cx="1544237" cy="247649"/>
           </a:xfrm>
           <a:prstGeom prst="rect">
             <a:avLst/>
@@ -16984,7 +17784,7 @@
         <p:spPr>
           <a:xfrm>
             <a:off x="596899" y="6496034"/>
-            <a:ext cx="269954" cy="184150"/>
+            <a:ext cx="289495" cy="184150"/>
           </a:xfrm>
           <a:prstGeom prst="rect">
             <a:avLst/>
@@ -17023,7 +17823,7 @@
         <p:spPr>
           <a:xfrm>
             <a:off x="9960545" y="6388084"/>
-            <a:ext cx="1477102" cy="184150"/>
+            <a:ext cx="1636758" cy="184150"/>
           </a:xfrm>
           <a:prstGeom prst="rect">
             <a:avLst/>
@@ -17179,7 +17979,7 @@
         <p:spPr>
           <a:xfrm>
             <a:off x="596899" y="1934959"/>
-            <a:ext cx="2407327" cy="215899"/>
+            <a:ext cx="2674956" cy="215899"/>
           </a:xfrm>
           <a:prstGeom prst="rect">
             <a:avLst/>
@@ -17218,15 +18018,15 @@
         <p:spPr>
           <a:xfrm>
             <a:off x="596899" y="2252458"/>
-            <a:ext cx="7939607" cy="2216343"/>
-          </a:xfrm>
-          <a:prstGeom prst="rect">
-            <a:avLst/>
-          </a:prstGeom>
-          <a:noFill/>
-        </p:spPr>
-        <p:txBody>
-          <a:bodyPr wrap="square" lIns="0" rIns="0" tIns="0" bIns="0" anchor="t">
+            <a:ext cx="8132345" cy="2216343"/>
+          </a:xfrm>
+          <a:prstGeom prst="rect">
+            <a:avLst/>
+          </a:prstGeom>
+          <a:noFill/>
+        </p:spPr>
+        <p:txBody>
+          <a:bodyPr wrap="none" lIns="0" rIns="0" tIns="0" bIns="0" anchor="t">
             <a:spAutoFit/>
           </a:bodyPr>
           <a:lstStyle/>
@@ -17243,7 +18043,39 @@
                 </a:solidFill>
                 <a:latin typeface="Playfair Display"/>
               </a:rPr>
-              <a:t>Ascolta come se fosse la prima volta che senti queste informazioni.</a:t>
+              <a:t>Ascolta come se fosse la</a:t>
+            </a:r>
+          </a:p>
+          <a:p>
+            <a:pPr algn="l">
+              <a:lnSpc>
+                <a:spcPct val="112000"/>
+              </a:lnSpc>
+            </a:pPr>
+            <a:r>
+              <a:rPr sz="4800" b="1" i="1">
+                <a:solidFill>
+                  <a:srgbClr val="3A3532"/>
+                </a:solidFill>
+                <a:latin typeface="Playfair Display"/>
+              </a:rPr>
+              <a:t>prima volta che senti</a:t>
+            </a:r>
+          </a:p>
+          <a:p>
+            <a:pPr algn="l">
+              <a:lnSpc>
+                <a:spcPct val="112000"/>
+              </a:lnSpc>
+            </a:pPr>
+            <a:r>
+              <a:rPr sz="4800" b="1" i="1">
+                <a:solidFill>
+                  <a:srgbClr val="3A3532"/>
+                </a:solidFill>
+                <a:latin typeface="Playfair Display"/>
+              </a:rPr>
+              <a:t>queste informazioni.</a:t>
             </a:r>
           </a:p>
         </p:txBody>
@@ -17257,7 +18089,7 @@
         <p:spPr>
           <a:xfrm>
             <a:off x="596899" y="6407134"/>
-            <a:ext cx="277510" cy="184150"/>
+            <a:ext cx="297928" cy="184150"/>
           </a:xfrm>
           <a:prstGeom prst="rect">
             <a:avLst/>
@@ -17296,7 +18128,7 @@
         <p:spPr>
           <a:xfrm>
             <a:off x="9960545" y="6388084"/>
-            <a:ext cx="1477102" cy="184150"/>
+            <a:ext cx="1636758" cy="184150"/>
           </a:xfrm>
           <a:prstGeom prst="rect">
             <a:avLst/>
@@ -17734,7 +18566,7 @@
         <p:spPr>
           <a:xfrm>
             <a:off x="596899" y="425449"/>
-            <a:ext cx="1559889" cy="215899"/>
+            <a:ext cx="1729155" cy="215899"/>
           </a:xfrm>
           <a:prstGeom prst="rect">
             <a:avLst/>
@@ -17773,7 +18605,7 @@
         <p:spPr>
           <a:xfrm>
             <a:off x="596899" y="647698"/>
-            <a:ext cx="4843599" cy="577849"/>
+            <a:ext cx="4960206" cy="577849"/>
           </a:xfrm>
           <a:prstGeom prst="rect">
             <a:avLst/>
@@ -17812,7 +18644,7 @@
         <p:spPr>
           <a:xfrm>
             <a:off x="1054097" y="2045389"/>
-            <a:ext cx="3077298" cy="292099"/>
+            <a:ext cx="3422691" cy="292099"/>
           </a:xfrm>
           <a:prstGeom prst="rect">
             <a:avLst/>
@@ -17851,7 +18683,7 @@
         <p:spPr>
           <a:xfrm>
             <a:off x="596899" y="2083489"/>
-            <a:ext cx="457199" cy="203199"/>
+            <a:ext cx="498474" cy="203199"/>
           </a:xfrm>
           <a:prstGeom prst="rect">
             <a:avLst/>
@@ -17886,7 +18718,7 @@
         <p:spPr>
           <a:xfrm>
             <a:off x="1054097" y="2569858"/>
-            <a:ext cx="4844070" cy="292099"/>
+            <a:ext cx="5394535" cy="292099"/>
           </a:xfrm>
           <a:prstGeom prst="rect">
             <a:avLst/>
@@ -17925,7 +18757,7 @@
         <p:spPr>
           <a:xfrm>
             <a:off x="596899" y="2607958"/>
-            <a:ext cx="457199" cy="203199"/>
+            <a:ext cx="498474" cy="203199"/>
           </a:xfrm>
           <a:prstGeom prst="rect">
             <a:avLst/>
@@ -17960,7 +18792,7 @@
         <p:spPr>
           <a:xfrm>
             <a:off x="1054097" y="3094327"/>
-            <a:ext cx="3262320" cy="292099"/>
+            <a:ext cx="3629190" cy="292099"/>
           </a:xfrm>
           <a:prstGeom prst="rect">
             <a:avLst/>
@@ -17999,7 +18831,7 @@
         <p:spPr>
           <a:xfrm>
             <a:off x="596899" y="3132427"/>
-            <a:ext cx="457199" cy="203199"/>
+            <a:ext cx="498474" cy="203199"/>
           </a:xfrm>
           <a:prstGeom prst="rect">
             <a:avLst/>
@@ -18034,7 +18866,7 @@
         <p:spPr>
           <a:xfrm>
             <a:off x="1054097" y="3618796"/>
-            <a:ext cx="3645812" cy="292099"/>
+            <a:ext cx="4057193" cy="292099"/>
           </a:xfrm>
           <a:prstGeom prst="rect">
             <a:avLst/>
@@ -18073,7 +18905,7 @@
         <p:spPr>
           <a:xfrm>
             <a:off x="596899" y="3656896"/>
-            <a:ext cx="457199" cy="203199"/>
+            <a:ext cx="498474" cy="203199"/>
           </a:xfrm>
           <a:prstGeom prst="rect">
             <a:avLst/>
@@ -18108,7 +18940,7 @@
         <p:spPr>
           <a:xfrm>
             <a:off x="1054097" y="4143265"/>
-            <a:ext cx="2429885" cy="292099"/>
+            <a:ext cx="2700132" cy="292099"/>
           </a:xfrm>
           <a:prstGeom prst="rect">
             <a:avLst/>
@@ -18147,7 +18979,7 @@
         <p:spPr>
           <a:xfrm>
             <a:off x="596899" y="4181365"/>
-            <a:ext cx="457199" cy="203199"/>
+            <a:ext cx="498474" cy="203199"/>
           </a:xfrm>
           <a:prstGeom prst="rect">
             <a:avLst/>
@@ -18182,7 +19014,7 @@
         <p:spPr>
           <a:xfrm>
             <a:off x="1054097" y="4667734"/>
-            <a:ext cx="2486003" cy="292099"/>
+            <a:ext cx="2762764" cy="292099"/>
           </a:xfrm>
           <a:prstGeom prst="rect">
             <a:avLst/>
@@ -18221,7 +19053,7 @@
         <p:spPr>
           <a:xfrm>
             <a:off x="596899" y="4705834"/>
-            <a:ext cx="457199" cy="203199"/>
+            <a:ext cx="498474" cy="203199"/>
           </a:xfrm>
           <a:prstGeom prst="rect">
             <a:avLst/>
@@ -18256,7 +19088,7 @@
         <p:spPr>
           <a:xfrm>
             <a:off x="1054097" y="5192203"/>
-            <a:ext cx="2121958" cy="292099"/>
+            <a:ext cx="2356464" cy="292099"/>
           </a:xfrm>
           <a:prstGeom prst="rect">
             <a:avLst/>
@@ -18295,7 +19127,7 @@
         <p:spPr>
           <a:xfrm>
             <a:off x="596899" y="5230303"/>
-            <a:ext cx="457199" cy="203199"/>
+            <a:ext cx="498474" cy="203199"/>
           </a:xfrm>
           <a:prstGeom prst="rect">
             <a:avLst/>
@@ -18329,8 +19161,8 @@
         </p:nvSpPr>
         <p:spPr>
           <a:xfrm>
-            <a:off x="8055256" y="5379627"/>
-            <a:ext cx="3498238" cy="196850"/>
+            <a:off x="7858130" y="5379627"/>
+            <a:ext cx="3892491" cy="196850"/>
           </a:xfrm>
           <a:prstGeom prst="rect">
             <a:avLst/>
@@ -18369,7 +19201,7 @@
         <p:spPr>
           <a:xfrm>
             <a:off x="596899" y="6407134"/>
-            <a:ext cx="270620" cy="184150"/>
+            <a:ext cx="290239" cy="184150"/>
           </a:xfrm>
           <a:prstGeom prst="rect">
             <a:avLst/>
@@ -18408,7 +19240,7 @@
         <p:spPr>
           <a:xfrm>
             <a:off x="9960545" y="6388084"/>
-            <a:ext cx="1477102" cy="184150"/>
+            <a:ext cx="1636758" cy="184150"/>
           </a:xfrm>
           <a:prstGeom prst="rect">
             <a:avLst/>
@@ -18564,7 +19396,7 @@
         <p:spPr>
           <a:xfrm>
             <a:off x="596899" y="1384098"/>
-            <a:ext cx="2622020" cy="215899"/>
+            <a:ext cx="2914568" cy="215899"/>
           </a:xfrm>
           <a:prstGeom prst="rect">
             <a:avLst/>
@@ -18603,15 +19435,15 @@
         <p:spPr>
           <a:xfrm>
             <a:off x="596899" y="1771447"/>
-            <a:ext cx="11319954" cy="2231623"/>
-          </a:xfrm>
-          <a:prstGeom prst="rect">
-            <a:avLst/>
-          </a:prstGeom>
-          <a:noFill/>
-        </p:spPr>
-        <p:txBody>
-          <a:bodyPr wrap="square" lIns="0" rIns="0" tIns="0" bIns="0" anchor="t">
+            <a:ext cx="11595815" cy="2231623"/>
+          </a:xfrm>
+          <a:prstGeom prst="rect">
+            <a:avLst/>
+          </a:prstGeom>
+          <a:noFill/>
+        </p:spPr>
+        <p:txBody>
+          <a:bodyPr wrap="none" lIns="0" rIns="0" tIns="0" bIns="0" anchor="t">
             <a:spAutoFit/>
           </a:bodyPr>
           <a:lstStyle/>
@@ -18628,7 +19460,71 @@
                 </a:solidFill>
                 <a:latin typeface="Playfair Display"/>
               </a:rPr>
-              <a:t>L'attuale direzione verso la quale stiamo andando è, e sarà, uno shock. È un mondo che abbraccerà coloro che vivono e operano come loro stessi. Ciò significherà molto disordine, caos e confusione per coloro che sono persi nella dipendenza da schemi e relazioni. Tutto nella nostra specie è radicato nella dipendenza.</a:t>
+              <a:t>L'attuale direzione verso la quale stiamo andando è, e sarà, uno shock. È un</a:t>
+            </a:r>
+          </a:p>
+          <a:p>
+            <a:pPr algn="l">
+              <a:lnSpc>
+                <a:spcPct val="128000"/>
+              </a:lnSpc>
+            </a:pPr>
+            <a:r>
+              <a:rPr sz="2700" b="0" i="1">
+                <a:solidFill>
+                  <a:srgbClr val="FBF7F5"/>
+                </a:solidFill>
+                <a:latin typeface="Playfair Display"/>
+              </a:rPr>
+              <a:t>mondo che abbraccerà coloro che vivono e operano come loro stessi. Ciò</a:t>
+            </a:r>
+          </a:p>
+          <a:p>
+            <a:pPr algn="l">
+              <a:lnSpc>
+                <a:spcPct val="128000"/>
+              </a:lnSpc>
+            </a:pPr>
+            <a:r>
+              <a:rPr sz="2700" b="0" i="1">
+                <a:solidFill>
+                  <a:srgbClr val="FBF7F5"/>
+                </a:solidFill>
+                <a:latin typeface="Playfair Display"/>
+              </a:rPr>
+              <a:t>significherà molto disordine, caos e confusione per coloro che sono persi nella</a:t>
+            </a:r>
+          </a:p>
+          <a:p>
+            <a:pPr algn="l">
+              <a:lnSpc>
+                <a:spcPct val="128000"/>
+              </a:lnSpc>
+            </a:pPr>
+            <a:r>
+              <a:rPr sz="2700" b="0" i="1">
+                <a:solidFill>
+                  <a:srgbClr val="FBF7F5"/>
+                </a:solidFill>
+                <a:latin typeface="Playfair Display"/>
+              </a:rPr>
+              <a:t>dipendenza da schemi e relazioni. Tutto nella nostra specie è radicato nella</a:t>
+            </a:r>
+          </a:p>
+          <a:p>
+            <a:pPr algn="l">
+              <a:lnSpc>
+                <a:spcPct val="128000"/>
+              </a:lnSpc>
+            </a:pPr>
+            <a:r>
+              <a:rPr sz="2700" b="0" i="1">
+                <a:solidFill>
+                  <a:srgbClr val="FBF7F5"/>
+                </a:solidFill>
+                <a:latin typeface="Playfair Display"/>
+              </a:rPr>
+              <a:t>dipendenza.</a:t>
             </a:r>
           </a:p>
         </p:txBody>
@@ -18642,7 +19538,7 @@
         <p:spPr>
           <a:xfrm>
             <a:off x="596899" y="4226014"/>
-            <a:ext cx="1014489" cy="215899"/>
+            <a:ext cx="1120450" cy="215899"/>
           </a:xfrm>
           <a:prstGeom prst="rect">
             <a:avLst/>
@@ -18681,7 +19577,7 @@
         <p:spPr>
           <a:xfrm>
             <a:off x="596899" y="4670513"/>
-            <a:ext cx="6534610" cy="279399"/>
+            <a:ext cx="7281299" cy="279399"/>
           </a:xfrm>
           <a:prstGeom prst="rect">
             <a:avLst/>
@@ -18720,7 +19616,7 @@
         <p:spPr>
           <a:xfrm>
             <a:off x="596899" y="6407134"/>
-            <a:ext cx="272843" cy="184150"/>
+            <a:ext cx="292719" cy="184150"/>
           </a:xfrm>
           <a:prstGeom prst="rect">
             <a:avLst/>
@@ -18759,7 +19655,7 @@
         <p:spPr>
           <a:xfrm>
             <a:off x="9960545" y="6388084"/>
-            <a:ext cx="1477102" cy="184150"/>
+            <a:ext cx="1636758" cy="184150"/>
           </a:xfrm>
           <a:prstGeom prst="rect">
             <a:avLst/>
@@ -18915,7 +19811,7 @@
         <p:spPr>
           <a:xfrm>
             <a:off x="596899" y="425449"/>
-            <a:ext cx="2622020" cy="215899"/>
+            <a:ext cx="2914568" cy="215899"/>
           </a:xfrm>
           <a:prstGeom prst="rect">
             <a:avLst/>
@@ -18954,7 +19850,7 @@
         <p:spPr>
           <a:xfrm>
             <a:off x="596899" y="647698"/>
-            <a:ext cx="10628173" cy="577849"/>
+            <a:ext cx="10887023" cy="577849"/>
           </a:xfrm>
           <a:prstGeom prst="rect">
             <a:avLst/>
@@ -18993,7 +19889,7 @@
         <p:spPr>
           <a:xfrm>
             <a:off x="596899" y="1418527"/>
-            <a:ext cx="4671937" cy="292099"/>
+            <a:ext cx="5202423" cy="292099"/>
           </a:xfrm>
           <a:prstGeom prst="rect">
             <a:avLst/>
@@ -19032,15 +19928,15 @@
         <p:spPr>
           <a:xfrm>
             <a:off x="596899" y="1846456"/>
-            <a:ext cx="5084655" cy="775889"/>
-          </a:xfrm>
-          <a:prstGeom prst="rect">
-            <a:avLst/>
-          </a:prstGeom>
-          <a:noFill/>
-        </p:spPr>
-        <p:txBody>
-          <a:bodyPr wrap="square" lIns="0" rIns="0" tIns="0" bIns="0" anchor="t">
+            <a:ext cx="5663045" cy="775889"/>
+          </a:xfrm>
+          <a:prstGeom prst="rect">
+            <a:avLst/>
+          </a:prstGeom>
+          <a:noFill/>
+        </p:spPr>
+        <p:txBody>
+          <a:bodyPr wrap="none" lIns="0" rIns="0" tIns="0" bIns="0" anchor="t">
             <a:spAutoFit/>
           </a:bodyPr>
           <a:lstStyle/>
@@ -19057,7 +19953,39 @@
                 </a:solidFill>
                 <a:latin typeface="Outfit"/>
               </a:rPr>
-              <a:t>Falso entusiasmo. La comunicazione si basa su pretese inevitabilmente non realizzate. Tendenza ad esprimere la fantasia come realtà.</a:t>
+              <a:t>Falso entusiasmo. La comunicazione si basa su pretese</a:t>
+            </a:r>
+          </a:p>
+          <a:p>
+            <a:pPr algn="l">
+              <a:lnSpc>
+                <a:spcPct val="145000"/>
+              </a:lnSpc>
+            </a:pPr>
+            <a:r>
+              <a:rPr sz="1400" b="0" i="0">
+                <a:solidFill>
+                  <a:srgbClr val="6B625D"/>
+                </a:solidFill>
+                <a:latin typeface="Outfit"/>
+              </a:rPr>
+              <a:t>inevitabilmente non realizzate. Tendenza ad esprimere la</a:t>
+            </a:r>
+          </a:p>
+          <a:p>
+            <a:pPr algn="l">
+              <a:lnSpc>
+                <a:spcPct val="145000"/>
+              </a:lnSpc>
+            </a:pPr>
+            <a:r>
+              <a:rPr sz="1400" b="0" i="0">
+                <a:solidFill>
+                  <a:srgbClr val="6B625D"/>
+                </a:solidFill>
+                <a:latin typeface="Outfit"/>
+              </a:rPr>
+              <a:t>fantasia come realtà.</a:t>
             </a:r>
           </a:p>
         </p:txBody>
@@ -19071,7 +19999,7 @@
         <p:spPr>
           <a:xfrm>
             <a:off x="6492859" y="1418527"/>
-            <a:ext cx="3162641" cy="292099"/>
+            <a:ext cx="3517941" cy="292099"/>
           </a:xfrm>
           <a:prstGeom prst="rect">
             <a:avLst/>
@@ -19110,15 +20038,15 @@
         <p:spPr>
           <a:xfrm>
             <a:off x="6492859" y="1846456"/>
-            <a:ext cx="5592828" cy="1549198"/>
-          </a:xfrm>
-          <a:prstGeom prst="rect">
-            <a:avLst/>
-          </a:prstGeom>
-          <a:noFill/>
-        </p:spPr>
-        <p:txBody>
-          <a:bodyPr wrap="square" lIns="0" rIns="0" tIns="0" bIns="0" anchor="t">
+            <a:ext cx="6230203" cy="1549198"/>
+          </a:xfrm>
+          <a:prstGeom prst="rect">
+            <a:avLst/>
+          </a:prstGeom>
+          <a:noFill/>
+        </p:spPr>
+        <p:txBody>
+          <a:bodyPr wrap="none" lIns="0" rIns="0" tIns="0" bIns="0" anchor="t">
             <a:spAutoFit/>
           </a:bodyPr>
           <a:lstStyle/>
@@ -19135,7 +20063,87 @@
                 </a:solidFill>
                 <a:latin typeface="Outfit"/>
               </a:rPr>
-              <a:t>Contemplazione nell'adesso che si traduce nella capacità di applicare la comprensione. Le istituzioni lavorano a beneficio della società, dei valori, degli ideali e dei loro modelli, e di come questi possono essere compresi e applicati. La capacità di trasformare la consapevolezza individuale in impegno e comprensione generali.</a:t>
+              <a:t>Contemplazione nell'adesso che si traduce nella capacità di</a:t>
+            </a:r>
+          </a:p>
+          <a:p>
+            <a:pPr algn="l">
+              <a:lnSpc>
+                <a:spcPct val="145000"/>
+              </a:lnSpc>
+            </a:pPr>
+            <a:r>
+              <a:rPr sz="1400" b="0" i="0">
+                <a:solidFill>
+                  <a:srgbClr val="3A3532"/>
+                </a:solidFill>
+                <a:latin typeface="Outfit"/>
+              </a:rPr>
+              <a:t>applicare la comprensione. Le istituzioni lavorano a beneficio</a:t>
+            </a:r>
+          </a:p>
+          <a:p>
+            <a:pPr algn="l">
+              <a:lnSpc>
+                <a:spcPct val="145000"/>
+              </a:lnSpc>
+            </a:pPr>
+            <a:r>
+              <a:rPr sz="1400" b="0" i="0">
+                <a:solidFill>
+                  <a:srgbClr val="3A3532"/>
+                </a:solidFill>
+                <a:latin typeface="Outfit"/>
+              </a:rPr>
+              <a:t>della società, dei valori, degli ideali e dei loro modelli, e di come</a:t>
+            </a:r>
+          </a:p>
+          <a:p>
+            <a:pPr algn="l">
+              <a:lnSpc>
+                <a:spcPct val="145000"/>
+              </a:lnSpc>
+            </a:pPr>
+            <a:r>
+              <a:rPr sz="1400" b="0" i="0">
+                <a:solidFill>
+                  <a:srgbClr val="3A3532"/>
+                </a:solidFill>
+                <a:latin typeface="Outfit"/>
+              </a:rPr>
+              <a:t>questi possono essere compresi e applicati. La capacità di</a:t>
+            </a:r>
+          </a:p>
+          <a:p>
+            <a:pPr algn="l">
+              <a:lnSpc>
+                <a:spcPct val="145000"/>
+              </a:lnSpc>
+            </a:pPr>
+            <a:r>
+              <a:rPr sz="1400" b="0" i="0">
+                <a:solidFill>
+                  <a:srgbClr val="3A3532"/>
+                </a:solidFill>
+                <a:latin typeface="Outfit"/>
+              </a:rPr>
+              <a:t>trasformare la consapevolezza individuale in impegno e</a:t>
+            </a:r>
+          </a:p>
+          <a:p>
+            <a:pPr algn="l">
+              <a:lnSpc>
+                <a:spcPct val="145000"/>
+              </a:lnSpc>
+            </a:pPr>
+            <a:r>
+              <a:rPr sz="1400" b="0" i="0">
+                <a:solidFill>
+                  <a:srgbClr val="3A3532"/>
+                </a:solidFill>
+                <a:latin typeface="Outfit"/>
+              </a:rPr>
+              <a:t>comprensione generali.</a:t>
             </a:r>
           </a:p>
         </p:txBody>
@@ -19149,7 +20157,7 @@
         <p:spPr>
           <a:xfrm>
             <a:off x="596899" y="5942395"/>
-            <a:ext cx="2893660" cy="342899"/>
+            <a:ext cx="2962317" cy="342899"/>
           </a:xfrm>
           <a:prstGeom prst="rect">
             <a:avLst/>
@@ -19188,7 +20196,7 @@
         <p:spPr>
           <a:xfrm>
             <a:off x="596899" y="6407134"/>
-            <a:ext cx="263175" cy="184150"/>
+            <a:ext cx="281929" cy="184150"/>
           </a:xfrm>
           <a:prstGeom prst="rect">
             <a:avLst/>
@@ -19227,7 +20235,7 @@
         <p:spPr>
           <a:xfrm>
             <a:off x="9960545" y="6388084"/>
-            <a:ext cx="1477102" cy="184150"/>
+            <a:ext cx="1636758" cy="184150"/>
           </a:xfrm>
           <a:prstGeom prst="rect">
             <a:avLst/>
@@ -20033,7 +21041,7 @@
         <p:spPr>
           <a:xfrm>
             <a:off x="596899" y="425449"/>
-            <a:ext cx="1824589" cy="215899"/>
+            <a:ext cx="2024578" cy="215899"/>
           </a:xfrm>
           <a:prstGeom prst="rect">
             <a:avLst/>
@@ -20072,7 +21080,7 @@
         <p:spPr>
           <a:xfrm>
             <a:off x="596899" y="647698"/>
-            <a:ext cx="4971424" cy="577849"/>
+            <a:ext cx="5091174" cy="577849"/>
           </a:xfrm>
           <a:prstGeom prst="rect">
             <a:avLst/>
@@ -20111,7 +21119,7 @@
         <p:spPr>
           <a:xfrm>
             <a:off x="596899" y="1418527"/>
-            <a:ext cx="5021091" cy="292099"/>
+            <a:ext cx="5592104" cy="292099"/>
           </a:xfrm>
           <a:prstGeom prst="rect">
             <a:avLst/>
@@ -20150,7 +21158,7 @@
         <p:spPr>
           <a:xfrm>
             <a:off x="812798" y="1846456"/>
-            <a:ext cx="1218403" cy="260349"/>
+            <a:ext cx="1348032" cy="260349"/>
           </a:xfrm>
           <a:prstGeom prst="rect">
             <a:avLst/>
@@ -20189,7 +21197,7 @@
         <p:spPr>
           <a:xfrm>
             <a:off x="812798" y="2193126"/>
-            <a:ext cx="507094" cy="260349"/>
+            <a:ext cx="554160" cy="260349"/>
           </a:xfrm>
           <a:prstGeom prst="rect">
             <a:avLst/>
@@ -20228,7 +21236,7 @@
         <p:spPr>
           <a:xfrm>
             <a:off x="812798" y="2539795"/>
-            <a:ext cx="1942825" cy="260349"/>
+            <a:ext cx="2156539" cy="260349"/>
           </a:xfrm>
           <a:prstGeom prst="rect">
             <a:avLst/>
@@ -20267,7 +21275,7 @@
         <p:spPr>
           <a:xfrm>
             <a:off x="812798" y="2886465"/>
-            <a:ext cx="2502227" cy="260349"/>
+            <a:ext cx="2780871" cy="260349"/>
           </a:xfrm>
           <a:prstGeom prst="rect">
             <a:avLst/>
@@ -20306,7 +21314,7 @@
         <p:spPr>
           <a:xfrm>
             <a:off x="812798" y="3233134"/>
-            <a:ext cx="1563334" cy="260349"/>
+            <a:ext cx="1733000" cy="260349"/>
           </a:xfrm>
           <a:prstGeom prst="rect">
             <a:avLst/>
@@ -20345,7 +21353,7 @@
         <p:spPr>
           <a:xfrm>
             <a:off x="812798" y="3579804"/>
-            <a:ext cx="1396981" cy="260349"/>
+            <a:ext cx="1547337" cy="260349"/>
           </a:xfrm>
           <a:prstGeom prst="rect">
             <a:avLst/>
@@ -20384,7 +21392,7 @@
         <p:spPr>
           <a:xfrm>
             <a:off x="812798" y="3926473"/>
-            <a:ext cx="1714797" cy="260349"/>
+            <a:ext cx="1902043" cy="260349"/>
           </a:xfrm>
           <a:prstGeom prst="rect">
             <a:avLst/>
@@ -20423,7 +21431,7 @@
         <p:spPr>
           <a:xfrm>
             <a:off x="6492859" y="1418527"/>
-            <a:ext cx="5088877" cy="292099"/>
+            <a:ext cx="5667758" cy="292099"/>
           </a:xfrm>
           <a:prstGeom prst="rect">
             <a:avLst/>
@@ -20462,7 +21470,7 @@
         <p:spPr>
           <a:xfrm>
             <a:off x="6708758" y="1846456"/>
-            <a:ext cx="900364" cy="260349"/>
+            <a:ext cx="993078" cy="260349"/>
           </a:xfrm>
           <a:prstGeom prst="rect">
             <a:avLst/>
@@ -20501,7 +21509,7 @@
         <p:spPr>
           <a:xfrm>
             <a:off x="6708758" y="2193126"/>
-            <a:ext cx="1946604" cy="260349"/>
+            <a:ext cx="2160756" cy="260349"/>
           </a:xfrm>
           <a:prstGeom prst="rect">
             <a:avLst/>
@@ -20540,7 +21548,7 @@
         <p:spPr>
           <a:xfrm>
             <a:off x="6708758" y="2539795"/>
-            <a:ext cx="1541554" cy="260349"/>
+            <a:ext cx="1708691" cy="260349"/>
           </a:xfrm>
           <a:prstGeom prst="rect">
             <a:avLst/>
@@ -20579,7 +21587,7 @@
         <p:spPr>
           <a:xfrm>
             <a:off x="6708758" y="2886465"/>
-            <a:ext cx="2034281" cy="260349"/>
+            <a:ext cx="2258610" cy="260349"/>
           </a:xfrm>
           <a:prstGeom prst="rect">
             <a:avLst/>
@@ -20618,7 +21626,7 @@
         <p:spPr>
           <a:xfrm>
             <a:off x="6708758" y="3233134"/>
-            <a:ext cx="2315204" cy="260349"/>
+            <a:ext cx="2572140" cy="260349"/>
           </a:xfrm>
           <a:prstGeom prst="rect">
             <a:avLst/>
@@ -20657,7 +21665,7 @@
         <p:spPr>
           <a:xfrm>
             <a:off x="6708758" y="3579804"/>
-            <a:ext cx="1737578" cy="260349"/>
+            <a:ext cx="1927468" cy="260349"/>
           </a:xfrm>
           <a:prstGeom prst="rect">
             <a:avLst/>
@@ -20696,7 +21704,7 @@
         <p:spPr>
           <a:xfrm>
             <a:off x="6708758" y="3926473"/>
-            <a:ext cx="3923846" cy="260349"/>
+            <a:ext cx="4367499" cy="260349"/>
           </a:xfrm>
           <a:prstGeom prst="rect">
             <a:avLst/>
@@ -20735,7 +21743,7 @@
         <p:spPr>
           <a:xfrm>
             <a:off x="596899" y="6407134"/>
-            <a:ext cx="271065" cy="184150"/>
+            <a:ext cx="290735" cy="184150"/>
           </a:xfrm>
           <a:prstGeom prst="rect">
             <a:avLst/>
@@ -20774,7 +21782,7 @@
         <p:spPr>
           <a:xfrm>
             <a:off x="9960545" y="6388084"/>
-            <a:ext cx="1477102" cy="184150"/>
+            <a:ext cx="1636758" cy="184150"/>
           </a:xfrm>
           <a:prstGeom prst="rect">
             <a:avLst/>
@@ -21274,7 +22282,7 @@
         <p:spPr>
           <a:xfrm>
             <a:off x="596899" y="425449"/>
-            <a:ext cx="1105167" cy="215899"/>
+            <a:ext cx="1221653" cy="215899"/>
           </a:xfrm>
           <a:prstGeom prst="rect">
             <a:avLst/>
@@ -21313,7 +22321,7 @@
         <p:spPr>
           <a:xfrm>
             <a:off x="596899" y="647698"/>
-            <a:ext cx="11886936" cy="577849"/>
+            <a:ext cx="12176739" cy="577849"/>
           </a:xfrm>
           <a:prstGeom prst="rect">
             <a:avLst/>
@@ -21352,15 +22360,15 @@
         <p:spPr>
           <a:xfrm>
             <a:off x="812798" y="1437577"/>
-            <a:ext cx="4378901" cy="518119"/>
-          </a:xfrm>
-          <a:prstGeom prst="rect">
-            <a:avLst/>
-          </a:prstGeom>
-          <a:noFill/>
-        </p:spPr>
-        <p:txBody>
-          <a:bodyPr wrap="square" lIns="0" rIns="0" tIns="0" bIns="0" anchor="t">
+            <a:ext cx="4875374" cy="518119"/>
+          </a:xfrm>
+          <a:prstGeom prst="rect">
+            <a:avLst/>
+          </a:prstGeom>
+          <a:noFill/>
+        </p:spPr>
+        <p:txBody>
+          <a:bodyPr wrap="none" lIns="0" rIns="0" tIns="0" bIns="0" anchor="t">
             <a:spAutoFit/>
           </a:bodyPr>
           <a:lstStyle/>
@@ -21377,7 +22385,23 @@
                 </a:solidFill>
                 <a:latin typeface="Outfit"/>
               </a:rPr>
-              <a:t>Lo Human Design si occupa della trasformazione personale.</a:t>
+              <a:t>Lo Human Design si occupa della trasformazione</a:t>
+            </a:r>
+          </a:p>
+          <a:p>
+            <a:pPr algn="l">
+              <a:lnSpc>
+                <a:spcPct val="145000"/>
+              </a:lnSpc>
+            </a:pPr>
+            <a:r>
+              <a:rPr sz="1400" b="0" i="0">
+                <a:solidFill>
+                  <a:srgbClr val="3A3532"/>
+                </a:solidFill>
+                <a:latin typeface="Outfit"/>
+              </a:rPr>
+              <a:t>personale.</a:t>
             </a:r>
           </a:p>
         </p:txBody>
@@ -21391,15 +22415,15 @@
         <p:spPr>
           <a:xfrm>
             <a:off x="812798" y="2092816"/>
-            <a:ext cx="4803287" cy="518119"/>
-          </a:xfrm>
-          <a:prstGeom prst="rect">
-            <a:avLst/>
-          </a:prstGeom>
-          <a:noFill/>
-        </p:spPr>
-        <p:txBody>
-          <a:bodyPr wrap="square" lIns="0" rIns="0" tIns="0" bIns="0" anchor="t">
+            <a:ext cx="5349018" cy="518119"/>
+          </a:xfrm>
+          <a:prstGeom prst="rect">
+            <a:avLst/>
+          </a:prstGeom>
+          <a:noFill/>
+        </p:spPr>
+        <p:txBody>
+          <a:bodyPr wrap="none" lIns="0" rIns="0" tIns="0" bIns="0" anchor="t">
             <a:spAutoFit/>
           </a:bodyPr>
           <a:lstStyle/>
@@ -21416,7 +22440,23 @@
                 </a:solidFill>
                 <a:latin typeface="Outfit"/>
               </a:rPr>
-              <a:t>Il BG5 (Business Group 5) è l'applicazione pratica dello Human Design nella vita e nel business.</a:t>
+              <a:t>Il BG5 (Business Group 5) è l'applicazione pratica dello</a:t>
+            </a:r>
+          </a:p>
+          <a:p>
+            <a:pPr algn="l">
+              <a:lnSpc>
+                <a:spcPct val="145000"/>
+              </a:lnSpc>
+            </a:pPr>
+            <a:r>
+              <a:rPr sz="1400" b="0" i="0">
+                <a:solidFill>
+                  <a:srgbClr val="3A3532"/>
+                </a:solidFill>
+                <a:latin typeface="Outfit"/>
+              </a:rPr>
+              <a:t>Human Design nella vita e nel business.</a:t>
             </a:r>
           </a:p>
         </p:txBody>
@@ -21430,15 +22470,15 @@
         <p:spPr>
           <a:xfrm>
             <a:off x="812798" y="2748055"/>
-            <a:ext cx="4821733" cy="518119"/>
-          </a:xfrm>
-          <a:prstGeom prst="rect">
-            <a:avLst/>
-          </a:prstGeom>
-          <a:noFill/>
-        </p:spPr>
-        <p:txBody>
-          <a:bodyPr wrap="square" lIns="0" rIns="0" tIns="0" bIns="0" anchor="t">
+            <a:ext cx="5369606" cy="518119"/>
+          </a:xfrm>
+          <a:prstGeom prst="rect">
+            <a:avLst/>
+          </a:prstGeom>
+          <a:noFill/>
+        </p:spPr>
+        <p:txBody>
+          <a:bodyPr wrap="none" lIns="0" rIns="0" tIns="0" bIns="0" anchor="t">
             <a:spAutoFit/>
           </a:bodyPr>
           <a:lstStyle/>
@@ -21455,7 +22495,23 @@
                 </a:solidFill>
                 <a:latin typeface="Outfit"/>
               </a:rPr>
-              <a:t>Il mio approccio nasce dall'unione di queste due visioni dello stesso intero.</a:t>
+              <a:t>Il mio approccio nasce dall'unione di queste due visioni</a:t>
+            </a:r>
+          </a:p>
+          <a:p>
+            <a:pPr algn="l">
+              <a:lnSpc>
+                <a:spcPct val="145000"/>
+              </a:lnSpc>
+            </a:pPr>
+            <a:r>
+              <a:rPr sz="1400" b="0" i="0">
+                <a:solidFill>
+                  <a:srgbClr val="3A3532"/>
+                </a:solidFill>
+                <a:latin typeface="Outfit"/>
+              </a:rPr>
+              <a:t>dello stesso intero.</a:t>
             </a:r>
           </a:p>
         </p:txBody>
@@ -21469,15 +22525,15 @@
         <p:spPr>
           <a:xfrm>
             <a:off x="6251063" y="1418527"/>
-            <a:ext cx="5205447" cy="535879"/>
-          </a:xfrm>
-          <a:prstGeom prst="rect">
-            <a:avLst/>
-          </a:prstGeom>
-          <a:noFill/>
-        </p:spPr>
-        <p:txBody>
-          <a:bodyPr wrap="square" lIns="0" rIns="0" tIns="0" bIns="0" anchor="t">
+            <a:ext cx="5797858" cy="535879"/>
+          </a:xfrm>
+          <a:prstGeom prst="rect">
+            <a:avLst/>
+          </a:prstGeom>
+          <a:noFill/>
+        </p:spPr>
+        <p:txBody>
+          <a:bodyPr wrap="none" lIns="0" rIns="0" tIns="0" bIns="0" anchor="t">
             <a:spAutoFit/>
           </a:bodyPr>
           <a:lstStyle/>
@@ -21494,7 +22550,23 @@
                 </a:solidFill>
                 <a:latin typeface="Outfit"/>
               </a:rPr>
-              <a:t>CON QUESTO CORSO INTENDO FORNIRE GLI STRUMENTI PER</a:t>
+              <a:t>CON QUESTO CORSO INTENDO FORNIRE GLI</a:t>
+            </a:r>
+          </a:p>
+          <a:p>
+            <a:pPr algn="l">
+              <a:lnSpc>
+                <a:spcPct val="120000"/>
+              </a:lnSpc>
+            </a:pPr>
+            <a:r>
+              <a:rPr sz="1600" b="1" i="0">
+                <a:solidFill>
+                  <a:srgbClr val="6B625D"/>
+                </a:solidFill>
+                <a:latin typeface="Outfit"/>
+              </a:rPr>
+              <a:t>STRUMENTI PER</a:t>
             </a:r>
           </a:p>
         </p:txBody>
@@ -21508,7 +22580,7 @@
         <p:spPr>
           <a:xfrm>
             <a:off x="6466963" y="2090236"/>
-            <a:ext cx="2993732" cy="260349"/>
+            <a:ext cx="3329426" cy="260349"/>
           </a:xfrm>
           <a:prstGeom prst="rect">
             <a:avLst/>
@@ -21547,7 +22619,7 @@
         <p:spPr>
           <a:xfrm>
             <a:off x="6466963" y="2436906"/>
-            <a:ext cx="5148107" cy="260349"/>
+            <a:ext cx="5733862" cy="260349"/>
           </a:xfrm>
           <a:prstGeom prst="rect">
             <a:avLst/>
@@ -21586,7 +22658,7 @@
         <p:spPr>
           <a:xfrm>
             <a:off x="6466963" y="2783575"/>
-            <a:ext cx="4897076" cy="260349"/>
+            <a:ext cx="5453694" cy="260349"/>
           </a:xfrm>
           <a:prstGeom prst="rect">
             <a:avLst/>
@@ -21625,15 +22697,15 @@
         <p:spPr>
           <a:xfrm>
             <a:off x="6251063" y="3276294"/>
-            <a:ext cx="5709509" cy="535879"/>
-          </a:xfrm>
-          <a:prstGeom prst="rect">
-            <a:avLst/>
-          </a:prstGeom>
-          <a:noFill/>
-        </p:spPr>
-        <p:txBody>
-          <a:bodyPr wrap="square" lIns="0" rIns="0" tIns="0" bIns="0" anchor="t">
+            <a:ext cx="6360427" cy="535879"/>
+          </a:xfrm>
+          <a:prstGeom prst="rect">
+            <a:avLst/>
+          </a:prstGeom>
+          <a:noFill/>
+        </p:spPr>
+        <p:txBody>
+          <a:bodyPr wrap="none" lIns="0" rIns="0" tIns="0" bIns="0" anchor="t">
             <a:spAutoFit/>
           </a:bodyPr>
           <a:lstStyle/>
@@ -21650,7 +22722,23 @@
                 </a:solidFill>
                 <a:latin typeface="Outfit"/>
               </a:rPr>
-              <a:t>UNA VOLTA PADRONEGGIATA LA LETTURA BASE, APPROFONDIREMO</a:t>
+              <a:t>UNA VOLTA PADRONEGGIATA LA LETTURA BASE,</a:t>
+            </a:r>
+          </a:p>
+          <a:p>
+            <a:pPr algn="l">
+              <a:lnSpc>
+                <a:spcPct val="120000"/>
+              </a:lnSpc>
+            </a:pPr>
+            <a:r>
+              <a:rPr sz="1600" b="1" i="0">
+                <a:solidFill>
+                  <a:srgbClr val="6B625D"/>
+                </a:solidFill>
+                <a:latin typeface="Outfit"/>
+              </a:rPr>
+              <a:t>APPROFONDIREMO</a:t>
             </a:r>
           </a:p>
         </p:txBody>
@@ -21664,7 +22752,7 @@
         <p:spPr>
           <a:xfrm>
             <a:off x="6466963" y="3948003"/>
-            <a:ext cx="3244985" cy="260349"/>
+            <a:ext cx="3609842" cy="260349"/>
           </a:xfrm>
           <a:prstGeom prst="rect">
             <a:avLst/>
@@ -21703,7 +22791,7 @@
         <p:spPr>
           <a:xfrm>
             <a:off x="6466963" y="4294673"/>
-            <a:ext cx="4269777" cy="260349"/>
+            <a:ext cx="4753583" cy="260349"/>
           </a:xfrm>
           <a:prstGeom prst="rect">
             <a:avLst/>
@@ -21742,7 +22830,7 @@
         <p:spPr>
           <a:xfrm>
             <a:off x="596899" y="6407134"/>
-            <a:ext cx="272843" cy="184150"/>
+            <a:ext cx="292719" cy="184150"/>
           </a:xfrm>
           <a:prstGeom prst="rect">
             <a:avLst/>
@@ -21781,7 +22869,7 @@
         <p:spPr>
           <a:xfrm>
             <a:off x="9960545" y="6388084"/>
-            <a:ext cx="1477102" cy="184150"/>
+            <a:ext cx="1636758" cy="184150"/>
           </a:xfrm>
           <a:prstGeom prst="rect">
             <a:avLst/>

--- a/grav-site/root/kit-corso/corso-base-hd.pptx
+++ b/grav-site/root/kit-corso/corso-base-hd.pptx
@@ -3190,7 +3190,7 @@
           <a:noFill/>
         </p:spPr>
         <p:txBody>
-          <a:bodyPr wrap="none" lIns="0" rIns="0" tIns="0" bIns="0" anchor="t">
+          <a:bodyPr wrap="square" lIns="0" rIns="0" tIns="0" bIns="0" anchor="t">
             <a:spAutoFit/>
           </a:bodyPr>
           <a:lstStyle/>
@@ -3229,7 +3229,7 @@
           <a:noFill/>
         </p:spPr>
         <p:txBody>
-          <a:bodyPr wrap="none" lIns="0" rIns="0" tIns="0" bIns="0" anchor="t">
+          <a:bodyPr wrap="square" lIns="0" rIns="0" tIns="0" bIns="0" anchor="t">
             <a:spAutoFit/>
           </a:bodyPr>
           <a:lstStyle/>
@@ -3246,7 +3246,7 @@
                 </a:solidFill>
                 <a:latin typeface="Playfair Display"/>
               </a:rPr>
-              <a:t>Benvenuti al</a:t>
+              <a:t> Benvenuti al </a:t>
             </a:r>
           </a:p>
           <a:p>
@@ -3278,7 +3278,7 @@
                 </a:solidFill>
                 <a:latin typeface="Playfair Display"/>
               </a:rPr>
-              <a:t>di Human Design</a:t>
+              <a:t>di Human Design </a:t>
             </a:r>
           </a:p>
         </p:txBody>
@@ -3300,7 +3300,7 @@
           <a:noFill/>
         </p:spPr>
         <p:txBody>
-          <a:bodyPr wrap="none" lIns="0" rIns="0" tIns="0" bIns="0" anchor="t">
+          <a:bodyPr wrap="square" lIns="0" rIns="0" tIns="0" bIns="0" anchor="t">
             <a:spAutoFit/>
           </a:bodyPr>
           <a:lstStyle/>
@@ -3339,7 +3339,7 @@
           <a:noFill/>
         </p:spPr>
         <p:txBody>
-          <a:bodyPr wrap="none" lIns="0" rIns="0" tIns="0" bIns="0" anchor="t">
+          <a:bodyPr wrap="square" lIns="0" rIns="0" tIns="0" bIns="0" anchor="t">
             <a:spAutoFit/>
           </a:bodyPr>
           <a:lstStyle/>
@@ -3378,7 +3378,7 @@
           <a:noFill/>
         </p:spPr>
         <p:txBody>
-          <a:bodyPr wrap="none" lIns="0" rIns="0" tIns="0" bIns="0" anchor="t">
+          <a:bodyPr wrap="square" lIns="0" rIns="0" tIns="0" bIns="0" anchor="t">
             <a:spAutoFit/>
           </a:bodyPr>
           <a:lstStyle/>
@@ -3515,7 +3515,7 @@
           <a:noFill/>
         </p:spPr>
         <p:txBody>
-          <a:bodyPr wrap="none" lIns="0" rIns="0" tIns="0" bIns="0" anchor="t">
+          <a:bodyPr wrap="square" lIns="0" rIns="0" tIns="0" bIns="0" anchor="t">
             <a:spAutoFit/>
           </a:bodyPr>
           <a:lstStyle/>
@@ -3554,7 +3554,7 @@
           <a:noFill/>
         </p:spPr>
         <p:txBody>
-          <a:bodyPr wrap="none" lIns="0" rIns="0" tIns="0" bIns="0" anchor="t">
+          <a:bodyPr wrap="square" lIns="0" rIns="0" tIns="0" bIns="0" anchor="t">
             <a:spAutoFit/>
           </a:bodyPr>
           <a:lstStyle/>
@@ -3593,7 +3593,7 @@
           <a:noFill/>
         </p:spPr>
         <p:txBody>
-          <a:bodyPr wrap="none" lIns="0" rIns="0" tIns="0" bIns="0" anchor="t">
+          <a:bodyPr wrap="square" lIns="0" rIns="0" tIns="0" bIns="0" anchor="t">
             <a:spAutoFit/>
           </a:bodyPr>
           <a:lstStyle/>
@@ -3610,7 +3610,7 @@
                 </a:solidFill>
                 <a:latin typeface="Outfit"/>
               </a:rPr>
-              <a:t>Per auto-realizzarci relazionalmente e materialmente abbiamo</a:t>
+              <a:t>Per auto-realizzarci relazionalmente e materialmente abbiamo </a:t>
             </a:r>
           </a:p>
           <a:p>
@@ -3648,7 +3648,7 @@
           <a:noFill/>
         </p:spPr>
         <p:txBody>
-          <a:bodyPr wrap="none" lIns="0" rIns="0" tIns="0" bIns="0" anchor="t">
+          <a:bodyPr wrap="square" lIns="0" rIns="0" tIns="0" bIns="0" anchor="t">
             <a:spAutoFit/>
           </a:bodyPr>
           <a:lstStyle/>
@@ -3665,7 +3665,7 @@
                 </a:solidFill>
                 <a:latin typeface="Outfit"/>
               </a:rPr>
-              <a:t>Quando sei allineato con ciò che è corretto per te, entri in relazione</a:t>
+              <a:t>Quando sei allineato con ciò che è corretto per te, entri in relazione </a:t>
             </a:r>
           </a:p>
           <a:p>
@@ -3681,7 +3681,7 @@
                 </a:solidFill>
                 <a:latin typeface="Outfit"/>
               </a:rPr>
-              <a:t>proprio con chi sei fatto per connetterti. In questo modo ci si può</a:t>
+              <a:t>proprio con chi sei fatto per connetterti. In questo modo ci si può </a:t>
             </a:r>
           </a:p>
           <a:p>
@@ -3719,7 +3719,7 @@
           <a:noFill/>
         </p:spPr>
         <p:txBody>
-          <a:bodyPr wrap="none" lIns="0" rIns="0" tIns="0" bIns="0" anchor="t">
+          <a:bodyPr wrap="square" lIns="0" rIns="0" tIns="0" bIns="0" anchor="t">
             <a:spAutoFit/>
           </a:bodyPr>
           <a:lstStyle/>
@@ -3736,7 +3736,7 @@
                 </a:solidFill>
                 <a:latin typeface="Outfit"/>
               </a:rPr>
-              <a:t>Conoscere sé stessi significa poter ottimizzare la propria energia,</a:t>
+              <a:t>Conoscere sé stessi significa poter ottimizzare la propria energia, </a:t>
             </a:r>
           </a:p>
           <a:p>
@@ -3752,7 +3752,7 @@
                 </a:solidFill>
                 <a:latin typeface="Outfit"/>
               </a:rPr>
-              <a:t>porre i confini sani che servono a ciascuno di noi e raggiungere il</a:t>
+              <a:t>porre i confini sani che servono a ciascuno di noi e raggiungere il </a:t>
             </a:r>
           </a:p>
           <a:p>
@@ -3768,7 +3768,7 @@
                 </a:solidFill>
                 <a:latin typeface="Outfit"/>
               </a:rPr>
-              <a:t>benessere e la prosperità che sostengano la soddisfazione, il</a:t>
+              <a:t>benessere e la prosperità che sostengano la soddisfazione, il </a:t>
             </a:r>
           </a:p>
           <a:p>
@@ -3806,7 +3806,7 @@
           <a:noFill/>
         </p:spPr>
         <p:txBody>
-          <a:bodyPr wrap="none" lIns="0" rIns="0" tIns="0" bIns="0" anchor="t">
+          <a:bodyPr wrap="square" lIns="0" rIns="0" tIns="0" bIns="0" anchor="t">
             <a:spAutoFit/>
           </a:bodyPr>
           <a:lstStyle/>
@@ -3845,7 +3845,7 @@
           <a:noFill/>
         </p:spPr>
         <p:txBody>
-          <a:bodyPr wrap="none" lIns="0" rIns="0" tIns="0" bIns="0" anchor="t">
+          <a:bodyPr wrap="square" lIns="0" rIns="0" tIns="0" bIns="0" anchor="t">
             <a:spAutoFit/>
           </a:bodyPr>
           <a:lstStyle/>
@@ -3982,7 +3982,7 @@
           <a:noFill/>
         </p:spPr>
         <p:txBody>
-          <a:bodyPr wrap="none" lIns="0" rIns="0" tIns="0" bIns="0" anchor="t">
+          <a:bodyPr wrap="square" lIns="0" rIns="0" tIns="0" bIns="0" anchor="t">
             <a:spAutoFit/>
           </a:bodyPr>
           <a:lstStyle/>
@@ -4021,7 +4021,7 @@
           <a:noFill/>
         </p:spPr>
         <p:txBody>
-          <a:bodyPr wrap="none" lIns="0" rIns="0" tIns="0" bIns="0" anchor="t">
+          <a:bodyPr wrap="square" lIns="0" rIns="0" tIns="0" bIns="0" anchor="t">
             <a:spAutoFit/>
           </a:bodyPr>
           <a:lstStyle/>
@@ -4060,7 +4060,7 @@
           <a:noFill/>
         </p:spPr>
         <p:txBody>
-          <a:bodyPr wrap="none" lIns="0" rIns="0" tIns="0" bIns="0" anchor="t">
+          <a:bodyPr wrap="square" lIns="0" rIns="0" tIns="0" bIns="0" anchor="t">
             <a:spAutoFit/>
           </a:bodyPr>
           <a:lstStyle/>
@@ -4077,7 +4077,7 @@
                 </a:solidFill>
                 <a:latin typeface="Outfit"/>
               </a:rPr>
-              <a:t>Non esiste una scorciatoia per diventare bravi in questa materia. Le</a:t>
+              <a:t>Non esiste una scorciatoia per diventare bravi in questa materia. Le </a:t>
             </a:r>
           </a:p>
           <a:p>
@@ -4093,7 +4093,7 @@
                 </a:solidFill>
                 <a:latin typeface="Outfit"/>
               </a:rPr>
-              <a:t>AI possono fornire informazioni sommarie e spesso scorrette, quindi</a:t>
+              <a:t>AI possono fornire informazioni sommarie e spesso scorrette, quindi </a:t>
             </a:r>
           </a:p>
           <a:p>
@@ -4109,7 +4109,7 @@
                 </a:solidFill>
                 <a:latin typeface="Outfit"/>
               </a:rPr>
-              <a:t>l'unica opzione è imparare "alla vecchia maniera": applicando ciò che</a:t>
+              <a:t>l'unica opzione è imparare "alla vecchia maniera": applicando ciò che </a:t>
             </a:r>
           </a:p>
           <a:p>
@@ -4125,7 +4125,7 @@
                 </a:solidFill>
                 <a:latin typeface="Outfit"/>
               </a:rPr>
-              <a:t>si apprende nella vita quotidiana, facendo gli esercizi settimanali e</a:t>
+              <a:t>si apprende nella vita quotidiana, facendo gli esercizi settimanali e </a:t>
             </a:r>
           </a:p>
           <a:p>
@@ -4163,7 +4163,7 @@
           <a:noFill/>
         </p:spPr>
         <p:txBody>
-          <a:bodyPr wrap="none" lIns="0" rIns="0" tIns="0" bIns="0" anchor="t">
+          <a:bodyPr wrap="square" lIns="0" rIns="0" tIns="0" bIns="0" anchor="t">
             <a:spAutoFit/>
           </a:bodyPr>
           <a:lstStyle/>
@@ -4180,7 +4180,7 @@
                 </a:solidFill>
                 <a:latin typeface="Playfair Display"/>
               </a:rPr>
-              <a:t>Non serve essere perfetti. Serve essere</a:t>
+              <a:t>Non serve essere perfetti. Serve essere </a:t>
             </a:r>
           </a:p>
           <a:p>
@@ -4218,7 +4218,7 @@
           <a:noFill/>
         </p:spPr>
         <p:txBody>
-          <a:bodyPr wrap="none" lIns="0" rIns="0" tIns="0" bIns="0" anchor="t">
+          <a:bodyPr wrap="square" lIns="0" rIns="0" tIns="0" bIns="0" anchor="t">
             <a:spAutoFit/>
           </a:bodyPr>
           <a:lstStyle/>
@@ -4257,7 +4257,7 @@
           <a:noFill/>
         </p:spPr>
         <p:txBody>
-          <a:bodyPr wrap="none" lIns="0" rIns="0" tIns="0" bIns="0" anchor="t">
+          <a:bodyPr wrap="square" lIns="0" rIns="0" tIns="0" bIns="0" anchor="t">
             <a:spAutoFit/>
           </a:bodyPr>
           <a:lstStyle/>
@@ -4738,7 +4738,7 @@
           <a:noFill/>
         </p:spPr>
         <p:txBody>
-          <a:bodyPr wrap="none" lIns="0" rIns="0" tIns="0" bIns="0" anchor="t">
+          <a:bodyPr wrap="square" lIns="0" rIns="0" tIns="0" bIns="0" anchor="t">
             <a:spAutoFit/>
           </a:bodyPr>
           <a:lstStyle/>
@@ -4777,7 +4777,7 @@
           <a:noFill/>
         </p:spPr>
         <p:txBody>
-          <a:bodyPr wrap="none" lIns="0" rIns="0" tIns="0" bIns="0" anchor="t">
+          <a:bodyPr wrap="square" lIns="0" rIns="0" tIns="0" bIns="0" anchor="t">
             <a:spAutoFit/>
           </a:bodyPr>
           <a:lstStyle/>
@@ -4816,7 +4816,7 @@
           <a:noFill/>
         </p:spPr>
         <p:txBody>
-          <a:bodyPr wrap="none" lIns="0" rIns="0" tIns="0" bIns="0" anchor="t">
+          <a:bodyPr wrap="square" lIns="0" rIns="0" tIns="0" bIns="0" anchor="t">
             <a:spAutoFit/>
           </a:bodyPr>
           <a:lstStyle/>
@@ -4855,7 +4855,7 @@
           <a:noFill/>
         </p:spPr>
         <p:txBody>
-          <a:bodyPr wrap="none" lIns="0" rIns="0" tIns="0" bIns="0" anchor="t">
+          <a:bodyPr wrap="square" lIns="0" rIns="0" tIns="0" bIns="0" anchor="t">
             <a:spAutoFit/>
           </a:bodyPr>
           <a:lstStyle/>
@@ -4894,7 +4894,7 @@
           <a:noFill/>
         </p:spPr>
         <p:txBody>
-          <a:bodyPr wrap="none" lIns="0" rIns="0" tIns="0" bIns="0" anchor="t">
+          <a:bodyPr wrap="square" lIns="0" rIns="0" tIns="0" bIns="0" anchor="t">
             <a:spAutoFit/>
           </a:bodyPr>
           <a:lstStyle/>
@@ -4933,7 +4933,7 @@
           <a:noFill/>
         </p:spPr>
         <p:txBody>
-          <a:bodyPr wrap="none" lIns="0" rIns="0" tIns="0" bIns="0" anchor="t">
+          <a:bodyPr wrap="square" lIns="0" rIns="0" tIns="0" bIns="0" anchor="t">
             <a:spAutoFit/>
           </a:bodyPr>
           <a:lstStyle/>
@@ -4950,7 +4950,7 @@
                 </a:solidFill>
                 <a:latin typeface="Outfit"/>
               </a:rPr>
-              <a:t>Fig. 2 — La carta di Valentina Russo, 21 giugno 1988,</a:t>
+              <a:t>Fig. 2 — La carta di Valentina Russo, 21 giugno 1988, </a:t>
             </a:r>
           </a:p>
           <a:p>
@@ -4988,7 +4988,7 @@
           <a:noFill/>
         </p:spPr>
         <p:txBody>
-          <a:bodyPr wrap="none" lIns="0" rIns="0" tIns="0" bIns="0" anchor="t">
+          <a:bodyPr wrap="square" lIns="0" rIns="0" tIns="0" bIns="0" anchor="t">
             <a:spAutoFit/>
           </a:bodyPr>
           <a:lstStyle/>
@@ -5027,7 +5027,7 @@
           <a:noFill/>
         </p:spPr>
         <p:txBody>
-          <a:bodyPr wrap="none" lIns="0" rIns="0" tIns="0" bIns="0" anchor="t">
+          <a:bodyPr wrap="square" lIns="0" rIns="0" tIns="0" bIns="0" anchor="t">
             <a:spAutoFit/>
           </a:bodyPr>
           <a:lstStyle/>
@@ -5066,7 +5066,7 @@
           <a:noFill/>
         </p:spPr>
         <p:txBody>
-          <a:bodyPr wrap="none" lIns="0" rIns="0" tIns="0" bIns="0" anchor="t">
+          <a:bodyPr wrap="square" lIns="0" rIns="0" tIns="0" bIns="0" anchor="t">
             <a:spAutoFit/>
           </a:bodyPr>
           <a:lstStyle/>
@@ -5105,7 +5105,7 @@
           <a:noFill/>
         </p:spPr>
         <p:txBody>
-          <a:bodyPr wrap="none" lIns="0" rIns="0" tIns="0" bIns="0" anchor="t">
+          <a:bodyPr wrap="square" lIns="0" rIns="0" tIns="0" bIns="0" anchor="t">
             <a:spAutoFit/>
           </a:bodyPr>
           <a:lstStyle/>
@@ -5144,7 +5144,7 @@
           <a:noFill/>
         </p:spPr>
         <p:txBody>
-          <a:bodyPr wrap="none" lIns="0" rIns="0" tIns="0" bIns="0" anchor="t">
+          <a:bodyPr wrap="square" lIns="0" rIns="0" tIns="0" bIns="0" anchor="t">
             <a:spAutoFit/>
           </a:bodyPr>
           <a:lstStyle/>
@@ -5161,7 +5161,7 @@
                 </a:solidFill>
                 <a:latin typeface="Outfit"/>
               </a:rPr>
-              <a:t>Ci dice se il Disegno è tutto collegato, e come</a:t>
+              <a:t>Ci dice se il Disegno è tutto collegato, e come </a:t>
             </a:r>
           </a:p>
           <a:p>
@@ -5205,7 +5205,7 @@
           </a:ln>
         </p:spPr>
         <p:txBody>
-          <a:bodyPr wrap="none" lIns="114300" rIns="114300" tIns="57150" bIns="57150" anchor="t">
+          <a:bodyPr wrap="square" lIns="114300" rIns="114300" tIns="57150" bIns="57150" anchor="t">
             <a:spAutoFit/>
           </a:bodyPr>
           <a:lstStyle/>
@@ -5244,7 +5244,7 @@
           <a:noFill/>
         </p:spPr>
         <p:txBody>
-          <a:bodyPr wrap="none" lIns="0" rIns="0" tIns="0" bIns="0" anchor="t">
+          <a:bodyPr wrap="square" lIns="0" rIns="0" tIns="0" bIns="0" anchor="t">
             <a:spAutoFit/>
           </a:bodyPr>
           <a:lstStyle/>
@@ -5283,7 +5283,7 @@
           <a:noFill/>
         </p:spPr>
         <p:txBody>
-          <a:bodyPr wrap="none" lIns="0" rIns="0" tIns="0" bIns="0" anchor="t">
+          <a:bodyPr wrap="square" lIns="0" rIns="0" tIns="0" bIns="0" anchor="t">
             <a:spAutoFit/>
           </a:bodyPr>
           <a:lstStyle/>
@@ -5420,7 +5420,7 @@
           <a:noFill/>
         </p:spPr>
         <p:txBody>
-          <a:bodyPr wrap="none" lIns="0" rIns="0" tIns="0" bIns="0" anchor="t">
+          <a:bodyPr wrap="square" lIns="0" rIns="0" tIns="0" bIns="0" anchor="t">
             <a:spAutoFit/>
           </a:bodyPr>
           <a:lstStyle/>
@@ -5459,7 +5459,7 @@
           <a:noFill/>
         </p:spPr>
         <p:txBody>
-          <a:bodyPr wrap="none" lIns="0" rIns="0" tIns="0" bIns="0" anchor="t">
+          <a:bodyPr wrap="square" lIns="0" rIns="0" tIns="0" bIns="0" anchor="t">
             <a:spAutoFit/>
           </a:bodyPr>
           <a:lstStyle/>
@@ -5498,7 +5498,7 @@
           <a:noFill/>
         </p:spPr>
         <p:txBody>
-          <a:bodyPr wrap="none" lIns="0" rIns="0" tIns="0" bIns="0" anchor="t">
+          <a:bodyPr wrap="square" lIns="0" rIns="0" tIns="0" bIns="0" anchor="t">
             <a:spAutoFit/>
           </a:bodyPr>
           <a:lstStyle/>
@@ -5537,7 +5537,7 @@
           <a:noFill/>
         </p:spPr>
         <p:txBody>
-          <a:bodyPr wrap="none" lIns="0" rIns="0" tIns="0" bIns="0" anchor="t">
+          <a:bodyPr wrap="square" lIns="0" rIns="0" tIns="0" bIns="0" anchor="t">
             <a:spAutoFit/>
           </a:bodyPr>
           <a:lstStyle/>
@@ -5576,7 +5576,7 @@
           <a:noFill/>
         </p:spPr>
         <p:txBody>
-          <a:bodyPr wrap="none" lIns="0" rIns="0" tIns="0" bIns="0" anchor="t">
+          <a:bodyPr wrap="square" lIns="0" rIns="0" tIns="0" bIns="0" anchor="t">
             <a:spAutoFit/>
           </a:bodyPr>
           <a:lstStyle/>
@@ -5631,7 +5631,7 @@
           <a:noFill/>
         </p:spPr>
         <p:txBody>
-          <a:bodyPr wrap="none" lIns="0" rIns="0" tIns="0" bIns="0" anchor="t">
+          <a:bodyPr wrap="square" lIns="0" rIns="0" tIns="0" bIns="0" anchor="t">
             <a:spAutoFit/>
           </a:bodyPr>
           <a:lstStyle/>
@@ -5670,7 +5670,7 @@
           <a:noFill/>
         </p:spPr>
         <p:txBody>
-          <a:bodyPr wrap="none" lIns="0" rIns="0" tIns="0" bIns="0" anchor="t">
+          <a:bodyPr wrap="square" lIns="0" rIns="0" tIns="0" bIns="0" anchor="t">
             <a:spAutoFit/>
           </a:bodyPr>
           <a:lstStyle/>
@@ -5725,7 +5725,7 @@
           <a:noFill/>
         </p:spPr>
         <p:txBody>
-          <a:bodyPr wrap="none" lIns="0" rIns="0" tIns="0" bIns="0" anchor="t">
+          <a:bodyPr wrap="square" lIns="0" rIns="0" tIns="0" bIns="0" anchor="t">
             <a:spAutoFit/>
           </a:bodyPr>
           <a:lstStyle/>
@@ -5764,7 +5764,7 @@
           <a:noFill/>
         </p:spPr>
         <p:txBody>
-          <a:bodyPr wrap="none" lIns="0" rIns="0" tIns="0" bIns="0" anchor="t">
+          <a:bodyPr wrap="square" lIns="0" rIns="0" tIns="0" bIns="0" anchor="t">
             <a:spAutoFit/>
           </a:bodyPr>
           <a:lstStyle/>
@@ -5819,7 +5819,7 @@
           <a:noFill/>
         </p:spPr>
         <p:txBody>
-          <a:bodyPr wrap="none" lIns="0" rIns="0" tIns="0" bIns="0" anchor="t">
+          <a:bodyPr wrap="square" lIns="0" rIns="0" tIns="0" bIns="0" anchor="t">
             <a:spAutoFit/>
           </a:bodyPr>
           <a:lstStyle/>
@@ -5858,7 +5858,7 @@
           <a:noFill/>
         </p:spPr>
         <p:txBody>
-          <a:bodyPr wrap="none" lIns="0" rIns="0" tIns="0" bIns="0" anchor="t">
+          <a:bodyPr wrap="square" lIns="0" rIns="0" tIns="0" bIns="0" anchor="t">
             <a:spAutoFit/>
           </a:bodyPr>
           <a:lstStyle/>
@@ -5913,7 +5913,7 @@
           <a:noFill/>
         </p:spPr>
         <p:txBody>
-          <a:bodyPr wrap="none" lIns="0" rIns="0" tIns="0" bIns="0" anchor="t">
+          <a:bodyPr wrap="square" lIns="0" rIns="0" tIns="0" bIns="0" anchor="t">
             <a:spAutoFit/>
           </a:bodyPr>
           <a:lstStyle/>
@@ -5952,7 +5952,7 @@
           <a:noFill/>
         </p:spPr>
         <p:txBody>
-          <a:bodyPr wrap="none" lIns="0" rIns="0" tIns="0" bIns="0" anchor="t">
+          <a:bodyPr wrap="square" lIns="0" rIns="0" tIns="0" bIns="0" anchor="t">
             <a:spAutoFit/>
           </a:bodyPr>
           <a:lstStyle/>
@@ -6007,7 +6007,7 @@
           <a:noFill/>
         </p:spPr>
         <p:txBody>
-          <a:bodyPr wrap="none" lIns="0" rIns="0" tIns="0" bIns="0" anchor="t">
+          <a:bodyPr wrap="square" lIns="0" rIns="0" tIns="0" bIns="0" anchor="t">
             <a:spAutoFit/>
           </a:bodyPr>
           <a:lstStyle/>
@@ -6046,7 +6046,7 @@
           <a:noFill/>
         </p:spPr>
         <p:txBody>
-          <a:bodyPr wrap="none" lIns="0" rIns="0" tIns="0" bIns="0" anchor="t">
+          <a:bodyPr wrap="square" lIns="0" rIns="0" tIns="0" bIns="0" anchor="t">
             <a:spAutoFit/>
           </a:bodyPr>
           <a:lstStyle/>
@@ -6546,7 +6546,7 @@
           <a:noFill/>
         </p:spPr>
         <p:txBody>
-          <a:bodyPr wrap="none" lIns="0" rIns="0" tIns="0" bIns="0" anchor="t">
+          <a:bodyPr wrap="square" lIns="0" rIns="0" tIns="0" bIns="0" anchor="t">
             <a:spAutoFit/>
           </a:bodyPr>
           <a:lstStyle/>
@@ -6585,7 +6585,7 @@
           <a:noFill/>
         </p:spPr>
         <p:txBody>
-          <a:bodyPr wrap="none" lIns="0" rIns="0" tIns="0" bIns="0" anchor="t">
+          <a:bodyPr wrap="square" lIns="0" rIns="0" tIns="0" bIns="0" anchor="t">
             <a:spAutoFit/>
           </a:bodyPr>
           <a:lstStyle/>
@@ -6624,7 +6624,7 @@
           <a:noFill/>
         </p:spPr>
         <p:txBody>
-          <a:bodyPr wrap="none" lIns="0" rIns="0" tIns="0" bIns="0" anchor="t">
+          <a:bodyPr wrap="square" lIns="0" rIns="0" tIns="0" bIns="0" anchor="t">
             <a:spAutoFit/>
           </a:bodyPr>
           <a:lstStyle/>
@@ -6663,7 +6663,7 @@
           <a:noFill/>
         </p:spPr>
         <p:txBody>
-          <a:bodyPr wrap="none" lIns="0" rIns="0" tIns="0" bIns="0" anchor="t">
+          <a:bodyPr wrap="square" lIns="0" rIns="0" tIns="0" bIns="0" anchor="t">
             <a:spAutoFit/>
           </a:bodyPr>
           <a:lstStyle/>
@@ -6702,7 +6702,7 @@
           <a:noFill/>
         </p:spPr>
         <p:txBody>
-          <a:bodyPr wrap="none" lIns="0" rIns="0" tIns="0" bIns="0" anchor="t">
+          <a:bodyPr wrap="square" lIns="0" rIns="0" tIns="0" bIns="0" anchor="t">
             <a:spAutoFit/>
           </a:bodyPr>
           <a:lstStyle/>
@@ -6741,7 +6741,7 @@
           <a:noFill/>
         </p:spPr>
         <p:txBody>
-          <a:bodyPr wrap="none" lIns="0" rIns="0" tIns="0" bIns="0" anchor="t">
+          <a:bodyPr wrap="square" lIns="0" rIns="0" tIns="0" bIns="0" anchor="t">
             <a:spAutoFit/>
           </a:bodyPr>
           <a:lstStyle/>
@@ -6780,7 +6780,7 @@
           <a:noFill/>
         </p:spPr>
         <p:txBody>
-          <a:bodyPr wrap="none" lIns="0" rIns="0" tIns="0" bIns="0" anchor="t">
+          <a:bodyPr wrap="square" lIns="0" rIns="0" tIns="0" bIns="0" anchor="t">
             <a:spAutoFit/>
           </a:bodyPr>
           <a:lstStyle/>
@@ -6819,7 +6819,7 @@
           <a:noFill/>
         </p:spPr>
         <p:txBody>
-          <a:bodyPr wrap="none" lIns="0" rIns="0" tIns="0" bIns="0" anchor="t">
+          <a:bodyPr wrap="square" lIns="0" rIns="0" tIns="0" bIns="0" anchor="t">
             <a:spAutoFit/>
           </a:bodyPr>
           <a:lstStyle/>
@@ -6858,7 +6858,7 @@
           <a:noFill/>
         </p:spPr>
         <p:txBody>
-          <a:bodyPr wrap="none" lIns="0" rIns="0" tIns="0" bIns="0" anchor="t">
+          <a:bodyPr wrap="square" lIns="0" rIns="0" tIns="0" bIns="0" anchor="t">
             <a:spAutoFit/>
           </a:bodyPr>
           <a:lstStyle/>
@@ -6897,7 +6897,7 @@
           <a:noFill/>
         </p:spPr>
         <p:txBody>
-          <a:bodyPr wrap="none" lIns="0" rIns="0" tIns="0" bIns="0" anchor="t">
+          <a:bodyPr wrap="square" lIns="0" rIns="0" tIns="0" bIns="0" anchor="t">
             <a:spAutoFit/>
           </a:bodyPr>
           <a:lstStyle/>
@@ -6936,7 +6936,7 @@
           <a:noFill/>
         </p:spPr>
         <p:txBody>
-          <a:bodyPr wrap="none" lIns="0" rIns="0" tIns="0" bIns="0" anchor="t">
+          <a:bodyPr wrap="square" lIns="0" rIns="0" tIns="0" bIns="0" anchor="t">
             <a:spAutoFit/>
           </a:bodyPr>
           <a:lstStyle/>
@@ -6975,7 +6975,7 @@
           <a:noFill/>
         </p:spPr>
         <p:txBody>
-          <a:bodyPr wrap="none" lIns="0" rIns="0" tIns="0" bIns="0" anchor="t">
+          <a:bodyPr wrap="square" lIns="0" rIns="0" tIns="0" bIns="0" anchor="t">
             <a:spAutoFit/>
           </a:bodyPr>
           <a:lstStyle/>
@@ -7014,7 +7014,7 @@
           <a:noFill/>
         </p:spPr>
         <p:txBody>
-          <a:bodyPr wrap="none" lIns="0" rIns="0" tIns="0" bIns="0" anchor="t">
+          <a:bodyPr wrap="square" lIns="0" rIns="0" tIns="0" bIns="0" anchor="t">
             <a:spAutoFit/>
           </a:bodyPr>
           <a:lstStyle/>
@@ -7053,7 +7053,7 @@
           <a:noFill/>
         </p:spPr>
         <p:txBody>
-          <a:bodyPr wrap="none" lIns="0" rIns="0" tIns="0" bIns="0" anchor="t">
+          <a:bodyPr wrap="square" lIns="0" rIns="0" tIns="0" bIns="0" anchor="t">
             <a:spAutoFit/>
           </a:bodyPr>
           <a:lstStyle/>
@@ -7190,7 +7190,7 @@
           <a:noFill/>
         </p:spPr>
         <p:txBody>
-          <a:bodyPr wrap="none" lIns="0" rIns="0" tIns="0" bIns="0" anchor="t">
+          <a:bodyPr wrap="square" lIns="0" rIns="0" tIns="0" bIns="0" anchor="t">
             <a:spAutoFit/>
           </a:bodyPr>
           <a:lstStyle/>
@@ -7229,7 +7229,7 @@
           <a:noFill/>
         </p:spPr>
         <p:txBody>
-          <a:bodyPr wrap="none" lIns="0" rIns="0" tIns="0" bIns="0" anchor="t">
+          <a:bodyPr wrap="square" lIns="0" rIns="0" tIns="0" bIns="0" anchor="t">
             <a:spAutoFit/>
           </a:bodyPr>
           <a:lstStyle/>
@@ -7268,7 +7268,7 @@
           <a:noFill/>
         </p:spPr>
         <p:txBody>
-          <a:bodyPr wrap="none" lIns="0" rIns="0" tIns="0" bIns="0" anchor="t">
+          <a:bodyPr wrap="square" lIns="0" rIns="0" tIns="0" bIns="0" anchor="t">
             <a:spAutoFit/>
           </a:bodyPr>
           <a:lstStyle/>
@@ -7285,7 +7285,7 @@
                 </a:solidFill>
                 <a:latin typeface="Outfit"/>
               </a:rPr>
-              <a:t>ESISTONO DIVERSI STRATI DI SINTESI, DI CUI TRE SONO QUELLI</a:t>
+              <a:t>ESISTONO DIVERSI STRATI DI SINTESI, DI CUI TRE SONO QUELLI </a:t>
             </a:r>
           </a:p>
           <a:p>
@@ -7323,7 +7323,7 @@
           <a:noFill/>
         </p:spPr>
         <p:txBody>
-          <a:bodyPr wrap="none" lIns="0" rIns="0" tIns="0" bIns="0" anchor="t">
+          <a:bodyPr wrap="square" lIns="0" rIns="0" tIns="0" bIns="0" anchor="t">
             <a:spAutoFit/>
           </a:bodyPr>
           <a:lstStyle/>
@@ -7362,7 +7362,7 @@
           <a:noFill/>
         </p:spPr>
         <p:txBody>
-          <a:bodyPr wrap="none" lIns="0" rIns="0" tIns="0" bIns="0" anchor="t">
+          <a:bodyPr wrap="square" lIns="0" rIns="0" tIns="0" bIns="0" anchor="t">
             <a:spAutoFit/>
           </a:bodyPr>
           <a:lstStyle/>
@@ -7397,7 +7397,7 @@
           <a:noFill/>
         </p:spPr>
         <p:txBody>
-          <a:bodyPr wrap="none" lIns="0" rIns="0" tIns="0" bIns="0" anchor="t">
+          <a:bodyPr wrap="square" lIns="0" rIns="0" tIns="0" bIns="0" anchor="t">
             <a:spAutoFit/>
           </a:bodyPr>
           <a:lstStyle/>
@@ -7436,7 +7436,7 @@
           <a:noFill/>
         </p:spPr>
         <p:txBody>
-          <a:bodyPr wrap="none" lIns="0" rIns="0" tIns="0" bIns="0" anchor="t">
+          <a:bodyPr wrap="square" lIns="0" rIns="0" tIns="0" bIns="0" anchor="t">
             <a:spAutoFit/>
           </a:bodyPr>
           <a:lstStyle/>
@@ -7471,7 +7471,7 @@
           <a:noFill/>
         </p:spPr>
         <p:txBody>
-          <a:bodyPr wrap="none" lIns="0" rIns="0" tIns="0" bIns="0" anchor="t">
+          <a:bodyPr wrap="square" lIns="0" rIns="0" tIns="0" bIns="0" anchor="t">
             <a:spAutoFit/>
           </a:bodyPr>
           <a:lstStyle/>
@@ -7510,7 +7510,7 @@
           <a:noFill/>
         </p:spPr>
         <p:txBody>
-          <a:bodyPr wrap="none" lIns="0" rIns="0" tIns="0" bIns="0" anchor="t">
+          <a:bodyPr wrap="square" lIns="0" rIns="0" tIns="0" bIns="0" anchor="t">
             <a:spAutoFit/>
           </a:bodyPr>
           <a:lstStyle/>
@@ -7545,7 +7545,7 @@
           <a:noFill/>
         </p:spPr>
         <p:txBody>
-          <a:bodyPr wrap="none" lIns="0" rIns="0" tIns="0" bIns="0" anchor="t">
+          <a:bodyPr wrap="square" lIns="0" rIns="0" tIns="0" bIns="0" anchor="t">
             <a:spAutoFit/>
           </a:bodyPr>
           <a:lstStyle/>
@@ -7584,7 +7584,7 @@
           <a:noFill/>
         </p:spPr>
         <p:txBody>
-          <a:bodyPr wrap="none" lIns="0" rIns="0" tIns="0" bIns="0" anchor="t">
+          <a:bodyPr wrap="square" lIns="0" rIns="0" tIns="0" bIns="0" anchor="t">
             <a:spAutoFit/>
           </a:bodyPr>
           <a:lstStyle/>
@@ -7769,7 +7769,7 @@
           <a:noFill/>
         </p:spPr>
         <p:txBody>
-          <a:bodyPr wrap="none" lIns="0" rIns="0" tIns="0" bIns="0" anchor="t">
+          <a:bodyPr wrap="square" lIns="0" rIns="0" tIns="0" bIns="0" anchor="t">
             <a:spAutoFit/>
           </a:bodyPr>
           <a:lstStyle/>
@@ -7808,7 +7808,7 @@
           <a:noFill/>
         </p:spPr>
         <p:txBody>
-          <a:bodyPr wrap="none" lIns="0" rIns="0" tIns="0" bIns="0" anchor="t">
+          <a:bodyPr wrap="square" lIns="0" rIns="0" tIns="0" bIns="0" anchor="t">
             <a:spAutoFit/>
           </a:bodyPr>
           <a:lstStyle/>
@@ -7847,7 +7847,7 @@
           <a:noFill/>
         </p:spPr>
         <p:txBody>
-          <a:bodyPr wrap="none" lIns="0" rIns="0" tIns="0" bIns="0" anchor="t">
+          <a:bodyPr wrap="square" lIns="0" rIns="0" tIns="0" bIns="0" anchor="t">
             <a:spAutoFit/>
           </a:bodyPr>
           <a:lstStyle/>
@@ -7873,7 +7873,7 @@
                 </a:solidFill>
                 <a:latin typeface="Outfit"/>
               </a:rPr>
-              <a:t>· Mappa genetica inconscia</a:t>
+              <a:t> · Mappa genetica inconscia</a:t>
             </a:r>
           </a:p>
         </p:txBody>
@@ -7895,7 +7895,7 @@
           <a:noFill/>
         </p:spPr>
         <p:txBody>
-          <a:bodyPr wrap="none" lIns="0" rIns="0" tIns="0" bIns="0" anchor="t">
+          <a:bodyPr wrap="square" lIns="0" rIns="0" tIns="0" bIns="0" anchor="t">
             <a:spAutoFit/>
           </a:bodyPr>
           <a:lstStyle/>
@@ -7934,7 +7934,7 @@
           <a:noFill/>
         </p:spPr>
         <p:txBody>
-          <a:bodyPr wrap="none" lIns="0" rIns="0" tIns="0" bIns="0" anchor="t">
+          <a:bodyPr wrap="square" lIns="0" rIns="0" tIns="0" bIns="0" anchor="t">
             <a:spAutoFit/>
           </a:bodyPr>
           <a:lstStyle/>
@@ -7960,7 +7960,7 @@
                 </a:solidFill>
                 <a:latin typeface="Outfit"/>
               </a:rPr>
-              <a:t>· Mappa della personalità conscia</a:t>
+              <a:t> · Mappa della personalità conscia</a:t>
             </a:r>
           </a:p>
         </p:txBody>
@@ -7982,7 +7982,7 @@
           <a:noFill/>
         </p:spPr>
         <p:txBody>
-          <a:bodyPr wrap="none" lIns="0" rIns="0" tIns="0" bIns="0" anchor="t">
+          <a:bodyPr wrap="square" lIns="0" rIns="0" tIns="0" bIns="0" anchor="t">
             <a:spAutoFit/>
           </a:bodyPr>
           <a:lstStyle/>
@@ -8021,7 +8021,7 @@
           <a:noFill/>
         </p:spPr>
         <p:txBody>
-          <a:bodyPr wrap="none" lIns="0" rIns="0" tIns="0" bIns="0" anchor="t">
+          <a:bodyPr wrap="square" lIns="0" rIns="0" tIns="0" bIns="0" anchor="t">
             <a:spAutoFit/>
           </a:bodyPr>
           <a:lstStyle/>
@@ -8047,7 +8047,7 @@
                 </a:solidFill>
                 <a:latin typeface="Outfit"/>
               </a:rPr>
-              <a:t>· Canali e centri definiti</a:t>
+              <a:t> · Canali e centri definiti</a:t>
             </a:r>
           </a:p>
         </p:txBody>
@@ -8069,7 +8069,7 @@
           <a:noFill/>
         </p:spPr>
         <p:txBody>
-          <a:bodyPr wrap="none" lIns="0" rIns="0" tIns="0" bIns="0" anchor="t">
+          <a:bodyPr wrap="square" lIns="0" rIns="0" tIns="0" bIns="0" anchor="t">
             <a:spAutoFit/>
           </a:bodyPr>
           <a:lstStyle/>
@@ -8108,7 +8108,7 @@
           <a:noFill/>
         </p:spPr>
         <p:txBody>
-          <a:bodyPr wrap="none" lIns="0" rIns="0" tIns="0" bIns="0" anchor="t">
+          <a:bodyPr wrap="square" lIns="0" rIns="0" tIns="0" bIns="0" anchor="t">
             <a:spAutoFit/>
           </a:bodyPr>
           <a:lstStyle/>
@@ -8245,7 +8245,7 @@
           <a:noFill/>
         </p:spPr>
         <p:txBody>
-          <a:bodyPr wrap="none" lIns="0" rIns="0" tIns="0" bIns="0" anchor="t">
+          <a:bodyPr wrap="square" lIns="0" rIns="0" tIns="0" bIns="0" anchor="t">
             <a:spAutoFit/>
           </a:bodyPr>
           <a:lstStyle/>
@@ -8284,7 +8284,7 @@
           <a:noFill/>
         </p:spPr>
         <p:txBody>
-          <a:bodyPr wrap="none" lIns="0" rIns="0" tIns="0" bIns="0" anchor="t">
+          <a:bodyPr wrap="square" lIns="0" rIns="0" tIns="0" bIns="0" anchor="t">
             <a:spAutoFit/>
           </a:bodyPr>
           <a:lstStyle/>
@@ -8323,7 +8323,7 @@
           <a:noFill/>
         </p:spPr>
         <p:txBody>
-          <a:bodyPr wrap="none" lIns="0" rIns="0" tIns="0" bIns="0" anchor="t">
+          <a:bodyPr wrap="square" lIns="0" rIns="0" tIns="0" bIns="0" anchor="t">
             <a:spAutoFit/>
           </a:bodyPr>
           <a:lstStyle/>
@@ -8362,7 +8362,7 @@
           <a:noFill/>
         </p:spPr>
         <p:txBody>
-          <a:bodyPr wrap="none" lIns="0" rIns="0" tIns="0" bIns="0" anchor="t">
+          <a:bodyPr wrap="square" lIns="0" rIns="0" tIns="0" bIns="0" anchor="t">
             <a:spAutoFit/>
           </a:bodyPr>
           <a:lstStyle/>
@@ -8379,7 +8379,7 @@
                 </a:solidFill>
                 <a:latin typeface="Outfit"/>
               </a:rPr>
-              <a:t>Quando due porte definite si incontrano, creano un</a:t>
+              <a:t>Quando due porte definite si incontrano, creano un </a:t>
             </a:r>
           </a:p>
           <a:p>
@@ -8395,7 +8395,7 @@
                 </a:solidFill>
                 <a:latin typeface="Outfit"/>
               </a:rPr>
-              <a:t>canale. Quel canale determina un punto di forza, definito</a:t>
+              <a:t>canale. Quel canale determina un punto di forza, definito </a:t>
             </a:r>
           </a:p>
           <a:p>
@@ -8411,7 +8411,7 @@
                 </a:solidFill>
                 <a:latin typeface="Outfit"/>
               </a:rPr>
-              <a:t>da un circuito di energia coerente, che a sua volta</a:t>
+              <a:t>da un circuito di energia coerente, che a sua volta </a:t>
             </a:r>
           </a:p>
           <a:p>
@@ -8455,7 +8455,7 @@
           </a:ln>
         </p:spPr>
         <p:txBody>
-          <a:bodyPr wrap="none" lIns="114300" rIns="114300" tIns="57150" bIns="57150" anchor="t">
+          <a:bodyPr wrap="square" lIns="114300" rIns="114300" tIns="57150" bIns="57150" anchor="t">
             <a:spAutoFit/>
           </a:bodyPr>
           <a:lstStyle/>
@@ -8494,7 +8494,7 @@
           <a:noFill/>
         </p:spPr>
         <p:txBody>
-          <a:bodyPr wrap="none" lIns="0" rIns="0" tIns="0" bIns="0" anchor="t">
+          <a:bodyPr wrap="square" lIns="0" rIns="0" tIns="0" bIns="0" anchor="t">
             <a:spAutoFit/>
           </a:bodyPr>
           <a:lstStyle/>
@@ -8533,7 +8533,7 @@
           <a:noFill/>
         </p:spPr>
         <p:txBody>
-          <a:bodyPr wrap="none" lIns="0" rIns="0" tIns="0" bIns="0" anchor="t">
+          <a:bodyPr wrap="square" lIns="0" rIns="0" tIns="0" bIns="0" anchor="t">
             <a:spAutoFit/>
           </a:bodyPr>
           <a:lstStyle/>
@@ -8742,7 +8742,7 @@
           <a:noFill/>
         </p:spPr>
         <p:txBody>
-          <a:bodyPr wrap="none" lIns="0" rIns="0" tIns="0" bIns="0" anchor="t">
+          <a:bodyPr wrap="square" lIns="0" rIns="0" tIns="0" bIns="0" anchor="t">
             <a:spAutoFit/>
           </a:bodyPr>
           <a:lstStyle/>
@@ -8781,7 +8781,7 @@
           <a:noFill/>
         </p:spPr>
         <p:txBody>
-          <a:bodyPr wrap="none" lIns="0" rIns="0" tIns="0" bIns="0" anchor="t">
+          <a:bodyPr wrap="square" lIns="0" rIns="0" tIns="0" bIns="0" anchor="t">
             <a:spAutoFit/>
           </a:bodyPr>
           <a:lstStyle/>
@@ -8820,7 +8820,7 @@
           <a:noFill/>
         </p:spPr>
         <p:txBody>
-          <a:bodyPr wrap="none" lIns="0" rIns="0" tIns="0" bIns="0" anchor="t">
+          <a:bodyPr wrap="square" lIns="0" rIns="0" tIns="0" bIns="0" anchor="t">
             <a:spAutoFit/>
           </a:bodyPr>
           <a:lstStyle/>
@@ -8875,7 +8875,7 @@
           <a:noFill/>
         </p:spPr>
         <p:txBody>
-          <a:bodyPr wrap="none" lIns="0" rIns="0" tIns="0" bIns="0" anchor="t">
+          <a:bodyPr wrap="square" lIns="0" rIns="0" tIns="0" bIns="0" anchor="t">
             <a:spAutoFit/>
           </a:bodyPr>
           <a:lstStyle/>
@@ -8930,7 +8930,7 @@
           <a:noFill/>
         </p:spPr>
         <p:txBody>
-          <a:bodyPr wrap="none" lIns="0" rIns="0" tIns="0" bIns="0" anchor="t">
+          <a:bodyPr wrap="square" lIns="0" rIns="0" tIns="0" bIns="0" anchor="t">
             <a:spAutoFit/>
           </a:bodyPr>
           <a:lstStyle/>
@@ -8985,7 +8985,7 @@
           <a:noFill/>
         </p:spPr>
         <p:txBody>
-          <a:bodyPr wrap="none" lIns="0" rIns="0" tIns="0" bIns="0" anchor="t">
+          <a:bodyPr wrap="square" lIns="0" rIns="0" tIns="0" bIns="0" anchor="t">
             <a:spAutoFit/>
           </a:bodyPr>
           <a:lstStyle/>
@@ -9040,7 +9040,7 @@
           <a:noFill/>
         </p:spPr>
         <p:txBody>
-          <a:bodyPr wrap="none" lIns="0" rIns="0" tIns="0" bIns="0" anchor="t">
+          <a:bodyPr wrap="square" lIns="0" rIns="0" tIns="0" bIns="0" anchor="t">
             <a:spAutoFit/>
           </a:bodyPr>
           <a:lstStyle/>
@@ -9079,7 +9079,7 @@
           <a:noFill/>
         </p:spPr>
         <p:txBody>
-          <a:bodyPr wrap="none" lIns="0" rIns="0" tIns="0" bIns="0" anchor="t">
+          <a:bodyPr wrap="square" lIns="0" rIns="0" tIns="0" bIns="0" anchor="t">
             <a:spAutoFit/>
           </a:bodyPr>
           <a:lstStyle/>
@@ -9118,7 +9118,7 @@
           <a:noFill/>
         </p:spPr>
         <p:txBody>
-          <a:bodyPr wrap="none" lIns="0" rIns="0" tIns="0" bIns="0" anchor="t">
+          <a:bodyPr wrap="square" lIns="0" rIns="0" tIns="0" bIns="0" anchor="t">
             <a:spAutoFit/>
           </a:bodyPr>
           <a:lstStyle/>
@@ -9599,7 +9599,7 @@
           <a:noFill/>
         </p:spPr>
         <p:txBody>
-          <a:bodyPr wrap="none" lIns="0" rIns="0" tIns="0" bIns="0" anchor="t">
+          <a:bodyPr wrap="square" lIns="0" rIns="0" tIns="0" bIns="0" anchor="t">
             <a:spAutoFit/>
           </a:bodyPr>
           <a:lstStyle/>
@@ -9638,7 +9638,7 @@
           <a:noFill/>
         </p:spPr>
         <p:txBody>
-          <a:bodyPr wrap="none" lIns="0" rIns="0" tIns="0" bIns="0" anchor="t">
+          <a:bodyPr wrap="square" lIns="0" rIns="0" tIns="0" bIns="0" anchor="t">
             <a:spAutoFit/>
           </a:bodyPr>
           <a:lstStyle/>
@@ -9677,7 +9677,7 @@
           <a:noFill/>
         </p:spPr>
         <p:txBody>
-          <a:bodyPr wrap="none" lIns="0" rIns="0" tIns="0" bIns="0" anchor="t">
+          <a:bodyPr wrap="square" lIns="0" rIns="0" tIns="0" bIns="0" anchor="t">
             <a:spAutoFit/>
           </a:bodyPr>
           <a:lstStyle/>
@@ -9732,7 +9732,7 @@
           <a:noFill/>
         </p:spPr>
         <p:txBody>
-          <a:bodyPr wrap="none" lIns="0" rIns="0" tIns="0" bIns="0" anchor="t">
+          <a:bodyPr wrap="square" lIns="0" rIns="0" tIns="0" bIns="0" anchor="t">
             <a:spAutoFit/>
           </a:bodyPr>
           <a:lstStyle/>
@@ -9771,7 +9771,7 @@
           <a:noFill/>
         </p:spPr>
         <p:txBody>
-          <a:bodyPr wrap="none" lIns="0" rIns="0" tIns="0" bIns="0" anchor="t">
+          <a:bodyPr wrap="square" lIns="0" rIns="0" tIns="0" bIns="0" anchor="t">
             <a:spAutoFit/>
           </a:bodyPr>
           <a:lstStyle/>
@@ -9810,7 +9810,7 @@
           <a:noFill/>
         </p:spPr>
         <p:txBody>
-          <a:bodyPr wrap="none" lIns="0" rIns="0" tIns="0" bIns="0" anchor="t">
+          <a:bodyPr wrap="square" lIns="0" rIns="0" tIns="0" bIns="0" anchor="t">
             <a:spAutoFit/>
           </a:bodyPr>
           <a:lstStyle/>
@@ -9849,7 +9849,7 @@
           <a:noFill/>
         </p:spPr>
         <p:txBody>
-          <a:bodyPr wrap="none" lIns="0" rIns="0" tIns="0" bIns="0" anchor="t">
+          <a:bodyPr wrap="square" lIns="0" rIns="0" tIns="0" bIns="0" anchor="t">
             <a:spAutoFit/>
           </a:bodyPr>
           <a:lstStyle/>
@@ -9894,7 +9894,7 @@
           </a:ln>
         </p:spPr>
         <p:txBody>
-          <a:bodyPr wrap="none" lIns="114300" rIns="114300" tIns="57150" bIns="57150" anchor="t">
+          <a:bodyPr wrap="square" lIns="114300" rIns="114300" tIns="57150" bIns="57150" anchor="t">
             <a:spAutoFit/>
           </a:bodyPr>
           <a:lstStyle/>
@@ -9933,7 +9933,7 @@
           <a:noFill/>
         </p:spPr>
         <p:txBody>
-          <a:bodyPr wrap="none" lIns="0" rIns="0" tIns="0" bIns="0" anchor="t">
+          <a:bodyPr wrap="square" lIns="0" rIns="0" tIns="0" bIns="0" anchor="t">
             <a:spAutoFit/>
           </a:bodyPr>
           <a:lstStyle/>
@@ -9988,7 +9988,7 @@
           <a:noFill/>
         </p:spPr>
         <p:txBody>
-          <a:bodyPr wrap="none" lIns="0" rIns="0" tIns="0" bIns="0" anchor="t">
+          <a:bodyPr wrap="square" lIns="0" rIns="0" tIns="0" bIns="0" anchor="t">
             <a:spAutoFit/>
           </a:bodyPr>
           <a:lstStyle/>
@@ -10027,7 +10027,7 @@
           <a:noFill/>
         </p:spPr>
         <p:txBody>
-          <a:bodyPr wrap="none" lIns="0" rIns="0" tIns="0" bIns="0" anchor="t">
+          <a:bodyPr wrap="square" lIns="0" rIns="0" tIns="0" bIns="0" anchor="t">
             <a:spAutoFit/>
           </a:bodyPr>
           <a:lstStyle/>
@@ -10066,7 +10066,7 @@
           <a:noFill/>
         </p:spPr>
         <p:txBody>
-          <a:bodyPr wrap="none" lIns="0" rIns="0" tIns="0" bIns="0" anchor="t">
+          <a:bodyPr wrap="square" lIns="0" rIns="0" tIns="0" bIns="0" anchor="t">
             <a:spAutoFit/>
           </a:bodyPr>
           <a:lstStyle/>
@@ -10083,7 +10083,7 @@
                 </a:solidFill>
                 <a:latin typeface="Outfit"/>
               </a:rPr>
-              <a:t>Una forma incoerente e inaffidabile di</a:t>
+              <a:t>Una forma incoerente e inaffidabile di </a:t>
             </a:r>
           </a:p>
           <a:p>
@@ -10121,7 +10121,7 @@
           <a:noFill/>
         </p:spPr>
         <p:txBody>
-          <a:bodyPr wrap="none" lIns="0" rIns="0" tIns="0" bIns="0" anchor="t">
+          <a:bodyPr wrap="square" lIns="0" rIns="0" tIns="0" bIns="0" anchor="t">
             <a:spAutoFit/>
           </a:bodyPr>
           <a:lstStyle/>
@@ -10166,7 +10166,7 @@
           </a:ln>
         </p:spPr>
         <p:txBody>
-          <a:bodyPr wrap="none" lIns="114300" rIns="114300" tIns="57150" bIns="57150" anchor="t">
+          <a:bodyPr wrap="square" lIns="114300" rIns="114300" tIns="57150" bIns="57150" anchor="t">
             <a:spAutoFit/>
           </a:bodyPr>
           <a:lstStyle/>
@@ -10205,7 +10205,7 @@
           <a:noFill/>
         </p:spPr>
         <p:txBody>
-          <a:bodyPr wrap="none" lIns="0" rIns="0" tIns="0" bIns="0" anchor="t">
+          <a:bodyPr wrap="square" lIns="0" rIns="0" tIns="0" bIns="0" anchor="t">
             <a:spAutoFit/>
           </a:bodyPr>
           <a:lstStyle/>
@@ -10244,7 +10244,7 @@
           <a:noFill/>
         </p:spPr>
         <p:txBody>
-          <a:bodyPr wrap="none" lIns="0" rIns="0" tIns="0" bIns="0" anchor="t">
+          <a:bodyPr wrap="square" lIns="0" rIns="0" tIns="0" bIns="0" anchor="t">
             <a:spAutoFit/>
           </a:bodyPr>
           <a:lstStyle/>
@@ -10405,7 +10405,7 @@
           <a:noFill/>
         </p:spPr>
         <p:txBody>
-          <a:bodyPr wrap="none" lIns="0" rIns="0" tIns="0" bIns="0" anchor="t">
+          <a:bodyPr wrap="square" lIns="0" rIns="0" tIns="0" bIns="0" anchor="t">
             <a:spAutoFit/>
           </a:bodyPr>
           <a:lstStyle/>
@@ -10444,7 +10444,7 @@
           <a:noFill/>
         </p:spPr>
         <p:txBody>
-          <a:bodyPr wrap="none" lIns="0" rIns="0" tIns="0" bIns="0" anchor="t">
+          <a:bodyPr wrap="square" lIns="0" rIns="0" tIns="0" bIns="0" anchor="t">
             <a:spAutoFit/>
           </a:bodyPr>
           <a:lstStyle/>
@@ -10483,7 +10483,7 @@
           <a:noFill/>
         </p:spPr>
         <p:txBody>
-          <a:bodyPr wrap="none" lIns="0" rIns="0" tIns="0" bIns="0" anchor="t">
+          <a:bodyPr wrap="square" lIns="0" rIns="0" tIns="0" bIns="0" anchor="t">
             <a:spAutoFit/>
           </a:bodyPr>
           <a:lstStyle/>
@@ -10522,7 +10522,7 @@
           <a:noFill/>
         </p:spPr>
         <p:txBody>
-          <a:bodyPr wrap="none" lIns="0" rIns="0" tIns="0" bIns="0" anchor="t">
+          <a:bodyPr wrap="square" lIns="0" rIns="0" tIns="0" bIns="0" anchor="t">
             <a:spAutoFit/>
           </a:bodyPr>
           <a:lstStyle/>
@@ -10539,7 +10539,7 @@
                 </a:solidFill>
                 <a:latin typeface="Outfit"/>
               </a:rPr>
-              <a:t>Per ottenere il massimo dalla lezione di oggi, assicurati di avere il tuo</a:t>
+              <a:t>Per ottenere il massimo dalla lezione di oggi, assicurati di avere il tuo </a:t>
             </a:r>
           </a:p>
           <a:p>
@@ -10577,7 +10577,7 @@
           <a:noFill/>
         </p:spPr>
         <p:txBody>
-          <a:bodyPr wrap="none" lIns="0" rIns="0" tIns="0" bIns="0" anchor="t">
+          <a:bodyPr wrap="square" lIns="0" rIns="0" tIns="0" bIns="0" anchor="t">
             <a:spAutoFit/>
           </a:bodyPr>
           <a:lstStyle/>
@@ -10594,7 +10594,7 @@
                 </a:solidFill>
                 <a:latin typeface="Outfit"/>
               </a:rPr>
-              <a:t>Se non ce l'hai, vai su</a:t>
+              <a:t>Se non ce l'hai, vai su </a:t>
             </a:r>
             <a:r>
               <a:rPr sz="1400" b="1" i="0">
@@ -10625,7 +10625,7 @@
           <a:noFill/>
         </p:spPr>
         <p:txBody>
-          <a:bodyPr wrap="none" lIns="0" rIns="0" tIns="0" bIns="0" anchor="t">
+          <a:bodyPr wrap="square" lIns="0" rIns="0" tIns="0" bIns="0" anchor="t">
             <a:spAutoFit/>
           </a:bodyPr>
           <a:lstStyle/>
@@ -10664,7 +10664,7 @@
           <a:noFill/>
         </p:spPr>
         <p:txBody>
-          <a:bodyPr wrap="none" lIns="0" rIns="0" tIns="0" bIns="0" anchor="t">
+          <a:bodyPr wrap="square" lIns="0" rIns="0" tIns="0" bIns="0" anchor="t">
             <a:spAutoFit/>
           </a:bodyPr>
           <a:lstStyle/>
@@ -10887,7 +10887,7 @@
           <a:noFill/>
         </p:spPr>
         <p:txBody>
-          <a:bodyPr wrap="none" lIns="0" rIns="0" tIns="0" bIns="0" anchor="t">
+          <a:bodyPr wrap="square" lIns="0" rIns="0" tIns="0" bIns="0" anchor="t">
             <a:spAutoFit/>
           </a:bodyPr>
           <a:lstStyle/>
@@ -10926,7 +10926,7 @@
           <a:noFill/>
         </p:spPr>
         <p:txBody>
-          <a:bodyPr wrap="none" lIns="0" rIns="0" tIns="0" bIns="0" anchor="t">
+          <a:bodyPr wrap="square" lIns="0" rIns="0" tIns="0" bIns="0" anchor="t">
             <a:spAutoFit/>
           </a:bodyPr>
           <a:lstStyle/>
@@ -10965,7 +10965,7 @@
           <a:noFill/>
         </p:spPr>
         <p:txBody>
-          <a:bodyPr wrap="none" lIns="0" rIns="0" tIns="0" bIns="0" anchor="t">
+          <a:bodyPr wrap="square" lIns="0" rIns="0" tIns="0" bIns="0" anchor="t">
             <a:spAutoFit/>
           </a:bodyPr>
           <a:lstStyle/>
@@ -10982,7 +10982,7 @@
                 </a:solidFill>
                 <a:latin typeface="Outfit"/>
               </a:rPr>
-              <a:t>Il BG5 (Business Group 5) approfondisce proprio</a:t>
+              <a:t>Il BG5 (Business Group 5) approfondisce proprio </a:t>
             </a:r>
           </a:p>
           <a:p>
@@ -11020,7 +11020,7 @@
           <a:noFill/>
         </p:spPr>
         <p:txBody>
-          <a:bodyPr wrap="none" lIns="0" rIns="0" tIns="0" bIns="0" anchor="t">
+          <a:bodyPr wrap="square" lIns="0" rIns="0" tIns="0" bIns="0" anchor="t">
             <a:spAutoFit/>
           </a:bodyPr>
           <a:lstStyle/>
@@ -11059,7 +11059,7 @@
           <a:noFill/>
         </p:spPr>
         <p:txBody>
-          <a:bodyPr wrap="none" lIns="0" rIns="0" tIns="0" bIns="0" anchor="t">
+          <a:bodyPr wrap="square" lIns="0" rIns="0" tIns="0" bIns="0" anchor="t">
             <a:spAutoFit/>
           </a:bodyPr>
           <a:lstStyle/>
@@ -11098,7 +11098,7 @@
           <a:noFill/>
         </p:spPr>
         <p:txBody>
-          <a:bodyPr wrap="none" lIns="0" rIns="0" tIns="0" bIns="0" anchor="t">
+          <a:bodyPr wrap="square" lIns="0" rIns="0" tIns="0" bIns="0" anchor="t">
             <a:spAutoFit/>
           </a:bodyPr>
           <a:lstStyle/>
@@ -11137,7 +11137,7 @@
           <a:noFill/>
         </p:spPr>
         <p:txBody>
-          <a:bodyPr wrap="none" lIns="0" rIns="0" tIns="0" bIns="0" anchor="t">
+          <a:bodyPr wrap="square" lIns="0" rIns="0" tIns="0" bIns="0" anchor="t">
             <a:spAutoFit/>
           </a:bodyPr>
           <a:lstStyle/>
@@ -11274,7 +11274,7 @@
           <a:noFill/>
         </p:spPr>
         <p:txBody>
-          <a:bodyPr wrap="none" lIns="0" rIns="0" tIns="0" bIns="0" anchor="t">
+          <a:bodyPr wrap="square" lIns="0" rIns="0" tIns="0" bIns="0" anchor="t">
             <a:spAutoFit/>
           </a:bodyPr>
           <a:lstStyle/>
@@ -11313,7 +11313,7 @@
           <a:noFill/>
         </p:spPr>
         <p:txBody>
-          <a:bodyPr wrap="none" lIns="0" rIns="0" tIns="0" bIns="0" anchor="t">
+          <a:bodyPr wrap="square" lIns="0" rIns="0" tIns="0" bIns="0" anchor="t">
             <a:spAutoFit/>
           </a:bodyPr>
           <a:lstStyle/>
@@ -11354,7 +11354,7 @@
           </a:solidFill>
         </p:spPr>
         <p:txBody>
-          <a:bodyPr wrap="none" lIns="114300" rIns="114300" tIns="57150" bIns="57150" anchor="t">
+          <a:bodyPr wrap="square" lIns="114300" rIns="114300" tIns="57150" bIns="57150" anchor="t">
             <a:spAutoFit/>
           </a:bodyPr>
           <a:lstStyle/>
@@ -11393,7 +11393,7 @@
           <a:noFill/>
         </p:spPr>
         <p:txBody>
-          <a:bodyPr wrap="none" lIns="0" rIns="0" tIns="0" bIns="0" anchor="t">
+          <a:bodyPr wrap="square" lIns="0" rIns="0" tIns="0" bIns="0" anchor="t">
             <a:spAutoFit/>
           </a:bodyPr>
           <a:lstStyle/>
@@ -11410,7 +11410,7 @@
                 </a:solidFill>
                 <a:latin typeface="Outfit"/>
               </a:rPr>
-              <a:t>Stampa quattro copie della risorsa del corso, la trovi nella tua area riservata,</a:t>
+              <a:t>Stampa quattro copie della risorsa del corso, la trovi nella tua area riservata, </a:t>
             </a:r>
           </a:p>
           <a:p>
@@ -11448,7 +11448,7 @@
           <a:noFill/>
         </p:spPr>
         <p:txBody>
-          <a:bodyPr wrap="none" lIns="0" rIns="0" tIns="0" bIns="0" anchor="t">
+          <a:bodyPr wrap="square" lIns="0" rIns="0" tIns="0" bIns="0" anchor="t">
             <a:spAutoFit/>
           </a:bodyPr>
           <a:lstStyle/>
@@ -11487,7 +11487,7 @@
           <a:noFill/>
         </p:spPr>
         <p:txBody>
-          <a:bodyPr wrap="none" lIns="0" rIns="0" tIns="0" bIns="0" anchor="t">
+          <a:bodyPr wrap="square" lIns="0" rIns="0" tIns="0" bIns="0" anchor="t">
             <a:spAutoFit/>
           </a:bodyPr>
           <a:lstStyle/>
@@ -11522,7 +11522,7 @@
           <a:noFill/>
         </p:spPr>
         <p:txBody>
-          <a:bodyPr wrap="none" lIns="0" rIns="0" tIns="0" bIns="0" anchor="t">
+          <a:bodyPr wrap="square" lIns="0" rIns="0" tIns="0" bIns="0" anchor="t">
             <a:spAutoFit/>
           </a:bodyPr>
           <a:lstStyle/>
@@ -11561,7 +11561,7 @@
           <a:noFill/>
         </p:spPr>
         <p:txBody>
-          <a:bodyPr wrap="none" lIns="0" rIns="0" tIns="0" bIns="0" anchor="t">
+          <a:bodyPr wrap="square" lIns="0" rIns="0" tIns="0" bIns="0" anchor="t">
             <a:spAutoFit/>
           </a:bodyPr>
           <a:lstStyle/>
@@ -11596,7 +11596,7 @@
           <a:noFill/>
         </p:spPr>
         <p:txBody>
-          <a:bodyPr wrap="none" lIns="0" rIns="0" tIns="0" bIns="0" anchor="t">
+          <a:bodyPr wrap="square" lIns="0" rIns="0" tIns="0" bIns="0" anchor="t">
             <a:spAutoFit/>
           </a:bodyPr>
           <a:lstStyle/>
@@ -11635,7 +11635,7 @@
           <a:noFill/>
         </p:spPr>
         <p:txBody>
-          <a:bodyPr wrap="none" lIns="0" rIns="0" tIns="0" bIns="0" anchor="t">
+          <a:bodyPr wrap="square" lIns="0" rIns="0" tIns="0" bIns="0" anchor="t">
             <a:spAutoFit/>
           </a:bodyPr>
           <a:lstStyle/>
@@ -11670,7 +11670,7 @@
           <a:noFill/>
         </p:spPr>
         <p:txBody>
-          <a:bodyPr wrap="none" lIns="0" rIns="0" tIns="0" bIns="0" anchor="t">
+          <a:bodyPr wrap="square" lIns="0" rIns="0" tIns="0" bIns="0" anchor="t">
             <a:spAutoFit/>
           </a:bodyPr>
           <a:lstStyle/>
@@ -11709,7 +11709,7 @@
           <a:noFill/>
         </p:spPr>
         <p:txBody>
-          <a:bodyPr wrap="none" lIns="0" rIns="0" tIns="0" bIns="0" anchor="t">
+          <a:bodyPr wrap="square" lIns="0" rIns="0" tIns="0" bIns="0" anchor="t">
             <a:spAutoFit/>
           </a:bodyPr>
           <a:lstStyle/>
@@ -11744,7 +11744,7 @@
           <a:noFill/>
         </p:spPr>
         <p:txBody>
-          <a:bodyPr wrap="none" lIns="0" rIns="0" tIns="0" bIns="0" anchor="t">
+          <a:bodyPr wrap="square" lIns="0" rIns="0" tIns="0" bIns="0" anchor="t">
             <a:spAutoFit/>
           </a:bodyPr>
           <a:lstStyle/>
@@ -11761,7 +11761,7 @@
                 </a:solidFill>
                 <a:latin typeface="Outfit"/>
               </a:rPr>
-              <a:t>Carica le foto o le scansioni dei quattro grafici nel forum e commenta con le</a:t>
+              <a:t>Carica le foto o le scansioni dei quattro grafici nel forum e commenta con le </a:t>
             </a:r>
           </a:p>
           <a:p>
@@ -11799,7 +11799,7 @@
           <a:noFill/>
         </p:spPr>
         <p:txBody>
-          <a:bodyPr wrap="none" lIns="0" rIns="0" tIns="0" bIns="0" anchor="t">
+          <a:bodyPr wrap="square" lIns="0" rIns="0" tIns="0" bIns="0" anchor="t">
             <a:spAutoFit/>
           </a:bodyPr>
           <a:lstStyle/>
@@ -11838,7 +11838,7 @@
           <a:noFill/>
         </p:spPr>
         <p:txBody>
-          <a:bodyPr wrap="none" lIns="0" rIns="0" tIns="0" bIns="0" anchor="t">
+          <a:bodyPr wrap="square" lIns="0" rIns="0" tIns="0" bIns="0" anchor="t">
             <a:spAutoFit/>
           </a:bodyPr>
           <a:lstStyle/>
@@ -11877,7 +11877,7 @@
           <a:noFill/>
         </p:spPr>
         <p:txBody>
-          <a:bodyPr wrap="none" lIns="0" rIns="0" tIns="0" bIns="0" anchor="t">
+          <a:bodyPr wrap="square" lIns="0" rIns="0" tIns="0" bIns="0" anchor="t">
             <a:spAutoFit/>
           </a:bodyPr>
           <a:lstStyle/>
@@ -12038,7 +12038,7 @@
           <a:noFill/>
         </p:spPr>
         <p:txBody>
-          <a:bodyPr wrap="none" lIns="0" rIns="0" tIns="0" bIns="0" anchor="t">
+          <a:bodyPr wrap="square" lIns="0" rIns="0" tIns="0" bIns="0" anchor="t">
             <a:spAutoFit/>
           </a:bodyPr>
           <a:lstStyle/>
@@ -12077,7 +12077,7 @@
           <a:noFill/>
         </p:spPr>
         <p:txBody>
-          <a:bodyPr wrap="none" lIns="0" rIns="0" tIns="0" bIns="0" anchor="t">
+          <a:bodyPr wrap="square" lIns="0" rIns="0" tIns="0" bIns="0" anchor="t">
             <a:spAutoFit/>
           </a:bodyPr>
           <a:lstStyle/>
@@ -12116,7 +12116,7 @@
           <a:noFill/>
         </p:spPr>
         <p:txBody>
-          <a:bodyPr wrap="none" lIns="0" rIns="0" tIns="0" bIns="0" anchor="t">
+          <a:bodyPr wrap="square" lIns="0" rIns="0" tIns="0" bIns="0" anchor="t">
             <a:spAutoFit/>
           </a:bodyPr>
           <a:lstStyle/>
@@ -12157,7 +12157,7 @@
           </a:solidFill>
         </p:spPr>
         <p:txBody>
-          <a:bodyPr wrap="none" lIns="114300" rIns="114300" tIns="57150" bIns="57150" anchor="t">
+          <a:bodyPr wrap="square" lIns="114300" rIns="114300" tIns="57150" bIns="57150" anchor="t">
             <a:spAutoFit/>
           </a:bodyPr>
           <a:lstStyle/>
@@ -12196,7 +12196,7 @@
           <a:noFill/>
         </p:spPr>
         <p:txBody>
-          <a:bodyPr wrap="none" lIns="0" rIns="0" tIns="0" bIns="0" anchor="t">
+          <a:bodyPr wrap="square" lIns="0" rIns="0" tIns="0" bIns="0" anchor="t">
             <a:spAutoFit/>
           </a:bodyPr>
           <a:lstStyle/>
@@ -12213,7 +12213,7 @@
                 </a:solidFill>
                 <a:latin typeface="Outfit"/>
               </a:rPr>
-              <a:t>Prendi una penna nera, una rossa e una del</a:t>
+              <a:t>Prendi una penna nera, una rossa e una del </a:t>
             </a:r>
           </a:p>
           <a:p>
@@ -12251,7 +12251,7 @@
           <a:noFill/>
         </p:spPr>
         <p:txBody>
-          <a:bodyPr wrap="none" lIns="0" rIns="0" tIns="0" bIns="0" anchor="t">
+          <a:bodyPr wrap="square" lIns="0" rIns="0" tIns="0" bIns="0" anchor="t">
             <a:spAutoFit/>
           </a:bodyPr>
           <a:lstStyle/>
@@ -12286,7 +12286,7 @@
           <a:noFill/>
         </p:spPr>
         <p:txBody>
-          <a:bodyPr wrap="none" lIns="0" rIns="0" tIns="0" bIns="0" anchor="t">
+          <a:bodyPr wrap="square" lIns="0" rIns="0" tIns="0" bIns="0" anchor="t">
             <a:spAutoFit/>
           </a:bodyPr>
           <a:lstStyle/>
@@ -12303,7 +12303,7 @@
                 </a:solidFill>
                 <a:latin typeface="Outfit"/>
               </a:rPr>
-              <a:t>Guarda le porte del tuo Disegno, sia rosse che</a:t>
+              <a:t>Guarda le porte del tuo Disegno, sia rosse che </a:t>
             </a:r>
           </a:p>
           <a:p>
@@ -12341,7 +12341,7 @@
           <a:noFill/>
         </p:spPr>
         <p:txBody>
-          <a:bodyPr wrap="none" lIns="0" rIns="0" tIns="0" bIns="0" anchor="t">
+          <a:bodyPr wrap="square" lIns="0" rIns="0" tIns="0" bIns="0" anchor="t">
             <a:spAutoFit/>
           </a:bodyPr>
           <a:lstStyle/>
@@ -12376,7 +12376,7 @@
           <a:noFill/>
         </p:spPr>
         <p:txBody>
-          <a:bodyPr wrap="none" lIns="0" rIns="0" tIns="0" bIns="0" anchor="t">
+          <a:bodyPr wrap="square" lIns="0" rIns="0" tIns="0" bIns="0" anchor="t">
             <a:spAutoFit/>
           </a:bodyPr>
           <a:lstStyle/>
@@ -12415,7 +12415,7 @@
           <a:noFill/>
         </p:spPr>
         <p:txBody>
-          <a:bodyPr wrap="none" lIns="0" rIns="0" tIns="0" bIns="0" anchor="t">
+          <a:bodyPr wrap="square" lIns="0" rIns="0" tIns="0" bIns="0" anchor="t">
             <a:spAutoFit/>
           </a:bodyPr>
           <a:lstStyle/>
@@ -12450,7 +12450,7 @@
           <a:noFill/>
         </p:spPr>
         <p:txBody>
-          <a:bodyPr wrap="none" lIns="0" rIns="0" tIns="0" bIns="0" anchor="t">
+          <a:bodyPr wrap="square" lIns="0" rIns="0" tIns="0" bIns="0" anchor="t">
             <a:spAutoFit/>
           </a:bodyPr>
           <a:lstStyle/>
@@ -12467,7 +12467,7 @@
                 </a:solidFill>
                 <a:latin typeface="Outfit"/>
               </a:rPr>
-              <a:t>Colora col terzo colore i centri che si</a:t>
+              <a:t>Colora col terzo colore i centri che si </a:t>
             </a:r>
           </a:p>
           <a:p>
@@ -12505,7 +12505,7 @@
           <a:noFill/>
         </p:spPr>
         <p:txBody>
-          <a:bodyPr wrap="none" lIns="0" rIns="0" tIns="0" bIns="0" anchor="t">
+          <a:bodyPr wrap="square" lIns="0" rIns="0" tIns="0" bIns="0" anchor="t">
             <a:spAutoFit/>
           </a:bodyPr>
           <a:lstStyle/>
@@ -12540,7 +12540,7 @@
           <a:noFill/>
         </p:spPr>
         <p:txBody>
-          <a:bodyPr wrap="none" lIns="0" rIns="0" tIns="0" bIns="0" anchor="t">
+          <a:bodyPr wrap="square" lIns="0" rIns="0" tIns="0" bIns="0" anchor="t">
             <a:spAutoFit/>
           </a:bodyPr>
           <a:lstStyle/>
@@ -12557,7 +12557,7 @@
                 </a:solidFill>
                 <a:latin typeface="Outfit"/>
               </a:rPr>
-              <a:t>Verifica che il Disegno combaci con quello di</a:t>
+              <a:t>Verifica che il Disegno combaci con quello di </a:t>
             </a:r>
           </a:p>
           <a:p>
@@ -12595,7 +12595,7 @@
           <a:noFill/>
         </p:spPr>
         <p:txBody>
-          <a:bodyPr wrap="none" lIns="0" rIns="0" tIns="0" bIns="0" anchor="t">
+          <a:bodyPr wrap="square" lIns="0" rIns="0" tIns="0" bIns="0" anchor="t">
             <a:spAutoFit/>
           </a:bodyPr>
           <a:lstStyle/>
@@ -12630,7 +12630,7 @@
           <a:noFill/>
         </p:spPr>
         <p:txBody>
-          <a:bodyPr wrap="none" lIns="0" rIns="0" tIns="0" bIns="0" anchor="t">
+          <a:bodyPr wrap="square" lIns="0" rIns="0" tIns="0" bIns="0" anchor="t">
             <a:spAutoFit/>
           </a:bodyPr>
           <a:lstStyle/>
@@ -12669,7 +12669,7 @@
           <a:noFill/>
         </p:spPr>
         <p:txBody>
-          <a:bodyPr wrap="none" lIns="0" rIns="0" tIns="0" bIns="0" anchor="t">
+          <a:bodyPr wrap="square" lIns="0" rIns="0" tIns="0" bIns="0" anchor="t">
             <a:spAutoFit/>
           </a:bodyPr>
           <a:lstStyle/>
@@ -12708,7 +12708,7 @@
           <a:noFill/>
         </p:spPr>
         <p:txBody>
-          <a:bodyPr wrap="none" lIns="0" rIns="0" tIns="0" bIns="0" anchor="t">
+          <a:bodyPr wrap="square" lIns="0" rIns="0" tIns="0" bIns="0" anchor="t">
             <a:spAutoFit/>
           </a:bodyPr>
           <a:lstStyle/>
@@ -12869,7 +12869,7 @@
           <a:noFill/>
         </p:spPr>
         <p:txBody>
-          <a:bodyPr wrap="none" lIns="0" rIns="0" tIns="0" bIns="0" anchor="t">
+          <a:bodyPr wrap="square" lIns="0" rIns="0" tIns="0" bIns="0" anchor="t">
             <a:spAutoFit/>
           </a:bodyPr>
           <a:lstStyle/>
@@ -12908,7 +12908,7 @@
           <a:noFill/>
         </p:spPr>
         <p:txBody>
-          <a:bodyPr wrap="none" lIns="0" rIns="0" tIns="0" bIns="0" anchor="t">
+          <a:bodyPr wrap="square" lIns="0" rIns="0" tIns="0" bIns="0" anchor="t">
             <a:spAutoFit/>
           </a:bodyPr>
           <a:lstStyle/>
@@ -12947,7 +12947,7 @@
           <a:noFill/>
         </p:spPr>
         <p:txBody>
-          <a:bodyPr wrap="none" lIns="0" rIns="0" tIns="0" bIns="0" anchor="t">
+          <a:bodyPr wrap="square" lIns="0" rIns="0" tIns="0" bIns="0" anchor="t">
             <a:spAutoFit/>
           </a:bodyPr>
           <a:lstStyle/>
@@ -12988,7 +12988,7 @@
           </a:solidFill>
         </p:spPr>
         <p:txBody>
-          <a:bodyPr wrap="none" lIns="114300" rIns="114300" tIns="57150" bIns="57150" anchor="t">
+          <a:bodyPr wrap="square" lIns="114300" rIns="114300" tIns="57150" bIns="57150" anchor="t">
             <a:spAutoFit/>
           </a:bodyPr>
           <a:lstStyle/>
@@ -13027,7 +13027,7 @@
           <a:noFill/>
         </p:spPr>
         <p:txBody>
-          <a:bodyPr wrap="none" lIns="0" rIns="0" tIns="0" bIns="0" anchor="t">
+          <a:bodyPr wrap="square" lIns="0" rIns="0" tIns="0" bIns="0" anchor="t">
             <a:spAutoFit/>
           </a:bodyPr>
           <a:lstStyle/>
@@ -13066,7 +13066,7 @@
           <a:noFill/>
         </p:spPr>
         <p:txBody>
-          <a:bodyPr wrap="none" lIns="0" rIns="0" tIns="0" bIns="0" anchor="t">
+          <a:bodyPr wrap="square" lIns="0" rIns="0" tIns="0" bIns="0" anchor="t">
             <a:spAutoFit/>
           </a:bodyPr>
           <a:lstStyle/>
@@ -13101,7 +13101,7 @@
           <a:noFill/>
         </p:spPr>
         <p:txBody>
-          <a:bodyPr wrap="none" lIns="0" rIns="0" tIns="0" bIns="0" anchor="t">
+          <a:bodyPr wrap="square" lIns="0" rIns="0" tIns="0" bIns="0" anchor="t">
             <a:spAutoFit/>
           </a:bodyPr>
           <a:lstStyle/>
@@ -13118,7 +13118,7 @@
                 </a:solidFill>
                 <a:latin typeface="Outfit"/>
               </a:rPr>
-              <a:t>Guarda le porte rosse del tuo Disegno e</a:t>
+              <a:t>Guarda le porte rosse del tuo Disegno e </a:t>
             </a:r>
           </a:p>
           <a:p>
@@ -13156,7 +13156,7 @@
           <a:noFill/>
         </p:spPr>
         <p:txBody>
-          <a:bodyPr wrap="none" lIns="0" rIns="0" tIns="0" bIns="0" anchor="t">
+          <a:bodyPr wrap="square" lIns="0" rIns="0" tIns="0" bIns="0" anchor="t">
             <a:spAutoFit/>
           </a:bodyPr>
           <a:lstStyle/>
@@ -13191,7 +13191,7 @@
           <a:noFill/>
         </p:spPr>
         <p:txBody>
-          <a:bodyPr wrap="none" lIns="0" rIns="0" tIns="0" bIns="0" anchor="t">
+          <a:bodyPr wrap="square" lIns="0" rIns="0" tIns="0" bIns="0" anchor="t">
             <a:spAutoFit/>
           </a:bodyPr>
           <a:lstStyle/>
@@ -13230,7 +13230,7 @@
           <a:noFill/>
         </p:spPr>
         <p:txBody>
-          <a:bodyPr wrap="none" lIns="0" rIns="0" tIns="0" bIns="0" anchor="t">
+          <a:bodyPr wrap="square" lIns="0" rIns="0" tIns="0" bIns="0" anchor="t">
             <a:spAutoFit/>
           </a:bodyPr>
           <a:lstStyle/>
@@ -13265,7 +13265,7 @@
           <a:noFill/>
         </p:spPr>
         <p:txBody>
-          <a:bodyPr wrap="none" lIns="0" rIns="0" tIns="0" bIns="0" anchor="t">
+          <a:bodyPr wrap="square" lIns="0" rIns="0" tIns="0" bIns="0" anchor="t">
             <a:spAutoFit/>
           </a:bodyPr>
           <a:lstStyle/>
@@ -13282,7 +13282,7 @@
                 </a:solidFill>
                 <a:latin typeface="Outfit"/>
               </a:rPr>
-              <a:t>Colora gli eventuali centri che si definiscono</a:t>
+              <a:t>Colora gli eventuali centri che si definiscono </a:t>
             </a:r>
           </a:p>
           <a:p>
@@ -13320,7 +13320,7 @@
           <a:noFill/>
         </p:spPr>
         <p:txBody>
-          <a:bodyPr wrap="none" lIns="0" rIns="0" tIns="0" bIns="0" anchor="t">
+          <a:bodyPr wrap="square" lIns="0" rIns="0" tIns="0" bIns="0" anchor="t">
             <a:spAutoFit/>
           </a:bodyPr>
           <a:lstStyle/>
@@ -13355,7 +13355,7 @@
           <a:noFill/>
         </p:spPr>
         <p:txBody>
-          <a:bodyPr wrap="none" lIns="0" rIns="0" tIns="0" bIns="0" anchor="t">
+          <a:bodyPr wrap="square" lIns="0" rIns="0" tIns="0" bIns="0" anchor="t">
             <a:spAutoFit/>
           </a:bodyPr>
           <a:lstStyle/>
@@ -13372,7 +13372,7 @@
                 </a:solidFill>
                 <a:latin typeface="Playfair Display"/>
               </a:rPr>
-              <a:t>Questa è la mappa genetica del tuo</a:t>
+              <a:t>Questa è la mappa genetica del tuo </a:t>
             </a:r>
           </a:p>
           <a:p>
@@ -13410,7 +13410,7 @@
           <a:noFill/>
         </p:spPr>
         <p:txBody>
-          <a:bodyPr wrap="none" lIns="0" rIns="0" tIns="0" bIns="0" anchor="t">
+          <a:bodyPr wrap="square" lIns="0" rIns="0" tIns="0" bIns="0" anchor="t">
             <a:spAutoFit/>
           </a:bodyPr>
           <a:lstStyle/>
@@ -13449,7 +13449,7 @@
           <a:noFill/>
         </p:spPr>
         <p:txBody>
-          <a:bodyPr wrap="none" lIns="0" rIns="0" tIns="0" bIns="0" anchor="t">
+          <a:bodyPr wrap="square" lIns="0" rIns="0" tIns="0" bIns="0" anchor="t">
             <a:spAutoFit/>
           </a:bodyPr>
           <a:lstStyle/>
@@ -13488,7 +13488,7 @@
           <a:noFill/>
         </p:spPr>
         <p:txBody>
-          <a:bodyPr wrap="none" lIns="0" rIns="0" tIns="0" bIns="0" anchor="t">
+          <a:bodyPr wrap="square" lIns="0" rIns="0" tIns="0" bIns="0" anchor="t">
             <a:spAutoFit/>
           </a:bodyPr>
           <a:lstStyle/>
@@ -13649,7 +13649,7 @@
           <a:noFill/>
         </p:spPr>
         <p:txBody>
-          <a:bodyPr wrap="none" lIns="0" rIns="0" tIns="0" bIns="0" anchor="t">
+          <a:bodyPr wrap="square" lIns="0" rIns="0" tIns="0" bIns="0" anchor="t">
             <a:spAutoFit/>
           </a:bodyPr>
           <a:lstStyle/>
@@ -13688,7 +13688,7 @@
           <a:noFill/>
         </p:spPr>
         <p:txBody>
-          <a:bodyPr wrap="none" lIns="0" rIns="0" tIns="0" bIns="0" anchor="t">
+          <a:bodyPr wrap="square" lIns="0" rIns="0" tIns="0" bIns="0" anchor="t">
             <a:spAutoFit/>
           </a:bodyPr>
           <a:lstStyle/>
@@ -13727,7 +13727,7 @@
           <a:noFill/>
         </p:spPr>
         <p:txBody>
-          <a:bodyPr wrap="none" lIns="0" rIns="0" tIns="0" bIns="0" anchor="t">
+          <a:bodyPr wrap="square" lIns="0" rIns="0" tIns="0" bIns="0" anchor="t">
             <a:spAutoFit/>
           </a:bodyPr>
           <a:lstStyle/>
@@ -13768,7 +13768,7 @@
           </a:solidFill>
         </p:spPr>
         <p:txBody>
-          <a:bodyPr wrap="none" lIns="114300" rIns="114300" tIns="57150" bIns="57150" anchor="t">
+          <a:bodyPr wrap="square" lIns="114300" rIns="114300" tIns="57150" bIns="57150" anchor="t">
             <a:spAutoFit/>
           </a:bodyPr>
           <a:lstStyle/>
@@ -13807,7 +13807,7 @@
           <a:noFill/>
         </p:spPr>
         <p:txBody>
-          <a:bodyPr wrap="none" lIns="0" rIns="0" tIns="0" bIns="0" anchor="t">
+          <a:bodyPr wrap="square" lIns="0" rIns="0" tIns="0" bIns="0" anchor="t">
             <a:spAutoFit/>
           </a:bodyPr>
           <a:lstStyle/>
@@ -13846,7 +13846,7 @@
           <a:noFill/>
         </p:spPr>
         <p:txBody>
-          <a:bodyPr wrap="none" lIns="0" rIns="0" tIns="0" bIns="0" anchor="t">
+          <a:bodyPr wrap="square" lIns="0" rIns="0" tIns="0" bIns="0" anchor="t">
             <a:spAutoFit/>
           </a:bodyPr>
           <a:lstStyle/>
@@ -13881,7 +13881,7 @@
           <a:noFill/>
         </p:spPr>
         <p:txBody>
-          <a:bodyPr wrap="none" lIns="0" rIns="0" tIns="0" bIns="0" anchor="t">
+          <a:bodyPr wrap="square" lIns="0" rIns="0" tIns="0" bIns="0" anchor="t">
             <a:spAutoFit/>
           </a:bodyPr>
           <a:lstStyle/>
@@ -13898,7 +13898,7 @@
                 </a:solidFill>
                 <a:latin typeface="Outfit"/>
               </a:rPr>
-              <a:t>Guarda le porte nere del tuo Disegno e</a:t>
+              <a:t>Guarda le porte nere del tuo Disegno e </a:t>
             </a:r>
           </a:p>
           <a:p>
@@ -13936,7 +13936,7 @@
           <a:noFill/>
         </p:spPr>
         <p:txBody>
-          <a:bodyPr wrap="none" lIns="0" rIns="0" tIns="0" bIns="0" anchor="t">
+          <a:bodyPr wrap="square" lIns="0" rIns="0" tIns="0" bIns="0" anchor="t">
             <a:spAutoFit/>
           </a:bodyPr>
           <a:lstStyle/>
@@ -13971,7 +13971,7 @@
           <a:noFill/>
         </p:spPr>
         <p:txBody>
-          <a:bodyPr wrap="none" lIns="0" rIns="0" tIns="0" bIns="0" anchor="t">
+          <a:bodyPr wrap="square" lIns="0" rIns="0" tIns="0" bIns="0" anchor="t">
             <a:spAutoFit/>
           </a:bodyPr>
           <a:lstStyle/>
@@ -14010,7 +14010,7 @@
           <a:noFill/>
         </p:spPr>
         <p:txBody>
-          <a:bodyPr wrap="none" lIns="0" rIns="0" tIns="0" bIns="0" anchor="t">
+          <a:bodyPr wrap="square" lIns="0" rIns="0" tIns="0" bIns="0" anchor="t">
             <a:spAutoFit/>
           </a:bodyPr>
           <a:lstStyle/>
@@ -14045,7 +14045,7 @@
           <a:noFill/>
         </p:spPr>
         <p:txBody>
-          <a:bodyPr wrap="none" lIns="0" rIns="0" tIns="0" bIns="0" anchor="t">
+          <a:bodyPr wrap="square" lIns="0" rIns="0" tIns="0" bIns="0" anchor="t">
             <a:spAutoFit/>
           </a:bodyPr>
           <a:lstStyle/>
@@ -14062,7 +14062,7 @@
                 </a:solidFill>
                 <a:latin typeface="Outfit"/>
               </a:rPr>
-              <a:t>Colora gli eventuali centri che si definiscono</a:t>
+              <a:t>Colora gli eventuali centri che si definiscono </a:t>
             </a:r>
           </a:p>
           <a:p>
@@ -14100,7 +14100,7 @@
           <a:noFill/>
         </p:spPr>
         <p:txBody>
-          <a:bodyPr wrap="none" lIns="0" rIns="0" tIns="0" bIns="0" anchor="t">
+          <a:bodyPr wrap="square" lIns="0" rIns="0" tIns="0" bIns="0" anchor="t">
             <a:spAutoFit/>
           </a:bodyPr>
           <a:lstStyle/>
@@ -14135,7 +14135,7 @@
           <a:noFill/>
         </p:spPr>
         <p:txBody>
-          <a:bodyPr wrap="none" lIns="0" rIns="0" tIns="0" bIns="0" anchor="t">
+          <a:bodyPr wrap="square" lIns="0" rIns="0" tIns="0" bIns="0" anchor="t">
             <a:spAutoFit/>
           </a:bodyPr>
           <a:lstStyle/>
@@ -14152,7 +14152,7 @@
                 </a:solidFill>
                 <a:latin typeface="Playfair Display"/>
               </a:rPr>
-              <a:t>Questa è la mappa della tua personalità</a:t>
+              <a:t>Questa è la mappa della tua personalità </a:t>
             </a:r>
           </a:p>
           <a:p>
@@ -14190,7 +14190,7 @@
           <a:noFill/>
         </p:spPr>
         <p:txBody>
-          <a:bodyPr wrap="none" lIns="0" rIns="0" tIns="0" bIns="0" anchor="t">
+          <a:bodyPr wrap="square" lIns="0" rIns="0" tIns="0" bIns="0" anchor="t">
             <a:spAutoFit/>
           </a:bodyPr>
           <a:lstStyle/>
@@ -14229,7 +14229,7 @@
           <a:noFill/>
         </p:spPr>
         <p:txBody>
-          <a:bodyPr wrap="none" lIns="0" rIns="0" tIns="0" bIns="0" anchor="t">
+          <a:bodyPr wrap="square" lIns="0" rIns="0" tIns="0" bIns="0" anchor="t">
             <a:spAutoFit/>
           </a:bodyPr>
           <a:lstStyle/>
@@ -14268,7 +14268,7 @@
           <a:noFill/>
         </p:spPr>
         <p:txBody>
-          <a:bodyPr wrap="none" lIns="0" rIns="0" tIns="0" bIns="0" anchor="t">
+          <a:bodyPr wrap="square" lIns="0" rIns="0" tIns="0" bIns="0" anchor="t">
             <a:spAutoFit/>
           </a:bodyPr>
           <a:lstStyle/>
@@ -14429,7 +14429,7 @@
           <a:noFill/>
         </p:spPr>
         <p:txBody>
-          <a:bodyPr wrap="none" lIns="0" rIns="0" tIns="0" bIns="0" anchor="t">
+          <a:bodyPr wrap="square" lIns="0" rIns="0" tIns="0" bIns="0" anchor="t">
             <a:spAutoFit/>
           </a:bodyPr>
           <a:lstStyle/>
@@ -14468,7 +14468,7 @@
           <a:noFill/>
         </p:spPr>
         <p:txBody>
-          <a:bodyPr wrap="none" lIns="0" rIns="0" tIns="0" bIns="0" anchor="t">
+          <a:bodyPr wrap="square" lIns="0" rIns="0" tIns="0" bIns="0" anchor="t">
             <a:spAutoFit/>
           </a:bodyPr>
           <a:lstStyle/>
@@ -14507,7 +14507,7 @@
           <a:noFill/>
         </p:spPr>
         <p:txBody>
-          <a:bodyPr wrap="none" lIns="0" rIns="0" tIns="0" bIns="0" anchor="t">
+          <a:bodyPr wrap="square" lIns="0" rIns="0" tIns="0" bIns="0" anchor="t">
             <a:spAutoFit/>
           </a:bodyPr>
           <a:lstStyle/>
@@ -14548,7 +14548,7 @@
           </a:solidFill>
         </p:spPr>
         <p:txBody>
-          <a:bodyPr wrap="none" lIns="114300" rIns="114300" tIns="57150" bIns="57150" anchor="t">
+          <a:bodyPr wrap="square" lIns="114300" rIns="114300" tIns="57150" bIns="57150" anchor="t">
             <a:spAutoFit/>
           </a:bodyPr>
           <a:lstStyle/>
@@ -14587,7 +14587,7 @@
           <a:noFill/>
         </p:spPr>
         <p:txBody>
-          <a:bodyPr wrap="none" lIns="0" rIns="0" tIns="0" bIns="0" anchor="t">
+          <a:bodyPr wrap="square" lIns="0" rIns="0" tIns="0" bIns="0" anchor="t">
             <a:spAutoFit/>
           </a:bodyPr>
           <a:lstStyle/>
@@ -14626,7 +14626,7 @@
           <a:noFill/>
         </p:spPr>
         <p:txBody>
-          <a:bodyPr wrap="none" lIns="0" rIns="0" tIns="0" bIns="0" anchor="t">
+          <a:bodyPr wrap="square" lIns="0" rIns="0" tIns="0" bIns="0" anchor="t">
             <a:spAutoFit/>
           </a:bodyPr>
           <a:lstStyle/>
@@ -14661,7 +14661,7 @@
           <a:noFill/>
         </p:spPr>
         <p:txBody>
-          <a:bodyPr wrap="none" lIns="0" rIns="0" tIns="0" bIns="0" anchor="t">
+          <a:bodyPr wrap="square" lIns="0" rIns="0" tIns="0" bIns="0" anchor="t">
             <a:spAutoFit/>
           </a:bodyPr>
           <a:lstStyle/>
@@ -14678,7 +14678,7 @@
                 </a:solidFill>
                 <a:latin typeface="Outfit"/>
               </a:rPr>
-              <a:t>Guarda le porte che nel tuo Disegno</a:t>
+              <a:t>Guarda le porte che nel tuo Disegno </a:t>
             </a:r>
             <a:r>
               <a:rPr sz="1400" b="0" i="0">
@@ -14696,7 +14696,7 @@
                 </a:solidFill>
                 <a:latin typeface="Outfit"/>
               </a:rPr>
-              <a:t>sono</a:t>
+              <a:t> sono </a:t>
             </a:r>
           </a:p>
           <a:p>
@@ -14734,7 +14734,7 @@
           <a:noFill/>
         </p:spPr>
         <p:txBody>
-          <a:bodyPr wrap="none" lIns="0" rIns="0" tIns="0" bIns="0" anchor="t">
+          <a:bodyPr wrap="square" lIns="0" rIns="0" tIns="0" bIns="0" anchor="t">
             <a:spAutoFit/>
           </a:bodyPr>
           <a:lstStyle/>
@@ -14769,7 +14769,7 @@
           <a:noFill/>
         </p:spPr>
         <p:txBody>
-          <a:bodyPr wrap="none" lIns="0" rIns="0" tIns="0" bIns="0" anchor="t">
+          <a:bodyPr wrap="square" lIns="0" rIns="0" tIns="0" bIns="0" anchor="t">
             <a:spAutoFit/>
           </a:bodyPr>
           <a:lstStyle/>
@@ -14808,7 +14808,7 @@
           <a:noFill/>
         </p:spPr>
         <p:txBody>
-          <a:bodyPr wrap="none" lIns="0" rIns="0" tIns="0" bIns="0" anchor="t">
+          <a:bodyPr wrap="square" lIns="0" rIns="0" tIns="0" bIns="0" anchor="t">
             <a:spAutoFit/>
           </a:bodyPr>
           <a:lstStyle/>
@@ -14843,7 +14843,7 @@
           <a:noFill/>
         </p:spPr>
         <p:txBody>
-          <a:bodyPr wrap="none" lIns="0" rIns="0" tIns="0" bIns="0" anchor="t">
+          <a:bodyPr wrap="square" lIns="0" rIns="0" tIns="0" bIns="0" anchor="t">
             <a:spAutoFit/>
           </a:bodyPr>
           <a:lstStyle/>
@@ -14860,7 +14860,7 @@
                 </a:solidFill>
                 <a:latin typeface="Outfit"/>
               </a:rPr>
-              <a:t>Colora gli eventuali centri che si definiscono</a:t>
+              <a:t>Colora gli eventuali centri che si definiscono </a:t>
             </a:r>
           </a:p>
           <a:p>
@@ -14898,7 +14898,7 @@
           <a:noFill/>
         </p:spPr>
         <p:txBody>
-          <a:bodyPr wrap="none" lIns="0" rIns="0" tIns="0" bIns="0" anchor="t">
+          <a:bodyPr wrap="square" lIns="0" rIns="0" tIns="0" bIns="0" anchor="t">
             <a:spAutoFit/>
           </a:bodyPr>
           <a:lstStyle/>
@@ -14933,7 +14933,7 @@
           <a:noFill/>
         </p:spPr>
         <p:txBody>
-          <a:bodyPr wrap="none" lIns="0" rIns="0" tIns="0" bIns="0" anchor="t">
+          <a:bodyPr wrap="square" lIns="0" rIns="0" tIns="0" bIns="0" anchor="t">
             <a:spAutoFit/>
           </a:bodyPr>
           <a:lstStyle/>
@@ -14950,7 +14950,7 @@
                 </a:solidFill>
                 <a:latin typeface="Playfair Display"/>
               </a:rPr>
-              <a:t>Questo è ciò che non è la tua natura, ed è</a:t>
+              <a:t>Questo è ciò che non è la tua natura, ed è </a:t>
             </a:r>
           </a:p>
           <a:p>
@@ -14988,7 +14988,7 @@
           <a:noFill/>
         </p:spPr>
         <p:txBody>
-          <a:bodyPr wrap="none" lIns="0" rIns="0" tIns="0" bIns="0" anchor="t">
+          <a:bodyPr wrap="square" lIns="0" rIns="0" tIns="0" bIns="0" anchor="t">
             <a:spAutoFit/>
           </a:bodyPr>
           <a:lstStyle/>
@@ -15027,7 +15027,7 @@
           <a:noFill/>
         </p:spPr>
         <p:txBody>
-          <a:bodyPr wrap="none" lIns="0" rIns="0" tIns="0" bIns="0" anchor="t">
+          <a:bodyPr wrap="square" lIns="0" rIns="0" tIns="0" bIns="0" anchor="t">
             <a:spAutoFit/>
           </a:bodyPr>
           <a:lstStyle/>
@@ -15066,7 +15066,7 @@
           <a:noFill/>
         </p:spPr>
         <p:txBody>
-          <a:bodyPr wrap="none" lIns="0" rIns="0" tIns="0" bIns="0" anchor="t">
+          <a:bodyPr wrap="square" lIns="0" rIns="0" tIns="0" bIns="0" anchor="t">
             <a:spAutoFit/>
           </a:bodyPr>
           <a:lstStyle/>
@@ -15222,7 +15222,7 @@
           <a:noFill/>
         </p:spPr>
         <p:txBody>
-          <a:bodyPr wrap="none" lIns="0" rIns="0" tIns="0" bIns="0" anchor="t">
+          <a:bodyPr wrap="square" lIns="0" rIns="0" tIns="0" bIns="0" anchor="t">
             <a:spAutoFit/>
           </a:bodyPr>
           <a:lstStyle/>
@@ -15261,7 +15261,7 @@
           <a:noFill/>
         </p:spPr>
         <p:txBody>
-          <a:bodyPr wrap="none" lIns="0" rIns="0" tIns="0" bIns="0" anchor="t">
+          <a:bodyPr wrap="square" lIns="0" rIns="0" tIns="0" bIns="0" anchor="t">
             <a:spAutoFit/>
           </a:bodyPr>
           <a:lstStyle/>
@@ -15316,7 +15316,7 @@
           <a:noFill/>
         </p:spPr>
         <p:txBody>
-          <a:bodyPr wrap="none" lIns="0" rIns="0" tIns="0" bIns="0" anchor="t">
+          <a:bodyPr wrap="square" lIns="0" rIns="0" tIns="0" bIns="0" anchor="t">
             <a:spAutoFit/>
           </a:bodyPr>
           <a:lstStyle/>
@@ -15355,7 +15355,7 @@
           <a:noFill/>
         </p:spPr>
         <p:txBody>
-          <a:bodyPr wrap="none" lIns="0" rIns="0" tIns="0" bIns="0" anchor="t">
+          <a:bodyPr wrap="square" lIns="0" rIns="0" tIns="0" bIns="0" anchor="t">
             <a:spAutoFit/>
           </a:bodyPr>
           <a:lstStyle/>
@@ -15394,7 +15394,7 @@
           <a:noFill/>
         </p:spPr>
         <p:txBody>
-          <a:bodyPr wrap="none" lIns="0" rIns="0" tIns="0" bIns="0" anchor="t">
+          <a:bodyPr wrap="square" lIns="0" rIns="0" tIns="0" bIns="0" anchor="t">
             <a:spAutoFit/>
           </a:bodyPr>
           <a:lstStyle/>
@@ -15679,7 +15679,7 @@
           <a:noFill/>
         </p:spPr>
         <p:txBody>
-          <a:bodyPr wrap="none" lIns="0" rIns="0" tIns="0" bIns="0" anchor="t">
+          <a:bodyPr wrap="square" lIns="0" rIns="0" tIns="0" bIns="0" anchor="t">
             <a:spAutoFit/>
           </a:bodyPr>
           <a:lstStyle/>
@@ -15718,7 +15718,7 @@
           <a:noFill/>
         </p:spPr>
         <p:txBody>
-          <a:bodyPr wrap="none" lIns="0" rIns="0" tIns="0" bIns="0" anchor="t">
+          <a:bodyPr wrap="square" lIns="0" rIns="0" tIns="0" bIns="0" anchor="t">
             <a:spAutoFit/>
           </a:bodyPr>
           <a:lstStyle/>
@@ -15757,7 +15757,7 @@
           <a:noFill/>
         </p:spPr>
         <p:txBody>
-          <a:bodyPr wrap="none" lIns="0" rIns="0" tIns="0" bIns="0" anchor="t">
+          <a:bodyPr wrap="square" lIns="0" rIns="0" tIns="0" bIns="0" anchor="t">
             <a:spAutoFit/>
           </a:bodyPr>
           <a:lstStyle/>
@@ -15774,7 +15774,7 @@
                 </a:solidFill>
                 <a:latin typeface="Outfit"/>
               </a:rPr>
-              <a:t>Vai sulla pagina del corso e scegli:</a:t>
+              <a:t>Vai sulla pagina del corso e scegli: </a:t>
             </a:r>
           </a:p>
           <a:p>
@@ -15790,7 +15790,7 @@
                 </a:solidFill>
                 <a:latin typeface="Outfit"/>
               </a:rPr>
-              <a:t>un semestre, oppure il percorso</a:t>
+              <a:t>un semestre, oppure il percorso </a:t>
             </a:r>
           </a:p>
           <a:p>
@@ -15828,7 +15828,7 @@
           <a:noFill/>
         </p:spPr>
         <p:txBody>
-          <a:bodyPr wrap="none" lIns="0" rIns="0" tIns="0" bIns="0" anchor="t">
+          <a:bodyPr wrap="square" lIns="0" rIns="0" tIns="0" bIns="0" anchor="t">
             <a:spAutoFit/>
           </a:bodyPr>
           <a:lstStyle/>
@@ -15863,7 +15863,7 @@
           <a:noFill/>
         </p:spPr>
         <p:txBody>
-          <a:bodyPr wrap="none" lIns="0" rIns="0" tIns="0" bIns="0" anchor="t">
+          <a:bodyPr wrap="square" lIns="0" rIns="0" tIns="0" bIns="0" anchor="t">
             <a:spAutoFit/>
           </a:bodyPr>
           <a:lstStyle/>
@@ -15880,7 +15880,7 @@
                 </a:solidFill>
                 <a:latin typeface="Outfit"/>
               </a:rPr>
-              <a:t>Paghi con la carta, in modo sicuro:</a:t>
+              <a:t>Paghi con la carta, in modo sicuro: </a:t>
             </a:r>
           </a:p>
           <a:p>
@@ -15896,7 +15896,7 @@
                 </a:solidFill>
                 <a:latin typeface="Outfit"/>
               </a:rPr>
-              <a:t>il pagamento passa da Stripe, noi</a:t>
+              <a:t>il pagamento passa da Stripe, noi </a:t>
             </a:r>
           </a:p>
           <a:p>
@@ -15934,7 +15934,7 @@
           <a:noFill/>
         </p:spPr>
         <p:txBody>
-          <a:bodyPr wrap="none" lIns="0" rIns="0" tIns="0" bIns="0" anchor="t">
+          <a:bodyPr wrap="square" lIns="0" rIns="0" tIns="0" bIns="0" anchor="t">
             <a:spAutoFit/>
           </a:bodyPr>
           <a:lstStyle/>
@@ -15969,7 +15969,7 @@
           <a:noFill/>
         </p:spPr>
         <p:txBody>
-          <a:bodyPr wrap="none" lIns="0" rIns="0" tIns="0" bIns="0" anchor="t">
+          <a:bodyPr wrap="square" lIns="0" rIns="0" tIns="0" bIns="0" anchor="t">
             <a:spAutoFit/>
           </a:bodyPr>
           <a:lstStyle/>
@@ -15986,7 +15986,7 @@
                 </a:solidFill>
                 <a:latin typeface="Outfit"/>
               </a:rPr>
-              <a:t>Ricevi subito una mail con il link per</a:t>
+              <a:t>Ricevi subito una mail con il link per </a:t>
             </a:r>
           </a:p>
           <a:p>
@@ -16002,7 +16002,7 @@
                 </a:solidFill>
                 <a:latin typeface="Outfit"/>
               </a:rPr>
-              <a:t>attivare il tuo accesso e scegliere la</a:t>
+              <a:t>attivare il tuo accesso e scegliere la </a:t>
             </a:r>
           </a:p>
           <a:p>
@@ -16040,7 +16040,7 @@
           <a:noFill/>
         </p:spPr>
         <p:txBody>
-          <a:bodyPr wrap="none" lIns="0" rIns="0" tIns="0" bIns="0" anchor="t">
+          <a:bodyPr wrap="square" lIns="0" rIns="0" tIns="0" bIns="0" anchor="t">
             <a:spAutoFit/>
           </a:bodyPr>
           <a:lstStyle/>
@@ -16075,7 +16075,7 @@
           <a:noFill/>
         </p:spPr>
         <p:txBody>
-          <a:bodyPr wrap="none" lIns="0" rIns="0" tIns="0" bIns="0" anchor="t">
+          <a:bodyPr wrap="square" lIns="0" rIns="0" tIns="0" bIns="0" anchor="t">
             <a:spAutoFit/>
           </a:bodyPr>
           <a:lstStyle/>
@@ -16092,7 +16092,7 @@
                 </a:solidFill>
                 <a:latin typeface="Outfit"/>
               </a:rPr>
-              <a:t>Sei dentro: lezioni, registrazioni,</a:t>
+              <a:t>Sei dentro: lezioni, registrazioni, </a:t>
             </a:r>
           </a:p>
           <a:p>
@@ -16108,7 +16108,7 @@
                 </a:solidFill>
                 <a:latin typeface="Outfit"/>
               </a:rPr>
-              <a:t>materiali e forum nella tua area</a:t>
+              <a:t>materiali e forum nella tua area </a:t>
             </a:r>
           </a:p>
           <a:p>
@@ -16146,7 +16146,7 @@
           <a:noFill/>
         </p:spPr>
         <p:txBody>
-          <a:bodyPr wrap="none" lIns="0" rIns="0" tIns="0" bIns="0" anchor="t">
+          <a:bodyPr wrap="square" lIns="0" rIns="0" tIns="0" bIns="0" anchor="t">
             <a:spAutoFit/>
           </a:bodyPr>
           <a:lstStyle/>
@@ -16181,7 +16181,7 @@
           <a:noFill/>
         </p:spPr>
         <p:txBody>
-          <a:bodyPr wrap="none" lIns="0" rIns="0" tIns="0" bIns="0" anchor="t">
+          <a:bodyPr wrap="square" lIns="0" rIns="0" tIns="0" bIns="0" anchor="t">
             <a:spAutoFit/>
           </a:bodyPr>
           <a:lstStyle/>
@@ -16220,7 +16220,7 @@
           <a:noFill/>
         </p:spPr>
         <p:txBody>
-          <a:bodyPr wrap="none" lIns="0" rIns="0" tIns="0" bIns="0" anchor="t">
+          <a:bodyPr wrap="square" lIns="0" rIns="0" tIns="0" bIns="0" anchor="t">
             <a:spAutoFit/>
           </a:bodyPr>
           <a:lstStyle/>
@@ -16259,7 +16259,7 @@
           <a:noFill/>
         </p:spPr>
         <p:txBody>
-          <a:bodyPr wrap="none" lIns="0" rIns="0" tIns="0" bIns="0" anchor="t">
+          <a:bodyPr wrap="square" lIns="0" rIns="0" tIns="0" bIns="0" anchor="t">
             <a:spAutoFit/>
           </a:bodyPr>
           <a:lstStyle/>
@@ -16298,7 +16298,7 @@
           <a:noFill/>
         </p:spPr>
         <p:txBody>
-          <a:bodyPr wrap="none" lIns="0" rIns="0" tIns="0" bIns="0" anchor="t">
+          <a:bodyPr wrap="square" lIns="0" rIns="0" tIns="0" bIns="0" anchor="t">
             <a:spAutoFit/>
           </a:bodyPr>
           <a:lstStyle/>
@@ -16337,7 +16337,7 @@
           <a:noFill/>
         </p:spPr>
         <p:txBody>
-          <a:bodyPr wrap="none" lIns="0" rIns="0" tIns="0" bIns="0" anchor="t">
+          <a:bodyPr wrap="square" lIns="0" rIns="0" tIns="0" bIns="0" anchor="t">
             <a:spAutoFit/>
           </a:bodyPr>
           <a:lstStyle/>
@@ -16376,7 +16376,7 @@
           <a:noFill/>
         </p:spPr>
         <p:txBody>
-          <a:bodyPr wrap="none" lIns="0" rIns="0" tIns="0" bIns="0" anchor="t">
+          <a:bodyPr wrap="square" lIns="0" rIns="0" tIns="0" bIns="0" anchor="t">
             <a:spAutoFit/>
           </a:bodyPr>
           <a:lstStyle/>
@@ -16415,7 +16415,7 @@
           <a:noFill/>
         </p:spPr>
         <p:txBody>
-          <a:bodyPr wrap="none" lIns="0" rIns="0" tIns="0" bIns="0" anchor="t">
+          <a:bodyPr wrap="square" lIns="0" rIns="0" tIns="0" bIns="0" anchor="t">
             <a:spAutoFit/>
           </a:bodyPr>
           <a:lstStyle/>
@@ -16576,7 +16576,7 @@
           <a:noFill/>
         </p:spPr>
         <p:txBody>
-          <a:bodyPr wrap="none" lIns="0" rIns="0" tIns="0" bIns="0" anchor="t">
+          <a:bodyPr wrap="square" lIns="0" rIns="0" tIns="0" bIns="0" anchor="t">
             <a:spAutoFit/>
           </a:bodyPr>
           <a:lstStyle/>
@@ -16615,7 +16615,7 @@
           <a:noFill/>
         </p:spPr>
         <p:txBody>
-          <a:bodyPr wrap="none" lIns="0" rIns="0" tIns="0" bIns="0" anchor="t">
+          <a:bodyPr wrap="square" lIns="0" rIns="0" tIns="0" bIns="0" anchor="t">
             <a:spAutoFit/>
           </a:bodyPr>
           <a:lstStyle/>
@@ -16654,7 +16654,7 @@
           <a:noFill/>
         </p:spPr>
         <p:txBody>
-          <a:bodyPr wrap="none" lIns="0" rIns="0" tIns="0" bIns="0" anchor="t">
+          <a:bodyPr wrap="square" lIns="0" rIns="0" tIns="0" bIns="0" anchor="t">
             <a:spAutoFit/>
           </a:bodyPr>
           <a:lstStyle/>
@@ -16671,7 +16671,7 @@
                 </a:solidFill>
                 <a:latin typeface="Outfit"/>
               </a:rPr>
-              <a:t>La tua classe: le lezioni in ordine, ognuna con la registrazione da rivedere e</a:t>
+              <a:t>La tua classe: le lezioni in ordine, ognuna con la registrazione da rivedere e </a:t>
             </a:r>
           </a:p>
           <a:p>
@@ -16709,7 +16709,7 @@
           <a:noFill/>
         </p:spPr>
         <p:txBody>
-          <a:bodyPr wrap="none" lIns="0" rIns="0" tIns="0" bIns="0" anchor="t">
+          <a:bodyPr wrap="square" lIns="0" rIns="0" tIns="0" bIns="0" anchor="t">
             <a:spAutoFit/>
           </a:bodyPr>
           <a:lstStyle/>
@@ -16748,7 +16748,7 @@
           <a:noFill/>
         </p:spPr>
         <p:txBody>
-          <a:bodyPr wrap="none" lIns="0" rIns="0" tIns="0" bIns="0" anchor="t">
+          <a:bodyPr wrap="square" lIns="0" rIns="0" tIns="0" bIns="0" anchor="t">
             <a:spAutoFit/>
           </a:bodyPr>
           <a:lstStyle/>
@@ -16787,7 +16787,7 @@
           <a:noFill/>
         </p:spPr>
         <p:txBody>
-          <a:bodyPr wrap="none" lIns="0" rIns="0" tIns="0" bIns="0" anchor="t">
+          <a:bodyPr wrap="square" lIns="0" rIns="0" tIns="0" bIns="0" anchor="t">
             <a:spAutoFit/>
           </a:bodyPr>
           <a:lstStyle/>
@@ -16826,7 +16826,7 @@
           <a:noFill/>
         </p:spPr>
         <p:txBody>
-          <a:bodyPr wrap="none" lIns="0" rIns="0" tIns="0" bIns="0" anchor="t">
+          <a:bodyPr wrap="square" lIns="0" rIns="0" tIns="0" bIns="0" anchor="t">
             <a:spAutoFit/>
           </a:bodyPr>
           <a:lstStyle/>
@@ -16939,7 +16939,7 @@
           <a:noFill/>
         </p:spPr>
         <p:txBody>
-          <a:bodyPr wrap="none" lIns="0" rIns="0" tIns="0" bIns="0" anchor="t">
+          <a:bodyPr wrap="square" lIns="0" rIns="0" tIns="0" bIns="0" anchor="t">
             <a:spAutoFit/>
           </a:bodyPr>
           <a:lstStyle/>
@@ -16978,7 +16978,7 @@
           <a:noFill/>
         </p:spPr>
         <p:txBody>
-          <a:bodyPr wrap="none" lIns="0" rIns="0" tIns="0" bIns="0" anchor="t">
+          <a:bodyPr wrap="square" lIns="0" rIns="0" tIns="0" bIns="0" anchor="t">
             <a:spAutoFit/>
           </a:bodyPr>
           <a:lstStyle/>
@@ -17017,7 +17017,7 @@
           <a:noFill/>
         </p:spPr>
         <p:txBody>
-          <a:bodyPr wrap="none" lIns="0" rIns="0" tIns="0" bIns="0" anchor="t">
+          <a:bodyPr wrap="square" lIns="0" rIns="0" tIns="0" bIns="0" anchor="t">
             <a:spAutoFit/>
           </a:bodyPr>
           <a:lstStyle/>
@@ -17056,7 +17056,7 @@
           <a:noFill/>
         </p:spPr>
         <p:txBody>
-          <a:bodyPr wrap="none" lIns="0" rIns="0" tIns="0" bIns="0" anchor="t">
+          <a:bodyPr wrap="square" lIns="0" rIns="0" tIns="0" bIns="0" anchor="t">
             <a:spAutoFit/>
           </a:bodyPr>
           <a:lstStyle/>
@@ -17193,7 +17193,7 @@
           <a:noFill/>
         </p:spPr>
         <p:txBody>
-          <a:bodyPr wrap="none" lIns="0" rIns="0" tIns="0" bIns="0" anchor="t">
+          <a:bodyPr wrap="square" lIns="0" rIns="0" tIns="0" bIns="0" anchor="t">
             <a:spAutoFit/>
           </a:bodyPr>
           <a:lstStyle/>
@@ -17232,7 +17232,7 @@
           <a:noFill/>
         </p:spPr>
         <p:txBody>
-          <a:bodyPr wrap="none" lIns="0" rIns="0" tIns="0" bIns="0" anchor="t">
+          <a:bodyPr wrap="square" lIns="0" rIns="0" tIns="0" bIns="0" anchor="t">
             <a:spAutoFit/>
           </a:bodyPr>
           <a:lstStyle/>
@@ -17271,7 +17271,7 @@
           <a:noFill/>
         </p:spPr>
         <p:txBody>
-          <a:bodyPr wrap="none" lIns="0" rIns="0" tIns="0" bIns="0" anchor="t">
+          <a:bodyPr wrap="square" lIns="0" rIns="0" tIns="0" bIns="0" anchor="t">
             <a:spAutoFit/>
           </a:bodyPr>
           <a:lstStyle/>
@@ -17326,7 +17326,7 @@
           <a:noFill/>
         </p:spPr>
         <p:txBody>
-          <a:bodyPr wrap="none" lIns="0" rIns="0" tIns="0" bIns="0" anchor="t">
+          <a:bodyPr wrap="square" lIns="0" rIns="0" tIns="0" bIns="0" anchor="t">
             <a:spAutoFit/>
           </a:bodyPr>
           <a:lstStyle/>
@@ -17343,7 +17343,7 @@
                 </a:solidFill>
                 <a:latin typeface="Outfit"/>
               </a:rPr>
-              <a:t>Questo corso arriva da diversi inviti che mi sono arrivati attraverso</a:t>
+              <a:t>Questo corso arriva da diversi inviti che mi sono arrivati attraverso </a:t>
             </a:r>
           </a:p>
           <a:p>
@@ -17359,7 +17359,7 @@
                 </a:solidFill>
                 <a:latin typeface="Outfit"/>
               </a:rPr>
-              <a:t>la divulgazione dello Human Design e del BG5 sul mio canale</a:t>
+              <a:t>la divulgazione dello Human Design e del BG5 sul mio canale </a:t>
             </a:r>
           </a:p>
           <a:p>
@@ -17397,7 +17397,7 @@
           <a:noFill/>
         </p:spPr>
         <p:txBody>
-          <a:bodyPr wrap="none" lIns="0" rIns="0" tIns="0" bIns="0" anchor="t">
+          <a:bodyPr wrap="square" lIns="0" rIns="0" tIns="0" bIns="0" anchor="t">
             <a:spAutoFit/>
           </a:bodyPr>
           <a:lstStyle/>
@@ -17414,7 +17414,7 @@
                 </a:solidFill>
                 <a:latin typeface="Outfit"/>
               </a:rPr>
-              <a:t>Mi sento chiamata ad essere al servizio delle persone, ma fuori dal</a:t>
+              <a:t>Mi sento chiamata ad essere al servizio delle persone, ma fuori dal </a:t>
             </a:r>
           </a:p>
           <a:p>
@@ -17452,7 +17452,7 @@
           <a:noFill/>
         </p:spPr>
         <p:txBody>
-          <a:bodyPr wrap="none" lIns="0" rIns="0" tIns="0" bIns="0" anchor="t">
+          <a:bodyPr wrap="square" lIns="0" rIns="0" tIns="0" bIns="0" anchor="t">
             <a:spAutoFit/>
           </a:bodyPr>
           <a:lstStyle/>
@@ -17469,7 +17469,7 @@
                 </a:solidFill>
                 <a:latin typeface="Playfair Display"/>
               </a:rPr>
-              <a:t>Il mio obiettivo, con questo corso, è fornire gli</a:t>
+              <a:t>Il mio obiettivo, con questo corso, è fornire gli </a:t>
             </a:r>
           </a:p>
           <a:p>
@@ -17485,7 +17485,7 @@
                 </a:solidFill>
                 <a:latin typeface="Playfair Display"/>
               </a:rPr>
-              <a:t>strumenti base per leggere in autonomia qualsiasi</a:t>
+              <a:t>strumenti base per leggere in autonomia qualsiasi </a:t>
             </a:r>
           </a:p>
           <a:p>
@@ -17523,7 +17523,7 @@
           <a:noFill/>
         </p:spPr>
         <p:txBody>
-          <a:bodyPr wrap="none" lIns="0" rIns="0" tIns="0" bIns="0" anchor="t">
+          <a:bodyPr wrap="square" lIns="0" rIns="0" tIns="0" bIns="0" anchor="t">
             <a:spAutoFit/>
           </a:bodyPr>
           <a:lstStyle/>
@@ -17562,7 +17562,7 @@
           <a:noFill/>
         </p:spPr>
         <p:txBody>
-          <a:bodyPr wrap="none" lIns="0" rIns="0" tIns="0" bIns="0" anchor="t">
+          <a:bodyPr wrap="square" lIns="0" rIns="0" tIns="0" bIns="0" anchor="t">
             <a:spAutoFit/>
           </a:bodyPr>
           <a:lstStyle/>
@@ -17675,7 +17675,7 @@
           <a:noFill/>
         </p:spPr>
         <p:txBody>
-          <a:bodyPr wrap="none" lIns="0" rIns="0" tIns="0" bIns="0" anchor="t">
+          <a:bodyPr wrap="square" lIns="0" rIns="0" tIns="0" bIns="0" anchor="t">
             <a:spAutoFit/>
           </a:bodyPr>
           <a:lstStyle/>
@@ -17705,16 +17705,16 @@
         </p:nvSpPr>
         <p:spPr>
           <a:xfrm>
-            <a:off x="7514884" y="3429488"/>
-            <a:ext cx="4067487" cy="419099"/>
-          </a:xfrm>
-          <a:prstGeom prst="rect">
-            <a:avLst/>
-          </a:prstGeom>
-          <a:noFill/>
-        </p:spPr>
-        <p:txBody>
-          <a:bodyPr wrap="none" lIns="0" rIns="0" tIns="0" bIns="0" anchor="t">
+            <a:off x="6664457" y="3416788"/>
+            <a:ext cx="4917914" cy="444499"/>
+          </a:xfrm>
+          <a:prstGeom prst="rect">
+            <a:avLst/>
+          </a:prstGeom>
+          <a:noFill/>
+        </p:spPr>
+        <p:txBody>
+          <a:bodyPr wrap="square" lIns="0" rIns="0" tIns="0" bIns="0" anchor="t">
             <a:spAutoFit/>
           </a:bodyPr>
           <a:lstStyle/>
@@ -17753,7 +17753,7 @@
           <a:noFill/>
         </p:spPr>
         <p:txBody>
-          <a:bodyPr wrap="none" lIns="0" rIns="0" tIns="0" bIns="0" anchor="t">
+          <a:bodyPr wrap="square" lIns="0" rIns="0" tIns="0" bIns="0" anchor="t">
             <a:spAutoFit/>
           </a:bodyPr>
           <a:lstStyle/>
@@ -17792,7 +17792,7 @@
           <a:noFill/>
         </p:spPr>
         <p:txBody>
-          <a:bodyPr wrap="none" lIns="0" rIns="0" tIns="0" bIns="0" anchor="t">
+          <a:bodyPr wrap="square" lIns="0" rIns="0" tIns="0" bIns="0" anchor="t">
             <a:spAutoFit/>
           </a:bodyPr>
           <a:lstStyle/>
@@ -17831,7 +17831,7 @@
           <a:noFill/>
         </p:spPr>
         <p:txBody>
-          <a:bodyPr wrap="none" lIns="0" rIns="0" tIns="0" bIns="0" anchor="t">
+          <a:bodyPr wrap="square" lIns="0" rIns="0" tIns="0" bIns="0" anchor="t">
             <a:spAutoFit/>
           </a:bodyPr>
           <a:lstStyle/>
@@ -17987,7 +17987,7 @@
           <a:noFill/>
         </p:spPr>
         <p:txBody>
-          <a:bodyPr wrap="none" lIns="0" rIns="0" tIns="0" bIns="0" anchor="t">
+          <a:bodyPr wrap="square" lIns="0" rIns="0" tIns="0" bIns="0" anchor="t">
             <a:spAutoFit/>
           </a:bodyPr>
           <a:lstStyle/>
@@ -18026,7 +18026,7 @@
           <a:noFill/>
         </p:spPr>
         <p:txBody>
-          <a:bodyPr wrap="none" lIns="0" rIns="0" tIns="0" bIns="0" anchor="t">
+          <a:bodyPr wrap="square" lIns="0" rIns="0" tIns="0" bIns="0" anchor="t">
             <a:spAutoFit/>
           </a:bodyPr>
           <a:lstStyle/>
@@ -18043,7 +18043,7 @@
                 </a:solidFill>
                 <a:latin typeface="Playfair Display"/>
               </a:rPr>
-              <a:t>Ascolta come se fosse la</a:t>
+              <a:t>Ascolta come se fosse la </a:t>
             </a:r>
           </a:p>
           <a:p>
@@ -18059,7 +18059,7 @@
                 </a:solidFill>
                 <a:latin typeface="Playfair Display"/>
               </a:rPr>
-              <a:t>prima volta che senti</a:t>
+              <a:t>prima volta che senti </a:t>
             </a:r>
           </a:p>
           <a:p>
@@ -18097,7 +18097,7 @@
           <a:noFill/>
         </p:spPr>
         <p:txBody>
-          <a:bodyPr wrap="none" lIns="0" rIns="0" tIns="0" bIns="0" anchor="t">
+          <a:bodyPr wrap="square" lIns="0" rIns="0" tIns="0" bIns="0" anchor="t">
             <a:spAutoFit/>
           </a:bodyPr>
           <a:lstStyle/>
@@ -18136,7 +18136,7 @@
           <a:noFill/>
         </p:spPr>
         <p:txBody>
-          <a:bodyPr wrap="none" lIns="0" rIns="0" tIns="0" bIns="0" anchor="t">
+          <a:bodyPr wrap="square" lIns="0" rIns="0" tIns="0" bIns="0" anchor="t">
             <a:spAutoFit/>
           </a:bodyPr>
           <a:lstStyle/>
@@ -18574,7 +18574,7 @@
           <a:noFill/>
         </p:spPr>
         <p:txBody>
-          <a:bodyPr wrap="none" lIns="0" rIns="0" tIns="0" bIns="0" anchor="t">
+          <a:bodyPr wrap="square" lIns="0" rIns="0" tIns="0" bIns="0" anchor="t">
             <a:spAutoFit/>
           </a:bodyPr>
           <a:lstStyle/>
@@ -18613,7 +18613,7 @@
           <a:noFill/>
         </p:spPr>
         <p:txBody>
-          <a:bodyPr wrap="none" lIns="0" rIns="0" tIns="0" bIns="0" anchor="t">
+          <a:bodyPr wrap="square" lIns="0" rIns="0" tIns="0" bIns="0" anchor="t">
             <a:spAutoFit/>
           </a:bodyPr>
           <a:lstStyle/>
@@ -18652,7 +18652,7 @@
           <a:noFill/>
         </p:spPr>
         <p:txBody>
-          <a:bodyPr wrap="none" lIns="0" rIns="0" tIns="0" bIns="0" anchor="t">
+          <a:bodyPr wrap="square" lIns="0" rIns="0" tIns="0" bIns="0" anchor="t">
             <a:spAutoFit/>
           </a:bodyPr>
           <a:lstStyle/>
@@ -18691,7 +18691,7 @@
           <a:noFill/>
         </p:spPr>
         <p:txBody>
-          <a:bodyPr wrap="none" lIns="0" rIns="0" tIns="0" bIns="0" anchor="t">
+          <a:bodyPr wrap="square" lIns="0" rIns="0" tIns="0" bIns="0" anchor="t">
             <a:spAutoFit/>
           </a:bodyPr>
           <a:lstStyle/>
@@ -18726,7 +18726,7 @@
           <a:noFill/>
         </p:spPr>
         <p:txBody>
-          <a:bodyPr wrap="none" lIns="0" rIns="0" tIns="0" bIns="0" anchor="t">
+          <a:bodyPr wrap="square" lIns="0" rIns="0" tIns="0" bIns="0" anchor="t">
             <a:spAutoFit/>
           </a:bodyPr>
           <a:lstStyle/>
@@ -18765,7 +18765,7 @@
           <a:noFill/>
         </p:spPr>
         <p:txBody>
-          <a:bodyPr wrap="none" lIns="0" rIns="0" tIns="0" bIns="0" anchor="t">
+          <a:bodyPr wrap="square" lIns="0" rIns="0" tIns="0" bIns="0" anchor="t">
             <a:spAutoFit/>
           </a:bodyPr>
           <a:lstStyle/>
@@ -18800,7 +18800,7 @@
           <a:noFill/>
         </p:spPr>
         <p:txBody>
-          <a:bodyPr wrap="none" lIns="0" rIns="0" tIns="0" bIns="0" anchor="t">
+          <a:bodyPr wrap="square" lIns="0" rIns="0" tIns="0" bIns="0" anchor="t">
             <a:spAutoFit/>
           </a:bodyPr>
           <a:lstStyle/>
@@ -18839,7 +18839,7 @@
           <a:noFill/>
         </p:spPr>
         <p:txBody>
-          <a:bodyPr wrap="none" lIns="0" rIns="0" tIns="0" bIns="0" anchor="t">
+          <a:bodyPr wrap="square" lIns="0" rIns="0" tIns="0" bIns="0" anchor="t">
             <a:spAutoFit/>
           </a:bodyPr>
           <a:lstStyle/>
@@ -18874,7 +18874,7 @@
           <a:noFill/>
         </p:spPr>
         <p:txBody>
-          <a:bodyPr wrap="none" lIns="0" rIns="0" tIns="0" bIns="0" anchor="t">
+          <a:bodyPr wrap="square" lIns="0" rIns="0" tIns="0" bIns="0" anchor="t">
             <a:spAutoFit/>
           </a:bodyPr>
           <a:lstStyle/>
@@ -18913,7 +18913,7 @@
           <a:noFill/>
         </p:spPr>
         <p:txBody>
-          <a:bodyPr wrap="none" lIns="0" rIns="0" tIns="0" bIns="0" anchor="t">
+          <a:bodyPr wrap="square" lIns="0" rIns="0" tIns="0" bIns="0" anchor="t">
             <a:spAutoFit/>
           </a:bodyPr>
           <a:lstStyle/>
@@ -18948,7 +18948,7 @@
           <a:noFill/>
         </p:spPr>
         <p:txBody>
-          <a:bodyPr wrap="none" lIns="0" rIns="0" tIns="0" bIns="0" anchor="t">
+          <a:bodyPr wrap="square" lIns="0" rIns="0" tIns="0" bIns="0" anchor="t">
             <a:spAutoFit/>
           </a:bodyPr>
           <a:lstStyle/>
@@ -18987,7 +18987,7 @@
           <a:noFill/>
         </p:spPr>
         <p:txBody>
-          <a:bodyPr wrap="none" lIns="0" rIns="0" tIns="0" bIns="0" anchor="t">
+          <a:bodyPr wrap="square" lIns="0" rIns="0" tIns="0" bIns="0" anchor="t">
             <a:spAutoFit/>
           </a:bodyPr>
           <a:lstStyle/>
@@ -19022,7 +19022,7 @@
           <a:noFill/>
         </p:spPr>
         <p:txBody>
-          <a:bodyPr wrap="none" lIns="0" rIns="0" tIns="0" bIns="0" anchor="t">
+          <a:bodyPr wrap="square" lIns="0" rIns="0" tIns="0" bIns="0" anchor="t">
             <a:spAutoFit/>
           </a:bodyPr>
           <a:lstStyle/>
@@ -19061,7 +19061,7 @@
           <a:noFill/>
         </p:spPr>
         <p:txBody>
-          <a:bodyPr wrap="none" lIns="0" rIns="0" tIns="0" bIns="0" anchor="t">
+          <a:bodyPr wrap="square" lIns="0" rIns="0" tIns="0" bIns="0" anchor="t">
             <a:spAutoFit/>
           </a:bodyPr>
           <a:lstStyle/>
@@ -19096,7 +19096,7 @@
           <a:noFill/>
         </p:spPr>
         <p:txBody>
-          <a:bodyPr wrap="none" lIns="0" rIns="0" tIns="0" bIns="0" anchor="t">
+          <a:bodyPr wrap="square" lIns="0" rIns="0" tIns="0" bIns="0" anchor="t">
             <a:spAutoFit/>
           </a:bodyPr>
           <a:lstStyle/>
@@ -19135,7 +19135,7 @@
           <a:noFill/>
         </p:spPr>
         <p:txBody>
-          <a:bodyPr wrap="none" lIns="0" rIns="0" tIns="0" bIns="0" anchor="t">
+          <a:bodyPr wrap="square" lIns="0" rIns="0" tIns="0" bIns="0" anchor="t">
             <a:spAutoFit/>
           </a:bodyPr>
           <a:lstStyle/>
@@ -19170,7 +19170,7 @@
           <a:noFill/>
         </p:spPr>
         <p:txBody>
-          <a:bodyPr wrap="none" lIns="0" rIns="0" tIns="0" bIns="0" anchor="t">
+          <a:bodyPr wrap="square" lIns="0" rIns="0" tIns="0" bIns="0" anchor="t">
             <a:spAutoFit/>
           </a:bodyPr>
           <a:lstStyle/>
@@ -19209,7 +19209,7 @@
           <a:noFill/>
         </p:spPr>
         <p:txBody>
-          <a:bodyPr wrap="none" lIns="0" rIns="0" tIns="0" bIns="0" anchor="t">
+          <a:bodyPr wrap="square" lIns="0" rIns="0" tIns="0" bIns="0" anchor="t">
             <a:spAutoFit/>
           </a:bodyPr>
           <a:lstStyle/>
@@ -19248,7 +19248,7 @@
           <a:noFill/>
         </p:spPr>
         <p:txBody>
-          <a:bodyPr wrap="none" lIns="0" rIns="0" tIns="0" bIns="0" anchor="t">
+          <a:bodyPr wrap="square" lIns="0" rIns="0" tIns="0" bIns="0" anchor="t">
             <a:spAutoFit/>
           </a:bodyPr>
           <a:lstStyle/>
@@ -19404,7 +19404,7 @@
           <a:noFill/>
         </p:spPr>
         <p:txBody>
-          <a:bodyPr wrap="none" lIns="0" rIns="0" tIns="0" bIns="0" anchor="t">
+          <a:bodyPr wrap="square" lIns="0" rIns="0" tIns="0" bIns="0" anchor="t">
             <a:spAutoFit/>
           </a:bodyPr>
           <a:lstStyle/>
@@ -19434,16 +19434,16 @@
         </p:nvSpPr>
         <p:spPr>
           <a:xfrm>
-            <a:off x="596899" y="1771447"/>
-            <a:ext cx="11595815" cy="2231623"/>
-          </a:xfrm>
-          <a:prstGeom prst="rect">
-            <a:avLst/>
-          </a:prstGeom>
-          <a:noFill/>
-        </p:spPr>
-        <p:txBody>
-          <a:bodyPr wrap="none" lIns="0" rIns="0" tIns="0" bIns="0" anchor="t">
+            <a:off x="596899" y="1758747"/>
+            <a:ext cx="11917159" cy="2250672"/>
+          </a:xfrm>
+          <a:prstGeom prst="rect">
+            <a:avLst/>
+          </a:prstGeom>
+          <a:noFill/>
+        </p:spPr>
+        <p:txBody>
+          <a:bodyPr wrap="square" lIns="0" rIns="0" tIns="0" bIns="0" anchor="t">
             <a:spAutoFit/>
           </a:bodyPr>
           <a:lstStyle/>
@@ -19460,7 +19460,7 @@
                 </a:solidFill>
                 <a:latin typeface="Playfair Display"/>
               </a:rPr>
-              <a:t>L'attuale direzione verso la quale stiamo andando è, e sarà, uno shock. È un</a:t>
+              <a:t>L'attuale direzione verso la quale stiamo andando è, e sarà, uno </a:t>
             </a:r>
           </a:p>
           <a:p>
@@ -19476,7 +19476,7 @@
                 </a:solidFill>
                 <a:latin typeface="Playfair Display"/>
               </a:rPr>
-              <a:t>mondo che abbraccerà coloro che vivono e operano come loro stessi. Ciò</a:t>
+              <a:t>shock. È un mondo che abbraccerà coloro che vivono e operano </a:t>
             </a:r>
           </a:p>
           <a:p>
@@ -19492,7 +19492,7 @@
                 </a:solidFill>
                 <a:latin typeface="Playfair Display"/>
               </a:rPr>
-              <a:t>significherà molto disordine, caos e confusione per coloro che sono persi nella</a:t>
+              <a:t>come loro stessi. Ciò significherà molto disordine, caos e </a:t>
             </a:r>
           </a:p>
           <a:p>
@@ -19508,7 +19508,7 @@
                 </a:solidFill>
                 <a:latin typeface="Playfair Display"/>
               </a:rPr>
-              <a:t>dipendenza da schemi e relazioni. Tutto nella nostra specie è radicato nella</a:t>
+              <a:t>confusione per coloro che sono persi nella dipendenza da schemi </a:t>
             </a:r>
           </a:p>
           <a:p>
@@ -19524,7 +19524,7 @@
                 </a:solidFill>
                 <a:latin typeface="Playfair Display"/>
               </a:rPr>
-              <a:t>dipendenza.</a:t>
+              <a:t>e relazioni. Tutto nella nostra specie è radicato nella dipendenza.</a:t>
             </a:r>
           </a:p>
         </p:txBody>
@@ -19546,7 +19546,7 @@
           <a:noFill/>
         </p:spPr>
         <p:txBody>
-          <a:bodyPr wrap="none" lIns="0" rIns="0" tIns="0" bIns="0" anchor="t">
+          <a:bodyPr wrap="square" lIns="0" rIns="0" tIns="0" bIns="0" anchor="t">
             <a:spAutoFit/>
           </a:bodyPr>
           <a:lstStyle/>
@@ -19585,7 +19585,7 @@
           <a:noFill/>
         </p:spPr>
         <p:txBody>
-          <a:bodyPr wrap="none" lIns="0" rIns="0" tIns="0" bIns="0" anchor="t">
+          <a:bodyPr wrap="square" lIns="0" rIns="0" tIns="0" bIns="0" anchor="t">
             <a:spAutoFit/>
           </a:bodyPr>
           <a:lstStyle/>
@@ -19624,7 +19624,7 @@
           <a:noFill/>
         </p:spPr>
         <p:txBody>
-          <a:bodyPr wrap="none" lIns="0" rIns="0" tIns="0" bIns="0" anchor="t">
+          <a:bodyPr wrap="square" lIns="0" rIns="0" tIns="0" bIns="0" anchor="t">
             <a:spAutoFit/>
           </a:bodyPr>
           <a:lstStyle/>
@@ -19663,7 +19663,7 @@
           <a:noFill/>
         </p:spPr>
         <p:txBody>
-          <a:bodyPr wrap="none" lIns="0" rIns="0" tIns="0" bIns="0" anchor="t">
+          <a:bodyPr wrap="square" lIns="0" rIns="0" tIns="0" bIns="0" anchor="t">
             <a:spAutoFit/>
           </a:bodyPr>
           <a:lstStyle/>
@@ -19819,7 +19819,7 @@
           <a:noFill/>
         </p:spPr>
         <p:txBody>
-          <a:bodyPr wrap="none" lIns="0" rIns="0" tIns="0" bIns="0" anchor="t">
+          <a:bodyPr wrap="square" lIns="0" rIns="0" tIns="0" bIns="0" anchor="t">
             <a:spAutoFit/>
           </a:bodyPr>
           <a:lstStyle/>
@@ -19858,7 +19858,7 @@
           <a:noFill/>
         </p:spPr>
         <p:txBody>
-          <a:bodyPr wrap="none" lIns="0" rIns="0" tIns="0" bIns="0" anchor="t">
+          <a:bodyPr wrap="square" lIns="0" rIns="0" tIns="0" bIns="0" anchor="t">
             <a:spAutoFit/>
           </a:bodyPr>
           <a:lstStyle/>
@@ -19897,7 +19897,7 @@
           <a:noFill/>
         </p:spPr>
         <p:txBody>
-          <a:bodyPr wrap="none" lIns="0" rIns="0" tIns="0" bIns="0" anchor="t">
+          <a:bodyPr wrap="square" lIns="0" rIns="0" tIns="0" bIns="0" anchor="t">
             <a:spAutoFit/>
           </a:bodyPr>
           <a:lstStyle/>
@@ -19936,7 +19936,7 @@
           <a:noFill/>
         </p:spPr>
         <p:txBody>
-          <a:bodyPr wrap="none" lIns="0" rIns="0" tIns="0" bIns="0" anchor="t">
+          <a:bodyPr wrap="square" lIns="0" rIns="0" tIns="0" bIns="0" anchor="t">
             <a:spAutoFit/>
           </a:bodyPr>
           <a:lstStyle/>
@@ -19953,7 +19953,7 @@
                 </a:solidFill>
                 <a:latin typeface="Outfit"/>
               </a:rPr>
-              <a:t>Falso entusiasmo. La comunicazione si basa su pretese</a:t>
+              <a:t>Falso entusiasmo. La comunicazione si basa su pretese </a:t>
             </a:r>
           </a:p>
           <a:p>
@@ -19969,7 +19969,7 @@
                 </a:solidFill>
                 <a:latin typeface="Outfit"/>
               </a:rPr>
-              <a:t>inevitabilmente non realizzate. Tendenza ad esprimere la</a:t>
+              <a:t>inevitabilmente non realizzate. Tendenza ad esprimere la </a:t>
             </a:r>
           </a:p>
           <a:p>
@@ -20007,7 +20007,7 @@
           <a:noFill/>
         </p:spPr>
         <p:txBody>
-          <a:bodyPr wrap="none" lIns="0" rIns="0" tIns="0" bIns="0" anchor="t">
+          <a:bodyPr wrap="square" lIns="0" rIns="0" tIns="0" bIns="0" anchor="t">
             <a:spAutoFit/>
           </a:bodyPr>
           <a:lstStyle/>
@@ -20046,7 +20046,7 @@
           <a:noFill/>
         </p:spPr>
         <p:txBody>
-          <a:bodyPr wrap="none" lIns="0" rIns="0" tIns="0" bIns="0" anchor="t">
+          <a:bodyPr wrap="square" lIns="0" rIns="0" tIns="0" bIns="0" anchor="t">
             <a:spAutoFit/>
           </a:bodyPr>
           <a:lstStyle/>
@@ -20063,7 +20063,7 @@
                 </a:solidFill>
                 <a:latin typeface="Outfit"/>
               </a:rPr>
-              <a:t>Contemplazione nell'adesso che si traduce nella capacità di</a:t>
+              <a:t>Contemplazione nell'adesso che si traduce nella capacità di </a:t>
             </a:r>
           </a:p>
           <a:p>
@@ -20079,7 +20079,7 @@
                 </a:solidFill>
                 <a:latin typeface="Outfit"/>
               </a:rPr>
-              <a:t>applicare la comprensione. Le istituzioni lavorano a beneficio</a:t>
+              <a:t>applicare la comprensione. Le istituzioni lavorano a beneficio </a:t>
             </a:r>
           </a:p>
           <a:p>
@@ -20095,7 +20095,7 @@
                 </a:solidFill>
                 <a:latin typeface="Outfit"/>
               </a:rPr>
-              <a:t>della società, dei valori, degli ideali e dei loro modelli, e di come</a:t>
+              <a:t>della società, dei valori, degli ideali e dei loro modelli, e di come </a:t>
             </a:r>
           </a:p>
           <a:p>
@@ -20111,7 +20111,7 @@
                 </a:solidFill>
                 <a:latin typeface="Outfit"/>
               </a:rPr>
-              <a:t>questi possono essere compresi e applicati. La capacità di</a:t>
+              <a:t>questi possono essere compresi e applicati. La capacità di </a:t>
             </a:r>
           </a:p>
           <a:p>
@@ -20127,7 +20127,7 @@
                 </a:solidFill>
                 <a:latin typeface="Outfit"/>
               </a:rPr>
-              <a:t>trasformare la consapevolezza individuale in impegno e</a:t>
+              <a:t>trasformare la consapevolezza individuale in impegno e </a:t>
             </a:r>
           </a:p>
           <a:p>
@@ -20165,7 +20165,7 @@
           <a:noFill/>
         </p:spPr>
         <p:txBody>
-          <a:bodyPr wrap="none" lIns="0" rIns="0" tIns="0" bIns="0" anchor="t">
+          <a:bodyPr wrap="square" lIns="0" rIns="0" tIns="0" bIns="0" anchor="t">
             <a:spAutoFit/>
           </a:bodyPr>
           <a:lstStyle/>
@@ -20204,7 +20204,7 @@
           <a:noFill/>
         </p:spPr>
         <p:txBody>
-          <a:bodyPr wrap="none" lIns="0" rIns="0" tIns="0" bIns="0" anchor="t">
+          <a:bodyPr wrap="square" lIns="0" rIns="0" tIns="0" bIns="0" anchor="t">
             <a:spAutoFit/>
           </a:bodyPr>
           <a:lstStyle/>
@@ -20243,7 +20243,7 @@
           <a:noFill/>
         </p:spPr>
         <p:txBody>
-          <a:bodyPr wrap="none" lIns="0" rIns="0" tIns="0" bIns="0" anchor="t">
+          <a:bodyPr wrap="square" lIns="0" rIns="0" tIns="0" bIns="0" anchor="t">
             <a:spAutoFit/>
           </a:bodyPr>
           <a:lstStyle/>
@@ -21049,7 +21049,7 @@
           <a:noFill/>
         </p:spPr>
         <p:txBody>
-          <a:bodyPr wrap="none" lIns="0" rIns="0" tIns="0" bIns="0" anchor="t">
+          <a:bodyPr wrap="square" lIns="0" rIns="0" tIns="0" bIns="0" anchor="t">
             <a:spAutoFit/>
           </a:bodyPr>
           <a:lstStyle/>
@@ -21088,7 +21088,7 @@
           <a:noFill/>
         </p:spPr>
         <p:txBody>
-          <a:bodyPr wrap="none" lIns="0" rIns="0" tIns="0" bIns="0" anchor="t">
+          <a:bodyPr wrap="square" lIns="0" rIns="0" tIns="0" bIns="0" anchor="t">
             <a:spAutoFit/>
           </a:bodyPr>
           <a:lstStyle/>
@@ -21127,7 +21127,7 @@
           <a:noFill/>
         </p:spPr>
         <p:txBody>
-          <a:bodyPr wrap="none" lIns="0" rIns="0" tIns="0" bIns="0" anchor="t">
+          <a:bodyPr wrap="square" lIns="0" rIns="0" tIns="0" bIns="0" anchor="t">
             <a:spAutoFit/>
           </a:bodyPr>
           <a:lstStyle/>
@@ -21166,7 +21166,7 @@
           <a:noFill/>
         </p:spPr>
         <p:txBody>
-          <a:bodyPr wrap="none" lIns="0" rIns="0" tIns="0" bIns="0" anchor="t">
+          <a:bodyPr wrap="square" lIns="0" rIns="0" tIns="0" bIns="0" anchor="t">
             <a:spAutoFit/>
           </a:bodyPr>
           <a:lstStyle/>
@@ -21205,7 +21205,7 @@
           <a:noFill/>
         </p:spPr>
         <p:txBody>
-          <a:bodyPr wrap="none" lIns="0" rIns="0" tIns="0" bIns="0" anchor="t">
+          <a:bodyPr wrap="square" lIns="0" rIns="0" tIns="0" bIns="0" anchor="t">
             <a:spAutoFit/>
           </a:bodyPr>
           <a:lstStyle/>
@@ -21244,7 +21244,7 @@
           <a:noFill/>
         </p:spPr>
         <p:txBody>
-          <a:bodyPr wrap="none" lIns="0" rIns="0" tIns="0" bIns="0" anchor="t">
+          <a:bodyPr wrap="square" lIns="0" rIns="0" tIns="0" bIns="0" anchor="t">
             <a:spAutoFit/>
           </a:bodyPr>
           <a:lstStyle/>
@@ -21283,7 +21283,7 @@
           <a:noFill/>
         </p:spPr>
         <p:txBody>
-          <a:bodyPr wrap="none" lIns="0" rIns="0" tIns="0" bIns="0" anchor="t">
+          <a:bodyPr wrap="square" lIns="0" rIns="0" tIns="0" bIns="0" anchor="t">
             <a:spAutoFit/>
           </a:bodyPr>
           <a:lstStyle/>
@@ -21322,7 +21322,7 @@
           <a:noFill/>
         </p:spPr>
         <p:txBody>
-          <a:bodyPr wrap="none" lIns="0" rIns="0" tIns="0" bIns="0" anchor="t">
+          <a:bodyPr wrap="square" lIns="0" rIns="0" tIns="0" bIns="0" anchor="t">
             <a:spAutoFit/>
           </a:bodyPr>
           <a:lstStyle/>
@@ -21361,7 +21361,7 @@
           <a:noFill/>
         </p:spPr>
         <p:txBody>
-          <a:bodyPr wrap="none" lIns="0" rIns="0" tIns="0" bIns="0" anchor="t">
+          <a:bodyPr wrap="square" lIns="0" rIns="0" tIns="0" bIns="0" anchor="t">
             <a:spAutoFit/>
           </a:bodyPr>
           <a:lstStyle/>
@@ -21400,7 +21400,7 @@
           <a:noFill/>
         </p:spPr>
         <p:txBody>
-          <a:bodyPr wrap="none" lIns="0" rIns="0" tIns="0" bIns="0" anchor="t">
+          <a:bodyPr wrap="square" lIns="0" rIns="0" tIns="0" bIns="0" anchor="t">
             <a:spAutoFit/>
           </a:bodyPr>
           <a:lstStyle/>
@@ -21439,7 +21439,7 @@
           <a:noFill/>
         </p:spPr>
         <p:txBody>
-          <a:bodyPr wrap="none" lIns="0" rIns="0" tIns="0" bIns="0" anchor="t">
+          <a:bodyPr wrap="square" lIns="0" rIns="0" tIns="0" bIns="0" anchor="t">
             <a:spAutoFit/>
           </a:bodyPr>
           <a:lstStyle/>
@@ -21478,7 +21478,7 @@
           <a:noFill/>
         </p:spPr>
         <p:txBody>
-          <a:bodyPr wrap="none" lIns="0" rIns="0" tIns="0" bIns="0" anchor="t">
+          <a:bodyPr wrap="square" lIns="0" rIns="0" tIns="0" bIns="0" anchor="t">
             <a:spAutoFit/>
           </a:bodyPr>
           <a:lstStyle/>
@@ -21517,7 +21517,7 @@
           <a:noFill/>
         </p:spPr>
         <p:txBody>
-          <a:bodyPr wrap="none" lIns="0" rIns="0" tIns="0" bIns="0" anchor="t">
+          <a:bodyPr wrap="square" lIns="0" rIns="0" tIns="0" bIns="0" anchor="t">
             <a:spAutoFit/>
           </a:bodyPr>
           <a:lstStyle/>
@@ -21556,7 +21556,7 @@
           <a:noFill/>
         </p:spPr>
         <p:txBody>
-          <a:bodyPr wrap="none" lIns="0" rIns="0" tIns="0" bIns="0" anchor="t">
+          <a:bodyPr wrap="square" lIns="0" rIns="0" tIns="0" bIns="0" anchor="t">
             <a:spAutoFit/>
           </a:bodyPr>
           <a:lstStyle/>
@@ -21595,7 +21595,7 @@
           <a:noFill/>
         </p:spPr>
         <p:txBody>
-          <a:bodyPr wrap="none" lIns="0" rIns="0" tIns="0" bIns="0" anchor="t">
+          <a:bodyPr wrap="square" lIns="0" rIns="0" tIns="0" bIns="0" anchor="t">
             <a:spAutoFit/>
           </a:bodyPr>
           <a:lstStyle/>
@@ -21634,7 +21634,7 @@
           <a:noFill/>
         </p:spPr>
         <p:txBody>
-          <a:bodyPr wrap="none" lIns="0" rIns="0" tIns="0" bIns="0" anchor="t">
+          <a:bodyPr wrap="square" lIns="0" rIns="0" tIns="0" bIns="0" anchor="t">
             <a:spAutoFit/>
           </a:bodyPr>
           <a:lstStyle/>
@@ -21673,7 +21673,7 @@
           <a:noFill/>
         </p:spPr>
         <p:txBody>
-          <a:bodyPr wrap="none" lIns="0" rIns="0" tIns="0" bIns="0" anchor="t">
+          <a:bodyPr wrap="square" lIns="0" rIns="0" tIns="0" bIns="0" anchor="t">
             <a:spAutoFit/>
           </a:bodyPr>
           <a:lstStyle/>
@@ -21712,7 +21712,7 @@
           <a:noFill/>
         </p:spPr>
         <p:txBody>
-          <a:bodyPr wrap="none" lIns="0" rIns="0" tIns="0" bIns="0" anchor="t">
+          <a:bodyPr wrap="square" lIns="0" rIns="0" tIns="0" bIns="0" anchor="t">
             <a:spAutoFit/>
           </a:bodyPr>
           <a:lstStyle/>
@@ -21751,7 +21751,7 @@
           <a:noFill/>
         </p:spPr>
         <p:txBody>
-          <a:bodyPr wrap="none" lIns="0" rIns="0" tIns="0" bIns="0" anchor="t">
+          <a:bodyPr wrap="square" lIns="0" rIns="0" tIns="0" bIns="0" anchor="t">
             <a:spAutoFit/>
           </a:bodyPr>
           <a:lstStyle/>
@@ -21790,7 +21790,7 @@
           <a:noFill/>
         </p:spPr>
         <p:txBody>
-          <a:bodyPr wrap="none" lIns="0" rIns="0" tIns="0" bIns="0" anchor="t">
+          <a:bodyPr wrap="square" lIns="0" rIns="0" tIns="0" bIns="0" anchor="t">
             <a:spAutoFit/>
           </a:bodyPr>
           <a:lstStyle/>
@@ -22290,7 +22290,7 @@
           <a:noFill/>
         </p:spPr>
         <p:txBody>
-          <a:bodyPr wrap="none" lIns="0" rIns="0" tIns="0" bIns="0" anchor="t">
+          <a:bodyPr wrap="square" lIns="0" rIns="0" tIns="0" bIns="0" anchor="t">
             <a:spAutoFit/>
           </a:bodyPr>
           <a:lstStyle/>
@@ -22329,7 +22329,7 @@
           <a:noFill/>
         </p:spPr>
         <p:txBody>
-          <a:bodyPr wrap="none" lIns="0" rIns="0" tIns="0" bIns="0" anchor="t">
+          <a:bodyPr wrap="square" lIns="0" rIns="0" tIns="0" bIns="0" anchor="t">
             <a:spAutoFit/>
           </a:bodyPr>
           <a:lstStyle/>
@@ -22368,7 +22368,7 @@
           <a:noFill/>
         </p:spPr>
         <p:txBody>
-          <a:bodyPr wrap="none" lIns="0" rIns="0" tIns="0" bIns="0" anchor="t">
+          <a:bodyPr wrap="square" lIns="0" rIns="0" tIns="0" bIns="0" anchor="t">
             <a:spAutoFit/>
           </a:bodyPr>
           <a:lstStyle/>
@@ -22385,7 +22385,7 @@
                 </a:solidFill>
                 <a:latin typeface="Outfit"/>
               </a:rPr>
-              <a:t>Lo Human Design si occupa della trasformazione</a:t>
+              <a:t>Lo Human Design si occupa della trasformazione </a:t>
             </a:r>
           </a:p>
           <a:p>
@@ -22423,7 +22423,7 @@
           <a:noFill/>
         </p:spPr>
         <p:txBody>
-          <a:bodyPr wrap="none" lIns="0" rIns="0" tIns="0" bIns="0" anchor="t">
+          <a:bodyPr wrap="square" lIns="0" rIns="0" tIns="0" bIns="0" anchor="t">
             <a:spAutoFit/>
           </a:bodyPr>
           <a:lstStyle/>
@@ -22440,7 +22440,7 @@
                 </a:solidFill>
                 <a:latin typeface="Outfit"/>
               </a:rPr>
-              <a:t>Il BG5 (Business Group 5) è l'applicazione pratica dello</a:t>
+              <a:t>Il BG5 (Business Group 5) è l'applicazione pratica dello </a:t>
             </a:r>
           </a:p>
           <a:p>
@@ -22478,7 +22478,7 @@
           <a:noFill/>
         </p:spPr>
         <p:txBody>
-          <a:bodyPr wrap="none" lIns="0" rIns="0" tIns="0" bIns="0" anchor="t">
+          <a:bodyPr wrap="square" lIns="0" rIns="0" tIns="0" bIns="0" anchor="t">
             <a:spAutoFit/>
           </a:bodyPr>
           <a:lstStyle/>
@@ -22495,7 +22495,7 @@
                 </a:solidFill>
                 <a:latin typeface="Outfit"/>
               </a:rPr>
-              <a:t>Il mio approccio nasce dall'unione di queste due visioni</a:t>
+              <a:t>Il mio approccio nasce dall'unione di queste due visioni </a:t>
             </a:r>
           </a:p>
           <a:p>
@@ -22533,7 +22533,7 @@
           <a:noFill/>
         </p:spPr>
         <p:txBody>
-          <a:bodyPr wrap="none" lIns="0" rIns="0" tIns="0" bIns="0" anchor="t">
+          <a:bodyPr wrap="square" lIns="0" rIns="0" tIns="0" bIns="0" anchor="t">
             <a:spAutoFit/>
           </a:bodyPr>
           <a:lstStyle/>
@@ -22550,7 +22550,7 @@
                 </a:solidFill>
                 <a:latin typeface="Outfit"/>
               </a:rPr>
-              <a:t>CON QUESTO CORSO INTENDO FORNIRE GLI</a:t>
+              <a:t>CON QUESTO CORSO INTENDO FORNIRE GLI </a:t>
             </a:r>
           </a:p>
           <a:p>
@@ -22588,7 +22588,7 @@
           <a:noFill/>
         </p:spPr>
         <p:txBody>
-          <a:bodyPr wrap="none" lIns="0" rIns="0" tIns="0" bIns="0" anchor="t">
+          <a:bodyPr wrap="square" lIns="0" rIns="0" tIns="0" bIns="0" anchor="t">
             <a:spAutoFit/>
           </a:bodyPr>
           <a:lstStyle/>
@@ -22627,7 +22627,7 @@
           <a:noFill/>
         </p:spPr>
         <p:txBody>
-          <a:bodyPr wrap="none" lIns="0" rIns="0" tIns="0" bIns="0" anchor="t">
+          <a:bodyPr wrap="square" lIns="0" rIns="0" tIns="0" bIns="0" anchor="t">
             <a:spAutoFit/>
           </a:bodyPr>
           <a:lstStyle/>
@@ -22666,7 +22666,7 @@
           <a:noFill/>
         </p:spPr>
         <p:txBody>
-          <a:bodyPr wrap="none" lIns="0" rIns="0" tIns="0" bIns="0" anchor="t">
+          <a:bodyPr wrap="square" lIns="0" rIns="0" tIns="0" bIns="0" anchor="t">
             <a:spAutoFit/>
           </a:bodyPr>
           <a:lstStyle/>
@@ -22705,7 +22705,7 @@
           <a:noFill/>
         </p:spPr>
         <p:txBody>
-          <a:bodyPr wrap="none" lIns="0" rIns="0" tIns="0" bIns="0" anchor="t">
+          <a:bodyPr wrap="square" lIns="0" rIns="0" tIns="0" bIns="0" anchor="t">
             <a:spAutoFit/>
           </a:bodyPr>
           <a:lstStyle/>
@@ -22722,7 +22722,7 @@
                 </a:solidFill>
                 <a:latin typeface="Outfit"/>
               </a:rPr>
-              <a:t>UNA VOLTA PADRONEGGIATA LA LETTURA BASE,</a:t>
+              <a:t>UNA VOLTA PADRONEGGIATA LA LETTURA BASE, </a:t>
             </a:r>
           </a:p>
           <a:p>
@@ -22760,7 +22760,7 @@
           <a:noFill/>
         </p:spPr>
         <p:txBody>
-          <a:bodyPr wrap="none" lIns="0" rIns="0" tIns="0" bIns="0" anchor="t">
+          <a:bodyPr wrap="square" lIns="0" rIns="0" tIns="0" bIns="0" anchor="t">
             <a:spAutoFit/>
           </a:bodyPr>
           <a:lstStyle/>
@@ -22799,7 +22799,7 @@
           <a:noFill/>
         </p:spPr>
         <p:txBody>
-          <a:bodyPr wrap="none" lIns="0" rIns="0" tIns="0" bIns="0" anchor="t">
+          <a:bodyPr wrap="square" lIns="0" rIns="0" tIns="0" bIns="0" anchor="t">
             <a:spAutoFit/>
           </a:bodyPr>
           <a:lstStyle/>
@@ -22838,7 +22838,7 @@
           <a:noFill/>
         </p:spPr>
         <p:txBody>
-          <a:bodyPr wrap="none" lIns="0" rIns="0" tIns="0" bIns="0" anchor="t">
+          <a:bodyPr wrap="square" lIns="0" rIns="0" tIns="0" bIns="0" anchor="t">
             <a:spAutoFit/>
           </a:bodyPr>
           <a:lstStyle/>
@@ -22877,7 +22877,7 @@
           <a:noFill/>
         </p:spPr>
         <p:txBody>
-          <a:bodyPr wrap="none" lIns="0" rIns="0" tIns="0" bIns="0" anchor="t">
+          <a:bodyPr wrap="square" lIns="0" rIns="0" tIns="0" bIns="0" anchor="t">
             <a:spAutoFit/>
           </a:bodyPr>
           <a:lstStyle/>

--- a/grav-site/root/kit-corso/corso-base-hd.pptx
+++ b/grav-site/root/kit-corso/corso-base-hd.pptx
@@ -3246,7 +3246,7 @@
                 </a:solidFill>
                 <a:latin typeface="Playfair Display"/>
               </a:rPr>
-              <a:t> Benvenuti al </a:t>
+              <a:t>Benvenuti al </a:t>
             </a:r>
           </a:p>
           <a:p>

--- a/grav-site/root/kit-corso/corso-base-hd.pptx
+++ b/grav-site/root/kit-corso/corso-base-hd.pptx
@@ -4051,7 +4051,7 @@
         </p:nvSpPr>
         <p:spPr>
           <a:xfrm>
-            <a:off x="596899" y="2723548"/>
+            <a:off x="596899" y="2660048"/>
             <a:ext cx="6828490" cy="1291428"/>
           </a:xfrm>
           <a:prstGeom prst="rect">
@@ -4154,7 +4154,7 @@
         </p:nvSpPr>
         <p:spPr>
           <a:xfrm>
-            <a:off x="596899" y="4228296"/>
+            <a:off x="596899" y="4291796"/>
             <a:ext cx="6059795" cy="748008"/>
           </a:xfrm>
           <a:prstGeom prst="rect">
@@ -13018,7 +13018,7 @@
         </p:nvSpPr>
         <p:spPr>
           <a:xfrm>
-            <a:off x="965198" y="2385114"/>
+            <a:off x="965198" y="2321614"/>
             <a:ext cx="2463248" cy="260349"/>
           </a:xfrm>
           <a:prstGeom prst="rect">
@@ -13057,7 +13057,7 @@
         </p:nvSpPr>
         <p:spPr>
           <a:xfrm>
-            <a:off x="596899" y="2372414"/>
+            <a:off x="596899" y="2308914"/>
             <a:ext cx="498474" cy="228599"/>
           </a:xfrm>
           <a:prstGeom prst="rect">
@@ -13092,7 +13092,7 @@
         </p:nvSpPr>
         <p:spPr>
           <a:xfrm>
-            <a:off x="965198" y="2769883"/>
+            <a:off x="965198" y="2706383"/>
             <a:ext cx="3959959" cy="518119"/>
           </a:xfrm>
           <a:prstGeom prst="rect">
@@ -13147,7 +13147,7 @@
         </p:nvSpPr>
         <p:spPr>
           <a:xfrm>
-            <a:off x="596899" y="2757183"/>
+            <a:off x="596899" y="2693683"/>
             <a:ext cx="498474" cy="228599"/>
           </a:xfrm>
           <a:prstGeom prst="rect">
@@ -13182,7 +13182,7 @@
         </p:nvSpPr>
         <p:spPr>
           <a:xfrm>
-            <a:off x="965198" y="3412422"/>
+            <a:off x="965198" y="3348922"/>
             <a:ext cx="2587023" cy="260349"/>
           </a:xfrm>
           <a:prstGeom prst="rect">
@@ -13221,7 +13221,7 @@
         </p:nvSpPr>
         <p:spPr>
           <a:xfrm>
-            <a:off x="596899" y="3399722"/>
+            <a:off x="596899" y="3336222"/>
             <a:ext cx="498474" cy="228599"/>
           </a:xfrm>
           <a:prstGeom prst="rect">
@@ -13256,7 +13256,7 @@
         </p:nvSpPr>
         <p:spPr>
           <a:xfrm>
-            <a:off x="965198" y="3797191"/>
+            <a:off x="965198" y="3733691"/>
             <a:ext cx="4344183" cy="518119"/>
           </a:xfrm>
           <a:prstGeom prst="rect">
@@ -13311,7 +13311,7 @@
         </p:nvSpPr>
         <p:spPr>
           <a:xfrm>
-            <a:off x="596899" y="3784491"/>
+            <a:off x="596899" y="3720991"/>
             <a:ext cx="498474" cy="228599"/>
           </a:xfrm>
           <a:prstGeom prst="rect">
@@ -13346,7 +13346,7 @@
         </p:nvSpPr>
         <p:spPr>
           <a:xfrm>
-            <a:off x="596899" y="4528630"/>
+            <a:off x="596899" y="4592130"/>
             <a:ext cx="5596444" cy="748008"/>
           </a:xfrm>
           <a:prstGeom prst="rect">
@@ -13798,7 +13798,7 @@
         </p:nvSpPr>
         <p:spPr>
           <a:xfrm>
-            <a:off x="965198" y="2385114"/>
+            <a:off x="965198" y="2321614"/>
             <a:ext cx="2388586" cy="260349"/>
           </a:xfrm>
           <a:prstGeom prst="rect">
@@ -13837,7 +13837,7 @@
         </p:nvSpPr>
         <p:spPr>
           <a:xfrm>
-            <a:off x="596899" y="2372414"/>
+            <a:off x="596899" y="2308914"/>
             <a:ext cx="498474" cy="228599"/>
           </a:xfrm>
           <a:prstGeom prst="rect">
@@ -13872,7 +13872,7 @@
         </p:nvSpPr>
         <p:spPr>
           <a:xfrm>
-            <a:off x="965198" y="2769883"/>
+            <a:off x="965198" y="2706383"/>
             <a:ext cx="3885173" cy="518119"/>
           </a:xfrm>
           <a:prstGeom prst="rect">
@@ -13927,7 +13927,7 @@
         </p:nvSpPr>
         <p:spPr>
           <a:xfrm>
-            <a:off x="596899" y="2757183"/>
+            <a:off x="596899" y="2693683"/>
             <a:ext cx="498474" cy="228599"/>
           </a:xfrm>
           <a:prstGeom prst="rect">
@@ -13962,7 +13962,7 @@
         </p:nvSpPr>
         <p:spPr>
           <a:xfrm>
-            <a:off x="965198" y="3412422"/>
+            <a:off x="965198" y="3348922"/>
             <a:ext cx="2587023" cy="260349"/>
           </a:xfrm>
           <a:prstGeom prst="rect">
@@ -14001,7 +14001,7 @@
         </p:nvSpPr>
         <p:spPr>
           <a:xfrm>
-            <a:off x="596899" y="3399722"/>
+            <a:off x="596899" y="3336222"/>
             <a:ext cx="498474" cy="228599"/>
           </a:xfrm>
           <a:prstGeom prst="rect">
@@ -14036,7 +14036,7 @@
         </p:nvSpPr>
         <p:spPr>
           <a:xfrm>
-            <a:off x="965198" y="3797191"/>
+            <a:off x="965198" y="3733691"/>
             <a:ext cx="4344183" cy="518119"/>
           </a:xfrm>
           <a:prstGeom prst="rect">
@@ -14091,7 +14091,7 @@
         </p:nvSpPr>
         <p:spPr>
           <a:xfrm>
-            <a:off x="596899" y="3784491"/>
+            <a:off x="596899" y="3720991"/>
             <a:ext cx="498474" cy="228599"/>
           </a:xfrm>
           <a:prstGeom prst="rect">
@@ -14126,7 +14126,7 @@
         </p:nvSpPr>
         <p:spPr>
           <a:xfrm>
-            <a:off x="596899" y="4528630"/>
+            <a:off x="596899" y="4592130"/>
             <a:ext cx="6423803" cy="748008"/>
           </a:xfrm>
           <a:prstGeom prst="rect">
@@ -14578,7 +14578,7 @@
         </p:nvSpPr>
         <p:spPr>
           <a:xfrm>
-            <a:off x="965198" y="2385114"/>
+            <a:off x="965198" y="2321614"/>
             <a:ext cx="3734981" cy="260349"/>
           </a:xfrm>
           <a:prstGeom prst="rect">
@@ -14617,7 +14617,7 @@
         </p:nvSpPr>
         <p:spPr>
           <a:xfrm>
-            <a:off x="596899" y="2372414"/>
+            <a:off x="596899" y="2308914"/>
             <a:ext cx="498474" cy="228599"/>
           </a:xfrm>
           <a:prstGeom prst="rect">
@@ -14652,7 +14652,7 @@
         </p:nvSpPr>
         <p:spPr>
           <a:xfrm>
-            <a:off x="965198" y="2769883"/>
+            <a:off x="965198" y="2706383"/>
             <a:ext cx="4546341" cy="518119"/>
           </a:xfrm>
           <a:prstGeom prst="rect">
@@ -14725,7 +14725,7 @@
         </p:nvSpPr>
         <p:spPr>
           <a:xfrm>
-            <a:off x="596899" y="2757183"/>
+            <a:off x="596899" y="2693683"/>
             <a:ext cx="498474" cy="228599"/>
           </a:xfrm>
           <a:prstGeom prst="rect">
@@ -14760,7 +14760,7 @@
         </p:nvSpPr>
         <p:spPr>
           <a:xfrm>
-            <a:off x="965198" y="3412422"/>
+            <a:off x="965198" y="3348922"/>
             <a:ext cx="2587023" cy="260349"/>
           </a:xfrm>
           <a:prstGeom prst="rect">
@@ -14799,7 +14799,7 @@
         </p:nvSpPr>
         <p:spPr>
           <a:xfrm>
-            <a:off x="596899" y="3399722"/>
+            <a:off x="596899" y="3336222"/>
             <a:ext cx="498474" cy="228599"/>
           </a:xfrm>
           <a:prstGeom prst="rect">
@@ -14834,7 +14834,7 @@
         </p:nvSpPr>
         <p:spPr>
           <a:xfrm>
-            <a:off x="965198" y="3797191"/>
+            <a:off x="965198" y="3733691"/>
             <a:ext cx="4344183" cy="518119"/>
           </a:xfrm>
           <a:prstGeom prst="rect">
@@ -14889,7 +14889,7 @@
         </p:nvSpPr>
         <p:spPr>
           <a:xfrm>
-            <a:off x="596899" y="3784491"/>
+            <a:off x="596899" y="3720991"/>
             <a:ext cx="498474" cy="228599"/>
           </a:xfrm>
           <a:prstGeom prst="rect">
@@ -14924,7 +14924,7 @@
         </p:nvSpPr>
         <p:spPr>
           <a:xfrm>
-            <a:off x="596899" y="4528630"/>
+            <a:off x="596899" y="4592130"/>
             <a:ext cx="6574243" cy="748008"/>
           </a:xfrm>
           <a:prstGeom prst="rect">
@@ -17184,7 +17184,7 @@
         </p:nvSpPr>
         <p:spPr>
           <a:xfrm>
-            <a:off x="596899" y="1264540"/>
+            <a:off x="596899" y="1201040"/>
             <a:ext cx="2128510" cy="215899"/>
           </a:xfrm>
           <a:prstGeom prst="rect">
@@ -17223,7 +17223,7 @@
         </p:nvSpPr>
         <p:spPr>
           <a:xfrm>
-            <a:off x="596899" y="1474089"/>
+            <a:off x="596899" y="1410589"/>
             <a:ext cx="4896210" cy="749298"/>
           </a:xfrm>
           <a:prstGeom prst="rect">
@@ -17262,7 +17262,7 @@
         </p:nvSpPr>
         <p:spPr>
           <a:xfrm>
-            <a:off x="596899" y="2219518"/>
+            <a:off x="596899" y="2156018"/>
             <a:ext cx="4507397" cy="478729"/>
           </a:xfrm>
           <a:prstGeom prst="rect">
@@ -17317,7 +17317,7 @@
         </p:nvSpPr>
         <p:spPr>
           <a:xfrm>
-            <a:off x="596899" y="2916627"/>
+            <a:off x="596899" y="2853127"/>
             <a:ext cx="6590862" cy="775889"/>
           </a:xfrm>
           <a:prstGeom prst="rect">
@@ -17388,7 +17388,7 @@
         </p:nvSpPr>
         <p:spPr>
           <a:xfrm>
-            <a:off x="596899" y="3816936"/>
+            <a:off x="596899" y="3753436"/>
             <a:ext cx="6551298" cy="518119"/>
           </a:xfrm>
           <a:prstGeom prst="rect">
@@ -17443,7 +17443,7 @@
         </p:nvSpPr>
         <p:spPr>
           <a:xfrm>
-            <a:off x="596899" y="4554725"/>
+            <a:off x="596899" y="4618224"/>
             <a:ext cx="6523641" cy="891379"/>
           </a:xfrm>
           <a:prstGeom prst="rect">
@@ -19352,7 +19352,7 @@
         </p:nvSpPr>
         <p:spPr>
           <a:xfrm>
-            <a:off x="609598" y="5213436"/>
+            <a:off x="609598" y="5302336"/>
             <a:ext cx="76200" cy="76200"/>
           </a:xfrm>
           <a:prstGeom prst="ellipse">
@@ -19395,7 +19395,7 @@
         </p:nvSpPr>
         <p:spPr>
           <a:xfrm>
-            <a:off x="596899" y="1384098"/>
+            <a:off x="596899" y="1295198"/>
             <a:ext cx="2914568" cy="215899"/>
           </a:xfrm>
           <a:prstGeom prst="rect">
@@ -19434,7 +19434,7 @@
         </p:nvSpPr>
         <p:spPr>
           <a:xfrm>
-            <a:off x="596899" y="1758747"/>
+            <a:off x="596899" y="1669847"/>
             <a:ext cx="11917159" cy="2250672"/>
           </a:xfrm>
           <a:prstGeom prst="rect">
@@ -19537,7 +19537,7 @@
         </p:nvSpPr>
         <p:spPr>
           <a:xfrm>
-            <a:off x="596899" y="4226014"/>
+            <a:off x="596899" y="4314913"/>
             <a:ext cx="1120450" cy="215899"/>
           </a:xfrm>
           <a:prstGeom prst="rect">
@@ -19576,7 +19576,7 @@
         </p:nvSpPr>
         <p:spPr>
           <a:xfrm>
-            <a:off x="596899" y="4670513"/>
+            <a:off x="596899" y="4759412"/>
             <a:ext cx="7281299" cy="279399"/>
           </a:xfrm>
           <a:prstGeom prst="rect">
